--- a/20261007_サンクスLINE誘導のご提案_業界別ver3.0.pptx
+++ b/20261007_サンクスLINE誘導のご提案_業界別ver3.0.pptx
@@ -13,10 +13,10 @@
   </p:handoutMasterIdLst>
   <p:sldIdLst>
     <p:sldId id="3043" r:id="rId3"/>
-    <p:sldId id="3044" r:id="rId4"/>
+    <p:sldId id="3008" r:id="rId4"/>
     <p:sldId id="3039" r:id="rId5"/>
     <p:sldId id="3041" r:id="rId6"/>
-    <p:sldId id="3042" r:id="rId7"/>
+    <p:sldId id="3044" r:id="rId7"/>
   </p:sldIdLst>
   <p:sldSz cx="12192000" cy="6858000"/>
   <p:notesSz cx="6807200" cy="9939338"/>
@@ -318,7 +318,7 @@
           <a:p>
             <a:fld id="{6AF8158D-F6B1-45E0-9831-E70689DC8490}" type="datetimeFigureOut">
               <a:rPr kumimoji="1" lang="ja-JP" altLang="en-US" smtClean="0"/>
-              <a:t>2026/10/6</a:t>
+              <a:t>2026/10/7</a:t>
             </a:fld>
             <a:endParaRPr kumimoji="1" lang="ja-JP" altLang="en-US"/>
           </a:p>
@@ -2798,7 +2798,7 @@
           <a:noFill/>
         </p:spPr>
         <p:txBody>
-          <a:bodyPr wrap="square" anchor="b" lIns="36000" rIns="36000" tIns="18000" bIns="18000">
+          <a:bodyPr wrap="square" lIns="36000" tIns="18000" rIns="36000" bIns="18000" anchor="b">
             <a:spAutoFit/>
           </a:bodyPr>
           <a:lstStyle/>
@@ -2864,7 +2864,7 @@
           </a:fontRef>
         </p:style>
         <p:txBody>
-          <a:bodyPr rtlCol="0" anchor="ctr" wrap="square" lIns="36000" tIns="0" rIns="36000" bIns="0"/>
+          <a:bodyPr wrap="square" lIns="36000" tIns="0" rIns="36000" bIns="0" rtlCol="0" anchor="ctr"/>
           <a:lstStyle/>
           <a:p>
             <a:pPr algn="ctr">
@@ -2928,10 +2928,11 @@
           </a:fontRef>
         </p:style>
         <p:txBody>
-          <a:bodyPr rtlCol="0" anchor="ctr" wrap="square" lIns="72000" tIns="18000" rIns="72000" bIns="18000"/>
+          <a:bodyPr wrap="square" lIns="72000" tIns="18000" rIns="72000" bIns="18000" rtlCol="0" anchor="ctr"/>
           <a:lstStyle/>
           <a:p>
             <a:pPr algn="ctr"/>
+            <a:endParaRPr/>
           </a:p>
         </p:txBody>
       </p:sp>
@@ -2952,7 +2953,7 @@
           <a:noFill/>
         </p:spPr>
         <p:txBody>
-          <a:bodyPr wrap="square" anchor="ctr" lIns="36000" rIns="36000" tIns="18000" bIns="18000">
+          <a:bodyPr wrap="square" lIns="36000" tIns="18000" rIns="36000" bIns="18000" anchor="ctr">
             <a:spAutoFit/>
           </a:bodyPr>
           <a:lstStyle/>
@@ -3018,10 +3019,11 @@
           </a:fontRef>
         </p:style>
         <p:txBody>
-          <a:bodyPr rtlCol="0" anchor="ctr" wrap="square" lIns="72000" tIns="18000" rIns="72000" bIns="18000"/>
+          <a:bodyPr wrap="square" lIns="72000" tIns="18000" rIns="72000" bIns="18000" rtlCol="0" anchor="ctr"/>
           <a:lstStyle/>
           <a:p>
             <a:pPr algn="ctr"/>
+            <a:endParaRPr/>
           </a:p>
         </p:txBody>
       </p:sp>
@@ -3042,7 +3044,7 @@
           <a:noFill/>
         </p:spPr>
         <p:txBody>
-          <a:bodyPr wrap="square" anchor="ctr" lIns="36000" rIns="36000" tIns="18000" bIns="18000">
+          <a:bodyPr wrap="square" lIns="36000" tIns="18000" rIns="36000" bIns="18000" anchor="ctr">
             <a:spAutoFit/>
           </a:bodyPr>
           <a:lstStyle/>
@@ -3108,10 +3110,11 @@
           </a:fontRef>
         </p:style>
         <p:txBody>
-          <a:bodyPr rtlCol="0" anchor="ctr" wrap="square" lIns="72000" tIns="18000" rIns="72000" bIns="18000"/>
+          <a:bodyPr wrap="square" lIns="72000" tIns="18000" rIns="72000" bIns="18000" rtlCol="0" anchor="ctr"/>
           <a:lstStyle/>
           <a:p>
             <a:pPr algn="ctr"/>
+            <a:endParaRPr/>
           </a:p>
         </p:txBody>
       </p:sp>
@@ -3132,7 +3135,7 @@
           <a:noFill/>
         </p:spPr>
         <p:txBody>
-          <a:bodyPr wrap="square" anchor="ctr" lIns="36000" rIns="36000" tIns="18000" bIns="18000">
+          <a:bodyPr wrap="square" lIns="36000" tIns="18000" rIns="36000" bIns="18000" anchor="ctr">
             <a:spAutoFit/>
           </a:bodyPr>
           <a:lstStyle/>
@@ -3198,10 +3201,11 @@
           </a:fontRef>
         </p:style>
         <p:txBody>
-          <a:bodyPr rtlCol="0" anchor="ctr" wrap="square" lIns="72000" tIns="18000" rIns="72000" bIns="18000"/>
+          <a:bodyPr wrap="square" lIns="72000" tIns="18000" rIns="72000" bIns="18000" rtlCol="0" anchor="ctr"/>
           <a:lstStyle/>
           <a:p>
             <a:pPr algn="ctr"/>
+            <a:endParaRPr/>
           </a:p>
         </p:txBody>
       </p:sp>
@@ -3222,7 +3226,7 @@
           <a:noFill/>
         </p:spPr>
         <p:txBody>
-          <a:bodyPr wrap="square" anchor="ctr" lIns="36000" rIns="36000" tIns="18000" bIns="18000">
+          <a:bodyPr wrap="square" lIns="36000" tIns="18000" rIns="36000" bIns="18000" anchor="ctr">
             <a:spAutoFit/>
           </a:bodyPr>
           <a:lstStyle/>
@@ -3288,7 +3292,7 @@
           </a:fontRef>
         </p:style>
         <p:txBody>
-          <a:bodyPr rtlCol="0" anchor="ctr" wrap="square" lIns="72000" tIns="18000" rIns="72000" bIns="18000"/>
+          <a:bodyPr wrap="square" lIns="72000" tIns="18000" rIns="72000" bIns="18000" rtlCol="0" anchor="ctr"/>
           <a:lstStyle/>
           <a:p>
             <a:pPr algn="ctr">
@@ -3351,7 +3355,7 @@
           <a:noFill/>
         </p:spPr>
         <p:txBody>
-          <a:bodyPr wrap="square" anchor="t" lIns="36000" rIns="36000" tIns="18000" bIns="18000">
+          <a:bodyPr wrap="square" lIns="36000" tIns="18000" rIns="36000" bIns="18000" anchor="t">
             <a:spAutoFit/>
           </a:bodyPr>
           <a:lstStyle/>
@@ -3430,7 +3434,7 @@
           <a:noFill/>
         </p:spPr>
         <p:txBody>
-          <a:bodyPr wrap="square" anchor="b" lIns="36000" rIns="36000" tIns="18000" bIns="18000">
+          <a:bodyPr wrap="square" lIns="36000" tIns="18000" rIns="36000" bIns="18000" anchor="b">
             <a:spAutoFit/>
           </a:bodyPr>
           <a:lstStyle/>
@@ -3496,7 +3500,7 @@
           </a:fontRef>
         </p:style>
         <p:txBody>
-          <a:bodyPr rtlCol="0" anchor="ctr" wrap="square" lIns="36000" tIns="0" rIns="36000" bIns="0"/>
+          <a:bodyPr wrap="square" lIns="36000" tIns="0" rIns="36000" bIns="0" rtlCol="0" anchor="ctr"/>
           <a:lstStyle/>
           <a:p>
             <a:pPr algn="ctr">
@@ -3560,10 +3564,11 @@
           </a:fontRef>
         </p:style>
         <p:txBody>
-          <a:bodyPr rtlCol="0" anchor="ctr" wrap="square" lIns="72000" tIns="18000" rIns="72000" bIns="18000"/>
+          <a:bodyPr wrap="square" lIns="72000" tIns="18000" rIns="72000" bIns="18000" rtlCol="0" anchor="ctr"/>
           <a:lstStyle/>
           <a:p>
             <a:pPr algn="ctr"/>
+            <a:endParaRPr/>
           </a:p>
         </p:txBody>
       </p:sp>
@@ -3584,7 +3589,7 @@
           <a:noFill/>
         </p:spPr>
         <p:txBody>
-          <a:bodyPr wrap="square" anchor="ctr" lIns="36000" rIns="36000" tIns="18000" bIns="18000">
+          <a:bodyPr wrap="square" lIns="36000" tIns="18000" rIns="36000" bIns="18000" anchor="ctr">
             <a:spAutoFit/>
           </a:bodyPr>
           <a:lstStyle/>
@@ -3650,10 +3655,11 @@
           </a:fontRef>
         </p:style>
         <p:txBody>
-          <a:bodyPr rtlCol="0" anchor="ctr" wrap="square" lIns="72000" tIns="18000" rIns="72000" bIns="18000"/>
+          <a:bodyPr wrap="square" lIns="72000" tIns="18000" rIns="72000" bIns="18000" rtlCol="0" anchor="ctr"/>
           <a:lstStyle/>
           <a:p>
             <a:pPr algn="ctr"/>
+            <a:endParaRPr/>
           </a:p>
         </p:txBody>
       </p:sp>
@@ -3674,7 +3680,7 @@
           <a:noFill/>
         </p:spPr>
         <p:txBody>
-          <a:bodyPr wrap="square" anchor="ctr" lIns="36000" rIns="36000" tIns="18000" bIns="18000">
+          <a:bodyPr wrap="square" lIns="36000" tIns="18000" rIns="36000" bIns="18000" anchor="ctr">
             <a:spAutoFit/>
           </a:bodyPr>
           <a:lstStyle/>
@@ -3740,10 +3746,11 @@
           </a:fontRef>
         </p:style>
         <p:txBody>
-          <a:bodyPr rtlCol="0" anchor="ctr" wrap="square" lIns="72000" tIns="18000" rIns="72000" bIns="18000"/>
+          <a:bodyPr wrap="square" lIns="72000" tIns="18000" rIns="72000" bIns="18000" rtlCol="0" anchor="ctr"/>
           <a:lstStyle/>
           <a:p>
             <a:pPr algn="ctr"/>
+            <a:endParaRPr/>
           </a:p>
         </p:txBody>
       </p:sp>
@@ -3764,7 +3771,7 @@
           <a:noFill/>
         </p:spPr>
         <p:txBody>
-          <a:bodyPr wrap="square" anchor="ctr" lIns="36000" rIns="36000" tIns="18000" bIns="18000">
+          <a:bodyPr wrap="square" lIns="36000" tIns="18000" rIns="36000" bIns="18000" anchor="ctr">
             <a:spAutoFit/>
           </a:bodyPr>
           <a:lstStyle/>
@@ -3830,10 +3837,11 @@
           </a:fontRef>
         </p:style>
         <p:txBody>
-          <a:bodyPr rtlCol="0" anchor="ctr" wrap="square" lIns="72000" tIns="18000" rIns="72000" bIns="18000"/>
+          <a:bodyPr wrap="square" lIns="72000" tIns="18000" rIns="72000" bIns="18000" rtlCol="0" anchor="ctr"/>
           <a:lstStyle/>
           <a:p>
             <a:pPr algn="ctr"/>
+            <a:endParaRPr/>
           </a:p>
         </p:txBody>
       </p:sp>
@@ -3854,7 +3862,7 @@
           <a:noFill/>
         </p:spPr>
         <p:txBody>
-          <a:bodyPr wrap="square" anchor="ctr" lIns="36000" rIns="36000" tIns="18000" bIns="18000">
+          <a:bodyPr wrap="square" lIns="36000" tIns="18000" rIns="36000" bIns="18000" anchor="ctr">
             <a:spAutoFit/>
           </a:bodyPr>
           <a:lstStyle/>
@@ -3918,7 +3926,7 @@
           </a:fontRef>
         </p:style>
         <p:txBody>
-          <a:bodyPr rtlCol="0" anchor="ctr" wrap="square" lIns="72000" tIns="18000" rIns="72000" bIns="18000"/>
+          <a:bodyPr wrap="square" lIns="72000" tIns="18000" rIns="72000" bIns="18000" rtlCol="0" anchor="ctr"/>
           <a:lstStyle/>
           <a:p>
             <a:pPr algn="ctr">
@@ -3930,7 +3938,7 @@
               </a:spcAft>
             </a:pPr>
             <a:r>
-              <a:rPr sz="2000" b="1">
+              <a:rPr sz="2000" b="1" dirty="0" err="1">
                 <a:solidFill>
                   <a:srgbClr val="FFFFFF"/>
                 </a:solidFill>
@@ -3940,6 +3948,14 @@
               </a:rPr>
               <a:t>CPO改善</a:t>
             </a:r>
+            <a:endParaRPr sz="2000" b="1" dirty="0">
+              <a:solidFill>
+                <a:srgbClr val="FFFFFF"/>
+              </a:solidFill>
+              <a:latin typeface="メイリオ"/>
+              <a:ea typeface="メイリオ"/>
+              <a:cs typeface="メイリオ"/>
+            </a:endParaRPr>
           </a:p>
           <a:p>
             <a:pPr algn="ctr">
@@ -3951,7 +3967,7 @@
               </a:spcAft>
             </a:pPr>
             <a:r>
-              <a:rPr sz="950" b="0">
+              <a:rPr sz="950" b="0" dirty="0">
                 <a:solidFill>
                   <a:srgbClr val="D9DCEA"/>
                 </a:solidFill>
@@ -3959,7 +3975,7 @@
                 <a:ea typeface="メイリオ"/>
                 <a:cs typeface="メイリオ"/>
               </a:rPr>
-              <a:t>来店・面談・購入1件あたりの費用</a:t>
+              <a:t>購入1件あたりの費用</a:t>
             </a:r>
           </a:p>
         </p:txBody>
@@ -3981,7 +3997,7 @@
           <a:noFill/>
         </p:spPr>
         <p:txBody>
-          <a:bodyPr wrap="square" anchor="t" lIns="36000" rIns="36000" tIns="18000" bIns="18000">
+          <a:bodyPr wrap="square" lIns="36000" tIns="18000" rIns="36000" bIns="18000" anchor="t">
             <a:spAutoFit/>
           </a:bodyPr>
           <a:lstStyle/>
@@ -4025,7 +4041,7 @@
           <a:noFill/>
         </p:spPr>
         <p:txBody>
-          <a:bodyPr wrap="square" anchor="ctr" lIns="36000" rIns="36000" tIns="18000" bIns="18000">
+          <a:bodyPr wrap="square" lIns="36000" tIns="18000" rIns="36000" bIns="18000" anchor="ctr">
             <a:spAutoFit/>
           </a:bodyPr>
           <a:lstStyle/>
@@ -4079,27 +4095,36 @@
       </p:grpSpPr>
       <p:sp>
         <p:nvSpPr>
-          <p:cNvPr id="3" name="TextBox 1"/>
+          <p:cNvPr id="22" name="Google Shape;752;p28">
+            <a:extLst>
+              <a:ext uri="{FF2B5EF4-FFF2-40B4-BE49-F238E27FC236}">
+                <a16:creationId xmlns:a16="http://schemas.microsoft.com/office/drawing/2014/main" id="{AA80CD04-9456-70DB-2E44-D3EDB1461933}"/>
+              </a:ext>
+            </a:extLst>
+          </p:cNvPr>
           <p:cNvSpPr txBox="1"/>
           <p:nvPr/>
         </p:nvSpPr>
         <p:spPr>
           <a:xfrm>
-            <a:off x="547200" y="161078"/>
-            <a:ext cx="11070119" cy="289843"/>
+            <a:off x="1691884" y="138137"/>
+            <a:ext cx="6276325" cy="338514"/>
           </a:xfrm>
           <a:prstGeom prst="rect">
             <a:avLst/>
           </a:prstGeom>
           <a:noFill/>
-        </p:spPr>
-        <p:txBody>
-          <a:bodyPr wrap="square" lIns="0" tIns="21600" rIns="0" bIns="21600" anchor="ctr">
+          <a:ln>
+            <a:noFill/>
+          </a:ln>
+        </p:spPr>
+        <p:txBody>
+          <a:bodyPr spcFirstLastPara="1" wrap="square" lIns="91425" tIns="45700" rIns="91425" bIns="45700" anchor="ctr" anchorCtr="0">
             <a:spAutoFit/>
           </a:bodyPr>
           <a:lstStyle/>
           <a:p>
-            <a:pPr algn="l"/>
+            <a:pPr lvl="0"/>
             <a:r>
               <a:rPr lang="ja-JP" altLang="en-US" sz="1600" b="1" dirty="0">
                 <a:solidFill>
@@ -4108,62 +4133,74 @@
                 <a:latin typeface="メイリオ"/>
                 <a:ea typeface="メイリオ"/>
                 <a:cs typeface="メイリオ"/>
+                <a:sym typeface="Meiryo"/>
               </a:rPr>
               <a:t>サンクスLINE｜機能・費用</a:t>
             </a:r>
-            <a:endParaRPr sz="1600" b="1" dirty="0">
+            <a:endParaRPr lang="en-US" altLang="ja-JP" sz="1600" b="1" dirty="0">
               <a:solidFill>
                 <a:srgbClr val="002060"/>
               </a:solidFill>
               <a:latin typeface="メイリオ"/>
               <a:ea typeface="メイリオ"/>
               <a:cs typeface="メイリオ"/>
+              <a:sym typeface="Meiryo"/>
             </a:endParaRPr>
           </a:p>
         </p:txBody>
       </p:sp>
       <p:sp>
         <p:nvSpPr>
-          <p:cNvPr id="4" name="TextBox 2"/>
-          <p:cNvSpPr txBox="1"/>
-          <p:nvPr/>
-        </p:nvSpPr>
-        <p:spPr>
-          <a:xfrm>
-            <a:off x="793680" y="798527"/>
-            <a:ext cx="11214119" cy="382946"/>
+          <p:cNvPr id="16" name="正方形/長方形 15">
+            <a:extLst>
+              <a:ext uri="{FF2B5EF4-FFF2-40B4-BE49-F238E27FC236}">
+                <a16:creationId xmlns:a16="http://schemas.microsoft.com/office/drawing/2014/main" id="{32BBF438-B1EF-A61A-EE3D-69CD39766C7E}"/>
+              </a:ext>
+            </a:extLst>
+          </p:cNvPr>
+          <p:cNvSpPr/>
+          <p:nvPr/>
+        </p:nvSpPr>
+        <p:spPr>
+          <a:xfrm>
+            <a:off x="7537034" y="2187780"/>
+            <a:ext cx="3061624" cy="1821208"/>
           </a:xfrm>
           <a:prstGeom prst="rect">
             <a:avLst/>
           </a:prstGeom>
           <a:noFill/>
-        </p:spPr>
-        <p:txBody>
-          <a:bodyPr wrap="square" lIns="0" tIns="21600" rIns="0" bIns="21600" anchor="ctr">
-            <a:spAutoFit/>
-          </a:bodyPr>
+          <a:ln>
+            <a:solidFill>
+              <a:schemeClr val="tx2">
+                <a:lumMod val="20000"/>
+                <a:lumOff val="80000"/>
+              </a:schemeClr>
+            </a:solidFill>
+          </a:ln>
+        </p:spPr>
+        <p:style>
+          <a:lnRef idx="2">
+            <a:schemeClr val="accent1">
+              <a:shade val="15000"/>
+            </a:schemeClr>
+          </a:lnRef>
+          <a:fillRef idx="1">
+            <a:schemeClr val="accent1"/>
+          </a:fillRef>
+          <a:effectRef idx="0">
+            <a:schemeClr val="accent1"/>
+          </a:effectRef>
+          <a:fontRef idx="minor">
+            <a:schemeClr val="lt1"/>
+          </a:fontRef>
+        </p:style>
+        <p:txBody>
+          <a:bodyPr rtlCol="0" anchor="ctr"/>
           <a:lstStyle/>
           <a:p>
-            <a:pPr algn="l">
-              <a:lnSpc>
-                <a:spcPct val="130000"/>
-              </a:lnSpc>
-            </a:pPr>
-            <a:r>
-              <a:rPr lang="en-US" altLang="ja-JP" sz="1800" dirty="0">
-                <a:solidFill>
-                  <a:srgbClr val="333333"/>
-                </a:solidFill>
-                <a:latin typeface="メイリオ"/>
-                <a:ea typeface="メイリオ"/>
-                <a:cs typeface="メイリオ"/>
-              </a:rPr>
-              <a:t>フォーム送信後のLINE誘導を自動化するツール</a:t>
-            </a:r>
-            <a:endParaRPr sz="1250" dirty="0">
-              <a:solidFill>
-                <a:srgbClr val="333333"/>
-              </a:solidFill>
+            <a:pPr algn="ctr"/>
+            <a:endParaRPr lang="ja-JP" altLang="en-US">
               <a:latin typeface="メイリオ"/>
               <a:ea typeface="メイリオ"/>
               <a:cs typeface="メイリオ"/>
@@ -4171,34 +4208,257 @@
           </a:p>
         </p:txBody>
       </p:sp>
+      <p:sp>
+        <p:nvSpPr>
+          <p:cNvPr id="17" name="正方形/長方形 16">
+            <a:extLst>
+              <a:ext uri="{FF2B5EF4-FFF2-40B4-BE49-F238E27FC236}">
+                <a16:creationId xmlns:a16="http://schemas.microsoft.com/office/drawing/2014/main" id="{1A1E4128-77DC-C871-EE20-5BD43326E078}"/>
+              </a:ext>
+            </a:extLst>
+          </p:cNvPr>
+          <p:cNvSpPr/>
+          <p:nvPr/>
+        </p:nvSpPr>
+        <p:spPr>
+          <a:xfrm>
+            <a:off x="7537035" y="4317370"/>
+            <a:ext cx="3061623" cy="1821208"/>
+          </a:xfrm>
+          <a:prstGeom prst="rect">
+            <a:avLst/>
+          </a:prstGeom>
+          <a:noFill/>
+          <a:ln>
+            <a:solidFill>
+              <a:schemeClr val="tx2">
+                <a:lumMod val="20000"/>
+                <a:lumOff val="80000"/>
+              </a:schemeClr>
+            </a:solidFill>
+          </a:ln>
+        </p:spPr>
+        <p:style>
+          <a:lnRef idx="2">
+            <a:schemeClr val="accent1">
+              <a:shade val="15000"/>
+            </a:schemeClr>
+          </a:lnRef>
+          <a:fillRef idx="1">
+            <a:schemeClr val="accent1"/>
+          </a:fillRef>
+          <a:effectRef idx="0">
+            <a:schemeClr val="accent1"/>
+          </a:effectRef>
+          <a:fontRef idx="minor">
+            <a:schemeClr val="lt1"/>
+          </a:fontRef>
+        </p:style>
+        <p:txBody>
+          <a:bodyPr rtlCol="0" anchor="ctr"/>
+          <a:lstStyle/>
+          <a:p>
+            <a:pPr algn="ctr"/>
+            <a:endParaRPr lang="ja-JP" altLang="en-US">
+              <a:latin typeface="メイリオ"/>
+              <a:ea typeface="メイリオ"/>
+              <a:cs typeface="メイリオ"/>
+            </a:endParaRPr>
+          </a:p>
+        </p:txBody>
+      </p:sp>
+      <p:sp>
+        <p:nvSpPr>
+          <p:cNvPr id="20" name="正方形/長方形 19">
+            <a:extLst>
+              <a:ext uri="{FF2B5EF4-FFF2-40B4-BE49-F238E27FC236}">
+                <a16:creationId xmlns:a16="http://schemas.microsoft.com/office/drawing/2014/main" id="{F37BB268-660A-FEE4-BB39-0E338F1DDC23}"/>
+              </a:ext>
+            </a:extLst>
+          </p:cNvPr>
+          <p:cNvSpPr/>
+          <p:nvPr/>
+        </p:nvSpPr>
+        <p:spPr>
+          <a:xfrm>
+            <a:off x="7583090" y="2033196"/>
+            <a:ext cx="1619242" cy="244151"/>
+          </a:xfrm>
+          <a:prstGeom prst="rect">
+            <a:avLst/>
+          </a:prstGeom>
+          <a:solidFill>
+            <a:schemeClr val="accent1">
+              <a:lumMod val="20000"/>
+              <a:lumOff val="80000"/>
+            </a:schemeClr>
+          </a:solidFill>
+          <a:ln>
+            <a:noFill/>
+          </a:ln>
+        </p:spPr>
+        <p:style>
+          <a:lnRef idx="2">
+            <a:schemeClr val="accent1">
+              <a:shade val="15000"/>
+            </a:schemeClr>
+          </a:lnRef>
+          <a:fillRef idx="1">
+            <a:schemeClr val="accent1"/>
+          </a:fillRef>
+          <a:effectRef idx="0">
+            <a:schemeClr val="accent1"/>
+          </a:effectRef>
+          <a:fontRef idx="minor">
+            <a:schemeClr val="lt1"/>
+          </a:fontRef>
+        </p:style>
+        <p:txBody>
+          <a:bodyPr rtlCol="0" anchor="ctr"/>
+          <a:lstStyle/>
+          <a:p>
+            <a:pPr algn="ctr"/>
+            <a:r>
+              <a:rPr lang="en-US" altLang="ja-JP" sz="1100" b="1" dirty="0">
+                <a:solidFill>
+                  <a:schemeClr val="tx1"/>
+                </a:solidFill>
+                <a:latin typeface="メイリオ" panose="020B0604030504040204" pitchFamily="50" charset="-128"/>
+                <a:ea typeface="メイリオ" panose="020B0604030504040204" pitchFamily="50" charset="-128"/>
+                <a:cs typeface="メイリオ"/>
+              </a:rPr>
+              <a:t>LINE</a:t>
+            </a:r>
+            <a:r>
+              <a:rPr lang="ja-JP" altLang="en-US" sz="1100" b="1" dirty="0">
+                <a:solidFill>
+                  <a:schemeClr val="tx1"/>
+                </a:solidFill>
+                <a:latin typeface="メイリオ" panose="020B0604030504040204" pitchFamily="50" charset="-128"/>
+                <a:ea typeface="メイリオ" panose="020B0604030504040204" pitchFamily="50" charset="-128"/>
+                <a:cs typeface="メイリオ"/>
+              </a:rPr>
+              <a:t>未追加の場合</a:t>
+            </a:r>
+          </a:p>
+        </p:txBody>
+      </p:sp>
+      <p:sp>
+        <p:nvSpPr>
+          <p:cNvPr id="21" name="正方形/長方形 20">
+            <a:extLst>
+              <a:ext uri="{FF2B5EF4-FFF2-40B4-BE49-F238E27FC236}">
+                <a16:creationId xmlns:a16="http://schemas.microsoft.com/office/drawing/2014/main" id="{C9FF4626-FD17-CA1C-8064-F46606D0BCCE}"/>
+              </a:ext>
+            </a:extLst>
+          </p:cNvPr>
+          <p:cNvSpPr/>
+          <p:nvPr/>
+        </p:nvSpPr>
+        <p:spPr>
+          <a:xfrm>
+            <a:off x="7583090" y="4195296"/>
+            <a:ext cx="1619242" cy="244151"/>
+          </a:xfrm>
+          <a:prstGeom prst="rect">
+            <a:avLst/>
+          </a:prstGeom>
+          <a:solidFill>
+            <a:schemeClr val="accent1">
+              <a:lumMod val="20000"/>
+              <a:lumOff val="80000"/>
+            </a:schemeClr>
+          </a:solidFill>
+          <a:ln>
+            <a:noFill/>
+          </a:ln>
+        </p:spPr>
+        <p:style>
+          <a:lnRef idx="2">
+            <a:schemeClr val="accent1">
+              <a:shade val="15000"/>
+            </a:schemeClr>
+          </a:lnRef>
+          <a:fillRef idx="1">
+            <a:schemeClr val="accent1"/>
+          </a:fillRef>
+          <a:effectRef idx="0">
+            <a:schemeClr val="accent1"/>
+          </a:effectRef>
+          <a:fontRef idx="minor">
+            <a:schemeClr val="lt1"/>
+          </a:fontRef>
+        </p:style>
+        <p:txBody>
+          <a:bodyPr rtlCol="0" anchor="ctr"/>
+          <a:lstStyle/>
+          <a:p>
+            <a:pPr algn="ctr"/>
+            <a:r>
+              <a:rPr lang="en-US" altLang="ja-JP" sz="1100" b="1" dirty="0">
+                <a:solidFill>
+                  <a:schemeClr val="tx1"/>
+                </a:solidFill>
+                <a:latin typeface="メイリオ" panose="020B0604030504040204" pitchFamily="50" charset="-128"/>
+                <a:ea typeface="メイリオ" panose="020B0604030504040204" pitchFamily="50" charset="-128"/>
+                <a:cs typeface="メイリオ"/>
+              </a:rPr>
+              <a:t>LINE</a:t>
+            </a:r>
+            <a:r>
+              <a:rPr lang="ja-JP" altLang="en-US" sz="1100" b="1" dirty="0">
+                <a:solidFill>
+                  <a:schemeClr val="tx1"/>
+                </a:solidFill>
+                <a:latin typeface="メイリオ" panose="020B0604030504040204" pitchFamily="50" charset="-128"/>
+                <a:ea typeface="メイリオ" panose="020B0604030504040204" pitchFamily="50" charset="-128"/>
+                <a:cs typeface="メイリオ"/>
+              </a:rPr>
+              <a:t>追加済みの場合</a:t>
+            </a:r>
+          </a:p>
+        </p:txBody>
+      </p:sp>
       <p:cxnSp>
         <p:nvCxnSpPr>
-          <p:cNvPr id="5" name="Connector 3"/>
-          <p:cNvCxnSpPr/>
+          <p:cNvPr id="23" name="直線矢印コネクタ 22">
+            <a:extLst>
+              <a:ext uri="{FF2B5EF4-FFF2-40B4-BE49-F238E27FC236}">
+                <a16:creationId xmlns:a16="http://schemas.microsoft.com/office/drawing/2014/main" id="{8F202453-7FF9-8AE7-D10D-66F74A74A2F4}"/>
+              </a:ext>
+            </a:extLst>
+          </p:cNvPr>
+          <p:cNvCxnSpPr>
+            <a:cxnSpLocks/>
+          </p:cNvCxnSpPr>
           <p:nvPr/>
         </p:nvCxnSpPr>
         <p:spPr>
-          <a:xfrm>
-            <a:off x="0" y="1389600"/>
-            <a:ext cx="12192119" cy="0"/>
-          </a:xfrm>
-          <a:prstGeom prst="line">
-            <a:avLst/>
-          </a:prstGeom>
-          <a:ln w="12700">
+          <a:xfrm flipV="1">
+            <a:off x="7162523" y="2932418"/>
+            <a:ext cx="391555" cy="421706"/>
+          </a:xfrm>
+          <a:prstGeom prst="straightConnector1">
+            <a:avLst/>
+          </a:prstGeom>
+          <a:ln w="19050">
             <a:solidFill>
-              <a:srgbClr val="D9D9D9"/>
+              <a:srgbClr val="00B050">
+                <a:alpha val="80000"/>
+              </a:srgbClr>
             </a:solidFill>
+            <a:prstDash val="sysDot"/>
+            <a:tailEnd type="triangle"/>
           </a:ln>
         </p:spPr>
         <p:style>
-          <a:lnRef idx="2">
+          <a:lnRef idx="1">
             <a:schemeClr val="accent1"/>
           </a:lnRef>
           <a:fillRef idx="0">
             <a:schemeClr val="accent1"/>
           </a:fillRef>
-          <a:effectRef idx="1">
+          <a:effectRef idx="0">
             <a:schemeClr val="accent1"/>
           </a:effectRef>
           <a:fontRef idx="minor">
@@ -4206,122 +4466,40 @@
           </a:fontRef>
         </p:style>
       </p:cxnSp>
-      <p:sp>
-        <p:nvSpPr>
-          <p:cNvPr id="6" name="Rounded Rectangle 5"/>
-          <p:cNvSpPr/>
-          <p:nvPr/>
-        </p:nvSpPr>
-        <p:spPr>
-          <a:xfrm>
-            <a:off x="792000" y="1980000"/>
-            <a:ext cx="1477277" cy="251999"/>
-          </a:xfrm>
-          <a:prstGeom prst="roundRect">
-            <a:avLst>
-              <a:gd name="adj" fmla="val 50000"/>
-            </a:avLst>
-          </a:prstGeom>
-          <a:solidFill>
-            <a:srgbClr val="F2F2F2"/>
-          </a:solidFill>
-          <a:ln>
-            <a:noFill/>
+      <p:cxnSp>
+        <p:nvCxnSpPr>
+          <p:cNvPr id="24" name="直線矢印コネクタ 23">
+            <a:extLst>
+              <a:ext uri="{FF2B5EF4-FFF2-40B4-BE49-F238E27FC236}">
+                <a16:creationId xmlns:a16="http://schemas.microsoft.com/office/drawing/2014/main" id="{C92F6E28-BBFF-1A56-AC22-CA16D2F1B1EA}"/>
+              </a:ext>
+            </a:extLst>
+          </p:cNvPr>
+          <p:cNvCxnSpPr>
+            <a:cxnSpLocks/>
+          </p:cNvCxnSpPr>
+          <p:nvPr/>
+        </p:nvCxnSpPr>
+        <p:spPr>
+          <a:xfrm>
+            <a:off x="7162523" y="3354124"/>
+            <a:ext cx="345499" cy="1392760"/>
+          </a:xfrm>
+          <a:prstGeom prst="straightConnector1">
+            <a:avLst/>
+          </a:prstGeom>
+          <a:ln w="19050">
+            <a:solidFill>
+              <a:srgbClr val="00B050">
+                <a:alpha val="80000"/>
+              </a:srgbClr>
+            </a:solidFill>
+            <a:prstDash val="sysDot"/>
+            <a:tailEnd type="triangle"/>
           </a:ln>
-          <a:effectLst/>
         </p:spPr>
         <p:style>
           <a:lnRef idx="1">
-            <a:schemeClr val="accent1"/>
-          </a:lnRef>
-          <a:fillRef idx="3">
-            <a:schemeClr val="accent1"/>
-          </a:fillRef>
-          <a:effectRef idx="0">
-            <a:schemeClr val="accent1"/>
-          </a:effectRef>
-          <a:fontRef idx="minor">
-            <a:schemeClr val="lt1"/>
-          </a:fontRef>
-        </p:style>
-        <p:txBody>
-          <a:bodyPr rtlCol="0" anchor="ctr" wrap="square" lIns="36000" tIns="0" rIns="36000" bIns="0"/>
-          <a:lstStyle/>
-          <a:p>
-            <a:pPr algn="ctr">
-              <a:lnSpc>
-                <a:spcPct val="110000"/>
-              </a:lnSpc>
-              <a:spcAft>
-                <a:spcPts val="0"/>
-              </a:spcAft>
-            </a:pPr>
-            <a:r>
-              <a:rPr sz="1100" b="1">
-                <a:solidFill>
-                  <a:srgbClr val="333333"/>
-                </a:solidFill>
-                <a:latin typeface="メイリオ"/>
-                <a:ea typeface="メイリオ"/>
-                <a:cs typeface="メイリオ"/>
-              </a:rPr>
-              <a:t>WEBフォーム</a:t>
-            </a:r>
-          </a:p>
-        </p:txBody>
-      </p:sp>
-      <p:pic>
-        <p:nvPicPr>
-          <p:cNvPr id="7" name="Picture 6" descr="thanks_tool_form.png"/>
-          <p:cNvPicPr>
-            <a:picLocks noChangeAspect="1"/>
-          </p:cNvPicPr>
-          <p:nvPr/>
-        </p:nvPicPr>
-        <p:blipFill>
-          <a:blip r:embed="rId2"/>
-          <a:stretch>
-            <a:fillRect/>
-          </a:stretch>
-        </p:blipFill>
-        <p:spPr>
-          <a:xfrm>
-            <a:off x="792000" y="2304000"/>
-            <a:ext cx="1477277" cy="2015999"/>
-          </a:xfrm>
-          <a:prstGeom prst="rect">
-            <a:avLst/>
-          </a:prstGeom>
-          <a:ln w="9525">
-            <a:solidFill>
-              <a:srgbClr val="D9D9D9"/>
-            </a:solidFill>
-          </a:ln>
-        </p:spPr>
-      </p:pic>
-      <p:cxnSp>
-        <p:nvCxnSpPr>
-          <p:cNvPr id="8" name="Connector 7"/>
-          <p:cNvCxnSpPr/>
-          <p:nvPr/>
-        </p:nvCxnSpPr>
-        <p:spPr>
-          <a:xfrm>
-            <a:off x="2359277" y="3311999"/>
-            <a:ext cx="324000" cy="0"/>
-          </a:xfrm>
-          <a:prstGeom prst="line">
-            <a:avLst/>
-          </a:prstGeom>
-          <a:ln w="25400">
-            <a:solidFill>
-              <a:srgbClr val="1F285A"/>
-            </a:solidFill>
-            <a:tailEnd type="triangle" w="med" len="med"/>
-          </a:ln>
-        </p:spPr>
-        <p:style>
-          <a:lnRef idx="2">
             <a:schemeClr val="accent1"/>
           </a:lnRef>
           <a:fillRef idx="0">
@@ -4335,109 +4513,96 @@
           </a:fontRef>
         </p:style>
       </p:cxnSp>
-      <p:sp>
-        <p:nvSpPr>
-          <p:cNvPr id="9" name="Rounded Rectangle 8"/>
-          <p:cNvSpPr/>
-          <p:nvPr/>
-        </p:nvSpPr>
-        <p:spPr>
-          <a:xfrm>
-            <a:off x="2773277" y="1980000"/>
-            <a:ext cx="1133999" cy="251999"/>
-          </a:xfrm>
-          <a:prstGeom prst="roundRect">
-            <a:avLst>
-              <a:gd name="adj" fmla="val 50000"/>
-            </a:avLst>
-          </a:prstGeom>
-          <a:solidFill>
-            <a:srgbClr val="F2F2F2"/>
-          </a:solidFill>
-          <a:ln>
-            <a:noFill/>
-          </a:ln>
-          <a:effectLst/>
-        </p:spPr>
-        <p:style>
-          <a:lnRef idx="1">
-            <a:schemeClr val="accent1"/>
-          </a:lnRef>
-          <a:fillRef idx="3">
-            <a:schemeClr val="accent1"/>
-          </a:fillRef>
-          <a:effectRef idx="0">
-            <a:schemeClr val="accent1"/>
-          </a:effectRef>
-          <a:fontRef idx="minor">
-            <a:schemeClr val="lt1"/>
-          </a:fontRef>
-        </p:style>
-        <p:txBody>
-          <a:bodyPr rtlCol="0" anchor="ctr" wrap="square" lIns="36000" tIns="0" rIns="36000" bIns="0"/>
-          <a:lstStyle/>
-          <a:p>
-            <a:pPr algn="ctr">
-              <a:lnSpc>
-                <a:spcPct val="110000"/>
-              </a:lnSpc>
-              <a:spcAft>
-                <a:spcPts val="0"/>
-              </a:spcAft>
-            </a:pPr>
-            <a:r>
-              <a:rPr sz="1100" b="1">
-                <a:solidFill>
-                  <a:srgbClr val="333333"/>
-                </a:solidFill>
-                <a:latin typeface="メイリオ"/>
-                <a:ea typeface="メイリオ"/>
-                <a:cs typeface="メイリオ"/>
-              </a:rPr>
-              <a:t>サンクス画面</a:t>
-            </a:r>
-          </a:p>
-        </p:txBody>
-      </p:sp>
       <p:pic>
         <p:nvPicPr>
-          <p:cNvPr id="10" name="Picture 9" descr="thanks_tool_thanks.png"/>
+          <p:cNvPr id="45" name="図 44" descr="グラフィカル ユーザー インターフェイス, アプリケーション, Teams&#10;&#10;AI 生成コンテンツは誤りを含む可能性があります。">
+            <a:extLst>
+              <a:ext uri="{FF2B5EF4-FFF2-40B4-BE49-F238E27FC236}">
+                <a16:creationId xmlns:a16="http://schemas.microsoft.com/office/drawing/2014/main" id="{E91CA7A5-62B3-F1F8-38C3-DDCE33E1CC3D}"/>
+              </a:ext>
+            </a:extLst>
+          </p:cNvPr>
           <p:cNvPicPr>
             <a:picLocks noChangeAspect="1"/>
           </p:cNvPicPr>
           <p:nvPr/>
         </p:nvPicPr>
         <p:blipFill>
-          <a:blip r:embed="rId3"/>
+          <a:blip r:embed="rId2" cstate="print">
+            <a:extLst>
+              <a:ext uri="{28A0092B-C50C-407E-A947-70E740481C1C}">
+                <a14:useLocalDpi xmlns:a14="http://schemas.microsoft.com/office/drawing/2010/main" val="0"/>
+              </a:ext>
+            </a:extLst>
+          </a:blip>
+          <a:srcRect t="4580"/>
           <a:stretch>
             <a:fillRect/>
           </a:stretch>
         </p:blipFill>
         <p:spPr>
           <a:xfrm>
-            <a:off x="2773277" y="2304000"/>
-            <a:ext cx="1133999" cy="2015999"/>
+            <a:off x="9253316" y="2021148"/>
+            <a:ext cx="1231081" cy="2085097"/>
           </a:xfrm>
           <a:prstGeom prst="rect">
             <a:avLst/>
           </a:prstGeom>
-          <a:ln w="9525">
-            <a:solidFill>
-              <a:srgbClr val="D9D9D9"/>
-            </a:solidFill>
-          </a:ln>
         </p:spPr>
       </p:pic>
-      <p:sp>
-        <p:nvSpPr>
-          <p:cNvPr id="11" name="TextBox 10"/>
+      <p:pic>
+        <p:nvPicPr>
+          <p:cNvPr id="46" name="図 45" descr="電卓の写真のスマートフォンのスクリーンショット&#10;&#10;AI 生成コンテンツは誤りを含む可能性があります。">
+            <a:extLst>
+              <a:ext uri="{FF2B5EF4-FFF2-40B4-BE49-F238E27FC236}">
+                <a16:creationId xmlns:a16="http://schemas.microsoft.com/office/drawing/2014/main" id="{31EEAD2C-3BE8-0210-FD8E-46D52B30A0AE}"/>
+              </a:ext>
+            </a:extLst>
+          </p:cNvPr>
+          <p:cNvPicPr>
+            <a:picLocks noChangeAspect="1"/>
+          </p:cNvPicPr>
+          <p:nvPr/>
+        </p:nvPicPr>
+        <p:blipFill>
+          <a:blip r:embed="rId3" cstate="print">
+            <a:extLst>
+              <a:ext uri="{28A0092B-C50C-407E-A947-70E740481C1C}">
+                <a14:useLocalDpi xmlns:a14="http://schemas.microsoft.com/office/drawing/2010/main" val="0"/>
+              </a:ext>
+            </a:extLst>
+          </a:blip>
+          <a:srcRect t="4580"/>
+          <a:stretch>
+            <a:fillRect/>
+          </a:stretch>
+        </p:blipFill>
+        <p:spPr>
+          <a:xfrm>
+            <a:off x="9265094" y="4121293"/>
+            <a:ext cx="1231081" cy="2085098"/>
+          </a:xfrm>
+          <a:prstGeom prst="rect">
+            <a:avLst/>
+          </a:prstGeom>
+        </p:spPr>
+      </p:pic>
+      <p:sp>
+        <p:nvSpPr>
+          <p:cNvPr id="48" name="テキスト ボックス 47">
+            <a:extLst>
+              <a:ext uri="{FF2B5EF4-FFF2-40B4-BE49-F238E27FC236}">
+                <a16:creationId xmlns:a16="http://schemas.microsoft.com/office/drawing/2014/main" id="{E989AEB3-EF0E-8885-B426-8B6A5E01F40A}"/>
+              </a:ext>
+            </a:extLst>
+          </p:cNvPr>
           <p:cNvSpPr txBox="1"/>
           <p:nvPr/>
         </p:nvSpPr>
         <p:spPr>
           <a:xfrm>
-            <a:off x="2827277" y="2422800"/>
-            <a:ext cx="1025999" cy="162000"/>
+            <a:off x="7583091" y="2552900"/>
+            <a:ext cx="1510975" cy="430887"/>
           </a:xfrm>
           <a:prstGeom prst="rect">
             <a:avLst/>
@@ -4445,43 +4610,63 @@
           <a:noFill/>
         </p:spPr>
         <p:txBody>
-          <a:bodyPr wrap="square" anchor="ctr" lIns="36000" rIns="36000" tIns="18000" bIns="18000">
+          <a:bodyPr wrap="square">
             <a:spAutoFit/>
           </a:bodyPr>
           <a:lstStyle/>
           <a:p>
-            <a:pPr algn="ctr">
-              <a:lnSpc>
-                <a:spcPct val="110000"/>
-              </a:lnSpc>
-              <a:spcAft>
-                <a:spcPts val="0"/>
-              </a:spcAft>
-            </a:pPr>
-            <a:r>
-              <a:rPr sz="700" b="1">
-                <a:solidFill>
-                  <a:srgbClr val="7F7F7F"/>
-                </a:solidFill>
-                <a:latin typeface="メイリオ"/>
-                <a:ea typeface="メイリオ"/>
-                <a:cs typeface="メイリオ"/>
-              </a:rPr>
-              <a:t>WEBサイト名</a:t>
-            </a:r>
-          </a:p>
-        </p:txBody>
-      </p:sp>
-      <p:sp>
-        <p:nvSpPr>
-          <p:cNvPr id="12" name="TextBox 11"/>
+            <a:pPr algn="ctr"/>
+            <a:r>
+              <a:rPr lang="ja-JP" altLang="en-US" sz="1100" b="1" dirty="0">
+                <a:latin typeface="メイリオ" panose="020B0604030504040204" pitchFamily="50" charset="-128"/>
+                <a:ea typeface="メイリオ" panose="020B0604030504040204" pitchFamily="50" charset="-128"/>
+                <a:cs typeface="メイリオ"/>
+              </a:rPr>
+              <a:t>友だち登録ページ</a:t>
+            </a:r>
+            <a:r>
+              <a:rPr lang="ja-JP" altLang="en-US" sz="1100" dirty="0">
+                <a:latin typeface="メイリオ" panose="020B0604030504040204" pitchFamily="50" charset="-128"/>
+                <a:ea typeface="メイリオ" panose="020B0604030504040204" pitchFamily="50" charset="-128"/>
+                <a:cs typeface="メイリオ"/>
+              </a:rPr>
+              <a:t>へ</a:t>
+            </a:r>
+            <a:endParaRPr lang="en-US" altLang="ja-JP" sz="1100" dirty="0">
+              <a:latin typeface="メイリオ" panose="020B0604030504040204" pitchFamily="50" charset="-128"/>
+              <a:ea typeface="メイリオ" panose="020B0604030504040204" pitchFamily="50" charset="-128"/>
+              <a:cs typeface="メイリオ"/>
+            </a:endParaRPr>
+          </a:p>
+          <a:p>
+            <a:pPr algn="ctr"/>
+            <a:r>
+              <a:rPr lang="ja-JP" altLang="en-US" sz="1100" dirty="0">
+                <a:latin typeface="メイリオ" panose="020B0604030504040204" pitchFamily="50" charset="-128"/>
+                <a:ea typeface="メイリオ" panose="020B0604030504040204" pitchFamily="50" charset="-128"/>
+                <a:cs typeface="メイリオ"/>
+              </a:rPr>
+              <a:t>遷移する。</a:t>
+            </a:r>
+          </a:p>
+        </p:txBody>
+      </p:sp>
+      <p:sp>
+        <p:nvSpPr>
+          <p:cNvPr id="49" name="テキスト ボックス 48">
+            <a:extLst>
+              <a:ext uri="{FF2B5EF4-FFF2-40B4-BE49-F238E27FC236}">
+                <a16:creationId xmlns:a16="http://schemas.microsoft.com/office/drawing/2014/main" id="{4E6D08E3-E0B3-1DF4-0533-E4EE67240415}"/>
+              </a:ext>
+            </a:extLst>
+          </p:cNvPr>
           <p:cNvSpPr txBox="1"/>
           <p:nvPr/>
         </p:nvSpPr>
         <p:spPr>
           <a:xfrm>
-            <a:off x="792000" y="4356000"/>
-            <a:ext cx="1477277" cy="251999"/>
+            <a:off x="7555221" y="4735255"/>
+            <a:ext cx="1647112" cy="261610"/>
           </a:xfrm>
           <a:prstGeom prst="rect">
             <a:avLst/>
@@ -4489,427 +4674,44 @@
           <a:noFill/>
         </p:spPr>
         <p:txBody>
-          <a:bodyPr wrap="square" anchor="t" lIns="36000" rIns="36000" tIns="18000" bIns="18000">
+          <a:bodyPr wrap="square">
             <a:spAutoFit/>
           </a:bodyPr>
           <a:lstStyle/>
           <a:p>
-            <a:pPr algn="ctr">
-              <a:lnSpc>
-                <a:spcPct val="110000"/>
-              </a:lnSpc>
-              <a:spcAft>
-                <a:spcPts val="0"/>
-              </a:spcAft>
-            </a:pPr>
-            <a:r>
-              <a:rPr sz="1050" b="1">
-                <a:solidFill>
-                  <a:srgbClr val="333333"/>
-                </a:solidFill>
-                <a:latin typeface="メイリオ"/>
-                <a:ea typeface="メイリオ"/>
-                <a:cs typeface="メイリオ"/>
-              </a:rPr>
-              <a:t>入力・送信</a:t>
-            </a:r>
-          </a:p>
-        </p:txBody>
-      </p:sp>
-      <p:sp>
-        <p:nvSpPr>
-          <p:cNvPr id="13" name="TextBox 12"/>
-          <p:cNvSpPr txBox="1"/>
-          <p:nvPr/>
-        </p:nvSpPr>
-        <p:spPr>
-          <a:xfrm>
-            <a:off x="2773277" y="4356000"/>
-            <a:ext cx="1133999" cy="251999"/>
-          </a:xfrm>
-          <a:prstGeom prst="rect">
-            <a:avLst/>
-          </a:prstGeom>
-          <a:noFill/>
-        </p:spPr>
-        <p:txBody>
-          <a:bodyPr wrap="square" anchor="t" lIns="36000" rIns="36000" tIns="18000" bIns="18000">
-            <a:spAutoFit/>
-          </a:bodyPr>
-          <a:lstStyle/>
-          <a:p>
-            <a:pPr algn="ctr">
-              <a:lnSpc>
-                <a:spcPct val="110000"/>
-              </a:lnSpc>
-              <a:spcAft>
-                <a:spcPts val="0"/>
-              </a:spcAft>
-            </a:pPr>
-            <a:r>
-              <a:rPr sz="1050" b="1">
-                <a:solidFill>
-                  <a:srgbClr val="333333"/>
-                </a:solidFill>
-                <a:latin typeface="メイリオ"/>
-                <a:ea typeface="メイリオ"/>
-                <a:cs typeface="メイリオ"/>
-              </a:rPr>
-              <a:t>CV完了</a:t>
-            </a:r>
-          </a:p>
-        </p:txBody>
-      </p:sp>
-      <p:cxnSp>
-        <p:nvCxnSpPr>
-          <p:cNvPr id="14" name="Connector 13"/>
-          <p:cNvCxnSpPr/>
-          <p:nvPr/>
-        </p:nvCxnSpPr>
-        <p:spPr>
-          <a:xfrm>
-            <a:off x="3961277" y="3311999"/>
-            <a:ext cx="234000" cy="0"/>
-          </a:xfrm>
-          <a:prstGeom prst="line">
-            <a:avLst/>
-          </a:prstGeom>
-          <a:ln w="25400">
-            <a:solidFill>
-              <a:srgbClr val="1F285A"/>
-            </a:solidFill>
-            <a:tailEnd type="triangle" w="med" len="med"/>
-          </a:ln>
-        </p:spPr>
-        <p:style>
-          <a:lnRef idx="2">
-            <a:schemeClr val="accent1"/>
-          </a:lnRef>
-          <a:fillRef idx="0">
-            <a:schemeClr val="accent1"/>
-          </a:fillRef>
-          <a:effectRef idx="0">
-            <a:schemeClr val="accent1"/>
-          </a:effectRef>
-          <a:fontRef idx="minor">
-            <a:schemeClr val="tx1"/>
-          </a:fontRef>
-        </p:style>
-      </p:cxnSp>
-      <p:sp>
-        <p:nvSpPr>
-          <p:cNvPr id="15" name="Rounded Rectangle 14"/>
-          <p:cNvSpPr/>
-          <p:nvPr/>
-        </p:nvSpPr>
-        <p:spPr>
-          <a:xfrm>
-            <a:off x="4231277" y="2826000"/>
-            <a:ext cx="2860722" cy="972000"/>
-          </a:xfrm>
-          <a:prstGeom prst="roundRect">
-            <a:avLst>
-              <a:gd name="adj" fmla="val 15000"/>
-            </a:avLst>
-          </a:prstGeom>
-          <a:solidFill>
-            <a:srgbClr val="06C755"/>
-          </a:solidFill>
-          <a:ln>
-            <a:noFill/>
-          </a:ln>
-          <a:effectLst/>
-        </p:spPr>
-        <p:style>
-          <a:lnRef idx="1">
-            <a:schemeClr val="accent1"/>
-          </a:lnRef>
-          <a:fillRef idx="3">
-            <a:schemeClr val="accent1"/>
-          </a:fillRef>
-          <a:effectRef idx="0">
-            <a:schemeClr val="accent1"/>
-          </a:effectRef>
-          <a:fontRef idx="minor">
-            <a:schemeClr val="lt1"/>
-          </a:fontRef>
-        </p:style>
-        <p:txBody>
-          <a:bodyPr rtlCol="0" anchor="ctr" wrap="square" lIns="54000" tIns="0" rIns="54000" bIns="0"/>
-          <a:lstStyle/>
-          <a:p>
-            <a:pPr algn="ctr">
-              <a:lnSpc>
-                <a:spcPct val="110000"/>
-              </a:lnSpc>
-              <a:spcAft>
-                <a:spcPts val="200"/>
-              </a:spcAft>
-            </a:pPr>
-            <a:r>
-              <a:rPr sz="1200" b="1">
-                <a:solidFill>
-                  <a:srgbClr val="FFFFFF"/>
-                </a:solidFill>
-                <a:latin typeface="メイリオ"/>
-                <a:ea typeface="メイリオ"/>
-                <a:cs typeface="メイリオ"/>
-              </a:rPr>
-              <a:t>CV完了後 約2〜3秒で</a:t>
-            </a:r>
-          </a:p>
-          <a:p>
-            <a:pPr algn="ctr">
-              <a:lnSpc>
-                <a:spcPct val="110000"/>
-              </a:lnSpc>
-              <a:spcAft>
-                <a:spcPts val="0"/>
-              </a:spcAft>
-            </a:pPr>
-            <a:r>
-              <a:rPr sz="1400" b="1">
-                <a:solidFill>
-                  <a:srgbClr val="FFFFFF"/>
-                </a:solidFill>
-                <a:latin typeface="メイリオ"/>
-                <a:ea typeface="メイリオ"/>
-                <a:cs typeface="メイリオ"/>
-              </a:rPr>
-              <a:t>LINEへ自動遷移</a:t>
-            </a:r>
-          </a:p>
-        </p:txBody>
-      </p:sp>
-      <p:sp>
-        <p:nvSpPr>
-          <p:cNvPr id="16" name="Rounded Rectangle 15"/>
-          <p:cNvSpPr/>
-          <p:nvPr/>
-        </p:nvSpPr>
-        <p:spPr>
-          <a:xfrm>
-            <a:off x="4941638" y="3887999"/>
-            <a:ext cx="1440000" cy="270000"/>
-          </a:xfrm>
-          <a:prstGeom prst="roundRect">
-            <a:avLst>
-              <a:gd name="adj" fmla="val 50000"/>
-            </a:avLst>
-          </a:prstGeom>
-          <a:solidFill>
-            <a:srgbClr val="1F285A"/>
-          </a:solidFill>
-          <a:ln>
-            <a:noFill/>
-          </a:ln>
-          <a:effectLst/>
-        </p:spPr>
-        <p:style>
-          <a:lnRef idx="1">
-            <a:schemeClr val="accent1"/>
-          </a:lnRef>
-          <a:fillRef idx="3">
-            <a:schemeClr val="accent1"/>
-          </a:fillRef>
-          <a:effectRef idx="0">
-            <a:schemeClr val="accent1"/>
-          </a:effectRef>
-          <a:fontRef idx="minor">
-            <a:schemeClr val="lt1"/>
-          </a:fontRef>
-        </p:style>
-        <p:txBody>
-          <a:bodyPr rtlCol="0" anchor="ctr" wrap="square" lIns="36000" tIns="0" rIns="36000" bIns="0"/>
-          <a:lstStyle/>
-          <a:p>
-            <a:pPr algn="ctr">
-              <a:lnSpc>
-                <a:spcPct val="110000"/>
-              </a:lnSpc>
-              <a:spcAft>
-                <a:spcPts val="0"/>
-              </a:spcAft>
-            </a:pPr>
-            <a:r>
-              <a:rPr sz="1050" b="1">
-                <a:solidFill>
-                  <a:srgbClr val="FFFFFF"/>
-                </a:solidFill>
-                <a:latin typeface="メイリオ"/>
-                <a:ea typeface="メイリオ"/>
-                <a:cs typeface="メイリオ"/>
-              </a:rPr>
-              <a:t>DYM開発ツール</a:t>
-            </a:r>
-          </a:p>
-        </p:txBody>
-      </p:sp>
-      <p:cxnSp>
-        <p:nvCxnSpPr>
-          <p:cNvPr id="17" name="Connector 16"/>
-          <p:cNvCxnSpPr/>
-          <p:nvPr/>
-        </p:nvCxnSpPr>
-        <p:spPr>
-          <a:xfrm>
-            <a:off x="7146000" y="3311999"/>
-            <a:ext cx="162000" cy="0"/>
-          </a:xfrm>
-          <a:prstGeom prst="line">
-            <a:avLst/>
-          </a:prstGeom>
-          <a:ln w="25400">
-            <a:solidFill>
-              <a:srgbClr val="1F285A"/>
-            </a:solidFill>
-            <a:tailEnd type="triangle" w="med" len="med"/>
-          </a:ln>
-        </p:spPr>
-        <p:style>
-          <a:lnRef idx="2">
-            <a:schemeClr val="accent1"/>
-          </a:lnRef>
-          <a:fillRef idx="0">
-            <a:schemeClr val="accent1"/>
-          </a:fillRef>
-          <a:effectRef idx="0">
-            <a:schemeClr val="accent1"/>
-          </a:effectRef>
-          <a:fontRef idx="minor">
-            <a:schemeClr val="tx1"/>
-          </a:fontRef>
-        </p:style>
-      </p:cxnSp>
-      <p:sp>
-        <p:nvSpPr>
-          <p:cNvPr id="18" name="Rectangle 17"/>
-          <p:cNvSpPr/>
-          <p:nvPr/>
-        </p:nvSpPr>
-        <p:spPr>
-          <a:xfrm>
-            <a:off x="7380000" y="1620000"/>
-            <a:ext cx="4031999" cy="288000"/>
-          </a:xfrm>
-          <a:prstGeom prst="rect">
-            <a:avLst/>
-          </a:prstGeom>
-          <a:solidFill>
-            <a:srgbClr val="1F285A"/>
-          </a:solidFill>
-          <a:ln>
-            <a:noFill/>
-          </a:ln>
-          <a:effectLst/>
-        </p:spPr>
-        <p:style>
-          <a:lnRef idx="1">
-            <a:schemeClr val="accent1"/>
-          </a:lnRef>
-          <a:fillRef idx="3">
-            <a:schemeClr val="accent1"/>
-          </a:fillRef>
-          <a:effectRef idx="0">
-            <a:schemeClr val="accent1"/>
-          </a:effectRef>
-          <a:fontRef idx="minor">
-            <a:schemeClr val="lt1"/>
-          </a:fontRef>
-        </p:style>
-        <p:txBody>
-          <a:bodyPr rtlCol="0" anchor="ctr" wrap="square" lIns="72000" tIns="18000" rIns="72000" bIns="18000"/>
-          <a:lstStyle/>
-          <a:p>
-            <a:pPr algn="ctr">
-              <a:lnSpc>
-                <a:spcPct val="110000"/>
-              </a:lnSpc>
-              <a:spcAft>
-                <a:spcPts val="0"/>
-              </a:spcAft>
-            </a:pPr>
-            <a:r>
-              <a:rPr sz="1200" b="1">
-                <a:solidFill>
-                  <a:srgbClr val="FFFFFF"/>
-                </a:solidFill>
-                <a:latin typeface="メイリオ"/>
-                <a:ea typeface="メイリオ"/>
-                <a:cs typeface="メイリオ"/>
-              </a:rPr>
-              <a:t>動作イメージ</a:t>
-            </a:r>
-          </a:p>
-        </p:txBody>
-      </p:sp>
-      <p:sp>
-        <p:nvSpPr>
-          <p:cNvPr id="19" name="Rounded Rectangle 18"/>
-          <p:cNvSpPr/>
-          <p:nvPr/>
-        </p:nvSpPr>
-        <p:spPr>
-          <a:xfrm>
-            <a:off x="7488000" y="1980000"/>
-            <a:ext cx="1800000" cy="251999"/>
-          </a:xfrm>
-          <a:prstGeom prst="roundRect">
-            <a:avLst>
-              <a:gd name="adj" fmla="val 50000"/>
-            </a:avLst>
-          </a:prstGeom>
-          <a:solidFill>
-            <a:srgbClr val="E8F8EE"/>
-          </a:solidFill>
-          <a:ln>
-            <a:noFill/>
-          </a:ln>
-          <a:effectLst/>
-        </p:spPr>
-        <p:style>
-          <a:lnRef idx="1">
-            <a:schemeClr val="accent1"/>
-          </a:lnRef>
-          <a:fillRef idx="3">
-            <a:schemeClr val="accent1"/>
-          </a:fillRef>
-          <a:effectRef idx="0">
-            <a:schemeClr val="accent1"/>
-          </a:effectRef>
-          <a:fontRef idx="minor">
-            <a:schemeClr val="lt1"/>
-          </a:fontRef>
-        </p:style>
-        <p:txBody>
-          <a:bodyPr rtlCol="0" anchor="ctr" wrap="square" lIns="36000" tIns="0" rIns="36000" bIns="0"/>
-          <a:lstStyle/>
-          <a:p>
-            <a:pPr algn="ctr">
-              <a:lnSpc>
-                <a:spcPct val="110000"/>
-              </a:lnSpc>
-              <a:spcAft>
-                <a:spcPts val="0"/>
-              </a:spcAft>
-            </a:pPr>
-            <a:r>
-              <a:rPr sz="1100" b="1">
-                <a:solidFill>
-                  <a:srgbClr val="0B7A3B"/>
-                </a:solidFill>
-                <a:latin typeface="メイリオ"/>
-                <a:ea typeface="メイリオ"/>
-                <a:cs typeface="メイリオ"/>
-              </a:rPr>
-              <a:t>LINE未追加</a:t>
-            </a:r>
+            <a:r>
+              <a:rPr lang="ja-JP" altLang="en-US" sz="1100" b="1" dirty="0">
+                <a:latin typeface="メイリオ" panose="020B0604030504040204" pitchFamily="50" charset="-128"/>
+                <a:ea typeface="メイリオ" panose="020B0604030504040204" pitchFamily="50" charset="-128"/>
+                <a:cs typeface="メイリオ"/>
+              </a:rPr>
+              <a:t>トーク画面</a:t>
+            </a:r>
+            <a:r>
+              <a:rPr lang="ja-JP" altLang="en-US" sz="1100" dirty="0">
+                <a:latin typeface="メイリオ" panose="020B0604030504040204" pitchFamily="50" charset="-128"/>
+                <a:ea typeface="メイリオ" panose="020B0604030504040204" pitchFamily="50" charset="-128"/>
+                <a:cs typeface="メイリオ"/>
+              </a:rPr>
+              <a:t>へ遷移する。</a:t>
+            </a:r>
+            <a:endParaRPr lang="en-US" altLang="ja-JP" sz="1100" dirty="0">
+              <a:latin typeface="メイリオ" panose="020B0604030504040204" pitchFamily="50" charset="-128"/>
+              <a:ea typeface="メイリオ" panose="020B0604030504040204" pitchFamily="50" charset="-128"/>
+              <a:cs typeface="メイリオ"/>
+            </a:endParaRPr>
           </a:p>
         </p:txBody>
       </p:sp>
       <p:pic>
         <p:nvPicPr>
-          <p:cNvPr id="20" name="Picture 19" descr="thanks_tool_add.png"/>
+          <p:cNvPr id="56" name="図 55">
+            <a:extLst>
+              <a:ext uri="{FF2B5EF4-FFF2-40B4-BE49-F238E27FC236}">
+                <a16:creationId xmlns:a16="http://schemas.microsoft.com/office/drawing/2014/main" id="{0B7B313D-7D5F-4357-9B38-DFC3DBC5FCF6}"/>
+              </a:ext>
+            </a:extLst>
+          </p:cNvPr>
           <p:cNvPicPr>
             <a:picLocks noChangeAspect="1"/>
           </p:cNvPicPr>
@@ -4923,253 +4725,23 @@
         </p:blipFill>
         <p:spPr>
           <a:xfrm>
-            <a:off x="7820760" y="2304000"/>
-            <a:ext cx="1134479" cy="2015999"/>
+            <a:off x="9301998" y="2977479"/>
+            <a:ext cx="1133712" cy="110223"/>
           </a:xfrm>
           <a:prstGeom prst="rect">
             <a:avLst/>
           </a:prstGeom>
-          <a:ln w="9525">
-            <a:solidFill>
-              <a:srgbClr val="D9D9D9"/>
-            </a:solidFill>
-          </a:ln>
         </p:spPr>
       </p:pic>
-      <p:sp>
-        <p:nvSpPr>
-          <p:cNvPr id="21" name="TextBox 20"/>
-          <p:cNvSpPr txBox="1"/>
-          <p:nvPr/>
-        </p:nvSpPr>
-        <p:spPr>
-          <a:xfrm>
-            <a:off x="7892760" y="2790000"/>
-            <a:ext cx="990479" cy="432000"/>
-          </a:xfrm>
-          <a:prstGeom prst="rect">
-            <a:avLst/>
-          </a:prstGeom>
-          <a:noFill/>
-        </p:spPr>
-        <p:txBody>
-          <a:bodyPr wrap="square" anchor="ctr" lIns="36000" rIns="36000" tIns="18000" bIns="18000">
-            <a:spAutoFit/>
-          </a:bodyPr>
-          <a:lstStyle/>
-          <a:p>
-            <a:pPr algn="ctr">
-              <a:lnSpc>
-                <a:spcPct val="110000"/>
-              </a:lnSpc>
-              <a:spcAft>
-                <a:spcPts val="0"/>
-              </a:spcAft>
-            </a:pPr>
-            <a:r>
-              <a:rPr sz="800" b="1">
-                <a:solidFill>
-                  <a:srgbClr val="7F7F7F"/>
-                </a:solidFill>
-                <a:latin typeface="メイリオ"/>
-                <a:ea typeface="メイリオ"/>
-                <a:cs typeface="メイリオ"/>
-              </a:rPr>
-              <a:t>ロゴ</a:t>
-            </a:r>
-          </a:p>
-        </p:txBody>
-      </p:sp>
-      <p:sp>
-        <p:nvSpPr>
-          <p:cNvPr id="22" name="TextBox 21"/>
-          <p:cNvSpPr txBox="1"/>
-          <p:nvPr/>
-        </p:nvSpPr>
-        <p:spPr>
-          <a:xfrm>
-            <a:off x="7856760" y="3258000"/>
-            <a:ext cx="1062479" cy="162000"/>
-          </a:xfrm>
-          <a:prstGeom prst="rect">
-            <a:avLst/>
-          </a:prstGeom>
-          <a:noFill/>
-        </p:spPr>
-        <p:txBody>
-          <a:bodyPr wrap="square" anchor="ctr" lIns="36000" rIns="36000" tIns="18000" bIns="18000">
-            <a:spAutoFit/>
-          </a:bodyPr>
-          <a:lstStyle/>
-          <a:p>
-            <a:pPr algn="ctr">
-              <a:lnSpc>
-                <a:spcPct val="110000"/>
-              </a:lnSpc>
-              <a:spcAft>
-                <a:spcPts val="0"/>
-              </a:spcAft>
-            </a:pPr>
-            <a:r>
-              <a:rPr sz="750" b="1">
-                <a:solidFill>
-                  <a:srgbClr val="333333"/>
-                </a:solidFill>
-                <a:latin typeface="メイリオ"/>
-                <a:ea typeface="メイリオ"/>
-                <a:cs typeface="メイリオ"/>
-              </a:rPr>
-              <a:t>アカウント名</a:t>
-            </a:r>
-          </a:p>
-        </p:txBody>
-      </p:sp>
-      <p:sp>
-        <p:nvSpPr>
-          <p:cNvPr id="23" name="TextBox 22"/>
-          <p:cNvSpPr txBox="1"/>
-          <p:nvPr/>
-        </p:nvSpPr>
-        <p:spPr>
-          <a:xfrm>
-            <a:off x="7380000" y="4356000"/>
-            <a:ext cx="2015999" cy="251999"/>
-          </a:xfrm>
-          <a:prstGeom prst="rect">
-            <a:avLst/>
-          </a:prstGeom>
-          <a:noFill/>
-        </p:spPr>
-        <p:txBody>
-          <a:bodyPr wrap="square" anchor="t" lIns="36000" rIns="36000" tIns="18000" bIns="18000">
-            <a:spAutoFit/>
-          </a:bodyPr>
-          <a:lstStyle/>
-          <a:p>
-            <a:pPr algn="ctr">
-              <a:lnSpc>
-                <a:spcPct val="110000"/>
-              </a:lnSpc>
-              <a:spcAft>
-                <a:spcPts val="0"/>
-              </a:spcAft>
-            </a:pPr>
-            <a:r>
-              <a:rPr sz="1050" b="1">
-                <a:solidFill>
-                  <a:srgbClr val="333333"/>
-                </a:solidFill>
-                <a:latin typeface="メイリオ"/>
-                <a:ea typeface="メイリオ"/>
-                <a:cs typeface="メイリオ"/>
-              </a:rPr>
-              <a:t>友だち登録ページへ遷移</a:t>
-            </a:r>
-          </a:p>
-        </p:txBody>
-      </p:sp>
-      <p:cxnSp>
-        <p:nvCxnSpPr>
-          <p:cNvPr id="24" name="Connector 23"/>
-          <p:cNvCxnSpPr/>
-          <p:nvPr/>
-        </p:nvCxnSpPr>
-        <p:spPr>
-          <a:xfrm>
-            <a:off x="9396000" y="1980000"/>
-            <a:ext cx="0" cy="2628000"/>
-          </a:xfrm>
-          <a:prstGeom prst="line">
-            <a:avLst/>
-          </a:prstGeom>
-          <a:ln w="9525">
-            <a:solidFill>
-              <a:srgbClr val="D9D9D9"/>
-            </a:solidFill>
-          </a:ln>
-        </p:spPr>
-        <p:style>
-          <a:lnRef idx="2">
-            <a:schemeClr val="accent1"/>
-          </a:lnRef>
-          <a:fillRef idx="0">
-            <a:schemeClr val="accent1"/>
-          </a:fillRef>
-          <a:effectRef idx="0">
-            <a:schemeClr val="accent1"/>
-          </a:effectRef>
-          <a:fontRef idx="minor">
-            <a:schemeClr val="tx1"/>
-          </a:fontRef>
-        </p:style>
-      </p:cxnSp>
-      <p:sp>
-        <p:nvSpPr>
-          <p:cNvPr id="25" name="Rounded Rectangle 24"/>
-          <p:cNvSpPr/>
-          <p:nvPr/>
-        </p:nvSpPr>
-        <p:spPr>
-          <a:xfrm>
-            <a:off x="9504000" y="1980000"/>
-            <a:ext cx="1800000" cy="251999"/>
-          </a:xfrm>
-          <a:prstGeom prst="roundRect">
-            <a:avLst>
-              <a:gd name="adj" fmla="val 50000"/>
-            </a:avLst>
-          </a:prstGeom>
-          <a:solidFill>
-            <a:srgbClr val="E8F8EE"/>
-          </a:solidFill>
-          <a:ln>
-            <a:noFill/>
-          </a:ln>
-          <a:effectLst/>
-        </p:spPr>
-        <p:style>
-          <a:lnRef idx="1">
-            <a:schemeClr val="accent1"/>
-          </a:lnRef>
-          <a:fillRef idx="3">
-            <a:schemeClr val="accent1"/>
-          </a:fillRef>
-          <a:effectRef idx="0">
-            <a:schemeClr val="accent1"/>
-          </a:effectRef>
-          <a:fontRef idx="minor">
-            <a:schemeClr val="lt1"/>
-          </a:fontRef>
-        </p:style>
-        <p:txBody>
-          <a:bodyPr rtlCol="0" anchor="ctr" wrap="square" lIns="36000" tIns="0" rIns="36000" bIns="0"/>
-          <a:lstStyle/>
-          <a:p>
-            <a:pPr algn="ctr">
-              <a:lnSpc>
-                <a:spcPct val="110000"/>
-              </a:lnSpc>
-              <a:spcAft>
-                <a:spcPts val="0"/>
-              </a:spcAft>
-            </a:pPr>
-            <a:r>
-              <a:rPr sz="1100" b="1">
-                <a:solidFill>
-                  <a:srgbClr val="0B7A3B"/>
-                </a:solidFill>
-                <a:latin typeface="メイリオ"/>
-                <a:ea typeface="メイリオ"/>
-                <a:cs typeface="メイリオ"/>
-              </a:rPr>
-              <a:t>LINE追加済み</a:t>
-            </a:r>
-          </a:p>
-        </p:txBody>
-      </p:sp>
       <p:pic>
         <p:nvPicPr>
-          <p:cNvPr id="26" name="Picture 25" descr="thanks_tool_talk.png"/>
+          <p:cNvPr id="57" name="図 56">
+            <a:extLst>
+              <a:ext uri="{FF2B5EF4-FFF2-40B4-BE49-F238E27FC236}">
+                <a16:creationId xmlns:a16="http://schemas.microsoft.com/office/drawing/2014/main" id="{A8EA42C4-338F-850B-B276-B83DC2A73148}"/>
+              </a:ext>
+            </a:extLst>
+          </p:cNvPr>
           <p:cNvPicPr>
             <a:picLocks noChangeAspect="1"/>
           </p:cNvPicPr>
@@ -5183,134 +4755,112 @@
         </p:blipFill>
         <p:spPr>
           <a:xfrm>
-            <a:off x="9836760" y="2304000"/>
-            <a:ext cx="1134479" cy="2015999"/>
+            <a:off x="9631724" y="2983787"/>
+            <a:ext cx="479964" cy="106659"/>
           </a:xfrm>
           <a:prstGeom prst="rect">
             <a:avLst/>
           </a:prstGeom>
+        </p:spPr>
+      </p:pic>
+      <p:pic>
+        <p:nvPicPr>
+          <p:cNvPr id="58" name="図 57">
+            <a:extLst>
+              <a:ext uri="{FF2B5EF4-FFF2-40B4-BE49-F238E27FC236}">
+                <a16:creationId xmlns:a16="http://schemas.microsoft.com/office/drawing/2014/main" id="{CCB04072-A708-EEE7-1345-D4C9E9FA9C1D}"/>
+              </a:ext>
+            </a:extLst>
+          </p:cNvPr>
+          <p:cNvPicPr>
+            <a:picLocks noChangeAspect="1"/>
+          </p:cNvPicPr>
+          <p:nvPr/>
+        </p:nvPicPr>
+        <p:blipFill>
+          <a:blip r:embed="rId5"/>
+          <a:stretch>
+            <a:fillRect/>
+          </a:stretch>
+        </p:blipFill>
+        <p:spPr>
+          <a:xfrm>
+            <a:off x="9661394" y="4118389"/>
+            <a:ext cx="334412" cy="74315"/>
+          </a:xfrm>
+          <a:prstGeom prst="rect">
+            <a:avLst/>
+          </a:prstGeom>
+        </p:spPr>
+      </p:pic>
+      <p:pic>
+        <p:nvPicPr>
+          <p:cNvPr id="59" name="図 58">
+            <a:extLst>
+              <a:ext uri="{FF2B5EF4-FFF2-40B4-BE49-F238E27FC236}">
+                <a16:creationId xmlns:a16="http://schemas.microsoft.com/office/drawing/2014/main" id="{EDED354B-362F-AAF7-76A6-52D8547EDC91}"/>
+              </a:ext>
+            </a:extLst>
+          </p:cNvPr>
+          <p:cNvPicPr>
+            <a:picLocks noChangeAspect="1"/>
+          </p:cNvPicPr>
+          <p:nvPr/>
+        </p:nvPicPr>
+        <p:blipFill>
+          <a:blip r:embed="rId5"/>
+          <a:stretch>
+            <a:fillRect/>
+          </a:stretch>
+        </p:blipFill>
+        <p:spPr>
+          <a:xfrm>
+            <a:off x="9813794" y="4270789"/>
+            <a:ext cx="334412" cy="74315"/>
+          </a:xfrm>
+          <a:prstGeom prst="rect">
+            <a:avLst/>
+          </a:prstGeom>
+        </p:spPr>
+      </p:pic>
+      <p:sp>
+        <p:nvSpPr>
+          <p:cNvPr id="1030" name="楕円 1029">
+            <a:extLst>
+              <a:ext uri="{FF2B5EF4-FFF2-40B4-BE49-F238E27FC236}">
+                <a16:creationId xmlns:a16="http://schemas.microsoft.com/office/drawing/2014/main" id="{A0934BB8-8F8D-D4F0-8D59-8F32A6A6E03A}"/>
+              </a:ext>
+            </a:extLst>
+          </p:cNvPr>
+          <p:cNvSpPr/>
+          <p:nvPr/>
+        </p:nvSpPr>
+        <p:spPr>
+          <a:xfrm>
+            <a:off x="9667828" y="2536378"/>
+            <a:ext cx="396000" cy="396000"/>
+          </a:xfrm>
+          <a:prstGeom prst="ellipse">
+            <a:avLst/>
+          </a:prstGeom>
+          <a:solidFill>
+            <a:schemeClr val="bg1">
+              <a:lumMod val="95000"/>
+            </a:schemeClr>
+          </a:solidFill>
           <a:ln w="9525">
             <a:solidFill>
-              <a:srgbClr val="D9D9D9"/>
+              <a:schemeClr val="tx1"/>
             </a:solidFill>
           </a:ln>
         </p:spPr>
-      </p:pic>
-      <p:sp>
-        <p:nvSpPr>
-          <p:cNvPr id="27" name="TextBox 26"/>
-          <p:cNvSpPr txBox="1"/>
-          <p:nvPr/>
-        </p:nvSpPr>
-        <p:spPr>
-          <a:xfrm>
-            <a:off x="10052760" y="2383200"/>
-            <a:ext cx="576000" cy="144000"/>
-          </a:xfrm>
-          <a:prstGeom prst="rect">
-            <a:avLst/>
-          </a:prstGeom>
-          <a:noFill/>
-        </p:spPr>
-        <p:txBody>
-          <a:bodyPr wrap="none" anchor="ctr" lIns="36000" rIns="36000" tIns="18000" bIns="18000">
-            <a:spAutoFit/>
-          </a:bodyPr>
-          <a:lstStyle/>
-          <a:p>
-            <a:pPr algn="ctr">
-              <a:lnSpc>
-                <a:spcPct val="110000"/>
-              </a:lnSpc>
-              <a:spcAft>
-                <a:spcPts val="0"/>
-              </a:spcAft>
-            </a:pPr>
-            <a:r>
-              <a:rPr sz="550" b="1">
-                <a:solidFill>
-                  <a:srgbClr val="333333"/>
-                </a:solidFill>
-                <a:latin typeface="メイリオ"/>
-                <a:ea typeface="メイリオ"/>
-                <a:cs typeface="メイリオ"/>
-              </a:rPr>
-              <a:t>アカウント名</a:t>
-            </a:r>
-          </a:p>
-        </p:txBody>
-      </p:sp>
-      <p:sp>
-        <p:nvSpPr>
-          <p:cNvPr id="28" name="TextBox 27"/>
-          <p:cNvSpPr txBox="1"/>
-          <p:nvPr/>
-        </p:nvSpPr>
-        <p:spPr>
-          <a:xfrm>
-            <a:off x="9396000" y="4356000"/>
-            <a:ext cx="2015999" cy="251999"/>
-          </a:xfrm>
-          <a:prstGeom prst="rect">
-            <a:avLst/>
-          </a:prstGeom>
-          <a:noFill/>
-        </p:spPr>
-        <p:txBody>
-          <a:bodyPr wrap="square" anchor="t" lIns="36000" rIns="36000" tIns="18000" bIns="18000">
-            <a:spAutoFit/>
-          </a:bodyPr>
-          <a:lstStyle/>
-          <a:p>
-            <a:pPr algn="ctr">
-              <a:lnSpc>
-                <a:spcPct val="110000"/>
-              </a:lnSpc>
-              <a:spcAft>
-                <a:spcPts val="0"/>
-              </a:spcAft>
-            </a:pPr>
-            <a:r>
-              <a:rPr sz="1050" b="1">
-                <a:solidFill>
-                  <a:srgbClr val="333333"/>
-                </a:solidFill>
-                <a:latin typeface="メイリオ"/>
-                <a:ea typeface="メイリオ"/>
-                <a:cs typeface="メイリオ"/>
-              </a:rPr>
-              <a:t>トーク画面へ遷移</a:t>
-            </a:r>
-          </a:p>
-        </p:txBody>
-      </p:sp>
-      <p:sp>
-        <p:nvSpPr>
-          <p:cNvPr id="29" name="Rectangle 28"/>
-          <p:cNvSpPr/>
-          <p:nvPr/>
-        </p:nvSpPr>
-        <p:spPr>
-          <a:xfrm>
-            <a:off x="792000" y="4752000"/>
-            <a:ext cx="10620000" cy="360000"/>
-          </a:xfrm>
-          <a:prstGeom prst="rect">
-            <a:avLst/>
-          </a:prstGeom>
-          <a:solidFill>
-            <a:srgbClr val="E4E8F6"/>
-          </a:solidFill>
-          <a:ln>
-            <a:noFill/>
-          </a:ln>
-          <a:effectLst/>
-        </p:spPr>
         <p:style>
-          <a:lnRef idx="1">
-            <a:schemeClr val="accent1"/>
+          <a:lnRef idx="2">
+            <a:schemeClr val="accent1">
+              <a:shade val="15000"/>
+            </a:schemeClr>
           </a:lnRef>
-          <a:fillRef idx="3">
+          <a:fillRef idx="1">
             <a:schemeClr val="accent1"/>
           </a:fillRef>
           <a:effectRef idx="0">
@@ -5321,102 +4871,61 @@
           </a:fontRef>
         </p:style>
         <p:txBody>
-          <a:bodyPr rtlCol="0" anchor="ctr" wrap="square" lIns="72000" tIns="18000" rIns="72000" bIns="18000"/>
+          <a:bodyPr rtlCol="0" anchor="ctr"/>
           <a:lstStyle/>
           <a:p>
-            <a:pPr algn="ctr">
-              <a:lnSpc>
-                <a:spcPct val="110000"/>
-              </a:lnSpc>
-              <a:spcAft>
-                <a:spcPts val="0"/>
-              </a:spcAft>
-            </a:pPr>
-            <a:r>
-              <a:rPr sz="1250" b="1">
-                <a:solidFill>
-                  <a:srgbClr val="1F285A"/>
-                </a:solidFill>
-                <a:latin typeface="メイリオ"/>
-                <a:ea typeface="メイリオ"/>
-                <a:cs typeface="メイリオ"/>
-              </a:rPr>
-              <a:t>フォーム入力内容をLINEトーク入力画面へ引き継ぎ可能</a:t>
-            </a:r>
-          </a:p>
-        </p:txBody>
-      </p:sp>
-      <p:sp>
-        <p:nvSpPr>
-          <p:cNvPr id="30" name="TextBox 29"/>
-          <p:cNvSpPr txBox="1"/>
-          <p:nvPr/>
-        </p:nvSpPr>
-        <p:spPr>
-          <a:xfrm>
-            <a:off x="792000" y="5292000"/>
-            <a:ext cx="792000" cy="576000"/>
+            <a:pPr algn="ctr"/>
+            <a:r>
+              <a:rPr lang="ja-JP" altLang="en-US" sz="800" dirty="0">
+                <a:solidFill>
+                  <a:schemeClr val="tx1"/>
+                </a:solidFill>
+                <a:latin typeface="メイリオ" panose="020B0604030504040204" pitchFamily="50" charset="-128"/>
+                <a:ea typeface="メイリオ" panose="020B0604030504040204" pitchFamily="50" charset="-128"/>
+                <a:cs typeface="メイリオ"/>
+              </a:rPr>
+              <a:t>ロゴ</a:t>
+            </a:r>
+          </a:p>
+        </p:txBody>
+      </p:sp>
+      <p:sp>
+        <p:nvSpPr>
+          <p:cNvPr id="34" name="正方形/長方形 33">
+            <a:extLst>
+              <a:ext uri="{FF2B5EF4-FFF2-40B4-BE49-F238E27FC236}">
+                <a16:creationId xmlns:a16="http://schemas.microsoft.com/office/drawing/2014/main" id="{A593FC72-954C-48DC-E845-1A5FCE4C9E00}"/>
+              </a:ext>
+            </a:extLst>
+          </p:cNvPr>
+          <p:cNvSpPr/>
+          <p:nvPr/>
+        </p:nvSpPr>
+        <p:spPr>
+          <a:xfrm>
+            <a:off x="1510609" y="2027927"/>
+            <a:ext cx="1405728" cy="2841034"/>
           </a:xfrm>
           <a:prstGeom prst="rect">
             <a:avLst/>
           </a:prstGeom>
           <a:noFill/>
-        </p:spPr>
-        <p:txBody>
-          <a:bodyPr wrap="square" anchor="ctr" lIns="36000" rIns="36000" tIns="18000" bIns="18000">
-            <a:spAutoFit/>
-          </a:bodyPr>
-          <a:lstStyle/>
-          <a:p>
-            <a:pPr algn="l">
-              <a:lnSpc>
-                <a:spcPct val="110000"/>
-              </a:lnSpc>
-              <a:spcAft>
-                <a:spcPts val="0"/>
-              </a:spcAft>
-            </a:pPr>
-            <a:r>
-              <a:rPr sz="1300" b="1">
-                <a:solidFill>
-                  <a:srgbClr val="1F285A"/>
-                </a:solidFill>
-                <a:latin typeface="メイリオ"/>
-                <a:ea typeface="メイリオ"/>
-                <a:cs typeface="メイリオ"/>
-              </a:rPr>
-              <a:t>費用</a:t>
-            </a:r>
-          </a:p>
-        </p:txBody>
-      </p:sp>
-      <p:sp>
-        <p:nvSpPr>
-          <p:cNvPr id="31" name="Rectangle 30"/>
-          <p:cNvSpPr/>
-          <p:nvPr/>
-        </p:nvSpPr>
-        <p:spPr>
-          <a:xfrm>
-            <a:off x="1584000" y="5292000"/>
-            <a:ext cx="2304000" cy="576000"/>
-          </a:xfrm>
-          <a:prstGeom prst="rect">
-            <a:avLst/>
-          </a:prstGeom>
-          <a:solidFill>
-            <a:srgbClr val="1F285A"/>
-          </a:solidFill>
           <a:ln>
-            <a:noFill/>
+            <a:solidFill>
+              <a:schemeClr val="tx2">
+                <a:lumMod val="20000"/>
+                <a:lumOff val="80000"/>
+              </a:schemeClr>
+            </a:solidFill>
           </a:ln>
-          <a:effectLst/>
         </p:spPr>
         <p:style>
-          <a:lnRef idx="1">
-            <a:schemeClr val="accent1"/>
+          <a:lnRef idx="2">
+            <a:schemeClr val="accent1">
+              <a:shade val="15000"/>
+            </a:schemeClr>
           </a:lnRef>
-          <a:fillRef idx="3">
+          <a:fillRef idx="1">
             <a:schemeClr val="accent1"/>
           </a:fillRef>
           <a:effectRef idx="0">
@@ -5427,95 +4936,52 @@
           </a:fontRef>
         </p:style>
         <p:txBody>
-          <a:bodyPr rtlCol="0" anchor="ctr" wrap="square" lIns="72000" tIns="18000" rIns="72000" bIns="18000"/>
+          <a:bodyPr rtlCol="0" anchor="ctr"/>
           <a:lstStyle/>
           <a:p>
             <a:pPr algn="ctr"/>
-          </a:p>
-        </p:txBody>
-      </p:sp>
-      <p:sp>
-        <p:nvSpPr>
-          <p:cNvPr id="32" name="TextBox 31"/>
-          <p:cNvSpPr txBox="1"/>
-          <p:nvPr/>
-        </p:nvSpPr>
-        <p:spPr>
-          <a:xfrm>
-            <a:off x="1584000" y="5292000"/>
-            <a:ext cx="2304000" cy="576000"/>
-          </a:xfrm>
-          <a:prstGeom prst="rect">
-            <a:avLst/>
-          </a:prstGeom>
-          <a:noFill/>
-        </p:spPr>
-        <p:txBody>
-          <a:bodyPr wrap="square" anchor="ctr" lIns="36000" rIns="36000" tIns="10800" bIns="10800">
-            <a:spAutoFit/>
-          </a:bodyPr>
-          <a:lstStyle/>
-          <a:p>
-            <a:pPr algn="ctr">
-              <a:lnSpc>
-                <a:spcPct val="105000"/>
-              </a:lnSpc>
-              <a:spcAft>
-                <a:spcPts val="200"/>
-              </a:spcAft>
-            </a:pPr>
-            <a:r>
-              <a:rPr sz="1100" b="1">
-                <a:solidFill>
-                  <a:srgbClr val="FFFFFF"/>
-                </a:solidFill>
-                <a:latin typeface="メイリオ"/>
-                <a:ea typeface="メイリオ"/>
-                <a:cs typeface="メイリオ"/>
-              </a:rPr>
-              <a:t>初期費用 </a:t>
-            </a:r>
-            <a:r>
-              <a:rPr sz="1800" b="1">
-                <a:solidFill>
-                  <a:srgbClr val="FFFFFF"/>
-                </a:solidFill>
-                <a:latin typeface="メイリオ"/>
-                <a:ea typeface="メイリオ"/>
-                <a:cs typeface="メイリオ"/>
-              </a:rPr>
-              <a:t>15万円</a:t>
-            </a:r>
-          </a:p>
-        </p:txBody>
-      </p:sp>
-      <p:sp>
-        <p:nvSpPr>
-          <p:cNvPr id="33" name="Rectangle 32"/>
+            <a:endParaRPr lang="ja-JP" altLang="en-US">
+              <a:latin typeface="メイリオ"/>
+              <a:ea typeface="メイリオ"/>
+              <a:cs typeface="メイリオ"/>
+            </a:endParaRPr>
+          </a:p>
+        </p:txBody>
+      </p:sp>
+      <p:sp>
+        <p:nvSpPr>
+          <p:cNvPr id="36" name="二等辺三角形 35">
+            <a:extLst>
+              <a:ext uri="{FF2B5EF4-FFF2-40B4-BE49-F238E27FC236}">
+                <a16:creationId xmlns:a16="http://schemas.microsoft.com/office/drawing/2014/main" id="{626832A8-575E-5E2B-73F4-BE5567514E57}"/>
+              </a:ext>
+            </a:extLst>
+          </p:cNvPr>
           <p:cNvSpPr/>
           <p:nvPr/>
         </p:nvSpPr>
         <p:spPr>
-          <a:xfrm>
-            <a:off x="3996000" y="5292000"/>
-            <a:ext cx="2736000" cy="576000"/>
-          </a:xfrm>
-          <a:prstGeom prst="rect">
+          <a:xfrm rot="5400000">
+            <a:off x="2957810" y="3262734"/>
+            <a:ext cx="252701" cy="182781"/>
+          </a:xfrm>
+          <a:prstGeom prst="triangle">
             <a:avLst/>
           </a:prstGeom>
           <a:solidFill>
-            <a:srgbClr val="1F285A"/>
+            <a:schemeClr val="tx2"/>
           </a:solidFill>
           <a:ln>
             <a:noFill/>
           </a:ln>
-          <a:effectLst/>
         </p:spPr>
         <p:style>
-          <a:lnRef idx="1">
-            <a:schemeClr val="accent1"/>
+          <a:lnRef idx="2">
+            <a:schemeClr val="accent1">
+              <a:shade val="15000"/>
+            </a:schemeClr>
           </a:lnRef>
-          <a:fillRef idx="3">
+          <a:fillRef idx="1">
             <a:schemeClr val="accent1"/>
           </a:fillRef>
           <a:effectRef idx="0">
@@ -5526,89 +4992,1055 @@
           </a:fontRef>
         </p:style>
         <p:txBody>
-          <a:bodyPr rtlCol="0" anchor="ctr" wrap="square" lIns="72000" tIns="18000" rIns="72000" bIns="18000"/>
+          <a:bodyPr rtlCol="0" anchor="ctr"/>
           <a:lstStyle/>
           <a:p>
             <a:pPr algn="ctr"/>
-          </a:p>
-        </p:txBody>
-      </p:sp>
-      <p:sp>
-        <p:nvSpPr>
-          <p:cNvPr id="34" name="TextBox 33"/>
-          <p:cNvSpPr txBox="1"/>
-          <p:nvPr/>
-        </p:nvSpPr>
-        <p:spPr>
-          <a:xfrm>
-            <a:off x="3996000" y="5292000"/>
-            <a:ext cx="2736000" cy="576000"/>
+            <a:endParaRPr lang="ja-JP" altLang="en-US">
+              <a:latin typeface="メイリオ"/>
+              <a:ea typeface="メイリオ"/>
+              <a:cs typeface="メイリオ"/>
+            </a:endParaRPr>
+          </a:p>
+        </p:txBody>
+      </p:sp>
+      <p:sp>
+        <p:nvSpPr>
+          <p:cNvPr id="38" name="正方形/長方形 37">
+            <a:extLst>
+              <a:ext uri="{FF2B5EF4-FFF2-40B4-BE49-F238E27FC236}">
+                <a16:creationId xmlns:a16="http://schemas.microsoft.com/office/drawing/2014/main" id="{28671F13-F479-AFF6-9832-C7C00D2D05EE}"/>
+              </a:ext>
+            </a:extLst>
+          </p:cNvPr>
+          <p:cNvSpPr/>
+          <p:nvPr/>
+        </p:nvSpPr>
+        <p:spPr>
+          <a:xfrm>
+            <a:off x="1510609" y="4624810"/>
+            <a:ext cx="1405728" cy="244151"/>
           </a:xfrm>
           <a:prstGeom prst="rect">
             <a:avLst/>
           </a:prstGeom>
+          <a:solidFill>
+            <a:schemeClr val="bg1">
+              <a:lumMod val="75000"/>
+            </a:schemeClr>
+          </a:solidFill>
+          <a:ln>
+            <a:noFill/>
+          </a:ln>
+        </p:spPr>
+        <p:style>
+          <a:lnRef idx="2">
+            <a:schemeClr val="accent1">
+              <a:shade val="15000"/>
+            </a:schemeClr>
+          </a:lnRef>
+          <a:fillRef idx="1">
+            <a:schemeClr val="accent1"/>
+          </a:fillRef>
+          <a:effectRef idx="0">
+            <a:schemeClr val="accent1"/>
+          </a:effectRef>
+          <a:fontRef idx="minor">
+            <a:schemeClr val="lt1"/>
+          </a:fontRef>
+        </p:style>
+        <p:txBody>
+          <a:bodyPr rtlCol="0" anchor="ctr"/>
+          <a:lstStyle/>
+          <a:p>
+            <a:pPr algn="ctr"/>
+            <a:r>
+              <a:rPr lang="ja-JP" altLang="en-US" sz="1100" b="1" dirty="0">
+                <a:solidFill>
+                  <a:schemeClr val="tx1"/>
+                </a:solidFill>
+                <a:latin typeface="メイリオ" panose="020B0604030504040204" pitchFamily="50" charset="-128"/>
+                <a:ea typeface="メイリオ" panose="020B0604030504040204" pitchFamily="50" charset="-128"/>
+                <a:cs typeface="メイリオ"/>
+              </a:rPr>
+              <a:t>フォーム入力</a:t>
+            </a:r>
+          </a:p>
+        </p:txBody>
+      </p:sp>
+      <p:pic>
+        <p:nvPicPr>
+          <p:cNvPr id="55" name="図 54">
+            <a:extLst>
+              <a:ext uri="{FF2B5EF4-FFF2-40B4-BE49-F238E27FC236}">
+                <a16:creationId xmlns:a16="http://schemas.microsoft.com/office/drawing/2014/main" id="{8AF12F67-4C9A-867F-4608-8FE9DA811630}"/>
+              </a:ext>
+            </a:extLst>
+          </p:cNvPr>
+          <p:cNvPicPr>
+            <a:picLocks noChangeAspect="1"/>
+          </p:cNvPicPr>
+          <p:nvPr/>
+        </p:nvPicPr>
+        <p:blipFill>
+          <a:blip r:embed="rId6"/>
+          <a:stretch>
+            <a:fillRect/>
+          </a:stretch>
+        </p:blipFill>
+        <p:spPr>
+          <a:xfrm>
+            <a:off x="1593344" y="2214387"/>
+            <a:ext cx="1249593" cy="2257852"/>
+          </a:xfrm>
+          <a:prstGeom prst="rect">
+            <a:avLst/>
+          </a:prstGeom>
+        </p:spPr>
+      </p:pic>
+      <p:sp>
+        <p:nvSpPr>
+          <p:cNvPr id="1032" name="正方形/長方形 1031">
+            <a:extLst>
+              <a:ext uri="{FF2B5EF4-FFF2-40B4-BE49-F238E27FC236}">
+                <a16:creationId xmlns:a16="http://schemas.microsoft.com/office/drawing/2014/main" id="{D1D96D42-255C-636E-49E5-2CDA95DD6764}"/>
+              </a:ext>
+            </a:extLst>
+          </p:cNvPr>
+          <p:cNvSpPr/>
+          <p:nvPr/>
+        </p:nvSpPr>
+        <p:spPr>
+          <a:xfrm>
+            <a:off x="3245020" y="2000983"/>
+            <a:ext cx="1508532" cy="2841034"/>
+          </a:xfrm>
+          <a:prstGeom prst="rect">
+            <a:avLst/>
+          </a:prstGeom>
+          <a:solidFill>
+            <a:schemeClr val="bg1"/>
+          </a:solidFill>
+          <a:ln>
+            <a:solidFill>
+              <a:schemeClr val="tx2">
+                <a:lumMod val="20000"/>
+                <a:lumOff val="80000"/>
+              </a:schemeClr>
+            </a:solidFill>
+          </a:ln>
+        </p:spPr>
+        <p:style>
+          <a:lnRef idx="2">
+            <a:schemeClr val="accent1">
+              <a:shade val="15000"/>
+            </a:schemeClr>
+          </a:lnRef>
+          <a:fillRef idx="1">
+            <a:schemeClr val="accent1"/>
+          </a:fillRef>
+          <a:effectRef idx="0">
+            <a:schemeClr val="accent1"/>
+          </a:effectRef>
+          <a:fontRef idx="minor">
+            <a:schemeClr val="lt1"/>
+          </a:fontRef>
+        </p:style>
+        <p:txBody>
+          <a:bodyPr rtlCol="0" anchor="ctr"/>
+          <a:lstStyle/>
+          <a:p>
+            <a:pPr algn="ctr"/>
+            <a:endParaRPr lang="ja-JP" altLang="en-US">
+              <a:latin typeface="メイリオ"/>
+              <a:ea typeface="メイリオ"/>
+              <a:cs typeface="メイリオ"/>
+            </a:endParaRPr>
+          </a:p>
+        </p:txBody>
+      </p:sp>
+      <p:sp>
+        <p:nvSpPr>
+          <p:cNvPr id="1034" name="正方形/長方形 1033">
+            <a:extLst>
+              <a:ext uri="{FF2B5EF4-FFF2-40B4-BE49-F238E27FC236}">
+                <a16:creationId xmlns:a16="http://schemas.microsoft.com/office/drawing/2014/main" id="{8693E451-BCB1-207B-6B73-131F2A8588BF}"/>
+              </a:ext>
+            </a:extLst>
+          </p:cNvPr>
+          <p:cNvSpPr/>
+          <p:nvPr/>
+        </p:nvSpPr>
+        <p:spPr>
+          <a:xfrm>
+            <a:off x="3242276" y="4603503"/>
+            <a:ext cx="1508533" cy="244151"/>
+          </a:xfrm>
+          <a:prstGeom prst="rect">
+            <a:avLst/>
+          </a:prstGeom>
+          <a:solidFill>
+            <a:schemeClr val="tx1">
+              <a:lumMod val="65000"/>
+              <a:lumOff val="35000"/>
+            </a:schemeClr>
+          </a:solidFill>
+          <a:ln>
+            <a:noFill/>
+          </a:ln>
+        </p:spPr>
+        <p:style>
+          <a:lnRef idx="2">
+            <a:schemeClr val="accent1">
+              <a:shade val="15000"/>
+            </a:schemeClr>
+          </a:lnRef>
+          <a:fillRef idx="1">
+            <a:schemeClr val="accent1"/>
+          </a:fillRef>
+          <a:effectRef idx="0">
+            <a:schemeClr val="accent1"/>
+          </a:effectRef>
+          <a:fontRef idx="minor">
+            <a:schemeClr val="lt1"/>
+          </a:fontRef>
+        </p:style>
+        <p:txBody>
+          <a:bodyPr rtlCol="0" anchor="ctr"/>
+          <a:lstStyle/>
+          <a:p>
+            <a:pPr algn="ctr"/>
+            <a:r>
+              <a:rPr lang="ja-JP" altLang="en-US" sz="1100" b="1" dirty="0">
+                <a:latin typeface="メイリオ" panose="020B0604030504040204" pitchFamily="50" charset="-128"/>
+                <a:ea typeface="メイリオ" panose="020B0604030504040204" pitchFamily="50" charset="-128"/>
+                <a:cs typeface="メイリオ"/>
+              </a:rPr>
+              <a:t>サンクス画面へ</a:t>
+            </a:r>
+            <a:endParaRPr lang="en-US" altLang="ja-JP" sz="1100" b="1" dirty="0">
+              <a:latin typeface="メイリオ" panose="020B0604030504040204" pitchFamily="50" charset="-128"/>
+              <a:ea typeface="メイリオ" panose="020B0604030504040204" pitchFamily="50" charset="-128"/>
+              <a:cs typeface="メイリオ"/>
+            </a:endParaRPr>
+          </a:p>
+        </p:txBody>
+      </p:sp>
+      <p:pic>
+        <p:nvPicPr>
+          <p:cNvPr id="1038" name="図 1037" descr="テキスト, 手紙&#10;&#10;AI 生成コンテンツは誤りを含む可能性があります。">
+            <a:extLst>
+              <a:ext uri="{FF2B5EF4-FFF2-40B4-BE49-F238E27FC236}">
+                <a16:creationId xmlns:a16="http://schemas.microsoft.com/office/drawing/2014/main" id="{85260668-6C66-A032-FFE0-0276021F9433}"/>
+              </a:ext>
+            </a:extLst>
+          </p:cNvPr>
+          <p:cNvPicPr>
+            <a:picLocks noChangeAspect="1"/>
+          </p:cNvPicPr>
+          <p:nvPr/>
+        </p:nvPicPr>
+        <p:blipFill>
+          <a:blip r:embed="rId7" cstate="print">
+            <a:extLst>
+              <a:ext uri="{28A0092B-C50C-407E-A947-70E740481C1C}">
+                <a14:useLocalDpi xmlns:a14="http://schemas.microsoft.com/office/drawing/2010/main" val="0"/>
+              </a:ext>
+            </a:extLst>
+          </a:blip>
+          <a:srcRect t="4580"/>
+          <a:stretch>
+            <a:fillRect/>
+          </a:stretch>
+        </p:blipFill>
+        <p:spPr>
+          <a:xfrm>
+            <a:off x="3359597" y="2260627"/>
+            <a:ext cx="1312445" cy="2202364"/>
+          </a:xfrm>
+          <a:prstGeom prst="rect">
+            <a:avLst/>
+          </a:prstGeom>
+        </p:spPr>
+      </p:pic>
+      <p:pic>
+        <p:nvPicPr>
+          <p:cNvPr id="1039" name="Picture 2" descr="買い物完了！イラスト｜無料イラスト・フリー素材なら「イラストAC」">
+            <a:extLst>
+              <a:ext uri="{FF2B5EF4-FFF2-40B4-BE49-F238E27FC236}">
+                <a16:creationId xmlns:a16="http://schemas.microsoft.com/office/drawing/2014/main" id="{23D05307-D6FE-6284-27D3-3433EE0122E2}"/>
+              </a:ext>
+            </a:extLst>
+          </p:cNvPr>
+          <p:cNvPicPr>
+            <a:picLocks noChangeAspect="1" noChangeArrowheads="1"/>
+          </p:cNvPicPr>
+          <p:nvPr/>
+        </p:nvPicPr>
+        <p:blipFill rotWithShape="1">
+          <a:blip r:embed="rId8" cstate="print">
+            <a:extLst>
+              <a:ext uri="{28A0092B-C50C-407E-A947-70E740481C1C}">
+                <a14:useLocalDpi xmlns:a14="http://schemas.microsoft.com/office/drawing/2010/main" val="0"/>
+              </a:ext>
+            </a:extLst>
+          </a:blip>
+          <a:srcRect l="20270" r="23682"/>
+          <a:stretch>
+            <a:fillRect/>
+          </a:stretch>
+        </p:blipFill>
+        <p:spPr bwMode="auto">
+          <a:xfrm>
+            <a:off x="4710177" y="1804300"/>
+            <a:ext cx="307967" cy="412413"/>
+          </a:xfrm>
+          <a:prstGeom prst="rect">
+            <a:avLst/>
+          </a:prstGeom>
           <a:noFill/>
-        </p:spPr>
-        <p:txBody>
-          <a:bodyPr wrap="square" anchor="ctr" lIns="36000" rIns="36000" tIns="10800" bIns="10800">
+          <a:extLst>
+            <a:ext uri="{909E8E84-426E-40DD-AFC4-6F175D3DCCD1}">
+              <a14:hiddenFill xmlns:a14="http://schemas.microsoft.com/office/drawing/2010/main">
+                <a:solidFill>
+                  <a:srgbClr val="FFFFFF"/>
+                </a:solidFill>
+              </a14:hiddenFill>
+            </a:ext>
+          </a:extLst>
+        </p:spPr>
+      </p:pic>
+      <p:grpSp>
+        <p:nvGrpSpPr>
+          <p:cNvPr id="3" name="グループ化 2">
+            <a:extLst>
+              <a:ext uri="{FF2B5EF4-FFF2-40B4-BE49-F238E27FC236}">
+                <a16:creationId xmlns:a16="http://schemas.microsoft.com/office/drawing/2014/main" id="{E76D8F54-2926-2D56-7238-F66ACCBC4F20}"/>
+              </a:ext>
+            </a:extLst>
+          </p:cNvPr>
+          <p:cNvGrpSpPr/>
+          <p:nvPr/>
+        </p:nvGrpSpPr>
+        <p:grpSpPr>
+          <a:xfrm>
+            <a:off x="1686399" y="777681"/>
+            <a:ext cx="3105325" cy="485102"/>
+            <a:chOff x="507969" y="928495"/>
+            <a:chExt cx="3105325" cy="485102"/>
+          </a:xfrm>
+        </p:grpSpPr>
+        <p:sp>
+          <p:nvSpPr>
+            <p:cNvPr id="4" name="Google Shape;51;p19">
+              <a:extLst>
+                <a:ext uri="{FF2B5EF4-FFF2-40B4-BE49-F238E27FC236}">
+                  <a16:creationId xmlns:a16="http://schemas.microsoft.com/office/drawing/2014/main" id="{98F6BB16-EFC6-9846-2A11-E624E876E64B}"/>
+                </a:ext>
+              </a:extLst>
+            </p:cNvPr>
+            <p:cNvSpPr/>
+            <p:nvPr/>
+          </p:nvSpPr>
+          <p:spPr>
+            <a:xfrm>
+              <a:off x="507969" y="928495"/>
+              <a:ext cx="3105325" cy="485102"/>
+            </a:xfrm>
+            <a:prstGeom prst="roundRect">
+              <a:avLst>
+                <a:gd name="adj" fmla="val 16667"/>
+              </a:avLst>
+            </a:prstGeom>
+            <a:solidFill>
+              <a:schemeClr val="dk1"/>
+            </a:solidFill>
+            <a:ln>
+              <a:noFill/>
+            </a:ln>
+          </p:spPr>
+          <p:txBody>
+            <a:bodyPr spcFirstLastPara="1" wrap="square" lIns="91425" tIns="45700" rIns="91425" bIns="45700" anchor="ctr" anchorCtr="0">
+              <a:noAutofit/>
+            </a:bodyPr>
+            <a:lstStyle>
+              <a:defPPr marR="0" lvl="0" algn="l" rtl="0">
+                <a:lnSpc>
+                  <a:spcPct val="100000"/>
+                </a:lnSpc>
+                <a:spcBef>
+                  <a:spcPts val="0"/>
+                </a:spcBef>
+                <a:spcAft>
+                  <a:spcPts val="0"/>
+                </a:spcAft>
+              </a:defPPr>
+              <a:lvl1pPr marR="0" lvl="0" algn="l" rtl="0">
+                <a:lnSpc>
+                  <a:spcPct val="100000"/>
+                </a:lnSpc>
+                <a:spcBef>
+                  <a:spcPts val="0"/>
+                </a:spcBef>
+                <a:spcAft>
+                  <a:spcPts val="0"/>
+                </a:spcAft>
+                <a:buClr>
+                  <a:srgbClr val="000000"/>
+                </a:buClr>
+                <a:buFont typeface="Arial"/>
+                <a:defRPr sz="1400" b="0" i="0" u="none" strike="noStrike" cap="none">
+                  <a:solidFill>
+                    <a:srgbClr val="000000"/>
+                  </a:solidFill>
+                  <a:latin typeface="メイリオ"/>
+                  <a:ea typeface="メイリオ"/>
+                  <a:cs typeface="メイリオ"/>
+                  <a:sym typeface="Arial"/>
+                </a:defRPr>
+              </a:lvl1pPr>
+              <a:lvl2pPr marR="0" lvl="1" algn="l" rtl="0">
+                <a:lnSpc>
+                  <a:spcPct val="100000"/>
+                </a:lnSpc>
+                <a:spcBef>
+                  <a:spcPts val="0"/>
+                </a:spcBef>
+                <a:spcAft>
+                  <a:spcPts val="0"/>
+                </a:spcAft>
+                <a:buClr>
+                  <a:srgbClr val="000000"/>
+                </a:buClr>
+                <a:buFont typeface="Arial"/>
+                <a:defRPr sz="1400" b="0" i="0" u="none" strike="noStrike" cap="none">
+                  <a:solidFill>
+                    <a:srgbClr val="000000"/>
+                  </a:solidFill>
+                  <a:latin typeface="メイリオ"/>
+                  <a:ea typeface="メイリオ"/>
+                  <a:cs typeface="メイリオ"/>
+                  <a:sym typeface="Arial"/>
+                </a:defRPr>
+              </a:lvl2pPr>
+              <a:lvl3pPr marR="0" lvl="2" algn="l" rtl="0">
+                <a:lnSpc>
+                  <a:spcPct val="100000"/>
+                </a:lnSpc>
+                <a:spcBef>
+                  <a:spcPts val="0"/>
+                </a:spcBef>
+                <a:spcAft>
+                  <a:spcPts val="0"/>
+                </a:spcAft>
+                <a:buClr>
+                  <a:srgbClr val="000000"/>
+                </a:buClr>
+                <a:buFont typeface="Arial"/>
+                <a:defRPr sz="1400" b="0" i="0" u="none" strike="noStrike" cap="none">
+                  <a:solidFill>
+                    <a:srgbClr val="000000"/>
+                  </a:solidFill>
+                  <a:latin typeface="メイリオ"/>
+                  <a:ea typeface="メイリオ"/>
+                  <a:cs typeface="メイリオ"/>
+                  <a:sym typeface="Arial"/>
+                </a:defRPr>
+              </a:lvl3pPr>
+              <a:lvl4pPr marR="0" lvl="3" algn="l" rtl="0">
+                <a:lnSpc>
+                  <a:spcPct val="100000"/>
+                </a:lnSpc>
+                <a:spcBef>
+                  <a:spcPts val="0"/>
+                </a:spcBef>
+                <a:spcAft>
+                  <a:spcPts val="0"/>
+                </a:spcAft>
+                <a:buClr>
+                  <a:srgbClr val="000000"/>
+                </a:buClr>
+                <a:buFont typeface="Arial"/>
+                <a:defRPr sz="1400" b="0" i="0" u="none" strike="noStrike" cap="none">
+                  <a:solidFill>
+                    <a:srgbClr val="000000"/>
+                  </a:solidFill>
+                  <a:latin typeface="メイリオ"/>
+                  <a:ea typeface="メイリオ"/>
+                  <a:cs typeface="メイリオ"/>
+                  <a:sym typeface="Arial"/>
+                </a:defRPr>
+              </a:lvl4pPr>
+              <a:lvl5pPr marR="0" lvl="4" algn="l" rtl="0">
+                <a:lnSpc>
+                  <a:spcPct val="100000"/>
+                </a:lnSpc>
+                <a:spcBef>
+                  <a:spcPts val="0"/>
+                </a:spcBef>
+                <a:spcAft>
+                  <a:spcPts val="0"/>
+                </a:spcAft>
+                <a:buClr>
+                  <a:srgbClr val="000000"/>
+                </a:buClr>
+                <a:buFont typeface="Arial"/>
+                <a:defRPr sz="1400" b="0" i="0" u="none" strike="noStrike" cap="none">
+                  <a:solidFill>
+                    <a:srgbClr val="000000"/>
+                  </a:solidFill>
+                  <a:latin typeface="メイリオ"/>
+                  <a:ea typeface="メイリオ"/>
+                  <a:cs typeface="メイリオ"/>
+                  <a:sym typeface="Arial"/>
+                </a:defRPr>
+              </a:lvl5pPr>
+              <a:lvl6pPr marR="0" lvl="5" algn="l" rtl="0">
+                <a:lnSpc>
+                  <a:spcPct val="100000"/>
+                </a:lnSpc>
+                <a:spcBef>
+                  <a:spcPts val="0"/>
+                </a:spcBef>
+                <a:spcAft>
+                  <a:spcPts val="0"/>
+                </a:spcAft>
+                <a:buClr>
+                  <a:srgbClr val="000000"/>
+                </a:buClr>
+                <a:buFont typeface="Arial"/>
+                <a:defRPr sz="1400" b="0" i="0" u="none" strike="noStrike" cap="none">
+                  <a:solidFill>
+                    <a:srgbClr val="000000"/>
+                  </a:solidFill>
+                  <a:latin typeface="メイリオ"/>
+                  <a:ea typeface="メイリオ"/>
+                  <a:cs typeface="メイリオ"/>
+                  <a:sym typeface="Arial"/>
+                </a:defRPr>
+              </a:lvl6pPr>
+              <a:lvl7pPr marR="0" lvl="6" algn="l" rtl="0">
+                <a:lnSpc>
+                  <a:spcPct val="100000"/>
+                </a:lnSpc>
+                <a:spcBef>
+                  <a:spcPts val="0"/>
+                </a:spcBef>
+                <a:spcAft>
+                  <a:spcPts val="0"/>
+                </a:spcAft>
+                <a:buClr>
+                  <a:srgbClr val="000000"/>
+                </a:buClr>
+                <a:buFont typeface="Arial"/>
+                <a:defRPr sz="1400" b="0" i="0" u="none" strike="noStrike" cap="none">
+                  <a:solidFill>
+                    <a:srgbClr val="000000"/>
+                  </a:solidFill>
+                  <a:latin typeface="メイリオ"/>
+                  <a:ea typeface="メイリオ"/>
+                  <a:cs typeface="メイリオ"/>
+                  <a:sym typeface="Arial"/>
+                </a:defRPr>
+              </a:lvl7pPr>
+              <a:lvl8pPr marR="0" lvl="7" algn="l" rtl="0">
+                <a:lnSpc>
+                  <a:spcPct val="100000"/>
+                </a:lnSpc>
+                <a:spcBef>
+                  <a:spcPts val="0"/>
+                </a:spcBef>
+                <a:spcAft>
+                  <a:spcPts val="0"/>
+                </a:spcAft>
+                <a:buClr>
+                  <a:srgbClr val="000000"/>
+                </a:buClr>
+                <a:buFont typeface="Arial"/>
+                <a:defRPr sz="1400" b="0" i="0" u="none" strike="noStrike" cap="none">
+                  <a:solidFill>
+                    <a:srgbClr val="000000"/>
+                  </a:solidFill>
+                  <a:latin typeface="メイリオ"/>
+                  <a:ea typeface="メイリオ"/>
+                  <a:cs typeface="メイリオ"/>
+                  <a:sym typeface="Arial"/>
+                </a:defRPr>
+              </a:lvl8pPr>
+              <a:lvl9pPr marR="0" lvl="8" algn="l" rtl="0">
+                <a:lnSpc>
+                  <a:spcPct val="100000"/>
+                </a:lnSpc>
+                <a:spcBef>
+                  <a:spcPts val="0"/>
+                </a:spcBef>
+                <a:spcAft>
+                  <a:spcPts val="0"/>
+                </a:spcAft>
+                <a:buClr>
+                  <a:srgbClr val="000000"/>
+                </a:buClr>
+                <a:buFont typeface="Arial"/>
+                <a:defRPr sz="1400" b="0" i="0" u="none" strike="noStrike" cap="none">
+                  <a:solidFill>
+                    <a:srgbClr val="000000"/>
+                  </a:solidFill>
+                  <a:latin typeface="メイリオ"/>
+                  <a:ea typeface="メイリオ"/>
+                  <a:cs typeface="メイリオ"/>
+                  <a:sym typeface="Arial"/>
+                </a:defRPr>
+              </a:lvl9pPr>
+            </a:lstStyle>
+            <a:p>
+              <a:pPr algn="ctr">
+                <a:buSzPts val="1400"/>
+              </a:pPr>
+              <a:endParaRPr b="1" dirty="0">
+                <a:solidFill>
+                  <a:schemeClr val="lt1"/>
+                </a:solidFill>
+                <a:sym typeface="Meiryo"/>
+              </a:endParaRPr>
+            </a:p>
+          </p:txBody>
+        </p:sp>
+        <p:sp>
+          <p:nvSpPr>
+            <p:cNvPr id="5" name="テキスト ボックス 4">
+              <a:extLst>
+                <a:ext uri="{FF2B5EF4-FFF2-40B4-BE49-F238E27FC236}">
+                  <a16:creationId xmlns:a16="http://schemas.microsoft.com/office/drawing/2014/main" id="{560EDF30-5F09-B70A-2993-8CD4F9E40EFA}"/>
+                </a:ext>
+              </a:extLst>
+            </p:cNvPr>
+            <p:cNvSpPr txBox="1"/>
+            <p:nvPr/>
+          </p:nvSpPr>
+          <p:spPr>
+            <a:xfrm>
+              <a:off x="1140096" y="988192"/>
+              <a:ext cx="1832553" cy="357790"/>
+            </a:xfrm>
+            <a:prstGeom prst="rect">
+              <a:avLst/>
+            </a:prstGeom>
+            <a:noFill/>
+          </p:spPr>
+          <p:txBody>
+            <a:bodyPr wrap="none" rtlCol="0">
+              <a:spAutoFit/>
+            </a:bodyPr>
+            <a:lstStyle>
+              <a:defPPr marR="0" lvl="0" algn="l" rtl="0">
+                <a:lnSpc>
+                  <a:spcPct val="100000"/>
+                </a:lnSpc>
+                <a:spcBef>
+                  <a:spcPts val="0"/>
+                </a:spcBef>
+                <a:spcAft>
+                  <a:spcPts val="0"/>
+                </a:spcAft>
+              </a:defPPr>
+              <a:lvl1pPr marR="0" lvl="0" algn="l" rtl="0">
+                <a:lnSpc>
+                  <a:spcPct val="100000"/>
+                </a:lnSpc>
+                <a:spcBef>
+                  <a:spcPts val="0"/>
+                </a:spcBef>
+                <a:spcAft>
+                  <a:spcPts val="0"/>
+                </a:spcAft>
+                <a:buClr>
+                  <a:srgbClr val="000000"/>
+                </a:buClr>
+                <a:buFont typeface="Arial"/>
+                <a:defRPr sz="1400" b="0" i="0" u="none" strike="noStrike" cap="none">
+                  <a:solidFill>
+                    <a:srgbClr val="000000"/>
+                  </a:solidFill>
+                  <a:latin typeface="メイリオ"/>
+                  <a:ea typeface="メイリオ"/>
+                  <a:cs typeface="メイリオ"/>
+                  <a:sym typeface="Arial"/>
+                </a:defRPr>
+              </a:lvl1pPr>
+              <a:lvl2pPr marR="0" lvl="1" algn="l" rtl="0">
+                <a:lnSpc>
+                  <a:spcPct val="100000"/>
+                </a:lnSpc>
+                <a:spcBef>
+                  <a:spcPts val="0"/>
+                </a:spcBef>
+                <a:spcAft>
+                  <a:spcPts val="0"/>
+                </a:spcAft>
+                <a:buClr>
+                  <a:srgbClr val="000000"/>
+                </a:buClr>
+                <a:buFont typeface="Arial"/>
+                <a:defRPr sz="1400" b="0" i="0" u="none" strike="noStrike" cap="none">
+                  <a:solidFill>
+                    <a:srgbClr val="000000"/>
+                  </a:solidFill>
+                  <a:latin typeface="メイリオ"/>
+                  <a:ea typeface="メイリオ"/>
+                  <a:cs typeface="メイリオ"/>
+                  <a:sym typeface="Arial"/>
+                </a:defRPr>
+              </a:lvl2pPr>
+              <a:lvl3pPr marR="0" lvl="2" algn="l" rtl="0">
+                <a:lnSpc>
+                  <a:spcPct val="100000"/>
+                </a:lnSpc>
+                <a:spcBef>
+                  <a:spcPts val="0"/>
+                </a:spcBef>
+                <a:spcAft>
+                  <a:spcPts val="0"/>
+                </a:spcAft>
+                <a:buClr>
+                  <a:srgbClr val="000000"/>
+                </a:buClr>
+                <a:buFont typeface="Arial"/>
+                <a:defRPr sz="1400" b="0" i="0" u="none" strike="noStrike" cap="none">
+                  <a:solidFill>
+                    <a:srgbClr val="000000"/>
+                  </a:solidFill>
+                  <a:latin typeface="メイリオ"/>
+                  <a:ea typeface="メイリオ"/>
+                  <a:cs typeface="メイリオ"/>
+                  <a:sym typeface="Arial"/>
+                </a:defRPr>
+              </a:lvl3pPr>
+              <a:lvl4pPr marR="0" lvl="3" algn="l" rtl="0">
+                <a:lnSpc>
+                  <a:spcPct val="100000"/>
+                </a:lnSpc>
+                <a:spcBef>
+                  <a:spcPts val="0"/>
+                </a:spcBef>
+                <a:spcAft>
+                  <a:spcPts val="0"/>
+                </a:spcAft>
+                <a:buClr>
+                  <a:srgbClr val="000000"/>
+                </a:buClr>
+                <a:buFont typeface="Arial"/>
+                <a:defRPr sz="1400" b="0" i="0" u="none" strike="noStrike" cap="none">
+                  <a:solidFill>
+                    <a:srgbClr val="000000"/>
+                  </a:solidFill>
+                  <a:latin typeface="メイリオ"/>
+                  <a:ea typeface="メイリオ"/>
+                  <a:cs typeface="メイリオ"/>
+                  <a:sym typeface="Arial"/>
+                </a:defRPr>
+              </a:lvl4pPr>
+              <a:lvl5pPr marR="0" lvl="4" algn="l" rtl="0">
+                <a:lnSpc>
+                  <a:spcPct val="100000"/>
+                </a:lnSpc>
+                <a:spcBef>
+                  <a:spcPts val="0"/>
+                </a:spcBef>
+                <a:spcAft>
+                  <a:spcPts val="0"/>
+                </a:spcAft>
+                <a:buClr>
+                  <a:srgbClr val="000000"/>
+                </a:buClr>
+                <a:buFont typeface="Arial"/>
+                <a:defRPr sz="1400" b="0" i="0" u="none" strike="noStrike" cap="none">
+                  <a:solidFill>
+                    <a:srgbClr val="000000"/>
+                  </a:solidFill>
+                  <a:latin typeface="メイリオ"/>
+                  <a:ea typeface="メイリオ"/>
+                  <a:cs typeface="メイリオ"/>
+                  <a:sym typeface="Arial"/>
+                </a:defRPr>
+              </a:lvl5pPr>
+              <a:lvl6pPr marR="0" lvl="5" algn="l" rtl="0">
+                <a:lnSpc>
+                  <a:spcPct val="100000"/>
+                </a:lnSpc>
+                <a:spcBef>
+                  <a:spcPts val="0"/>
+                </a:spcBef>
+                <a:spcAft>
+                  <a:spcPts val="0"/>
+                </a:spcAft>
+                <a:buClr>
+                  <a:srgbClr val="000000"/>
+                </a:buClr>
+                <a:buFont typeface="Arial"/>
+                <a:defRPr sz="1400" b="0" i="0" u="none" strike="noStrike" cap="none">
+                  <a:solidFill>
+                    <a:srgbClr val="000000"/>
+                  </a:solidFill>
+                  <a:latin typeface="メイリオ"/>
+                  <a:ea typeface="メイリオ"/>
+                  <a:cs typeface="メイリオ"/>
+                  <a:sym typeface="Arial"/>
+                </a:defRPr>
+              </a:lvl6pPr>
+              <a:lvl7pPr marR="0" lvl="6" algn="l" rtl="0">
+                <a:lnSpc>
+                  <a:spcPct val="100000"/>
+                </a:lnSpc>
+                <a:spcBef>
+                  <a:spcPts val="0"/>
+                </a:spcBef>
+                <a:spcAft>
+                  <a:spcPts val="0"/>
+                </a:spcAft>
+                <a:buClr>
+                  <a:srgbClr val="000000"/>
+                </a:buClr>
+                <a:buFont typeface="Arial"/>
+                <a:defRPr sz="1400" b="0" i="0" u="none" strike="noStrike" cap="none">
+                  <a:solidFill>
+                    <a:srgbClr val="000000"/>
+                  </a:solidFill>
+                  <a:latin typeface="メイリオ"/>
+                  <a:ea typeface="メイリオ"/>
+                  <a:cs typeface="メイリオ"/>
+                  <a:sym typeface="Arial"/>
+                </a:defRPr>
+              </a:lvl7pPr>
+              <a:lvl8pPr marR="0" lvl="7" algn="l" rtl="0">
+                <a:lnSpc>
+                  <a:spcPct val="100000"/>
+                </a:lnSpc>
+                <a:spcBef>
+                  <a:spcPts val="0"/>
+                </a:spcBef>
+                <a:spcAft>
+                  <a:spcPts val="0"/>
+                </a:spcAft>
+                <a:buClr>
+                  <a:srgbClr val="000000"/>
+                </a:buClr>
+                <a:buFont typeface="Arial"/>
+                <a:defRPr sz="1400" b="0" i="0" u="none" strike="noStrike" cap="none">
+                  <a:solidFill>
+                    <a:srgbClr val="000000"/>
+                  </a:solidFill>
+                  <a:latin typeface="メイリオ"/>
+                  <a:ea typeface="メイリオ"/>
+                  <a:cs typeface="メイリオ"/>
+                  <a:sym typeface="Arial"/>
+                </a:defRPr>
+              </a:lvl8pPr>
+              <a:lvl9pPr marR="0" lvl="8" algn="l" rtl="0">
+                <a:lnSpc>
+                  <a:spcPct val="100000"/>
+                </a:lnSpc>
+                <a:spcBef>
+                  <a:spcPts val="0"/>
+                </a:spcBef>
+                <a:spcAft>
+                  <a:spcPts val="0"/>
+                </a:spcAft>
+                <a:buClr>
+                  <a:srgbClr val="000000"/>
+                </a:buClr>
+                <a:buFont typeface="Arial"/>
+                <a:defRPr sz="1400" b="0" i="0" u="none" strike="noStrike" cap="none">
+                  <a:solidFill>
+                    <a:srgbClr val="000000"/>
+                  </a:solidFill>
+                  <a:latin typeface="メイリオ"/>
+                  <a:ea typeface="メイリオ"/>
+                  <a:cs typeface="メイリオ"/>
+                  <a:sym typeface="Arial"/>
+                </a:defRPr>
+              </a:lvl9pPr>
+            </a:lstStyle>
+            <a:p>
+              <a:pPr>
+                <a:lnSpc>
+                  <a:spcPct val="120000"/>
+                </a:lnSpc>
+              </a:pPr>
+              <a:r>
+                <a:rPr lang="ja-JP" altLang="en-US" sz="1500" b="1" dirty="0">
+                  <a:solidFill>
+                    <a:schemeClr val="bg1"/>
+                  </a:solidFill>
+                  <a:latin typeface="メイリオ" panose="020B0604030504040204" pitchFamily="34" charset="-128"/>
+                  <a:ea typeface="メイリオ" panose="020B0604030504040204" pitchFamily="34" charset="-128"/>
+                </a:rPr>
+                <a:t>サンクス</a:t>
+              </a:r>
+              <a:r>
+                <a:rPr lang="en-US" altLang="ja-JP" sz="1500" b="1" dirty="0">
+                  <a:solidFill>
+                    <a:schemeClr val="bg1"/>
+                  </a:solidFill>
+                  <a:latin typeface="メイリオ" panose="020B0604030504040204" pitchFamily="34" charset="-128"/>
+                  <a:ea typeface="メイリオ" panose="020B0604030504040204" pitchFamily="34" charset="-128"/>
+                </a:rPr>
+                <a:t>LINE</a:t>
+              </a:r>
+              <a:r>
+                <a:rPr lang="ja-JP" altLang="en-US" sz="1500" b="1" dirty="0">
+                  <a:solidFill>
+                    <a:schemeClr val="bg1"/>
+                  </a:solidFill>
+                  <a:latin typeface="メイリオ" panose="020B0604030504040204" pitchFamily="34" charset="-128"/>
+                  <a:ea typeface="メイリオ" panose="020B0604030504040204" pitchFamily="34" charset="-128"/>
+                </a:rPr>
+                <a:t>誘導</a:t>
+              </a:r>
+            </a:p>
+          </p:txBody>
+        </p:sp>
+      </p:grpSp>
+      <p:sp>
+        <p:nvSpPr>
+          <p:cNvPr id="6" name="正方形/長方形 5">
+            <a:extLst>
+              <a:ext uri="{FF2B5EF4-FFF2-40B4-BE49-F238E27FC236}">
+                <a16:creationId xmlns:a16="http://schemas.microsoft.com/office/drawing/2014/main" id="{8B20BFF3-9D3E-A4D7-FF5A-70927F78FC9D}"/>
+              </a:ext>
+            </a:extLst>
+          </p:cNvPr>
+          <p:cNvSpPr/>
+          <p:nvPr/>
+        </p:nvSpPr>
+        <p:spPr>
+          <a:xfrm>
+            <a:off x="9512823" y="4498577"/>
+            <a:ext cx="899499" cy="799596"/>
+          </a:xfrm>
+          <a:prstGeom prst="rect">
+            <a:avLst/>
+          </a:prstGeom>
+          <a:noFill/>
+          <a:ln>
+            <a:solidFill>
+              <a:srgbClr val="FF0000"/>
+            </a:solidFill>
+          </a:ln>
+        </p:spPr>
+        <p:style>
+          <a:lnRef idx="2">
+            <a:schemeClr val="accent1">
+              <a:shade val="15000"/>
+            </a:schemeClr>
+          </a:lnRef>
+          <a:fillRef idx="1">
+            <a:schemeClr val="accent1"/>
+          </a:fillRef>
+          <a:effectRef idx="0">
+            <a:schemeClr val="accent1"/>
+          </a:effectRef>
+          <a:fontRef idx="minor">
+            <a:schemeClr val="lt1"/>
+          </a:fontRef>
+        </p:style>
+        <p:txBody>
+          <a:bodyPr rtlCol="0" anchor="ctr"/>
+          <a:lstStyle/>
+          <a:p>
+            <a:pPr algn="ctr"/>
+            <a:endParaRPr lang="ja-JP" altLang="en-US">
+              <a:latin typeface="メイリオ"/>
+              <a:ea typeface="メイリオ"/>
+              <a:cs typeface="メイリオ"/>
+            </a:endParaRPr>
+          </a:p>
+        </p:txBody>
+      </p:sp>
+      <p:sp>
+        <p:nvSpPr>
+          <p:cNvPr id="9" name="正方形/長方形 8">
+            <a:extLst>
+              <a:ext uri="{FF2B5EF4-FFF2-40B4-BE49-F238E27FC236}">
+                <a16:creationId xmlns:a16="http://schemas.microsoft.com/office/drawing/2014/main" id="{DC4FF56C-47EE-47DB-92F1-3F0EF57613D9}"/>
+              </a:ext>
+            </a:extLst>
+          </p:cNvPr>
+          <p:cNvSpPr/>
+          <p:nvPr/>
+        </p:nvSpPr>
+        <p:spPr>
+          <a:xfrm>
+            <a:off x="5145349" y="846996"/>
+            <a:ext cx="5631798" cy="338554"/>
+          </a:xfrm>
+          <a:prstGeom prst="rect">
+            <a:avLst/>
+          </a:prstGeom>
+        </p:spPr>
+        <p:txBody>
+          <a:bodyPr wrap="square">
             <a:spAutoFit/>
           </a:bodyPr>
           <a:lstStyle/>
           <a:p>
-            <a:pPr algn="ctr">
-              <a:lnSpc>
-                <a:spcPct val="105000"/>
-              </a:lnSpc>
-              <a:spcAft>
-                <a:spcPts val="200"/>
-              </a:spcAft>
+            <a:pPr lvl="0">
+              <a:buClr>
+                <a:schemeClr val="dk1"/>
+              </a:buClr>
+              <a:buSzPts val="1500"/>
             </a:pPr>
             <a:r>
-              <a:rPr sz="1100" b="1">
-                <a:solidFill>
-                  <a:srgbClr val="FFFFFF"/>
-                </a:solidFill>
+              <a:rPr lang="ja-JP" altLang="en-US" sz="1600" dirty="0">
                 <a:latin typeface="メイリオ"/>
                 <a:ea typeface="メイリオ"/>
                 <a:cs typeface="メイリオ"/>
-              </a:rPr>
-              <a:t>月額 </a:t>
-            </a:r>
-            <a:r>
-              <a:rPr sz="1800" b="1">
-                <a:solidFill>
-                  <a:srgbClr val="FFFFFF"/>
-                </a:solidFill>
+                <a:sym typeface="Meiryo"/>
+              </a:rPr>
+              <a:t>フォーム送信後の</a:t>
+            </a:r>
+            <a:r>
+              <a:rPr lang="en-US" altLang="ja-JP" sz="1600" dirty="0">
                 <a:latin typeface="メイリオ"/>
                 <a:ea typeface="メイリオ"/>
                 <a:cs typeface="メイリオ"/>
-              </a:rPr>
-              <a:t>3万円〜</a:t>
-            </a:r>
-            <a:r>
-              <a:rPr sz="1000" b="1">
-                <a:solidFill>
-                  <a:srgbClr val="FFFFFF"/>
-                </a:solidFill>
+                <a:sym typeface="Meiryo"/>
+              </a:rPr>
+              <a:t>LINE</a:t>
+            </a:r>
+            <a:r>
+              <a:rPr lang="ja-JP" altLang="en-US" sz="1600" dirty="0">
                 <a:latin typeface="メイリオ"/>
                 <a:ea typeface="メイリオ"/>
                 <a:cs typeface="メイリオ"/>
-              </a:rPr>
-              <a:t>　+設定地点追加</a:t>
-            </a:r>
-          </a:p>
-        </p:txBody>
-      </p:sp>
-      <p:sp>
-        <p:nvSpPr>
-          <p:cNvPr id="35" name="TextBox 34"/>
+                <a:sym typeface="Meiryo"/>
+              </a:rPr>
+              <a:t>誘導を自動化するツール</a:t>
+            </a:r>
+            <a:endParaRPr lang="en-US" altLang="ja-JP" sz="1600" dirty="0">
+              <a:latin typeface="メイリオ"/>
+              <a:ea typeface="メイリオ"/>
+              <a:cs typeface="メイリオ"/>
+              <a:sym typeface="Meiryo"/>
+            </a:endParaRPr>
+          </a:p>
+        </p:txBody>
+      </p:sp>
+      <p:sp>
+        <p:nvSpPr>
+          <p:cNvPr id="14" name="テキスト ボックス 13">
+            <a:extLst>
+              <a:ext uri="{FF2B5EF4-FFF2-40B4-BE49-F238E27FC236}">
+                <a16:creationId xmlns:a16="http://schemas.microsoft.com/office/drawing/2014/main" id="{5ED6F7D2-546D-BF9F-9805-58455D7E2831}"/>
+              </a:ext>
+            </a:extLst>
+          </p:cNvPr>
           <p:cNvSpPr txBox="1"/>
           <p:nvPr/>
         </p:nvSpPr>
         <p:spPr>
           <a:xfrm>
-            <a:off x="6875999" y="5292000"/>
-            <a:ext cx="4536000" cy="576000"/>
+            <a:off x="5145350" y="1172815"/>
+            <a:ext cx="4718625" cy="253916"/>
           </a:xfrm>
           <a:prstGeom prst="rect">
             <a:avLst/>
@@ -5616,33 +6048,1404 @@
           <a:noFill/>
         </p:spPr>
         <p:txBody>
-          <a:bodyPr wrap="square" anchor="ctr" lIns="36000" rIns="36000" tIns="18000" bIns="18000">
+          <a:bodyPr wrap="square">
             <a:spAutoFit/>
           </a:bodyPr>
           <a:lstStyle/>
           <a:p>
-            <a:pPr algn="l">
+            <a:r>
+              <a:rPr lang="en-US" altLang="ja-JP" sz="1050" dirty="0">
+                <a:solidFill>
+                  <a:srgbClr val="FF0000"/>
+                </a:solidFill>
+                <a:latin typeface="メイリオ" panose="020B0604030504040204" pitchFamily="50" charset="-128"/>
+                <a:ea typeface="メイリオ" panose="020B0604030504040204" pitchFamily="50" charset="-128"/>
+                <a:cs typeface="メイリオ"/>
+                <a:sym typeface="Meiryo"/>
+              </a:rPr>
+              <a:t>※</a:t>
+            </a:r>
+            <a:r>
+              <a:rPr lang="ja-JP" altLang="en-US" sz="1050" dirty="0">
+                <a:solidFill>
+                  <a:srgbClr val="FF0000"/>
+                </a:solidFill>
+                <a:latin typeface="メイリオ" panose="020B0604030504040204" pitchFamily="50" charset="-128"/>
+                <a:ea typeface="メイリオ" panose="020B0604030504040204" pitchFamily="50" charset="-128"/>
+                <a:cs typeface="メイリオ"/>
+                <a:sym typeface="Meiryo"/>
+              </a:rPr>
+              <a:t>既存</a:t>
+            </a:r>
+            <a:r>
+              <a:rPr lang="en-US" altLang="ja-JP" sz="1050" dirty="0">
+                <a:solidFill>
+                  <a:srgbClr val="FF0000"/>
+                </a:solidFill>
+                <a:latin typeface="メイリオ" panose="020B0604030504040204" pitchFamily="50" charset="-128"/>
+                <a:ea typeface="メイリオ" panose="020B0604030504040204" pitchFamily="50" charset="-128"/>
+                <a:cs typeface="メイリオ"/>
+                <a:sym typeface="Meiryo"/>
+              </a:rPr>
+              <a:t>API</a:t>
+            </a:r>
+            <a:r>
+              <a:rPr lang="ja-JP" altLang="en-US" sz="1050" dirty="0">
+                <a:solidFill>
+                  <a:srgbClr val="FF0000"/>
+                </a:solidFill>
+                <a:latin typeface="メイリオ" panose="020B0604030504040204" pitchFamily="50" charset="-128"/>
+                <a:ea typeface="メイリオ" panose="020B0604030504040204" pitchFamily="50" charset="-128"/>
+                <a:cs typeface="メイリオ"/>
+                <a:sym typeface="Meiryo"/>
+              </a:rPr>
+              <a:t>ツールとの併用についても、問題なく稼働が可能。</a:t>
+            </a:r>
+            <a:endParaRPr lang="ja-JP" altLang="en-US" sz="1050" dirty="0">
+              <a:solidFill>
+                <a:srgbClr val="FF0000"/>
+              </a:solidFill>
+              <a:latin typeface="メイリオ"/>
+              <a:ea typeface="メイリオ"/>
+              <a:cs typeface="メイリオ"/>
+            </a:endParaRPr>
+          </a:p>
+        </p:txBody>
+      </p:sp>
+      <p:sp>
+        <p:nvSpPr>
+          <p:cNvPr id="8" name="正方形/長方形 7">
+            <a:extLst>
+              <a:ext uri="{FF2B5EF4-FFF2-40B4-BE49-F238E27FC236}">
+                <a16:creationId xmlns:a16="http://schemas.microsoft.com/office/drawing/2014/main" id="{F5B8C83A-7191-D772-EF88-AE268D007E63}"/>
+              </a:ext>
+            </a:extLst>
+          </p:cNvPr>
+          <p:cNvSpPr/>
+          <p:nvPr/>
+        </p:nvSpPr>
+        <p:spPr>
+          <a:xfrm>
+            <a:off x="7554077" y="1518664"/>
+            <a:ext cx="3044580" cy="284744"/>
+          </a:xfrm>
+          <a:prstGeom prst="rect">
+            <a:avLst/>
+          </a:prstGeom>
+          <a:solidFill>
+            <a:schemeClr val="tx2"/>
+          </a:solidFill>
+          <a:ln>
+            <a:noFill/>
+          </a:ln>
+        </p:spPr>
+        <p:style>
+          <a:lnRef idx="2">
+            <a:schemeClr val="accent1">
+              <a:shade val="15000"/>
+            </a:schemeClr>
+          </a:lnRef>
+          <a:fillRef idx="1">
+            <a:schemeClr val="accent1"/>
+          </a:fillRef>
+          <a:effectRef idx="0">
+            <a:schemeClr val="accent1"/>
+          </a:effectRef>
+          <a:fontRef idx="minor">
+            <a:schemeClr val="lt1"/>
+          </a:fontRef>
+        </p:style>
+        <p:txBody>
+          <a:bodyPr rtlCol="0" anchor="ctr"/>
+          <a:lstStyle/>
+          <a:p>
+            <a:pPr algn="ctr"/>
+            <a:r>
+              <a:rPr lang="ja-JP" altLang="en-US" sz="1400" b="1" dirty="0">
+                <a:solidFill>
+                  <a:schemeClr val="bg1"/>
+                </a:solidFill>
+                <a:latin typeface="メイリオ" panose="020B0604030504040204" pitchFamily="50" charset="-128"/>
+                <a:ea typeface="メイリオ" panose="020B0604030504040204" pitchFamily="50" charset="-128"/>
+                <a:cs typeface="メイリオ"/>
+              </a:rPr>
+              <a:t>動作イメージ</a:t>
+            </a:r>
+          </a:p>
+        </p:txBody>
+      </p:sp>
+      <p:sp>
+        <p:nvSpPr>
+          <p:cNvPr id="26" name="Google Shape;51;p19">
+            <a:extLst>
+              <a:ext uri="{FF2B5EF4-FFF2-40B4-BE49-F238E27FC236}">
+                <a16:creationId xmlns:a16="http://schemas.microsoft.com/office/drawing/2014/main" id="{A4070FDA-7C99-27DE-6A9C-437C1D5DD3B3}"/>
+              </a:ext>
+            </a:extLst>
+          </p:cNvPr>
+          <p:cNvSpPr/>
+          <p:nvPr/>
+        </p:nvSpPr>
+        <p:spPr>
+          <a:xfrm>
+            <a:off x="1686399" y="1321261"/>
+            <a:ext cx="1510826" cy="485102"/>
+          </a:xfrm>
+          <a:prstGeom prst="roundRect">
+            <a:avLst>
+              <a:gd name="adj" fmla="val 16667"/>
+            </a:avLst>
+          </a:prstGeom>
+          <a:solidFill>
+            <a:schemeClr val="tx2"/>
+          </a:solidFill>
+          <a:ln>
+            <a:noFill/>
+          </a:ln>
+        </p:spPr>
+        <p:txBody>
+          <a:bodyPr spcFirstLastPara="1" wrap="square" lIns="91425" tIns="45700" rIns="91425" bIns="45700" anchor="ctr" anchorCtr="0">
+            <a:noAutofit/>
+          </a:bodyPr>
+          <a:lstStyle>
+            <a:defPPr marR="0" lvl="0" algn="l" rtl="0">
               <a:lnSpc>
-                <a:spcPct val="110000"/>
+                <a:spcPct val="100000"/>
               </a:lnSpc>
+              <a:spcBef>
+                <a:spcPts val="0"/>
+              </a:spcBef>
               <a:spcAft>
                 <a:spcPts val="0"/>
               </a:spcAft>
-            </a:pPr>
-            <a:r>
-              <a:rPr sz="1000" b="0">
-                <a:solidFill>
-                  <a:srgbClr val="7F7F7F"/>
+            </a:defPPr>
+            <a:lvl1pPr marR="0" lvl="0" algn="l" rtl="0">
+              <a:lnSpc>
+                <a:spcPct val="100000"/>
+              </a:lnSpc>
+              <a:spcBef>
+                <a:spcPts val="0"/>
+              </a:spcBef>
+              <a:spcAft>
+                <a:spcPts val="0"/>
+              </a:spcAft>
+              <a:buClr>
+                <a:srgbClr val="000000"/>
+              </a:buClr>
+              <a:buFont typeface="Arial"/>
+              <a:defRPr sz="1400" b="0" i="0" u="none" strike="noStrike" cap="none">
+                <a:solidFill>
+                  <a:srgbClr val="000000"/>
                 </a:solidFill>
                 <a:latin typeface="メイリオ"/>
                 <a:ea typeface="メイリオ"/>
                 <a:cs typeface="メイリオ"/>
-              </a:rPr>
-              <a:t>※既存APIツールとの併用についても、問題なく稼働が可能。</a:t>
-            </a:r>
-          </a:p>
-        </p:txBody>
-      </p:sp>
+                <a:sym typeface="Arial"/>
+              </a:defRPr>
+            </a:lvl1pPr>
+            <a:lvl2pPr marR="0" lvl="1" algn="l" rtl="0">
+              <a:lnSpc>
+                <a:spcPct val="100000"/>
+              </a:lnSpc>
+              <a:spcBef>
+                <a:spcPts val="0"/>
+              </a:spcBef>
+              <a:spcAft>
+                <a:spcPts val="0"/>
+              </a:spcAft>
+              <a:buClr>
+                <a:srgbClr val="000000"/>
+              </a:buClr>
+              <a:buFont typeface="Arial"/>
+              <a:defRPr sz="1400" b="0" i="0" u="none" strike="noStrike" cap="none">
+                <a:solidFill>
+                  <a:srgbClr val="000000"/>
+                </a:solidFill>
+                <a:latin typeface="メイリオ"/>
+                <a:ea typeface="メイリオ"/>
+                <a:cs typeface="メイリオ"/>
+                <a:sym typeface="Arial"/>
+              </a:defRPr>
+            </a:lvl2pPr>
+            <a:lvl3pPr marR="0" lvl="2" algn="l" rtl="0">
+              <a:lnSpc>
+                <a:spcPct val="100000"/>
+              </a:lnSpc>
+              <a:spcBef>
+                <a:spcPts val="0"/>
+              </a:spcBef>
+              <a:spcAft>
+                <a:spcPts val="0"/>
+              </a:spcAft>
+              <a:buClr>
+                <a:srgbClr val="000000"/>
+              </a:buClr>
+              <a:buFont typeface="Arial"/>
+              <a:defRPr sz="1400" b="0" i="0" u="none" strike="noStrike" cap="none">
+                <a:solidFill>
+                  <a:srgbClr val="000000"/>
+                </a:solidFill>
+                <a:latin typeface="メイリオ"/>
+                <a:ea typeface="メイリオ"/>
+                <a:cs typeface="メイリオ"/>
+                <a:sym typeface="Arial"/>
+              </a:defRPr>
+            </a:lvl3pPr>
+            <a:lvl4pPr marR="0" lvl="3" algn="l" rtl="0">
+              <a:lnSpc>
+                <a:spcPct val="100000"/>
+              </a:lnSpc>
+              <a:spcBef>
+                <a:spcPts val="0"/>
+              </a:spcBef>
+              <a:spcAft>
+                <a:spcPts val="0"/>
+              </a:spcAft>
+              <a:buClr>
+                <a:srgbClr val="000000"/>
+              </a:buClr>
+              <a:buFont typeface="Arial"/>
+              <a:defRPr sz="1400" b="0" i="0" u="none" strike="noStrike" cap="none">
+                <a:solidFill>
+                  <a:srgbClr val="000000"/>
+                </a:solidFill>
+                <a:latin typeface="メイリオ"/>
+                <a:ea typeface="メイリオ"/>
+                <a:cs typeface="メイリオ"/>
+                <a:sym typeface="Arial"/>
+              </a:defRPr>
+            </a:lvl4pPr>
+            <a:lvl5pPr marR="0" lvl="4" algn="l" rtl="0">
+              <a:lnSpc>
+                <a:spcPct val="100000"/>
+              </a:lnSpc>
+              <a:spcBef>
+                <a:spcPts val="0"/>
+              </a:spcBef>
+              <a:spcAft>
+                <a:spcPts val="0"/>
+              </a:spcAft>
+              <a:buClr>
+                <a:srgbClr val="000000"/>
+              </a:buClr>
+              <a:buFont typeface="Arial"/>
+              <a:defRPr sz="1400" b="0" i="0" u="none" strike="noStrike" cap="none">
+                <a:solidFill>
+                  <a:srgbClr val="000000"/>
+                </a:solidFill>
+                <a:latin typeface="メイリオ"/>
+                <a:ea typeface="メイリオ"/>
+                <a:cs typeface="メイリオ"/>
+                <a:sym typeface="Arial"/>
+              </a:defRPr>
+            </a:lvl5pPr>
+            <a:lvl6pPr marR="0" lvl="5" algn="l" rtl="0">
+              <a:lnSpc>
+                <a:spcPct val="100000"/>
+              </a:lnSpc>
+              <a:spcBef>
+                <a:spcPts val="0"/>
+              </a:spcBef>
+              <a:spcAft>
+                <a:spcPts val="0"/>
+              </a:spcAft>
+              <a:buClr>
+                <a:srgbClr val="000000"/>
+              </a:buClr>
+              <a:buFont typeface="Arial"/>
+              <a:defRPr sz="1400" b="0" i="0" u="none" strike="noStrike" cap="none">
+                <a:solidFill>
+                  <a:srgbClr val="000000"/>
+                </a:solidFill>
+                <a:latin typeface="メイリオ"/>
+                <a:ea typeface="メイリオ"/>
+                <a:cs typeface="メイリオ"/>
+                <a:sym typeface="Arial"/>
+              </a:defRPr>
+            </a:lvl6pPr>
+            <a:lvl7pPr marR="0" lvl="6" algn="l" rtl="0">
+              <a:lnSpc>
+                <a:spcPct val="100000"/>
+              </a:lnSpc>
+              <a:spcBef>
+                <a:spcPts val="0"/>
+              </a:spcBef>
+              <a:spcAft>
+                <a:spcPts val="0"/>
+              </a:spcAft>
+              <a:buClr>
+                <a:srgbClr val="000000"/>
+              </a:buClr>
+              <a:buFont typeface="Arial"/>
+              <a:defRPr sz="1400" b="0" i="0" u="none" strike="noStrike" cap="none">
+                <a:solidFill>
+                  <a:srgbClr val="000000"/>
+                </a:solidFill>
+                <a:latin typeface="メイリオ"/>
+                <a:ea typeface="メイリオ"/>
+                <a:cs typeface="メイリオ"/>
+                <a:sym typeface="Arial"/>
+              </a:defRPr>
+            </a:lvl7pPr>
+            <a:lvl8pPr marR="0" lvl="7" algn="l" rtl="0">
+              <a:lnSpc>
+                <a:spcPct val="100000"/>
+              </a:lnSpc>
+              <a:spcBef>
+                <a:spcPts val="0"/>
+              </a:spcBef>
+              <a:spcAft>
+                <a:spcPts val="0"/>
+              </a:spcAft>
+              <a:buClr>
+                <a:srgbClr val="000000"/>
+              </a:buClr>
+              <a:buFont typeface="Arial"/>
+              <a:defRPr sz="1400" b="0" i="0" u="none" strike="noStrike" cap="none">
+                <a:solidFill>
+                  <a:srgbClr val="000000"/>
+                </a:solidFill>
+                <a:latin typeface="メイリオ"/>
+                <a:ea typeface="メイリオ"/>
+                <a:cs typeface="メイリオ"/>
+                <a:sym typeface="Arial"/>
+              </a:defRPr>
+            </a:lvl8pPr>
+            <a:lvl9pPr marR="0" lvl="8" algn="l" rtl="0">
+              <a:lnSpc>
+                <a:spcPct val="100000"/>
+              </a:lnSpc>
+              <a:spcBef>
+                <a:spcPts val="0"/>
+              </a:spcBef>
+              <a:spcAft>
+                <a:spcPts val="0"/>
+              </a:spcAft>
+              <a:buClr>
+                <a:srgbClr val="000000"/>
+              </a:buClr>
+              <a:buFont typeface="Arial"/>
+              <a:defRPr sz="1400" b="0" i="0" u="none" strike="noStrike" cap="none">
+                <a:solidFill>
+                  <a:srgbClr val="000000"/>
+                </a:solidFill>
+                <a:latin typeface="メイリオ"/>
+                <a:ea typeface="メイリオ"/>
+                <a:cs typeface="メイリオ"/>
+                <a:sym typeface="Arial"/>
+              </a:defRPr>
+            </a:lvl9pPr>
+          </a:lstStyle>
+          <a:p>
+            <a:pPr algn="ctr">
+              <a:buSzPts val="1400"/>
+            </a:pPr>
+            <a:r>
+              <a:rPr lang="ja-JP" altLang="en-US" b="1" dirty="0">
+                <a:solidFill>
+                  <a:schemeClr val="lt1"/>
+                </a:solidFill>
+                <a:sym typeface="Meiryo"/>
+              </a:rPr>
+              <a:t>初期：</a:t>
+            </a:r>
+            <a:r>
+              <a:rPr lang="en-US" altLang="ja-JP" b="1" dirty="0">
+                <a:solidFill>
+                  <a:schemeClr val="lt1"/>
+                </a:solidFill>
+                <a:sym typeface="Meiryo"/>
+              </a:rPr>
+              <a:t>15</a:t>
+            </a:r>
+            <a:r>
+              <a:rPr lang="ja-JP" altLang="en-US" b="1" dirty="0">
+                <a:solidFill>
+                  <a:schemeClr val="lt1"/>
+                </a:solidFill>
+                <a:sym typeface="Meiryo"/>
+              </a:rPr>
+              <a:t>万円</a:t>
+            </a:r>
+            <a:endParaRPr b="1" dirty="0">
+              <a:solidFill>
+                <a:schemeClr val="lt1"/>
+              </a:solidFill>
+              <a:sym typeface="Meiryo"/>
+            </a:endParaRPr>
+          </a:p>
+        </p:txBody>
+      </p:sp>
+      <p:sp>
+        <p:nvSpPr>
+          <p:cNvPr id="28" name="Google Shape;51;p19">
+            <a:extLst>
+              <a:ext uri="{FF2B5EF4-FFF2-40B4-BE49-F238E27FC236}">
+                <a16:creationId xmlns:a16="http://schemas.microsoft.com/office/drawing/2014/main" id="{40C4675F-5DCC-DD57-BE14-B3A7697A02CD}"/>
+              </a:ext>
+            </a:extLst>
+          </p:cNvPr>
+          <p:cNvSpPr/>
+          <p:nvPr/>
+        </p:nvSpPr>
+        <p:spPr>
+          <a:xfrm>
+            <a:off x="3280897" y="1321261"/>
+            <a:ext cx="1510826" cy="485102"/>
+          </a:xfrm>
+          <a:prstGeom prst="roundRect">
+            <a:avLst>
+              <a:gd name="adj" fmla="val 16667"/>
+            </a:avLst>
+          </a:prstGeom>
+          <a:solidFill>
+            <a:schemeClr val="tx2"/>
+          </a:solidFill>
+          <a:ln>
+            <a:noFill/>
+          </a:ln>
+        </p:spPr>
+        <p:txBody>
+          <a:bodyPr spcFirstLastPara="1" wrap="square" lIns="91425" tIns="45700" rIns="91425" bIns="45700" anchor="ctr" anchorCtr="0">
+            <a:noAutofit/>
+          </a:bodyPr>
+          <a:lstStyle>
+            <a:defPPr marR="0" lvl="0" algn="l" rtl="0">
+              <a:lnSpc>
+                <a:spcPct val="100000"/>
+              </a:lnSpc>
+              <a:spcBef>
+                <a:spcPts val="0"/>
+              </a:spcBef>
+              <a:spcAft>
+                <a:spcPts val="0"/>
+              </a:spcAft>
+            </a:defPPr>
+            <a:lvl1pPr marR="0" lvl="0" algn="l" rtl="0">
+              <a:lnSpc>
+                <a:spcPct val="100000"/>
+              </a:lnSpc>
+              <a:spcBef>
+                <a:spcPts val="0"/>
+              </a:spcBef>
+              <a:spcAft>
+                <a:spcPts val="0"/>
+              </a:spcAft>
+              <a:buClr>
+                <a:srgbClr val="000000"/>
+              </a:buClr>
+              <a:buFont typeface="Arial"/>
+              <a:defRPr sz="1400" b="0" i="0" u="none" strike="noStrike" cap="none">
+                <a:solidFill>
+                  <a:srgbClr val="000000"/>
+                </a:solidFill>
+                <a:latin typeface="メイリオ"/>
+                <a:ea typeface="メイリオ"/>
+                <a:cs typeface="メイリオ"/>
+                <a:sym typeface="Arial"/>
+              </a:defRPr>
+            </a:lvl1pPr>
+            <a:lvl2pPr marR="0" lvl="1" algn="l" rtl="0">
+              <a:lnSpc>
+                <a:spcPct val="100000"/>
+              </a:lnSpc>
+              <a:spcBef>
+                <a:spcPts val="0"/>
+              </a:spcBef>
+              <a:spcAft>
+                <a:spcPts val="0"/>
+              </a:spcAft>
+              <a:buClr>
+                <a:srgbClr val="000000"/>
+              </a:buClr>
+              <a:buFont typeface="Arial"/>
+              <a:defRPr sz="1400" b="0" i="0" u="none" strike="noStrike" cap="none">
+                <a:solidFill>
+                  <a:srgbClr val="000000"/>
+                </a:solidFill>
+                <a:latin typeface="メイリオ"/>
+                <a:ea typeface="メイリオ"/>
+                <a:cs typeface="メイリオ"/>
+                <a:sym typeface="Arial"/>
+              </a:defRPr>
+            </a:lvl2pPr>
+            <a:lvl3pPr marR="0" lvl="2" algn="l" rtl="0">
+              <a:lnSpc>
+                <a:spcPct val="100000"/>
+              </a:lnSpc>
+              <a:spcBef>
+                <a:spcPts val="0"/>
+              </a:spcBef>
+              <a:spcAft>
+                <a:spcPts val="0"/>
+              </a:spcAft>
+              <a:buClr>
+                <a:srgbClr val="000000"/>
+              </a:buClr>
+              <a:buFont typeface="Arial"/>
+              <a:defRPr sz="1400" b="0" i="0" u="none" strike="noStrike" cap="none">
+                <a:solidFill>
+                  <a:srgbClr val="000000"/>
+                </a:solidFill>
+                <a:latin typeface="メイリオ"/>
+                <a:ea typeface="メイリオ"/>
+                <a:cs typeface="メイリオ"/>
+                <a:sym typeface="Arial"/>
+              </a:defRPr>
+            </a:lvl3pPr>
+            <a:lvl4pPr marR="0" lvl="3" algn="l" rtl="0">
+              <a:lnSpc>
+                <a:spcPct val="100000"/>
+              </a:lnSpc>
+              <a:spcBef>
+                <a:spcPts val="0"/>
+              </a:spcBef>
+              <a:spcAft>
+                <a:spcPts val="0"/>
+              </a:spcAft>
+              <a:buClr>
+                <a:srgbClr val="000000"/>
+              </a:buClr>
+              <a:buFont typeface="Arial"/>
+              <a:defRPr sz="1400" b="0" i="0" u="none" strike="noStrike" cap="none">
+                <a:solidFill>
+                  <a:srgbClr val="000000"/>
+                </a:solidFill>
+                <a:latin typeface="メイリオ"/>
+                <a:ea typeface="メイリオ"/>
+                <a:cs typeface="メイリオ"/>
+                <a:sym typeface="Arial"/>
+              </a:defRPr>
+            </a:lvl4pPr>
+            <a:lvl5pPr marR="0" lvl="4" algn="l" rtl="0">
+              <a:lnSpc>
+                <a:spcPct val="100000"/>
+              </a:lnSpc>
+              <a:spcBef>
+                <a:spcPts val="0"/>
+              </a:spcBef>
+              <a:spcAft>
+                <a:spcPts val="0"/>
+              </a:spcAft>
+              <a:buClr>
+                <a:srgbClr val="000000"/>
+              </a:buClr>
+              <a:buFont typeface="Arial"/>
+              <a:defRPr sz="1400" b="0" i="0" u="none" strike="noStrike" cap="none">
+                <a:solidFill>
+                  <a:srgbClr val="000000"/>
+                </a:solidFill>
+                <a:latin typeface="メイリオ"/>
+                <a:ea typeface="メイリオ"/>
+                <a:cs typeface="メイリオ"/>
+                <a:sym typeface="Arial"/>
+              </a:defRPr>
+            </a:lvl5pPr>
+            <a:lvl6pPr marR="0" lvl="5" algn="l" rtl="0">
+              <a:lnSpc>
+                <a:spcPct val="100000"/>
+              </a:lnSpc>
+              <a:spcBef>
+                <a:spcPts val="0"/>
+              </a:spcBef>
+              <a:spcAft>
+                <a:spcPts val="0"/>
+              </a:spcAft>
+              <a:buClr>
+                <a:srgbClr val="000000"/>
+              </a:buClr>
+              <a:buFont typeface="Arial"/>
+              <a:defRPr sz="1400" b="0" i="0" u="none" strike="noStrike" cap="none">
+                <a:solidFill>
+                  <a:srgbClr val="000000"/>
+                </a:solidFill>
+                <a:latin typeface="メイリオ"/>
+                <a:ea typeface="メイリオ"/>
+                <a:cs typeface="メイリオ"/>
+                <a:sym typeface="Arial"/>
+              </a:defRPr>
+            </a:lvl6pPr>
+            <a:lvl7pPr marR="0" lvl="6" algn="l" rtl="0">
+              <a:lnSpc>
+                <a:spcPct val="100000"/>
+              </a:lnSpc>
+              <a:spcBef>
+                <a:spcPts val="0"/>
+              </a:spcBef>
+              <a:spcAft>
+                <a:spcPts val="0"/>
+              </a:spcAft>
+              <a:buClr>
+                <a:srgbClr val="000000"/>
+              </a:buClr>
+              <a:buFont typeface="Arial"/>
+              <a:defRPr sz="1400" b="0" i="0" u="none" strike="noStrike" cap="none">
+                <a:solidFill>
+                  <a:srgbClr val="000000"/>
+                </a:solidFill>
+                <a:latin typeface="メイリオ"/>
+                <a:ea typeface="メイリオ"/>
+                <a:cs typeface="メイリオ"/>
+                <a:sym typeface="Arial"/>
+              </a:defRPr>
+            </a:lvl7pPr>
+            <a:lvl8pPr marR="0" lvl="7" algn="l" rtl="0">
+              <a:lnSpc>
+                <a:spcPct val="100000"/>
+              </a:lnSpc>
+              <a:spcBef>
+                <a:spcPts val="0"/>
+              </a:spcBef>
+              <a:spcAft>
+                <a:spcPts val="0"/>
+              </a:spcAft>
+              <a:buClr>
+                <a:srgbClr val="000000"/>
+              </a:buClr>
+              <a:buFont typeface="Arial"/>
+              <a:defRPr sz="1400" b="0" i="0" u="none" strike="noStrike" cap="none">
+                <a:solidFill>
+                  <a:srgbClr val="000000"/>
+                </a:solidFill>
+                <a:latin typeface="メイリオ"/>
+                <a:ea typeface="メイリオ"/>
+                <a:cs typeface="メイリオ"/>
+                <a:sym typeface="Arial"/>
+              </a:defRPr>
+            </a:lvl8pPr>
+            <a:lvl9pPr marR="0" lvl="8" algn="l" rtl="0">
+              <a:lnSpc>
+                <a:spcPct val="100000"/>
+              </a:lnSpc>
+              <a:spcBef>
+                <a:spcPts val="0"/>
+              </a:spcBef>
+              <a:spcAft>
+                <a:spcPts val="0"/>
+              </a:spcAft>
+              <a:buClr>
+                <a:srgbClr val="000000"/>
+              </a:buClr>
+              <a:buFont typeface="Arial"/>
+              <a:defRPr sz="1400" b="0" i="0" u="none" strike="noStrike" cap="none">
+                <a:solidFill>
+                  <a:srgbClr val="000000"/>
+                </a:solidFill>
+                <a:latin typeface="メイリオ"/>
+                <a:ea typeface="メイリオ"/>
+                <a:cs typeface="メイリオ"/>
+                <a:sym typeface="Arial"/>
+              </a:defRPr>
+            </a:lvl9pPr>
+          </a:lstStyle>
+          <a:p>
+            <a:pPr algn="ctr">
+              <a:buSzPts val="1400"/>
+            </a:pPr>
+            <a:r>
+              <a:rPr lang="ja-JP" altLang="en-US" b="1" dirty="0">
+                <a:solidFill>
+                  <a:schemeClr val="lt1"/>
+                </a:solidFill>
+                <a:sym typeface="Meiryo"/>
+              </a:rPr>
+              <a:t>月額</a:t>
+            </a:r>
+            <a:r>
+              <a:rPr lang="en-US" altLang="ja-JP" b="1" dirty="0">
+                <a:solidFill>
+                  <a:schemeClr val="lt1"/>
+                </a:solidFill>
+                <a:sym typeface="Meiryo"/>
+              </a:rPr>
+              <a:t>3</a:t>
+            </a:r>
+            <a:r>
+              <a:rPr lang="ja-JP" altLang="en-US" b="1" dirty="0">
+                <a:solidFill>
+                  <a:schemeClr val="lt1"/>
+                </a:solidFill>
+                <a:sym typeface="Meiryo"/>
+              </a:rPr>
+              <a:t>万円～</a:t>
+            </a:r>
+            <a:endParaRPr lang="en-US" altLang="ja-JP" b="1" dirty="0">
+              <a:solidFill>
+                <a:schemeClr val="lt1"/>
+              </a:solidFill>
+              <a:sym typeface="Meiryo"/>
+            </a:endParaRPr>
+          </a:p>
+          <a:p>
+            <a:pPr algn="ctr">
+              <a:buSzPts val="1400"/>
+            </a:pPr>
+            <a:r>
+              <a:rPr lang="en-US" altLang="ja-JP" sz="1050" b="1" dirty="0">
+                <a:solidFill>
+                  <a:srgbClr val="FFFF00"/>
+                </a:solidFill>
+                <a:sym typeface="Meiryo"/>
+              </a:rPr>
+              <a:t>+</a:t>
+            </a:r>
+            <a:r>
+              <a:rPr lang="ja-JP" altLang="en-US" sz="1050" b="1" dirty="0">
+                <a:solidFill>
+                  <a:srgbClr val="FFFF00"/>
+                </a:solidFill>
+                <a:sym typeface="Meiryo"/>
+              </a:rPr>
+              <a:t>設定地点追加</a:t>
+            </a:r>
+            <a:endParaRPr sz="1050" b="1" dirty="0">
+              <a:solidFill>
+                <a:srgbClr val="FFFF00"/>
+              </a:solidFill>
+              <a:sym typeface="Meiryo"/>
+            </a:endParaRPr>
+          </a:p>
+        </p:txBody>
+      </p:sp>
+      <p:sp>
+        <p:nvSpPr>
+          <p:cNvPr id="11" name="正方形/長方形 10">
+            <a:extLst>
+              <a:ext uri="{FF2B5EF4-FFF2-40B4-BE49-F238E27FC236}">
+                <a16:creationId xmlns:a16="http://schemas.microsoft.com/office/drawing/2014/main" id="{189A6A4C-E34E-E7CF-D6DD-C175E600A94D}"/>
+              </a:ext>
+            </a:extLst>
+          </p:cNvPr>
+          <p:cNvSpPr/>
+          <p:nvPr/>
+        </p:nvSpPr>
+        <p:spPr>
+          <a:xfrm>
+            <a:off x="2146069" y="1909406"/>
+            <a:ext cx="1859036" cy="244151"/>
+          </a:xfrm>
+          <a:prstGeom prst="rect">
+            <a:avLst/>
+          </a:prstGeom>
+          <a:solidFill>
+            <a:schemeClr val="bg1">
+              <a:lumMod val="95000"/>
+            </a:schemeClr>
+          </a:solidFill>
+          <a:ln>
+            <a:noFill/>
+          </a:ln>
+        </p:spPr>
+        <p:style>
+          <a:lnRef idx="2">
+            <a:schemeClr val="accent1">
+              <a:shade val="15000"/>
+            </a:schemeClr>
+          </a:lnRef>
+          <a:fillRef idx="1">
+            <a:schemeClr val="accent1"/>
+          </a:fillRef>
+          <a:effectRef idx="0">
+            <a:schemeClr val="accent1"/>
+          </a:effectRef>
+          <a:fontRef idx="minor">
+            <a:schemeClr val="lt1"/>
+          </a:fontRef>
+        </p:style>
+        <p:txBody>
+          <a:bodyPr rtlCol="0" anchor="ctr"/>
+          <a:lstStyle/>
+          <a:p>
+            <a:pPr algn="ctr"/>
+            <a:r>
+              <a:rPr lang="en-US" altLang="ja-JP" sz="1200" b="1" dirty="0">
+                <a:solidFill>
+                  <a:schemeClr val="tx1">
+                    <a:lumMod val="50000"/>
+                    <a:lumOff val="50000"/>
+                  </a:schemeClr>
+                </a:solidFill>
+                <a:latin typeface="メイリオ" panose="020B0604030504040204" pitchFamily="50" charset="-128"/>
+                <a:ea typeface="メイリオ" panose="020B0604030504040204" pitchFamily="50" charset="-128"/>
+                <a:cs typeface="メイリオ"/>
+              </a:rPr>
+              <a:t>WEB</a:t>
+            </a:r>
+            <a:r>
+              <a:rPr lang="ja-JP" altLang="en-US" sz="1200" b="1" dirty="0">
+                <a:solidFill>
+                  <a:schemeClr val="tx1">
+                    <a:lumMod val="50000"/>
+                    <a:lumOff val="50000"/>
+                  </a:schemeClr>
+                </a:solidFill>
+                <a:latin typeface="メイリオ" panose="020B0604030504040204" pitchFamily="50" charset="-128"/>
+                <a:ea typeface="メイリオ" panose="020B0604030504040204" pitchFamily="50" charset="-128"/>
+                <a:cs typeface="メイリオ"/>
+              </a:rPr>
+              <a:t>サイト</a:t>
+            </a:r>
+          </a:p>
+        </p:txBody>
+      </p:sp>
+      <p:pic>
+        <p:nvPicPr>
+          <p:cNvPr id="18" name="図 17">
+            <a:extLst>
+              <a:ext uri="{FF2B5EF4-FFF2-40B4-BE49-F238E27FC236}">
+                <a16:creationId xmlns:a16="http://schemas.microsoft.com/office/drawing/2014/main" id="{122BEACA-AA0E-EFF8-CDF2-B0A5B58840D0}"/>
+              </a:ext>
+            </a:extLst>
+          </p:cNvPr>
+          <p:cNvPicPr>
+            <a:picLocks noChangeAspect="1"/>
+          </p:cNvPicPr>
+          <p:nvPr/>
+        </p:nvPicPr>
+        <p:blipFill>
+          <a:blip r:embed="rId9"/>
+          <a:stretch>
+            <a:fillRect/>
+          </a:stretch>
+        </p:blipFill>
+        <p:spPr>
+          <a:xfrm>
+            <a:off x="3626633" y="4115263"/>
+            <a:ext cx="466595" cy="86136"/>
+          </a:xfrm>
+          <a:prstGeom prst="rect">
+            <a:avLst/>
+          </a:prstGeom>
+        </p:spPr>
+      </p:pic>
+      <p:pic>
+        <p:nvPicPr>
+          <p:cNvPr id="27" name="図 26">
+            <a:extLst>
+              <a:ext uri="{FF2B5EF4-FFF2-40B4-BE49-F238E27FC236}">
+                <a16:creationId xmlns:a16="http://schemas.microsoft.com/office/drawing/2014/main" id="{D971BE53-7CD8-C375-2A00-B224602AC25F}"/>
+              </a:ext>
+            </a:extLst>
+          </p:cNvPr>
+          <p:cNvPicPr>
+            <a:picLocks noChangeAspect="1"/>
+          </p:cNvPicPr>
+          <p:nvPr/>
+        </p:nvPicPr>
+        <p:blipFill>
+          <a:blip r:embed="rId9"/>
+          <a:stretch>
+            <a:fillRect/>
+          </a:stretch>
+        </p:blipFill>
+        <p:spPr>
+          <a:xfrm>
+            <a:off x="3407778" y="2294975"/>
+            <a:ext cx="466595" cy="86136"/>
+          </a:xfrm>
+          <a:prstGeom prst="rect">
+            <a:avLst/>
+          </a:prstGeom>
+        </p:spPr>
+      </p:pic>
+      <p:sp>
+        <p:nvSpPr>
+          <p:cNvPr id="33" name="四角形: 角を丸くする 32">
+            <a:extLst>
+              <a:ext uri="{FF2B5EF4-FFF2-40B4-BE49-F238E27FC236}">
+                <a16:creationId xmlns:a16="http://schemas.microsoft.com/office/drawing/2014/main" id="{B7D71D80-6086-B1B4-3E2C-EE891B12909E}"/>
+              </a:ext>
+            </a:extLst>
+          </p:cNvPr>
+          <p:cNvSpPr/>
+          <p:nvPr/>
+        </p:nvSpPr>
+        <p:spPr>
+          <a:xfrm>
+            <a:off x="2354690" y="5205027"/>
+            <a:ext cx="4874067" cy="659955"/>
+          </a:xfrm>
+          <a:prstGeom prst="roundRect">
+            <a:avLst>
+              <a:gd name="adj" fmla="val 25327"/>
+            </a:avLst>
+          </a:prstGeom>
+          <a:solidFill>
+            <a:srgbClr val="04FA0A">
+              <a:alpha val="40000"/>
+            </a:srgbClr>
+          </a:solidFill>
+          <a:ln>
+            <a:noFill/>
+          </a:ln>
+        </p:spPr>
+        <p:style>
+          <a:lnRef idx="2">
+            <a:schemeClr val="accent1">
+              <a:shade val="15000"/>
+            </a:schemeClr>
+          </a:lnRef>
+          <a:fillRef idx="1">
+            <a:schemeClr val="accent1"/>
+          </a:fillRef>
+          <a:effectRef idx="0">
+            <a:schemeClr val="accent1"/>
+          </a:effectRef>
+          <a:fontRef idx="minor">
+            <a:schemeClr val="lt1"/>
+          </a:fontRef>
+        </p:style>
+        <p:txBody>
+          <a:bodyPr rtlCol="0" anchor="ctr"/>
+          <a:lstStyle/>
+          <a:p>
+            <a:pPr algn="ctr"/>
+            <a:r>
+              <a:rPr lang="ja-JP" altLang="en-US" sz="1600" dirty="0">
+                <a:solidFill>
+                  <a:schemeClr val="tx1"/>
+                </a:solidFill>
+                <a:latin typeface="メイリオ" panose="020B0604030504040204" pitchFamily="50" charset="-128"/>
+                <a:ea typeface="メイリオ" panose="020B0604030504040204" pitchFamily="50" charset="-128"/>
+              </a:rPr>
+              <a:t>フォーム入力内容を</a:t>
+            </a:r>
+            <a:br>
+              <a:rPr lang="en-US" altLang="ja-JP" sz="1600" dirty="0">
+                <a:solidFill>
+                  <a:schemeClr val="tx1"/>
+                </a:solidFill>
+                <a:latin typeface="メイリオ" panose="020B0604030504040204" pitchFamily="50" charset="-128"/>
+                <a:ea typeface="メイリオ" panose="020B0604030504040204" pitchFamily="50" charset="-128"/>
+              </a:rPr>
+            </a:br>
+            <a:r>
+              <a:rPr lang="en-US" altLang="ja-JP" sz="1600" dirty="0">
+                <a:solidFill>
+                  <a:schemeClr val="tx1"/>
+                </a:solidFill>
+                <a:latin typeface="メイリオ" panose="020B0604030504040204" pitchFamily="50" charset="-128"/>
+                <a:ea typeface="メイリオ" panose="020B0604030504040204" pitchFamily="50" charset="-128"/>
+              </a:rPr>
+              <a:t>LINE</a:t>
+            </a:r>
+            <a:r>
+              <a:rPr lang="ja-JP" altLang="en-US" sz="1600" dirty="0">
+                <a:solidFill>
+                  <a:schemeClr val="tx1"/>
+                </a:solidFill>
+                <a:latin typeface="メイリオ" panose="020B0604030504040204" pitchFamily="50" charset="-128"/>
+                <a:ea typeface="メイリオ" panose="020B0604030504040204" pitchFamily="50" charset="-128"/>
+              </a:rPr>
+              <a:t>トーク入力画面へ引き継ぎ可能</a:t>
+            </a:r>
+          </a:p>
+        </p:txBody>
+      </p:sp>
+      <p:cxnSp>
+        <p:nvCxnSpPr>
+          <p:cNvPr id="44" name="直線矢印コネクタ 43">
+            <a:extLst>
+              <a:ext uri="{FF2B5EF4-FFF2-40B4-BE49-F238E27FC236}">
+                <a16:creationId xmlns:a16="http://schemas.microsoft.com/office/drawing/2014/main" id="{666CF79B-D322-06BC-F342-DE710BE7473B}"/>
+              </a:ext>
+            </a:extLst>
+          </p:cNvPr>
+          <p:cNvCxnSpPr>
+            <a:cxnSpLocks/>
+            <a:stCxn id="33" idx="1"/>
+          </p:cNvCxnSpPr>
+          <p:nvPr/>
+        </p:nvCxnSpPr>
+        <p:spPr>
+          <a:xfrm flipH="1" flipV="1">
+            <a:off x="2066925" y="4868960"/>
+            <a:ext cx="287764" cy="666044"/>
+          </a:xfrm>
+          <a:prstGeom prst="straightConnector1">
+            <a:avLst/>
+          </a:prstGeom>
+          <a:ln w="19050">
+            <a:solidFill>
+              <a:srgbClr val="00B050">
+                <a:alpha val="80000"/>
+              </a:srgbClr>
+            </a:solidFill>
+            <a:prstDash val="sysDot"/>
+            <a:tailEnd type="triangle"/>
+          </a:ln>
+        </p:spPr>
+        <p:style>
+          <a:lnRef idx="1">
+            <a:schemeClr val="accent1"/>
+          </a:lnRef>
+          <a:fillRef idx="0">
+            <a:schemeClr val="accent1"/>
+          </a:fillRef>
+          <a:effectRef idx="0">
+            <a:schemeClr val="accent1"/>
+          </a:effectRef>
+          <a:fontRef idx="minor">
+            <a:schemeClr val="tx1"/>
+          </a:fontRef>
+        </p:style>
+      </p:cxnSp>
+      <p:sp>
+        <p:nvSpPr>
+          <p:cNvPr id="29" name="正方形/長方形 28">
+            <a:extLst>
+              <a:ext uri="{FF2B5EF4-FFF2-40B4-BE49-F238E27FC236}">
+                <a16:creationId xmlns:a16="http://schemas.microsoft.com/office/drawing/2014/main" id="{1D29A9C3-A3E8-0780-A758-0C8E7E376668}"/>
+              </a:ext>
+            </a:extLst>
+          </p:cNvPr>
+          <p:cNvSpPr/>
+          <p:nvPr/>
+        </p:nvSpPr>
+        <p:spPr>
+          <a:xfrm>
+            <a:off x="6504546" y="2415812"/>
+            <a:ext cx="653304" cy="1821208"/>
+          </a:xfrm>
+          <a:prstGeom prst="rect">
+            <a:avLst/>
+          </a:prstGeom>
+          <a:solidFill>
+            <a:srgbClr val="04FA0A">
+              <a:alpha val="40000"/>
+            </a:srgbClr>
+          </a:solidFill>
+          <a:ln>
+            <a:noFill/>
+          </a:ln>
+        </p:spPr>
+        <p:style>
+          <a:lnRef idx="2">
+            <a:schemeClr val="accent1">
+              <a:shade val="15000"/>
+            </a:schemeClr>
+          </a:lnRef>
+          <a:fillRef idx="1">
+            <a:schemeClr val="accent1"/>
+          </a:fillRef>
+          <a:effectRef idx="0">
+            <a:schemeClr val="accent1"/>
+          </a:effectRef>
+          <a:fontRef idx="minor">
+            <a:schemeClr val="lt1"/>
+          </a:fontRef>
+        </p:style>
+        <p:txBody>
+          <a:bodyPr rtlCol="0" anchor="ctr"/>
+          <a:lstStyle/>
+          <a:p>
+            <a:pPr algn="ctr"/>
+            <a:r>
+              <a:rPr lang="en-US" altLang="ja-JP" sz="1200" b="1" dirty="0">
+                <a:solidFill>
+                  <a:schemeClr val="tx1"/>
+                </a:solidFill>
+                <a:latin typeface="メイリオ" panose="020B0604030504040204" pitchFamily="50" charset="-128"/>
+                <a:ea typeface="メイリオ" panose="020B0604030504040204" pitchFamily="50" charset="-128"/>
+                <a:cs typeface="メイリオ"/>
+              </a:rPr>
+              <a:t>DYM</a:t>
+            </a:r>
+          </a:p>
+          <a:p>
+            <a:pPr algn="ctr"/>
+            <a:r>
+              <a:rPr lang="ja-JP" altLang="en-US" sz="1200" b="1" dirty="0">
+                <a:solidFill>
+                  <a:schemeClr val="tx1"/>
+                </a:solidFill>
+                <a:latin typeface="メイリオ" panose="020B0604030504040204" pitchFamily="50" charset="-128"/>
+                <a:ea typeface="メイリオ" panose="020B0604030504040204" pitchFamily="50" charset="-128"/>
+                <a:cs typeface="メイリオ"/>
+              </a:rPr>
+              <a:t>開発</a:t>
+            </a:r>
+            <a:endParaRPr lang="en-US" altLang="ja-JP" sz="1200" b="1" dirty="0">
+              <a:solidFill>
+                <a:schemeClr val="tx1"/>
+              </a:solidFill>
+              <a:latin typeface="メイリオ" panose="020B0604030504040204" pitchFamily="50" charset="-128"/>
+              <a:ea typeface="メイリオ" panose="020B0604030504040204" pitchFamily="50" charset="-128"/>
+              <a:cs typeface="メイリオ"/>
+            </a:endParaRPr>
+          </a:p>
+          <a:p>
+            <a:pPr algn="ctr"/>
+            <a:r>
+              <a:rPr lang="ja-JP" altLang="en-US" sz="1200" b="1" dirty="0">
+                <a:solidFill>
+                  <a:schemeClr val="tx1"/>
+                </a:solidFill>
+                <a:latin typeface="メイリオ" panose="020B0604030504040204" pitchFamily="50" charset="-128"/>
+                <a:ea typeface="メイリオ" panose="020B0604030504040204" pitchFamily="50" charset="-128"/>
+                <a:cs typeface="メイリオ"/>
+              </a:rPr>
+              <a:t>ツール</a:t>
+            </a:r>
+            <a:endParaRPr lang="en-US" altLang="ja-JP" sz="1200" b="1" dirty="0">
+              <a:solidFill>
+                <a:schemeClr val="tx1"/>
+              </a:solidFill>
+              <a:latin typeface="メイリオ" panose="020B0604030504040204" pitchFamily="50" charset="-128"/>
+              <a:ea typeface="メイリオ" panose="020B0604030504040204" pitchFamily="50" charset="-128"/>
+              <a:cs typeface="メイリオ"/>
+            </a:endParaRPr>
+          </a:p>
+        </p:txBody>
+      </p:sp>
+      <p:sp>
+        <p:nvSpPr>
+          <p:cNvPr id="1048" name="矢印: 右 1047">
+            <a:extLst>
+              <a:ext uri="{FF2B5EF4-FFF2-40B4-BE49-F238E27FC236}">
+                <a16:creationId xmlns:a16="http://schemas.microsoft.com/office/drawing/2014/main" id="{6A5BBE8E-2B42-49E0-686B-A6584B59E72F}"/>
+              </a:ext>
+            </a:extLst>
+          </p:cNvPr>
+          <p:cNvSpPr/>
+          <p:nvPr/>
+        </p:nvSpPr>
+        <p:spPr>
+          <a:xfrm>
+            <a:off x="4819827" y="3203047"/>
+            <a:ext cx="1632963" cy="392774"/>
+          </a:xfrm>
+          <a:prstGeom prst="rightArrow">
+            <a:avLst/>
+          </a:prstGeom>
+          <a:solidFill>
+            <a:schemeClr val="tx2"/>
+          </a:solidFill>
+          <a:ln>
+            <a:noFill/>
+          </a:ln>
+        </p:spPr>
+        <p:style>
+          <a:lnRef idx="2">
+            <a:schemeClr val="accent1">
+              <a:shade val="15000"/>
+            </a:schemeClr>
+          </a:lnRef>
+          <a:fillRef idx="1">
+            <a:schemeClr val="accent1"/>
+          </a:fillRef>
+          <a:effectRef idx="0">
+            <a:schemeClr val="accent1"/>
+          </a:effectRef>
+          <a:fontRef idx="minor">
+            <a:schemeClr val="lt1"/>
+          </a:fontRef>
+        </p:style>
+        <p:txBody>
+          <a:bodyPr rtlCol="0" anchor="ctr"/>
+          <a:lstStyle/>
+          <a:p>
+            <a:pPr algn="ctr"/>
+            <a:endParaRPr lang="ja-JP" altLang="en-US"/>
+          </a:p>
+        </p:txBody>
+      </p:sp>
+      <p:sp>
+        <p:nvSpPr>
+          <p:cNvPr id="1050" name="吹き出し: 角を丸めた四角形 1049">
+            <a:extLst>
+              <a:ext uri="{FF2B5EF4-FFF2-40B4-BE49-F238E27FC236}">
+                <a16:creationId xmlns:a16="http://schemas.microsoft.com/office/drawing/2014/main" id="{0D7606B7-7AEE-445F-FB97-74913C4A4F60}"/>
+              </a:ext>
+            </a:extLst>
+          </p:cNvPr>
+          <p:cNvSpPr/>
+          <p:nvPr/>
+        </p:nvSpPr>
+        <p:spPr>
+          <a:xfrm>
+            <a:off x="4831291" y="2187781"/>
+            <a:ext cx="1586044" cy="948384"/>
+          </a:xfrm>
+          <a:prstGeom prst="wedgeRoundRectCallout">
+            <a:avLst/>
+          </a:prstGeom>
+          <a:solidFill>
+            <a:srgbClr val="FDFDFD"/>
+          </a:solidFill>
+          <a:ln w="19050">
+            <a:solidFill>
+              <a:schemeClr val="tx2">
+                <a:alpha val="40000"/>
+              </a:schemeClr>
+            </a:solidFill>
+          </a:ln>
+        </p:spPr>
+        <p:style>
+          <a:lnRef idx="2">
+            <a:schemeClr val="accent1">
+              <a:shade val="15000"/>
+            </a:schemeClr>
+          </a:lnRef>
+          <a:fillRef idx="1">
+            <a:schemeClr val="accent1"/>
+          </a:fillRef>
+          <a:effectRef idx="0">
+            <a:schemeClr val="accent1"/>
+          </a:effectRef>
+          <a:fontRef idx="minor">
+            <a:schemeClr val="lt1"/>
+          </a:fontRef>
+        </p:style>
+        <p:txBody>
+          <a:bodyPr rtlCol="0" anchor="ctr"/>
+          <a:lstStyle/>
+          <a:p>
+            <a:r>
+              <a:rPr lang="en-US" altLang="ja-JP" sz="1400" dirty="0">
+                <a:solidFill>
+                  <a:schemeClr val="tx1"/>
+                </a:solidFill>
+                <a:latin typeface="メイリオ" panose="020B0604030504040204" pitchFamily="50" charset="-128"/>
+                <a:ea typeface="メイリオ" panose="020B0604030504040204" pitchFamily="50" charset="-128"/>
+              </a:rPr>
+              <a:t>CV</a:t>
+            </a:r>
+            <a:r>
+              <a:rPr lang="ja-JP" altLang="en-US" sz="1400" dirty="0">
+                <a:solidFill>
+                  <a:schemeClr val="tx1"/>
+                </a:solidFill>
+                <a:latin typeface="メイリオ" panose="020B0604030504040204" pitchFamily="50" charset="-128"/>
+                <a:ea typeface="メイリオ" panose="020B0604030504040204" pitchFamily="50" charset="-128"/>
+              </a:rPr>
+              <a:t>完了後</a:t>
+            </a:r>
+            <a:endParaRPr lang="en-US" altLang="ja-JP" sz="1400" dirty="0">
+              <a:solidFill>
+                <a:schemeClr val="tx1"/>
+              </a:solidFill>
+              <a:latin typeface="メイリオ" panose="020B0604030504040204" pitchFamily="50" charset="-128"/>
+              <a:ea typeface="メイリオ" panose="020B0604030504040204" pitchFamily="50" charset="-128"/>
+            </a:endParaRPr>
+          </a:p>
+          <a:p>
+            <a:r>
+              <a:rPr lang="ja-JP" altLang="en-US" sz="1400" dirty="0">
+                <a:solidFill>
+                  <a:schemeClr val="tx1"/>
+                </a:solidFill>
+                <a:latin typeface="メイリオ" panose="020B0604030504040204" pitchFamily="50" charset="-128"/>
+                <a:ea typeface="メイリオ" panose="020B0604030504040204" pitchFamily="50" charset="-128"/>
+              </a:rPr>
+              <a:t>約</a:t>
+            </a:r>
+            <a:r>
+              <a:rPr lang="en-US" altLang="ja-JP" sz="1400" dirty="0">
+                <a:solidFill>
+                  <a:schemeClr val="tx1"/>
+                </a:solidFill>
+                <a:latin typeface="メイリオ" panose="020B0604030504040204" pitchFamily="50" charset="-128"/>
+                <a:ea typeface="メイリオ" panose="020B0604030504040204" pitchFamily="50" charset="-128"/>
+              </a:rPr>
+              <a:t>2~3</a:t>
+            </a:r>
+            <a:r>
+              <a:rPr lang="ja-JP" altLang="en-US" sz="1400" dirty="0">
+                <a:solidFill>
+                  <a:schemeClr val="tx1"/>
+                </a:solidFill>
+                <a:latin typeface="メイリオ" panose="020B0604030504040204" pitchFamily="50" charset="-128"/>
+                <a:ea typeface="メイリオ" panose="020B0604030504040204" pitchFamily="50" charset="-128"/>
+              </a:rPr>
+              <a:t>秒で</a:t>
+            </a:r>
+            <a:br>
+              <a:rPr lang="en-US" altLang="ja-JP" sz="1400" dirty="0">
+                <a:solidFill>
+                  <a:schemeClr val="tx1"/>
+                </a:solidFill>
+                <a:latin typeface="メイリオ" panose="020B0604030504040204" pitchFamily="50" charset="-128"/>
+                <a:ea typeface="メイリオ" panose="020B0604030504040204" pitchFamily="50" charset="-128"/>
+              </a:rPr>
+            </a:br>
+            <a:r>
+              <a:rPr lang="en-US" altLang="ja-JP" sz="1400" dirty="0">
+                <a:solidFill>
+                  <a:schemeClr val="tx1"/>
+                </a:solidFill>
+                <a:latin typeface="メイリオ" panose="020B0604030504040204" pitchFamily="50" charset="-128"/>
+                <a:ea typeface="メイリオ" panose="020B0604030504040204" pitchFamily="50" charset="-128"/>
+              </a:rPr>
+              <a:t>LINE</a:t>
+            </a:r>
+            <a:r>
+              <a:rPr lang="ja-JP" altLang="en-US" sz="1400" dirty="0">
+                <a:solidFill>
+                  <a:schemeClr val="tx1"/>
+                </a:solidFill>
+                <a:latin typeface="メイリオ" panose="020B0604030504040204" pitchFamily="50" charset="-128"/>
+                <a:ea typeface="メイリオ" panose="020B0604030504040204" pitchFamily="50" charset="-128"/>
+              </a:rPr>
+              <a:t>へ自動遷移</a:t>
+            </a:r>
+            <a:endParaRPr lang="en-US" altLang="ja-JP" sz="1400" dirty="0">
+              <a:solidFill>
+                <a:schemeClr val="tx1"/>
+              </a:solidFill>
+              <a:latin typeface="メイリオ" panose="020B0604030504040204" pitchFamily="50" charset="-128"/>
+              <a:ea typeface="メイリオ" panose="020B0604030504040204" pitchFamily="50" charset="-128"/>
+            </a:endParaRPr>
+          </a:p>
+        </p:txBody>
+      </p:sp>
+      <p:cxnSp>
+        <p:nvCxnSpPr>
+          <p:cNvPr id="1052" name="直線矢印コネクタ 1051">
+            <a:extLst>
+              <a:ext uri="{FF2B5EF4-FFF2-40B4-BE49-F238E27FC236}">
+                <a16:creationId xmlns:a16="http://schemas.microsoft.com/office/drawing/2014/main" id="{5B4E7079-E54A-2282-BDB8-487FFE5E8981}"/>
+              </a:ext>
+            </a:extLst>
+          </p:cNvPr>
+          <p:cNvCxnSpPr>
+            <a:cxnSpLocks/>
+          </p:cNvCxnSpPr>
+          <p:nvPr/>
+        </p:nvCxnSpPr>
+        <p:spPr>
+          <a:xfrm flipV="1">
+            <a:off x="7217657" y="4971540"/>
+            <a:ext cx="2192682" cy="599046"/>
+          </a:xfrm>
+          <a:prstGeom prst="straightConnector1">
+            <a:avLst/>
+          </a:prstGeom>
+          <a:ln w="19050">
+            <a:solidFill>
+              <a:srgbClr val="00B050">
+                <a:alpha val="80000"/>
+              </a:srgbClr>
+            </a:solidFill>
+            <a:prstDash val="sysDot"/>
+            <a:tailEnd type="triangle"/>
+          </a:ln>
+        </p:spPr>
+        <p:style>
+          <a:lnRef idx="1">
+            <a:schemeClr val="accent1"/>
+          </a:lnRef>
+          <a:fillRef idx="0">
+            <a:schemeClr val="accent1"/>
+          </a:fillRef>
+          <a:effectRef idx="0">
+            <a:schemeClr val="accent1"/>
+          </a:effectRef>
+          <a:fontRef idx="minor">
+            <a:schemeClr val="tx1"/>
+          </a:fontRef>
+        </p:style>
+      </p:cxnSp>
     </p:spTree>
   </p:cSld>
   <p:clrMapOvr>
@@ -5814,7 +7617,7 @@
           <a:noFill/>
         </p:spPr>
         <p:txBody>
-          <a:bodyPr wrap="square" anchor="ctr" lIns="36000" rIns="36000" tIns="18000" bIns="18000">
+          <a:bodyPr wrap="square" lIns="36000" tIns="18000" rIns="36000" bIns="18000" anchor="ctr">
             <a:spAutoFit/>
           </a:bodyPr>
           <a:lstStyle/>
@@ -5878,7 +7681,7 @@
           </a:fontRef>
         </p:style>
         <p:txBody>
-          <a:bodyPr rtlCol="0" anchor="ctr" wrap="square" lIns="72000" tIns="18000" rIns="72000" bIns="18000"/>
+          <a:bodyPr wrap="square" lIns="72000" tIns="18000" rIns="72000" bIns="18000" rtlCol="0" anchor="ctr"/>
           <a:lstStyle/>
           <a:p>
             <a:pPr algn="ctr">
@@ -5942,10 +7745,11 @@
           </a:fontRef>
         </p:style>
         <p:txBody>
-          <a:bodyPr rtlCol="0" anchor="ctr" wrap="square" lIns="72000" tIns="18000" rIns="72000" bIns="18000"/>
+          <a:bodyPr wrap="square" lIns="72000" tIns="18000" rIns="72000" bIns="18000" rtlCol="0" anchor="ctr"/>
           <a:lstStyle/>
           <a:p>
             <a:pPr algn="ctr"/>
+            <a:endParaRPr/>
           </a:p>
         </p:txBody>
       </p:sp>
@@ -6022,7 +7826,7 @@
           </a:fontRef>
         </p:style>
         <p:txBody>
-          <a:bodyPr rtlCol="0" anchor="ctr" wrap="square" lIns="72000" tIns="18000" rIns="72000" bIns="18000"/>
+          <a:bodyPr wrap="square" lIns="72000" tIns="18000" rIns="72000" bIns="18000" rtlCol="0" anchor="ctr"/>
           <a:lstStyle/>
           <a:p>
             <a:pPr algn="ctr">
@@ -6086,10 +7890,11 @@
           </a:fontRef>
         </p:style>
         <p:txBody>
-          <a:bodyPr rtlCol="0" anchor="ctr" wrap="square" lIns="72000" tIns="18000" rIns="72000" bIns="18000"/>
+          <a:bodyPr wrap="square" lIns="72000" tIns="18000" rIns="72000" bIns="18000" rtlCol="0" anchor="ctr"/>
           <a:lstStyle/>
           <a:p>
             <a:pPr algn="ctr"/>
+            <a:endParaRPr/>
           </a:p>
         </p:txBody>
       </p:sp>
@@ -6166,7 +7971,7 @@
           </a:fontRef>
         </p:style>
         <p:txBody>
-          <a:bodyPr rtlCol="0" anchor="ctr" wrap="square" lIns="72000" tIns="18000" rIns="72000" bIns="18000"/>
+          <a:bodyPr wrap="square" lIns="72000" tIns="18000" rIns="72000" bIns="18000" rtlCol="0" anchor="ctr"/>
           <a:lstStyle/>
           <a:p>
             <a:pPr algn="ctr">
@@ -6230,10 +8035,11 @@
           </a:fontRef>
         </p:style>
         <p:txBody>
-          <a:bodyPr rtlCol="0" anchor="ctr" wrap="square" lIns="72000" tIns="18000" rIns="72000" bIns="18000"/>
+          <a:bodyPr wrap="square" lIns="72000" tIns="18000" rIns="72000" bIns="18000" rtlCol="0" anchor="ctr"/>
           <a:lstStyle/>
           <a:p>
             <a:pPr algn="ctr"/>
+            <a:endParaRPr/>
           </a:p>
         </p:txBody>
       </p:sp>
@@ -6254,7 +8060,7 @@
           <a:noFill/>
         </p:spPr>
         <p:txBody>
-          <a:bodyPr wrap="square" anchor="ctr" lIns="36000" rIns="36000" tIns="18000" bIns="18000">
+          <a:bodyPr wrap="square" lIns="36000" tIns="18000" rIns="36000" bIns="18000" anchor="ctr">
             <a:spAutoFit/>
           </a:bodyPr>
           <a:lstStyle/>
@@ -6339,7 +8145,7 @@
           </a:fontRef>
         </p:style>
         <p:txBody>
-          <a:bodyPr rtlCol="0" anchor="ctr" wrap="square" lIns="72000" tIns="18000" rIns="72000" bIns="18000"/>
+          <a:bodyPr wrap="square" lIns="72000" tIns="18000" rIns="72000" bIns="18000" rtlCol="0" anchor="ctr"/>
           <a:lstStyle/>
           <a:p>
             <a:pPr algn="ctr">
@@ -6437,7 +8243,7 @@
           </a:fontRef>
         </p:style>
         <p:txBody>
-          <a:bodyPr rtlCol="0" anchor="ctr" wrap="square" lIns="72000" tIns="18000" rIns="72000" bIns="18000"/>
+          <a:bodyPr wrap="square" lIns="72000" tIns="18000" rIns="72000" bIns="18000" rtlCol="0" anchor="ctr"/>
           <a:lstStyle/>
           <a:p>
             <a:pPr algn="ctr">
@@ -6535,7 +8341,7 @@
           </a:fontRef>
         </p:style>
         <p:txBody>
-          <a:bodyPr rtlCol="0" anchor="ctr" wrap="square" lIns="72000" tIns="18000" rIns="72000" bIns="18000"/>
+          <a:bodyPr wrap="square" lIns="72000" tIns="18000" rIns="72000" bIns="18000" rtlCol="0" anchor="ctr"/>
           <a:lstStyle/>
           <a:p>
             <a:pPr algn="ctr">
@@ -6633,7 +8439,7 @@
           </a:fontRef>
         </p:style>
         <p:txBody>
-          <a:bodyPr rtlCol="0" anchor="ctr" wrap="square" lIns="72000" tIns="18000" rIns="72000" bIns="18000"/>
+          <a:bodyPr wrap="square" lIns="72000" tIns="18000" rIns="72000" bIns="18000" rtlCol="0" anchor="ctr"/>
           <a:lstStyle/>
           <a:p>
             <a:pPr algn="ctr">
@@ -6675,7 +8481,7 @@
           <a:noFill/>
         </p:spPr>
         <p:txBody>
-          <a:bodyPr wrap="square" anchor="ctr" lIns="36000" rIns="36000" tIns="18000" bIns="18000">
+          <a:bodyPr wrap="square" lIns="36000" tIns="18000" rIns="36000" bIns="18000" anchor="ctr">
             <a:spAutoFit/>
           </a:bodyPr>
           <a:lstStyle/>
@@ -6719,7 +8525,7 @@
           <a:noFill/>
         </p:spPr>
         <p:txBody>
-          <a:bodyPr wrap="square" anchor="ctr" lIns="36000" rIns="36000" tIns="18000" bIns="18000">
+          <a:bodyPr wrap="square" lIns="36000" tIns="18000" rIns="36000" bIns="18000" anchor="ctr">
             <a:spAutoFit/>
           </a:bodyPr>
           <a:lstStyle/>
@@ -6763,7 +8569,7 @@
           <a:noFill/>
         </p:spPr>
         <p:txBody>
-          <a:bodyPr wrap="square" anchor="ctr" lIns="36000" rIns="36000" tIns="18000" bIns="18000">
+          <a:bodyPr wrap="square" lIns="36000" tIns="18000" rIns="36000" bIns="18000" anchor="ctr">
             <a:spAutoFit/>
           </a:bodyPr>
           <a:lstStyle/>
@@ -6842,7 +8648,7 @@
           <a:noFill/>
         </p:spPr>
         <p:txBody>
-          <a:bodyPr wrap="square" anchor="t" lIns="36000" rIns="36000" tIns="18000" bIns="18000">
+          <a:bodyPr wrap="square" lIns="36000" tIns="18000" rIns="36000" bIns="18000" anchor="t">
             <a:spAutoFit/>
           </a:bodyPr>
           <a:lstStyle/>
@@ -6886,7 +8692,7 @@
           <a:noFill/>
         </p:spPr>
         <p:txBody>
-          <a:bodyPr wrap="square" anchor="ctr" lIns="36000" rIns="36000" tIns="18000" bIns="18000">
+          <a:bodyPr wrap="square" lIns="36000" tIns="18000" rIns="36000" bIns="18000" anchor="ctr">
             <a:spAutoFit/>
           </a:bodyPr>
           <a:lstStyle/>
@@ -6930,7 +8736,7 @@
           <a:noFill/>
         </p:spPr>
         <p:txBody>
-          <a:bodyPr wrap="square" anchor="ctr" lIns="36000" rIns="36000" tIns="18000" bIns="18000">
+          <a:bodyPr wrap="square" lIns="36000" tIns="18000" rIns="36000" bIns="18000" anchor="ctr">
             <a:spAutoFit/>
           </a:bodyPr>
           <a:lstStyle/>
@@ -6974,7 +8780,7 @@
           <a:noFill/>
         </p:spPr>
         <p:txBody>
-          <a:bodyPr wrap="square" anchor="t" lIns="36000" rIns="36000" tIns="18000" bIns="18000">
+          <a:bodyPr wrap="square" lIns="36000" tIns="18000" rIns="36000" bIns="18000" anchor="t">
             <a:spAutoFit/>
           </a:bodyPr>
           <a:lstStyle/>
@@ -9150,10 +10956,11 @@
           </a:fontRef>
         </p:style>
         <p:txBody>
-          <a:bodyPr rtlCol="0" anchor="ctr" wrap="square" lIns="72000" tIns="18000" rIns="72000" bIns="18000"/>
+          <a:bodyPr wrap="square" lIns="72000" tIns="18000" rIns="72000" bIns="18000" rtlCol="0" anchor="ctr"/>
           <a:lstStyle/>
           <a:p>
             <a:pPr algn="ctr"/>
+            <a:endParaRPr/>
           </a:p>
         </p:txBody>
       </p:sp>
@@ -9174,7 +10981,7 @@
           <a:noFill/>
         </p:spPr>
         <p:txBody>
-          <a:bodyPr wrap="square" anchor="ctr" lIns="36000" rIns="36000" tIns="18000" bIns="18000">
+          <a:bodyPr wrap="square" lIns="36000" tIns="18000" rIns="36000" bIns="18000" anchor="ctr">
             <a:spAutoFit/>
           </a:bodyPr>
           <a:lstStyle/>
@@ -9240,10 +11047,11 @@
           </a:fontRef>
         </p:style>
         <p:txBody>
-          <a:bodyPr rtlCol="0" anchor="ctr" wrap="square" lIns="72000" tIns="18000" rIns="72000" bIns="18000"/>
+          <a:bodyPr wrap="square" lIns="72000" tIns="18000" rIns="72000" bIns="18000" rtlCol="0" anchor="ctr"/>
           <a:lstStyle/>
           <a:p>
             <a:pPr algn="ctr"/>
+            <a:endParaRPr/>
           </a:p>
         </p:txBody>
       </p:sp>
@@ -9264,7 +11072,7 @@
           <a:noFill/>
         </p:spPr>
         <p:txBody>
-          <a:bodyPr wrap="square" anchor="ctr" lIns="36000" rIns="36000" tIns="18000" bIns="18000">
+          <a:bodyPr wrap="square" lIns="36000" tIns="18000" rIns="36000" bIns="18000" anchor="ctr">
             <a:spAutoFit/>
           </a:bodyPr>
           <a:lstStyle/>
@@ -9330,10 +11138,11 @@
           </a:fontRef>
         </p:style>
         <p:txBody>
-          <a:bodyPr rtlCol="0" anchor="ctr" wrap="square" lIns="72000" tIns="18000" rIns="72000" bIns="18000"/>
+          <a:bodyPr wrap="square" lIns="72000" tIns="18000" rIns="72000" bIns="18000" rtlCol="0" anchor="ctr"/>
           <a:lstStyle/>
           <a:p>
             <a:pPr algn="ctr"/>
+            <a:endParaRPr/>
           </a:p>
         </p:txBody>
       </p:sp>
@@ -9354,7 +11163,7 @@
           <a:noFill/>
         </p:spPr>
         <p:txBody>
-          <a:bodyPr wrap="square" anchor="ctr" lIns="36000" rIns="36000" tIns="18000" bIns="18000">
+          <a:bodyPr wrap="square" lIns="36000" tIns="18000" rIns="36000" bIns="18000" anchor="ctr">
             <a:spAutoFit/>
           </a:bodyPr>
           <a:lstStyle/>
@@ -9420,10 +11229,11 @@
           </a:fontRef>
         </p:style>
         <p:txBody>
-          <a:bodyPr rtlCol="0" anchor="ctr" wrap="square" lIns="72000" tIns="18000" rIns="72000" bIns="18000"/>
+          <a:bodyPr wrap="square" lIns="72000" tIns="18000" rIns="72000" bIns="18000" rtlCol="0" anchor="ctr"/>
           <a:lstStyle/>
           <a:p>
             <a:pPr algn="ctr"/>
+            <a:endParaRPr/>
           </a:p>
         </p:txBody>
       </p:sp>
@@ -9444,7 +11254,7 @@
           <a:noFill/>
         </p:spPr>
         <p:txBody>
-          <a:bodyPr wrap="square" anchor="ctr" lIns="36000" rIns="36000" tIns="18000" bIns="18000">
+          <a:bodyPr wrap="square" lIns="36000" tIns="18000" rIns="36000" bIns="18000" anchor="ctr">
             <a:spAutoFit/>
           </a:bodyPr>
           <a:lstStyle/>
@@ -9512,7 +11322,7 @@
           </a:fontRef>
         </p:style>
         <p:txBody>
-          <a:bodyPr rtlCol="0" anchor="ctr" wrap="square" lIns="18000" tIns="0" rIns="18000" bIns="0"/>
+          <a:bodyPr wrap="square" lIns="18000" tIns="0" rIns="18000" bIns="0" rtlCol="0" anchor="ctr"/>
           <a:lstStyle/>
           <a:p>
             <a:pPr algn="ctr">
@@ -9578,7 +11388,7 @@
           </a:fontRef>
         </p:style>
         <p:txBody>
-          <a:bodyPr rtlCol="0" anchor="ctr" wrap="square" lIns="18000" tIns="0" rIns="18000" bIns="0"/>
+          <a:bodyPr wrap="square" lIns="18000" tIns="0" rIns="18000" bIns="0" rtlCol="0" anchor="ctr"/>
           <a:lstStyle/>
           <a:p>
             <a:pPr algn="ctr">
@@ -9644,7 +11454,7 @@
           </a:fontRef>
         </p:style>
         <p:txBody>
-          <a:bodyPr rtlCol="0" anchor="ctr" wrap="square" lIns="18000" tIns="0" rIns="18000" bIns="0"/>
+          <a:bodyPr wrap="square" lIns="18000" tIns="0" rIns="18000" bIns="0" rtlCol="0" anchor="ctr"/>
           <a:lstStyle/>
           <a:p>
             <a:pPr algn="ctr">
@@ -9710,7 +11520,7 @@
           </a:fontRef>
         </p:style>
         <p:txBody>
-          <a:bodyPr rtlCol="0" anchor="ctr" wrap="square" lIns="18000" tIns="0" rIns="18000" bIns="0"/>
+          <a:bodyPr wrap="square" lIns="18000" tIns="0" rIns="18000" bIns="0" rtlCol="0" anchor="ctr"/>
           <a:lstStyle/>
           <a:p>
             <a:pPr algn="ctr">
@@ -9776,7 +11586,7 @@
           </a:fontRef>
         </p:style>
         <p:txBody>
-          <a:bodyPr rtlCol="0" anchor="ctr" wrap="square" lIns="18000" tIns="0" rIns="18000" bIns="0"/>
+          <a:bodyPr wrap="square" lIns="18000" tIns="0" rIns="18000" bIns="0" rtlCol="0" anchor="ctr"/>
           <a:lstStyle/>
           <a:p>
             <a:pPr algn="ctr">
@@ -9842,7 +11652,7 @@
           </a:fontRef>
         </p:style>
         <p:txBody>
-          <a:bodyPr rtlCol="0" anchor="ctr" wrap="square" lIns="18000" tIns="0" rIns="18000" bIns="0"/>
+          <a:bodyPr wrap="square" lIns="18000" tIns="0" rIns="18000" bIns="0" rtlCol="0" anchor="ctr"/>
           <a:lstStyle/>
           <a:p>
             <a:pPr algn="ctr">
@@ -9908,7 +11718,7 @@
           </a:fontRef>
         </p:style>
         <p:txBody>
-          <a:bodyPr rtlCol="0" anchor="ctr" wrap="square" lIns="18000" tIns="0" rIns="18000" bIns="0"/>
+          <a:bodyPr wrap="square" lIns="18000" tIns="0" rIns="18000" bIns="0" rtlCol="0" anchor="ctr"/>
           <a:lstStyle/>
           <a:p>
             <a:pPr algn="ctr">
@@ -9974,7 +11784,7 @@
           </a:fontRef>
         </p:style>
         <p:txBody>
-          <a:bodyPr rtlCol="0" anchor="ctr" wrap="square" lIns="18000" tIns="0" rIns="18000" bIns="0"/>
+          <a:bodyPr wrap="square" lIns="18000" tIns="0" rIns="18000" bIns="0" rtlCol="0" anchor="ctr"/>
           <a:lstStyle/>
           <a:p>
             <a:pPr algn="ctr">
@@ -10040,7 +11850,7 @@
           </a:fontRef>
         </p:style>
         <p:txBody>
-          <a:bodyPr rtlCol="0" anchor="ctr" wrap="square" lIns="18000" tIns="0" rIns="18000" bIns="0"/>
+          <a:bodyPr wrap="square" lIns="18000" tIns="0" rIns="18000" bIns="0" rtlCol="0" anchor="ctr"/>
           <a:lstStyle/>
           <a:p>
             <a:pPr algn="ctr">
@@ -10106,7 +11916,7 @@
           </a:fontRef>
         </p:style>
         <p:txBody>
-          <a:bodyPr rtlCol="0" anchor="ctr" wrap="square" lIns="18000" tIns="0" rIns="18000" bIns="0"/>
+          <a:bodyPr wrap="square" lIns="18000" tIns="0" rIns="18000" bIns="0" rtlCol="0" anchor="ctr"/>
           <a:lstStyle/>
           <a:p>
             <a:pPr algn="ctr">
@@ -10172,7 +11982,7 @@
           </a:fontRef>
         </p:style>
         <p:txBody>
-          <a:bodyPr rtlCol="0" anchor="ctr" wrap="square" lIns="18000" tIns="0" rIns="18000" bIns="0"/>
+          <a:bodyPr wrap="square" lIns="18000" tIns="0" rIns="18000" bIns="0" rtlCol="0" anchor="ctr"/>
           <a:lstStyle/>
           <a:p>
             <a:pPr algn="ctr">
@@ -10238,7 +12048,7 @@
           </a:fontRef>
         </p:style>
         <p:txBody>
-          <a:bodyPr rtlCol="0" anchor="ctr" wrap="square" lIns="18000" tIns="0" rIns="18000" bIns="0"/>
+          <a:bodyPr wrap="square" lIns="18000" tIns="0" rIns="18000" bIns="0" rtlCol="0" anchor="ctr"/>
           <a:lstStyle/>
           <a:p>
             <a:pPr algn="ctr">
@@ -10280,7 +12090,7 @@
           <a:noFill/>
         </p:spPr>
         <p:txBody>
-          <a:bodyPr wrap="square" anchor="ctr" lIns="36000" rIns="36000" tIns="18000" bIns="18000">
+          <a:bodyPr wrap="square" lIns="36000" tIns="18000" rIns="36000" bIns="18000" anchor="ctr">
             <a:spAutoFit/>
           </a:bodyPr>
           <a:lstStyle/>
@@ -10430,7 +12240,7 @@
           <a:noFill/>
         </p:spPr>
         <p:txBody>
-          <a:bodyPr wrap="square" anchor="ctr" lIns="36000" rIns="36000" tIns="18000" bIns="18000">
+          <a:bodyPr wrap="square" lIns="36000" tIns="18000" rIns="36000" bIns="18000" anchor="ctr">
             <a:spAutoFit/>
           </a:bodyPr>
           <a:lstStyle/>
@@ -10465,7 +12275,7 @@
         </p:nvCxnSpPr>
         <p:spPr>
           <a:xfrm>
-            <a:off x="792000" y="4932000"/>
+            <a:off x="792000" y="4878000"/>
             <a:ext cx="10620000" cy="0"/>
           </a:xfrm>
           <a:prstGeom prst="line">
@@ -10494,14 +12304,59 @@
       </p:cxnSp>
       <p:sp>
         <p:nvSpPr>
-          <p:cNvPr id="32" name="TextBox 31"/>
+          <p:cNvPr id="32" name="Rectangle 31"/>
+          <p:cNvSpPr/>
+          <p:nvPr/>
+        </p:nvSpPr>
+        <p:spPr>
+          <a:xfrm>
+            <a:off x="792000" y="5029200"/>
+            <a:ext cx="64800" cy="180000"/>
+          </a:xfrm>
+          <a:prstGeom prst="rect">
+            <a:avLst/>
+          </a:prstGeom>
+          <a:solidFill>
+            <a:srgbClr val="06C755"/>
+          </a:solidFill>
+          <a:ln>
+            <a:noFill/>
+          </a:ln>
+          <a:effectLst/>
+        </p:spPr>
+        <p:style>
+          <a:lnRef idx="1">
+            <a:schemeClr val="accent1"/>
+          </a:lnRef>
+          <a:fillRef idx="3">
+            <a:schemeClr val="accent1"/>
+          </a:fillRef>
+          <a:effectRef idx="0">
+            <a:schemeClr val="accent1"/>
+          </a:effectRef>
+          <a:fontRef idx="minor">
+            <a:schemeClr val="lt1"/>
+          </a:fontRef>
+        </p:style>
+        <p:txBody>
+          <a:bodyPr wrap="square" lIns="72000" tIns="18000" rIns="72000" bIns="18000" rtlCol="0" anchor="ctr"/>
+          <a:lstStyle/>
+          <a:p>
+            <a:pPr algn="ctr"/>
+            <a:endParaRPr/>
+          </a:p>
+        </p:txBody>
+      </p:sp>
+      <p:sp>
+        <p:nvSpPr>
+          <p:cNvPr id="33" name="TextBox 32"/>
           <p:cNvSpPr txBox="1"/>
           <p:nvPr/>
         </p:nvSpPr>
         <p:spPr>
           <a:xfrm>
-            <a:off x="792000" y="5040000"/>
-            <a:ext cx="792000" cy="648000"/>
+            <a:off x="918000" y="4986000"/>
+            <a:ext cx="5040000" cy="270000"/>
           </a:xfrm>
           <a:prstGeom prst="rect">
             <a:avLst/>
@@ -10509,7 +12364,7 @@
           <a:noFill/>
         </p:spPr>
         <p:txBody>
-          <a:bodyPr wrap="square" anchor="ctr" lIns="36000" rIns="36000" tIns="18000" bIns="18000">
+          <a:bodyPr wrap="square" lIns="36000" tIns="18000" rIns="36000" bIns="18000" anchor="ctr">
             <a:spAutoFit/>
           </a:bodyPr>
           <a:lstStyle/>
@@ -10523,7 +12378,7 @@
               </a:spcAft>
             </a:pPr>
             <a:r>
-              <a:rPr sz="1300" b="1">
+              <a:rPr sz="1150" b="1">
                 <a:solidFill>
                   <a:srgbClr val="1F285A"/>
                 </a:solidFill>
@@ -10531,27 +12386,172 @@
                 <a:ea typeface="メイリオ"/>
                 <a:cs typeface="メイリオ"/>
               </a:rPr>
-              <a:t>費用</a:t>
-            </a:r>
-          </a:p>
-        </p:txBody>
-      </p:sp>
-      <p:sp>
-        <p:nvSpPr>
-          <p:cNvPr id="33" name="Rectangle 32"/>
+              <a:t>① サンクスLINE誘導ツール｜費用目安</a:t>
+            </a:r>
+          </a:p>
+        </p:txBody>
+      </p:sp>
+      <p:sp>
+        <p:nvSpPr>
+          <p:cNvPr id="34" name="TextBox 33"/>
+          <p:cNvSpPr txBox="1"/>
+          <p:nvPr/>
+        </p:nvSpPr>
+        <p:spPr>
+          <a:xfrm>
+            <a:off x="792000" y="5292000"/>
+            <a:ext cx="2583000" cy="486000"/>
+          </a:xfrm>
+          <a:prstGeom prst="rect">
+            <a:avLst/>
+          </a:prstGeom>
+          <a:noFill/>
+        </p:spPr>
+        <p:txBody>
+          <a:bodyPr wrap="square" lIns="36000" tIns="10800" rIns="36000" bIns="10800" anchor="ctr">
+            <a:spAutoFit/>
+          </a:bodyPr>
+          <a:lstStyle/>
+          <a:p>
+            <a:pPr algn="ctr">
+              <a:lnSpc>
+                <a:spcPct val="105000"/>
+              </a:lnSpc>
+              <a:spcAft>
+                <a:spcPts val="200"/>
+              </a:spcAft>
+            </a:pPr>
+            <a:r>
+              <a:rPr sz="950" b="0">
+                <a:solidFill>
+                  <a:srgbClr val="7F7F7F"/>
+                </a:solidFill>
+                <a:latin typeface="メイリオ"/>
+                <a:ea typeface="メイリオ"/>
+                <a:cs typeface="メイリオ"/>
+              </a:rPr>
+              <a:t>初期　</a:t>
+            </a:r>
+            <a:r>
+              <a:rPr sz="1600" b="1">
+                <a:solidFill>
+                  <a:srgbClr val="1F285A"/>
+                </a:solidFill>
+                <a:latin typeface="メイリオ"/>
+                <a:ea typeface="メイリオ"/>
+                <a:cs typeface="メイリオ"/>
+              </a:rPr>
+              <a:t>15万円</a:t>
+            </a:r>
+          </a:p>
+        </p:txBody>
+      </p:sp>
+      <p:cxnSp>
+        <p:nvCxnSpPr>
+          <p:cNvPr id="35" name="Connector 34"/>
+          <p:cNvCxnSpPr/>
+          <p:nvPr/>
+        </p:nvCxnSpPr>
+        <p:spPr>
+          <a:xfrm>
+            <a:off x="3375000" y="5364000"/>
+            <a:ext cx="0" cy="342000"/>
+          </a:xfrm>
+          <a:prstGeom prst="line">
+            <a:avLst/>
+          </a:prstGeom>
+          <a:ln w="9525">
+            <a:solidFill>
+              <a:srgbClr val="D9D9D9"/>
+            </a:solidFill>
+          </a:ln>
+        </p:spPr>
+        <p:style>
+          <a:lnRef idx="2">
+            <a:schemeClr val="accent1"/>
+          </a:lnRef>
+          <a:fillRef idx="0">
+            <a:schemeClr val="accent1"/>
+          </a:fillRef>
+          <a:effectRef idx="0">
+            <a:schemeClr val="accent1"/>
+          </a:effectRef>
+          <a:fontRef idx="minor">
+            <a:schemeClr val="tx1"/>
+          </a:fontRef>
+        </p:style>
+      </p:cxnSp>
+      <p:sp>
+        <p:nvSpPr>
+          <p:cNvPr id="36" name="TextBox 35"/>
+          <p:cNvSpPr txBox="1"/>
+          <p:nvPr/>
+        </p:nvSpPr>
+        <p:spPr>
+          <a:xfrm>
+            <a:off x="3375000" y="5292000"/>
+            <a:ext cx="2583000" cy="486000"/>
+          </a:xfrm>
+          <a:prstGeom prst="rect">
+            <a:avLst/>
+          </a:prstGeom>
+          <a:noFill/>
+        </p:spPr>
+        <p:txBody>
+          <a:bodyPr wrap="square" lIns="36000" tIns="10800" rIns="36000" bIns="10800" anchor="ctr">
+            <a:spAutoFit/>
+          </a:bodyPr>
+          <a:lstStyle/>
+          <a:p>
+            <a:pPr algn="ctr">
+              <a:lnSpc>
+                <a:spcPct val="105000"/>
+              </a:lnSpc>
+              <a:spcAft>
+                <a:spcPts val="200"/>
+              </a:spcAft>
+            </a:pPr>
+            <a:r>
+              <a:rPr sz="950" b="0">
+                <a:solidFill>
+                  <a:srgbClr val="7F7F7F"/>
+                </a:solidFill>
+                <a:latin typeface="メイリオ"/>
+                <a:ea typeface="メイリオ"/>
+                <a:cs typeface="メイリオ"/>
+              </a:rPr>
+              <a:t>月額　</a:t>
+            </a:r>
+            <a:r>
+              <a:rPr sz="1600" b="1">
+                <a:solidFill>
+                  <a:srgbClr val="1F285A"/>
+                </a:solidFill>
+                <a:latin typeface="メイリオ"/>
+                <a:ea typeface="メイリオ"/>
+                <a:cs typeface="メイリオ"/>
+              </a:rPr>
+              <a:t>3万円〜</a:t>
+            </a:r>
+          </a:p>
+        </p:txBody>
+      </p:sp>
+      <p:sp>
+        <p:nvSpPr>
+          <p:cNvPr id="37" name="Rectangle 36"/>
           <p:cNvSpPr/>
           <p:nvPr/>
         </p:nvSpPr>
         <p:spPr>
           <a:xfrm>
-            <a:off x="1584000" y="5040000"/>
-            <a:ext cx="2088000" cy="648000"/>
+            <a:off x="6246000" y="5029200"/>
+            <a:ext cx="64800" cy="180000"/>
           </a:xfrm>
           <a:prstGeom prst="rect">
             <a:avLst/>
           </a:prstGeom>
           <a:solidFill>
-            <a:srgbClr val="06C755"/>
+            <a:srgbClr val="1F285A"/>
           </a:solidFill>
           <a:ln>
             <a:noFill/>
@@ -10573,41 +12573,24 @@
           </a:fontRef>
         </p:style>
         <p:txBody>
-          <a:bodyPr rtlCol="0" anchor="ctr" wrap="square" lIns="72000" tIns="18000" rIns="72000" bIns="18000"/>
+          <a:bodyPr wrap="square" lIns="72000" tIns="18000" rIns="72000" bIns="18000" rtlCol="0" anchor="ctr"/>
           <a:lstStyle/>
           <a:p>
-            <a:pPr algn="ctr">
-              <a:lnSpc>
-                <a:spcPct val="110000"/>
-              </a:lnSpc>
-              <a:spcAft>
-                <a:spcPts val="0"/>
-              </a:spcAft>
-            </a:pPr>
-            <a:r>
-              <a:rPr sz="1100" b="1">
-                <a:solidFill>
-                  <a:srgbClr val="FFFFFF"/>
-                </a:solidFill>
-                <a:latin typeface="メイリオ"/>
-                <a:ea typeface="メイリオ"/>
-                <a:cs typeface="メイリオ"/>
-              </a:rPr>
-              <a:t>① サンクスLINE誘導ツール</a:t>
-            </a:r>
-          </a:p>
-        </p:txBody>
-      </p:sp>
-      <p:sp>
-        <p:nvSpPr>
-          <p:cNvPr id="34" name="TextBox 33"/>
+            <a:pPr algn="ctr"/>
+            <a:endParaRPr/>
+          </a:p>
+        </p:txBody>
+      </p:sp>
+      <p:sp>
+        <p:nvSpPr>
+          <p:cNvPr id="38" name="TextBox 37"/>
           <p:cNvSpPr txBox="1"/>
           <p:nvPr/>
         </p:nvSpPr>
         <p:spPr>
           <a:xfrm>
-            <a:off x="3708000" y="5040000"/>
-            <a:ext cx="2681999" cy="648000"/>
+            <a:off x="6372000" y="4986000"/>
+            <a:ext cx="5040000" cy="270000"/>
           </a:xfrm>
           <a:prstGeom prst="rect">
             <a:avLst/>
@@ -10615,7 +12598,7 @@
           <a:noFill/>
         </p:spPr>
         <p:txBody>
-          <a:bodyPr wrap="square" anchor="ctr" lIns="36000" rIns="36000" tIns="18000" bIns="18000">
+          <a:bodyPr wrap="square" lIns="36000" tIns="18000" rIns="36000" bIns="18000" anchor="ctr">
             <a:spAutoFit/>
           </a:bodyPr>
           <a:lstStyle/>
@@ -10629,91 +12612,209 @@
               </a:spcAft>
             </a:pPr>
             <a:r>
-              <a:rPr sz="1050" b="1">
-                <a:solidFill>
-                  <a:srgbClr val="333333"/>
+              <a:rPr sz="1150" b="1">
+                <a:solidFill>
+                  <a:srgbClr val="1F285A"/>
                 </a:solidFill>
                 <a:latin typeface="メイリオ"/>
                 <a:ea typeface="メイリオ"/>
                 <a:cs typeface="メイリオ"/>
               </a:rPr>
-              <a:t>ツール費用（初期・月額）※2枚目に記載</a:t>
-            </a:r>
-          </a:p>
-        </p:txBody>
-      </p:sp>
-      <p:sp>
-        <p:nvSpPr>
-          <p:cNvPr id="35" name="Rectangle 34"/>
-          <p:cNvSpPr/>
-          <p:nvPr/>
-        </p:nvSpPr>
-        <p:spPr>
-          <a:xfrm>
-            <a:off x="6606000" y="5040000"/>
-            <a:ext cx="2088000" cy="648000"/>
+              <a:t>② LINE運用コンサル｜費用目安</a:t>
+            </a:r>
+          </a:p>
+        </p:txBody>
+      </p:sp>
+      <p:sp>
+        <p:nvSpPr>
+          <p:cNvPr id="39" name="TextBox 38"/>
+          <p:cNvSpPr txBox="1"/>
+          <p:nvPr/>
+        </p:nvSpPr>
+        <p:spPr>
+          <a:xfrm>
+            <a:off x="6246000" y="5292000"/>
+            <a:ext cx="1722000" cy="486000"/>
           </a:xfrm>
           <a:prstGeom prst="rect">
             <a:avLst/>
           </a:prstGeom>
-          <a:solidFill>
-            <a:srgbClr val="1F285A"/>
-          </a:solidFill>
-          <a:ln>
-            <a:noFill/>
+          <a:noFill/>
+        </p:spPr>
+        <p:txBody>
+          <a:bodyPr wrap="square" lIns="36000" tIns="10800" rIns="36000" bIns="10800" anchor="ctr">
+            <a:spAutoFit/>
+          </a:bodyPr>
+          <a:lstStyle/>
+          <a:p>
+            <a:pPr algn="ctr">
+              <a:lnSpc>
+                <a:spcPct val="105000"/>
+              </a:lnSpc>
+              <a:spcAft>
+                <a:spcPts val="200"/>
+              </a:spcAft>
+            </a:pPr>
+            <a:r>
+              <a:rPr sz="950" b="0">
+                <a:solidFill>
+                  <a:srgbClr val="7F7F7F"/>
+                </a:solidFill>
+                <a:latin typeface="メイリオ"/>
+                <a:ea typeface="メイリオ"/>
+                <a:cs typeface="メイリオ"/>
+              </a:rPr>
+              <a:t>初期　</a:t>
+            </a:r>
+            <a:r>
+              <a:rPr sz="1600" b="1">
+                <a:solidFill>
+                  <a:srgbClr val="1F285A"/>
+                </a:solidFill>
+                <a:latin typeface="メイリオ"/>
+                <a:ea typeface="メイリオ"/>
+                <a:cs typeface="メイリオ"/>
+              </a:rPr>
+              <a:t>10万円〜</a:t>
+            </a:r>
+          </a:p>
+        </p:txBody>
+      </p:sp>
+      <p:cxnSp>
+        <p:nvCxnSpPr>
+          <p:cNvPr id="40" name="Connector 39"/>
+          <p:cNvCxnSpPr/>
+          <p:nvPr/>
+        </p:nvCxnSpPr>
+        <p:spPr>
+          <a:xfrm>
+            <a:off x="7968000" y="5364000"/>
+            <a:ext cx="0" cy="342000"/>
+          </a:xfrm>
+          <a:prstGeom prst="line">
+            <a:avLst/>
+          </a:prstGeom>
+          <a:ln w="9525">
+            <a:solidFill>
+              <a:srgbClr val="D9D9D9"/>
+            </a:solidFill>
           </a:ln>
-          <a:effectLst/>
         </p:spPr>
         <p:style>
-          <a:lnRef idx="1">
+          <a:lnRef idx="2">
             <a:schemeClr val="accent1"/>
           </a:lnRef>
-          <a:fillRef idx="3">
+          <a:fillRef idx="0">
             <a:schemeClr val="accent1"/>
           </a:fillRef>
           <a:effectRef idx="0">
             <a:schemeClr val="accent1"/>
           </a:effectRef>
           <a:fontRef idx="minor">
-            <a:schemeClr val="lt1"/>
+            <a:schemeClr val="tx1"/>
           </a:fontRef>
         </p:style>
-        <p:txBody>
-          <a:bodyPr rtlCol="0" anchor="ctr" wrap="square" lIns="72000" tIns="18000" rIns="72000" bIns="18000"/>
+      </p:cxnSp>
+      <p:sp>
+        <p:nvSpPr>
+          <p:cNvPr id="41" name="TextBox 40"/>
+          <p:cNvSpPr txBox="1"/>
+          <p:nvPr/>
+        </p:nvSpPr>
+        <p:spPr>
+          <a:xfrm>
+            <a:off x="7968000" y="5292000"/>
+            <a:ext cx="1722000" cy="486000"/>
+          </a:xfrm>
+          <a:prstGeom prst="rect">
+            <a:avLst/>
+          </a:prstGeom>
+          <a:noFill/>
+        </p:spPr>
+        <p:txBody>
+          <a:bodyPr wrap="square" lIns="36000" tIns="10800" rIns="36000" bIns="10800" anchor="ctr">
+            <a:spAutoFit/>
+          </a:bodyPr>
           <a:lstStyle/>
           <a:p>
             <a:pPr algn="ctr">
               <a:lnSpc>
-                <a:spcPct val="110000"/>
+                <a:spcPct val="105000"/>
               </a:lnSpc>
               <a:spcAft>
-                <a:spcPts val="0"/>
+                <a:spcPts val="200"/>
               </a:spcAft>
             </a:pPr>
             <a:r>
-              <a:rPr sz="1100" b="1">
-                <a:solidFill>
-                  <a:srgbClr val="FFFFFF"/>
+              <a:rPr sz="950" b="0">
+                <a:solidFill>
+                  <a:srgbClr val="7F7F7F"/>
                 </a:solidFill>
                 <a:latin typeface="メイリオ"/>
                 <a:ea typeface="メイリオ"/>
                 <a:cs typeface="メイリオ"/>
               </a:rPr>
-              <a:t>②〜④ LINE運用コンサル</a:t>
-            </a:r>
-          </a:p>
-        </p:txBody>
-      </p:sp>
-      <p:sp>
-        <p:nvSpPr>
-          <p:cNvPr id="36" name="TextBox 35"/>
+              <a:t>月額　</a:t>
+            </a:r>
+            <a:r>
+              <a:rPr sz="1600" b="1">
+                <a:solidFill>
+                  <a:srgbClr val="1F285A"/>
+                </a:solidFill>
+                <a:latin typeface="メイリオ"/>
+                <a:ea typeface="メイリオ"/>
+                <a:cs typeface="メイリオ"/>
+              </a:rPr>
+              <a:t>20万円〜</a:t>
+            </a:r>
+          </a:p>
+        </p:txBody>
+      </p:sp>
+      <p:cxnSp>
+        <p:nvCxnSpPr>
+          <p:cNvPr id="42" name="Connector 41"/>
+          <p:cNvCxnSpPr/>
+          <p:nvPr/>
+        </p:nvCxnSpPr>
+        <p:spPr>
+          <a:xfrm>
+            <a:off x="9690000" y="5364000"/>
+            <a:ext cx="0" cy="342000"/>
+          </a:xfrm>
+          <a:prstGeom prst="line">
+            <a:avLst/>
+          </a:prstGeom>
+          <a:ln w="9525">
+            <a:solidFill>
+              <a:srgbClr val="D9D9D9"/>
+            </a:solidFill>
+          </a:ln>
+        </p:spPr>
+        <p:style>
+          <a:lnRef idx="2">
+            <a:schemeClr val="accent1"/>
+          </a:lnRef>
+          <a:fillRef idx="0">
+            <a:schemeClr val="accent1"/>
+          </a:fillRef>
+          <a:effectRef idx="0">
+            <a:schemeClr val="accent1"/>
+          </a:effectRef>
+          <a:fontRef idx="minor">
+            <a:schemeClr val="tx1"/>
+          </a:fontRef>
+        </p:style>
+      </p:cxnSp>
+      <p:sp>
+        <p:nvSpPr>
+          <p:cNvPr id="43" name="TextBox 42"/>
           <p:cNvSpPr txBox="1"/>
           <p:nvPr/>
         </p:nvSpPr>
         <p:spPr>
           <a:xfrm>
-            <a:off x="8730000" y="5040000"/>
-            <a:ext cx="2681999" cy="648000"/>
+            <a:off x="9690000" y="5292000"/>
+            <a:ext cx="1722000" cy="486000"/>
           </a:xfrm>
           <a:prstGeom prst="rect">
             <a:avLst/>
@@ -10721,7 +12822,97 @@
           <a:noFill/>
         </p:spPr>
         <p:txBody>
-          <a:bodyPr wrap="square" anchor="ctr" lIns="36000" rIns="36000" tIns="18000" bIns="18000">
+          <a:bodyPr wrap="square" lIns="36000" tIns="10800" rIns="36000" bIns="10800" anchor="ctr">
+            <a:spAutoFit/>
+          </a:bodyPr>
+          <a:lstStyle/>
+          <a:p>
+            <a:pPr algn="ctr">
+              <a:lnSpc>
+                <a:spcPct val="105000"/>
+              </a:lnSpc>
+              <a:spcAft>
+                <a:spcPts val="200"/>
+              </a:spcAft>
+            </a:pPr>
+            <a:r>
+              <a:rPr sz="950" b="0">
+                <a:solidFill>
+                  <a:srgbClr val="7F7F7F"/>
+                </a:solidFill>
+                <a:latin typeface="メイリオ"/>
+                <a:ea typeface="メイリオ"/>
+                <a:cs typeface="メイリオ"/>
+              </a:rPr>
+              <a:t>期間　</a:t>
+            </a:r>
+            <a:r>
+              <a:rPr sz="1600" b="1">
+                <a:solidFill>
+                  <a:srgbClr val="1F285A"/>
+                </a:solidFill>
+                <a:latin typeface="メイリオ"/>
+                <a:ea typeface="メイリオ"/>
+                <a:cs typeface="メイリオ"/>
+              </a:rPr>
+              <a:t>6か月〜</a:t>
+            </a:r>
+          </a:p>
+        </p:txBody>
+      </p:sp>
+      <p:cxnSp>
+        <p:nvCxnSpPr>
+          <p:cNvPr id="44" name="Connector 43"/>
+          <p:cNvCxnSpPr/>
+          <p:nvPr/>
+        </p:nvCxnSpPr>
+        <p:spPr>
+          <a:xfrm>
+            <a:off x="6102000" y="4986000"/>
+            <a:ext cx="0" cy="792000"/>
+          </a:xfrm>
+          <a:prstGeom prst="line">
+            <a:avLst/>
+          </a:prstGeom>
+          <a:ln w="9525">
+            <a:solidFill>
+              <a:srgbClr val="D9D9D9"/>
+            </a:solidFill>
+          </a:ln>
+        </p:spPr>
+        <p:style>
+          <a:lnRef idx="2">
+            <a:schemeClr val="accent1"/>
+          </a:lnRef>
+          <a:fillRef idx="0">
+            <a:schemeClr val="accent1"/>
+          </a:fillRef>
+          <a:effectRef idx="0">
+            <a:schemeClr val="accent1"/>
+          </a:effectRef>
+          <a:fontRef idx="minor">
+            <a:schemeClr val="tx1"/>
+          </a:fontRef>
+        </p:style>
+      </p:cxnSp>
+      <p:sp>
+        <p:nvSpPr>
+          <p:cNvPr id="45" name="TextBox 44"/>
+          <p:cNvSpPr txBox="1"/>
+          <p:nvPr/>
+        </p:nvSpPr>
+        <p:spPr>
+          <a:xfrm>
+            <a:off x="792000" y="5814000"/>
+            <a:ext cx="10620000" cy="198000"/>
+          </a:xfrm>
+          <a:prstGeom prst="rect">
+            <a:avLst/>
+          </a:prstGeom>
+          <a:noFill/>
+        </p:spPr>
+        <p:txBody>
+          <a:bodyPr wrap="square" lIns="36000" tIns="18000" rIns="36000" bIns="18000" anchor="t">
             <a:spAutoFit/>
           </a:bodyPr>
           <a:lstStyle/>
@@ -10735,15 +12926,15 @@
               </a:spcAft>
             </a:pPr>
             <a:r>
-              <a:rPr sz="1050" b="1">
-                <a:solidFill>
-                  <a:srgbClr val="333333"/>
+              <a:rPr sz="900" b="0">
+                <a:solidFill>
+                  <a:srgbClr val="7F7F7F"/>
                 </a:solidFill>
                 <a:latin typeface="メイリオ"/>
                 <a:ea typeface="メイリオ"/>
                 <a:cs typeface="メイリオ"/>
               </a:rPr>
-              <a:t>配信本数・範囲に応じて別途お見積もり</a:t>
+              <a:t>※施策内容・配信本数・連携範囲等により、費用は個別にお見積もりいたします。</a:t>
             </a:r>
           </a:p>
         </p:txBody>

--- a/20261007_サンクスLINE誘導のご提案_業界別ver3.0.pptx
+++ b/20261007_サンクスLINE誘導のご提案_業界別ver3.0.pptx
@@ -2733,7 +2733,7 @@
                 <a:ea typeface="メイリオ"/>
                 <a:cs typeface="メイリオ"/>
               </a:rPr>
-              <a:t>広告はCVまで、サンクスLINEはCVの後を担う</a:t>
+              <a:t>広告はCV獲得までのCPA、サンクスLINEはCV獲得後のCPOを改善</a:t>
             </a:r>
             <a:endParaRPr sz="1250" dirty="0">
               <a:solidFill>
@@ -2789,8 +2789,8 @@
         </p:nvSpPr>
         <p:spPr>
           <a:xfrm>
-            <a:off x="792000" y="1800000"/>
-            <a:ext cx="1655999" cy="574200"/>
+            <a:off x="792000" y="1620000"/>
+            <a:ext cx="5094000" cy="468000"/>
           </a:xfrm>
           <a:prstGeom prst="rect">
             <a:avLst/>
@@ -2798,21 +2798,21 @@
           <a:noFill/>
         </p:spPr>
         <p:txBody>
-          <a:bodyPr wrap="square" lIns="36000" tIns="18000" rIns="36000" bIns="18000" anchor="b">
+          <a:bodyPr wrap="square" anchor="ctr" lIns="36000" rIns="36000" tIns="10800" bIns="10800">
             <a:spAutoFit/>
           </a:bodyPr>
           <a:lstStyle/>
           <a:p>
-            <a:pPr algn="l">
+            <a:pPr algn="ctr">
               <a:lnSpc>
-                <a:spcPct val="110000"/>
+                <a:spcPct val="105000"/>
               </a:lnSpc>
               <a:spcAft>
-                <a:spcPts val="0"/>
+                <a:spcPts val="200"/>
               </a:spcAft>
             </a:pPr>
             <a:r>
-              <a:rPr sz="1600" b="1">
+              <a:rPr sz="1300" b="1">
                 <a:solidFill>
                   <a:srgbClr val="1F285A"/>
                 </a:solidFill>
@@ -2820,29 +2820,38 @@
                 <a:ea typeface="メイリオ"/>
                 <a:cs typeface="メイリオ"/>
               </a:rPr>
-              <a:t>CV獲得まで</a:t>
-            </a:r>
-          </a:p>
-        </p:txBody>
-      </p:sp>
-      <p:sp>
-        <p:nvSpPr>
-          <p:cNvPr id="7" name="Rounded Rectangle 6"/>
+              <a:t>CV獲得まで｜</a:t>
+            </a:r>
+            <a:r>
+              <a:rPr sz="2400" b="1">
+                <a:solidFill>
+                  <a:srgbClr val="1F285A"/>
+                </a:solidFill>
+                <a:latin typeface="メイリオ"/>
+                <a:ea typeface="メイリオ"/>
+                <a:cs typeface="メイリオ"/>
+              </a:rPr>
+              <a:t>CPA改善</a:t>
+            </a:r>
+          </a:p>
+        </p:txBody>
+      </p:sp>
+      <p:sp>
+        <p:nvSpPr>
+          <p:cNvPr id="7" name="Rectangle 6"/>
           <p:cNvSpPr/>
           <p:nvPr/>
         </p:nvSpPr>
         <p:spPr>
           <a:xfrm>
-            <a:off x="828000" y="2405520"/>
-            <a:ext cx="936000" cy="251999"/>
-          </a:xfrm>
-          <a:prstGeom prst="roundRect">
-            <a:avLst>
-              <a:gd name="adj" fmla="val 50000"/>
-            </a:avLst>
+            <a:off x="2259000" y="2106000"/>
+            <a:ext cx="2160000" cy="43200"/>
+          </a:xfrm>
+          <a:prstGeom prst="rect">
+            <a:avLst/>
           </a:prstGeom>
           <a:solidFill>
-            <a:srgbClr val="FEF0DE"/>
+            <a:srgbClr val="1F285A"/>
           </a:solidFill>
           <a:ln>
             <a:noFill/>
@@ -2864,7 +2873,51 @@
           </a:fontRef>
         </p:style>
         <p:txBody>
-          <a:bodyPr wrap="square" lIns="36000" tIns="0" rIns="36000" bIns="0" rtlCol="0" anchor="ctr"/>
+          <a:bodyPr rtlCol="0" anchor="ctr" wrap="square" lIns="72000" tIns="18000" rIns="72000" bIns="18000"/>
+          <a:lstStyle/>
+          <a:p>
+            <a:pPr algn="ctr"/>
+          </a:p>
+        </p:txBody>
+      </p:sp>
+      <p:sp>
+        <p:nvSpPr>
+          <p:cNvPr id="8" name="Rectangle 7"/>
+          <p:cNvSpPr/>
+          <p:nvPr/>
+        </p:nvSpPr>
+        <p:spPr>
+          <a:xfrm>
+            <a:off x="1683000" y="2268000"/>
+            <a:ext cx="3311999" cy="396000"/>
+          </a:xfrm>
+          <a:prstGeom prst="rect">
+            <a:avLst/>
+          </a:prstGeom>
+          <a:solidFill>
+            <a:srgbClr val="E4E8F6"/>
+          </a:solidFill>
+          <a:ln>
+            <a:noFill/>
+          </a:ln>
+          <a:effectLst/>
+        </p:spPr>
+        <p:style>
+          <a:lnRef idx="1">
+            <a:schemeClr val="accent1"/>
+          </a:lnRef>
+          <a:fillRef idx="3">
+            <a:schemeClr val="accent1"/>
+          </a:fillRef>
+          <a:effectRef idx="0">
+            <a:schemeClr val="accent1"/>
+          </a:effectRef>
+          <a:fontRef idx="minor">
+            <a:schemeClr val="lt1"/>
+          </a:fontRef>
+        </p:style>
+        <p:txBody>
+          <a:bodyPr rtlCol="0" anchor="ctr" wrap="square" lIns="36000" tIns="0" rIns="36000" bIns="0"/>
           <a:lstStyle/>
           <a:p>
             <a:pPr algn="ctr">
@@ -2876,37 +2929,71 @@
               </a:spcAft>
             </a:pPr>
             <a:r>
-              <a:rPr sz="1050" b="1">
-                <a:solidFill>
-                  <a:srgbClr val="C46A00"/>
+              <a:rPr sz="1250" b="1">
+                <a:solidFill>
+                  <a:srgbClr val="1F285A"/>
                 </a:solidFill>
                 <a:latin typeface="メイリオ"/>
                 <a:ea typeface="メイリオ"/>
                 <a:cs typeface="メイリオ"/>
               </a:rPr>
-              <a:t>AD領域</a:t>
-            </a:r>
-          </a:p>
-        </p:txBody>
-      </p:sp>
-      <p:sp>
-        <p:nvSpPr>
-          <p:cNvPr id="8" name="Pentagon 7"/>
+              <a:t>広告</a:t>
+            </a:r>
+          </a:p>
+        </p:txBody>
+      </p:sp>
+      <p:cxnSp>
+        <p:nvCxnSpPr>
+          <p:cNvPr id="9" name="Connector 8"/>
+          <p:cNvCxnSpPr/>
+          <p:nvPr/>
+        </p:nvCxnSpPr>
+        <p:spPr>
+          <a:xfrm>
+            <a:off x="3339000" y="2682000"/>
+            <a:ext cx="0" cy="108000"/>
+          </a:xfrm>
+          <a:prstGeom prst="line">
+            <a:avLst/>
+          </a:prstGeom>
+          <a:ln w="22225">
+            <a:solidFill>
+              <a:srgbClr val="1F285A"/>
+            </a:solidFill>
+            <a:tailEnd type="triangle" w="med" len="med"/>
+          </a:ln>
+        </p:spPr>
+        <p:style>
+          <a:lnRef idx="2">
+            <a:schemeClr val="accent1"/>
+          </a:lnRef>
+          <a:fillRef idx="0">
+            <a:schemeClr val="accent1"/>
+          </a:fillRef>
+          <a:effectRef idx="0">
+            <a:schemeClr val="accent1"/>
+          </a:effectRef>
+          <a:fontRef idx="minor">
+            <a:schemeClr val="tx1"/>
+          </a:fontRef>
+        </p:style>
+      </p:cxnSp>
+      <p:sp>
+        <p:nvSpPr>
+          <p:cNvPr id="10" name="Rectangle 9"/>
           <p:cNvSpPr/>
           <p:nvPr/>
         </p:nvSpPr>
         <p:spPr>
           <a:xfrm>
-            <a:off x="2556000" y="1800000"/>
-            <a:ext cx="1591807" cy="1044000"/>
-          </a:xfrm>
-          <a:prstGeom prst="homePlate">
-            <a:avLst>
-              <a:gd name="adj" fmla="val 22000"/>
-            </a:avLst>
+            <a:off x="1683000" y="2808000"/>
+            <a:ext cx="3311999" cy="396000"/>
+          </a:xfrm>
+          <a:prstGeom prst="rect">
+            <a:avLst/>
           </a:prstGeom>
           <a:solidFill>
-            <a:srgbClr val="F59B21"/>
+            <a:srgbClr val="E4E8F6"/>
           </a:solidFill>
           <a:ln>
             <a:noFill/>
@@ -2928,34 +3015,7 @@
           </a:fontRef>
         </p:style>
         <p:txBody>
-          <a:bodyPr wrap="square" lIns="72000" tIns="18000" rIns="72000" bIns="18000" rtlCol="0" anchor="ctr"/>
-          <a:lstStyle/>
-          <a:p>
-            <a:pPr algn="ctr"/>
-            <a:endParaRPr/>
-          </a:p>
-        </p:txBody>
-      </p:sp>
-      <p:sp>
-        <p:nvSpPr>
-          <p:cNvPr id="9" name="TextBox 8"/>
-          <p:cNvSpPr txBox="1"/>
-          <p:nvPr/>
-        </p:nvSpPr>
-        <p:spPr>
-          <a:xfrm>
-            <a:off x="2664000" y="1800000"/>
-            <a:ext cx="1285807" cy="1044000"/>
-          </a:xfrm>
-          <a:prstGeom prst="rect">
-            <a:avLst/>
-          </a:prstGeom>
-          <a:noFill/>
-        </p:spPr>
-        <p:txBody>
-          <a:bodyPr wrap="square" lIns="36000" tIns="18000" rIns="36000" bIns="18000" anchor="ctr">
-            <a:spAutoFit/>
-          </a:bodyPr>
+          <a:bodyPr rtlCol="0" anchor="ctr" wrap="square" lIns="36000" tIns="0" rIns="36000" bIns="0"/>
           <a:lstStyle/>
           <a:p>
             <a:pPr algn="ctr">
@@ -2967,37 +3027,71 @@
               </a:spcAft>
             </a:pPr>
             <a:r>
-              <a:rPr sz="1400" b="1">
-                <a:solidFill>
-                  <a:srgbClr val="FFFFFF"/>
+              <a:rPr sz="1250" b="1">
+                <a:solidFill>
+                  <a:srgbClr val="1F285A"/>
                 </a:solidFill>
                 <a:latin typeface="メイリオ"/>
                 <a:ea typeface="メイリオ"/>
                 <a:cs typeface="メイリオ"/>
               </a:rPr>
-              <a:t>広告</a:t>
-            </a:r>
-          </a:p>
-        </p:txBody>
-      </p:sp>
-      <p:sp>
-        <p:nvSpPr>
-          <p:cNvPr id="10" name="Chevron 9"/>
+              <a:t>LP</a:t>
+            </a:r>
+          </a:p>
+        </p:txBody>
+      </p:sp>
+      <p:cxnSp>
+        <p:nvCxnSpPr>
+          <p:cNvPr id="11" name="Connector 10"/>
+          <p:cNvCxnSpPr/>
+          <p:nvPr/>
+        </p:nvCxnSpPr>
+        <p:spPr>
+          <a:xfrm>
+            <a:off x="3339000" y="3222000"/>
+            <a:ext cx="0" cy="108000"/>
+          </a:xfrm>
+          <a:prstGeom prst="line">
+            <a:avLst/>
+          </a:prstGeom>
+          <a:ln w="22225">
+            <a:solidFill>
+              <a:srgbClr val="1F285A"/>
+            </a:solidFill>
+            <a:tailEnd type="triangle" w="med" len="med"/>
+          </a:ln>
+        </p:spPr>
+        <p:style>
+          <a:lnRef idx="2">
+            <a:schemeClr val="accent1"/>
+          </a:lnRef>
+          <a:fillRef idx="0">
+            <a:schemeClr val="accent1"/>
+          </a:fillRef>
+          <a:effectRef idx="0">
+            <a:schemeClr val="accent1"/>
+          </a:effectRef>
+          <a:fontRef idx="minor">
+            <a:schemeClr val="tx1"/>
+          </a:fontRef>
+        </p:style>
+      </p:cxnSp>
+      <p:sp>
+        <p:nvSpPr>
+          <p:cNvPr id="12" name="Rectangle 11"/>
           <p:cNvSpPr/>
           <p:nvPr/>
         </p:nvSpPr>
         <p:spPr>
           <a:xfrm>
-            <a:off x="4021807" y="1800000"/>
-            <a:ext cx="1591807" cy="1044000"/>
-          </a:xfrm>
-          <a:prstGeom prst="chevron">
-            <a:avLst>
-              <a:gd name="adj" fmla="val 22000"/>
-            </a:avLst>
+            <a:off x="1683000" y="3348000"/>
+            <a:ext cx="3311999" cy="396000"/>
+          </a:xfrm>
+          <a:prstGeom prst="rect">
+            <a:avLst/>
           </a:prstGeom>
           <a:solidFill>
-            <a:srgbClr val="FEF0DE"/>
+            <a:srgbClr val="1F285A"/>
           </a:solidFill>
           <a:ln>
             <a:noFill/>
@@ -3019,34 +3113,7 @@
           </a:fontRef>
         </p:style>
         <p:txBody>
-          <a:bodyPr wrap="square" lIns="72000" tIns="18000" rIns="72000" bIns="18000" rtlCol="0" anchor="ctr"/>
-          <a:lstStyle/>
-          <a:p>
-            <a:pPr algn="ctr"/>
-            <a:endParaRPr/>
-          </a:p>
-        </p:txBody>
-      </p:sp>
-      <p:sp>
-        <p:nvSpPr>
-          <p:cNvPr id="11" name="TextBox 10"/>
-          <p:cNvSpPr txBox="1"/>
-          <p:nvPr/>
-        </p:nvSpPr>
-        <p:spPr>
-          <a:xfrm>
-            <a:off x="4255807" y="1800000"/>
-            <a:ext cx="1159807" cy="1044000"/>
-          </a:xfrm>
-          <a:prstGeom prst="rect">
-            <a:avLst/>
-          </a:prstGeom>
-          <a:noFill/>
-        </p:spPr>
-        <p:txBody>
-          <a:bodyPr wrap="square" lIns="36000" tIns="18000" rIns="36000" bIns="18000" anchor="ctr">
-            <a:spAutoFit/>
-          </a:bodyPr>
+          <a:bodyPr rtlCol="0" anchor="ctr" wrap="square" lIns="36000" tIns="0" rIns="36000" bIns="0"/>
           <a:lstStyle/>
           <a:p>
             <a:pPr algn="ctr">
@@ -3058,37 +3125,71 @@
               </a:spcAft>
             </a:pPr>
             <a:r>
-              <a:rPr sz="1400" b="1">
-                <a:solidFill>
-                  <a:srgbClr val="C46A00"/>
+              <a:rPr sz="1250" b="1">
+                <a:solidFill>
+                  <a:srgbClr val="FFFFFF"/>
                 </a:solidFill>
                 <a:latin typeface="メイリオ"/>
                 <a:ea typeface="メイリオ"/>
                 <a:cs typeface="メイリオ"/>
               </a:rPr>
-              <a:t>LP</a:t>
-            </a:r>
-          </a:p>
-        </p:txBody>
-      </p:sp>
-      <p:sp>
-        <p:nvSpPr>
-          <p:cNvPr id="12" name="Chevron 11"/>
+              <a:t>離脱防止 × 成果報酬施策</a:t>
+            </a:r>
+          </a:p>
+        </p:txBody>
+      </p:sp>
+      <p:cxnSp>
+        <p:nvCxnSpPr>
+          <p:cNvPr id="13" name="Connector 12"/>
+          <p:cNvCxnSpPr/>
+          <p:nvPr/>
+        </p:nvCxnSpPr>
+        <p:spPr>
+          <a:xfrm>
+            <a:off x="3339000" y="3762000"/>
+            <a:ext cx="0" cy="108000"/>
+          </a:xfrm>
+          <a:prstGeom prst="line">
+            <a:avLst/>
+          </a:prstGeom>
+          <a:ln w="22225">
+            <a:solidFill>
+              <a:srgbClr val="1F285A"/>
+            </a:solidFill>
+            <a:tailEnd type="triangle" w="med" len="med"/>
+          </a:ln>
+        </p:spPr>
+        <p:style>
+          <a:lnRef idx="2">
+            <a:schemeClr val="accent1"/>
+          </a:lnRef>
+          <a:fillRef idx="0">
+            <a:schemeClr val="accent1"/>
+          </a:fillRef>
+          <a:effectRef idx="0">
+            <a:schemeClr val="accent1"/>
+          </a:effectRef>
+          <a:fontRef idx="minor">
+            <a:schemeClr val="tx1"/>
+          </a:fontRef>
+        </p:style>
+      </p:cxnSp>
+      <p:sp>
+        <p:nvSpPr>
+          <p:cNvPr id="14" name="Rectangle 13"/>
           <p:cNvSpPr/>
           <p:nvPr/>
         </p:nvSpPr>
         <p:spPr>
           <a:xfrm>
-            <a:off x="5487614" y="1800000"/>
-            <a:ext cx="1830578" cy="1044000"/>
-          </a:xfrm>
-          <a:prstGeom prst="chevron">
-            <a:avLst>
-              <a:gd name="adj" fmla="val 22000"/>
-            </a:avLst>
+            <a:off x="1683000" y="3888000"/>
+            <a:ext cx="3311999" cy="396000"/>
+          </a:xfrm>
+          <a:prstGeom prst="rect">
+            <a:avLst/>
           </a:prstGeom>
           <a:solidFill>
-            <a:srgbClr val="FEF0DE"/>
+            <a:srgbClr val="1F285A"/>
           </a:solidFill>
           <a:ln>
             <a:noFill/>
@@ -3110,34 +3211,7 @@
           </a:fontRef>
         </p:style>
         <p:txBody>
-          <a:bodyPr wrap="square" lIns="72000" tIns="18000" rIns="72000" bIns="18000" rtlCol="0" anchor="ctr"/>
-          <a:lstStyle/>
-          <a:p>
-            <a:pPr algn="ctr"/>
-            <a:endParaRPr/>
-          </a:p>
-        </p:txBody>
-      </p:sp>
-      <p:sp>
-        <p:nvSpPr>
-          <p:cNvPr id="13" name="TextBox 12"/>
-          <p:cNvSpPr txBox="1"/>
-          <p:nvPr/>
-        </p:nvSpPr>
-        <p:spPr>
-          <a:xfrm>
-            <a:off x="5721614" y="1800000"/>
-            <a:ext cx="1398578" cy="1044000"/>
-          </a:xfrm>
-          <a:prstGeom prst="rect">
-            <a:avLst/>
-          </a:prstGeom>
-          <a:noFill/>
-        </p:spPr>
-        <p:txBody>
-          <a:bodyPr wrap="square" lIns="36000" tIns="18000" rIns="36000" bIns="18000" anchor="ctr">
-            <a:spAutoFit/>
-          </a:bodyPr>
+          <a:bodyPr rtlCol="0" anchor="ctr" wrap="square" lIns="36000" tIns="0" rIns="36000" bIns="0"/>
           <a:lstStyle/>
           <a:p>
             <a:pPr algn="ctr">
@@ -3149,63 +3223,16 @@
               </a:spcAft>
             </a:pPr>
             <a:r>
-              <a:rPr sz="1400" b="1">
-                <a:solidFill>
-                  <a:srgbClr val="C46A00"/>
+              <a:rPr sz="1250" b="1">
+                <a:solidFill>
+                  <a:srgbClr val="FFFFFF"/>
                 </a:solidFill>
                 <a:latin typeface="メイリオ"/>
                 <a:ea typeface="メイリオ"/>
                 <a:cs typeface="メイリオ"/>
               </a:rPr>
-              <a:t>離脱防止施策</a:t>
-            </a:r>
-          </a:p>
-        </p:txBody>
-      </p:sp>
-      <p:sp>
-        <p:nvSpPr>
-          <p:cNvPr id="14" name="Chevron 13"/>
-          <p:cNvSpPr/>
-          <p:nvPr/>
-        </p:nvSpPr>
-        <p:spPr>
-          <a:xfrm>
-            <a:off x="7192192" y="1800000"/>
-            <a:ext cx="1591807" cy="1044000"/>
-          </a:xfrm>
-          <a:prstGeom prst="chevron">
-            <a:avLst>
-              <a:gd name="adj" fmla="val 22000"/>
-            </a:avLst>
-          </a:prstGeom>
-          <a:solidFill>
-            <a:srgbClr val="F59B21"/>
-          </a:solidFill>
-          <a:ln>
-            <a:noFill/>
-          </a:ln>
-          <a:effectLst/>
-        </p:spPr>
-        <p:style>
-          <a:lnRef idx="1">
-            <a:schemeClr val="accent1"/>
-          </a:lnRef>
-          <a:fillRef idx="3">
-            <a:schemeClr val="accent1"/>
-          </a:fillRef>
-          <a:effectRef idx="0">
-            <a:schemeClr val="accent1"/>
-          </a:effectRef>
-          <a:fontRef idx="minor">
-            <a:schemeClr val="lt1"/>
-          </a:fontRef>
-        </p:style>
-        <p:txBody>
-          <a:bodyPr wrap="square" lIns="72000" tIns="18000" rIns="72000" bIns="18000" rtlCol="0" anchor="ctr"/>
-          <a:lstStyle/>
-          <a:p>
-            <a:pPr algn="ctr"/>
-            <a:endParaRPr/>
+              <a:t>CV</a:t>
+            </a:r>
           </a:p>
         </p:txBody>
       </p:sp>
@@ -3217,8 +3244,8 @@
         </p:nvSpPr>
         <p:spPr>
           <a:xfrm>
-            <a:off x="7426192" y="1800000"/>
-            <a:ext cx="1159807" cy="1044000"/>
+            <a:off x="792000" y="4464000"/>
+            <a:ext cx="5094000" cy="288000"/>
           </a:xfrm>
           <a:prstGeom prst="rect">
             <a:avLst/>
@@ -3226,7 +3253,7 @@
           <a:noFill/>
         </p:spPr>
         <p:txBody>
-          <a:bodyPr wrap="square" lIns="36000" tIns="18000" rIns="36000" bIns="18000" anchor="ctr">
+          <a:bodyPr wrap="square" anchor="ctr" lIns="36000" rIns="36000" tIns="18000" bIns="18000">
             <a:spAutoFit/>
           </a:bodyPr>
           <a:lstStyle/>
@@ -3240,40 +3267,93 @@
               </a:spcAft>
             </a:pPr>
             <a:r>
-              <a:rPr sz="1400" b="1">
-                <a:solidFill>
-                  <a:srgbClr val="FFFFFF"/>
+              <a:rPr sz="1100" b="1">
+                <a:solidFill>
+                  <a:srgbClr val="333333"/>
                 </a:solidFill>
                 <a:latin typeface="メイリオ"/>
                 <a:ea typeface="メイリオ"/>
                 <a:cs typeface="メイリオ"/>
               </a:rPr>
-              <a:t>CV</a:t>
-            </a:r>
-          </a:p>
-        </p:txBody>
-      </p:sp>
-      <p:sp>
-        <p:nvSpPr>
-          <p:cNvPr id="16" name="Rectangle 15"/>
+              <a:t>CVの取りこぼしを減らし、施策全体のCPA改善へ</a:t>
+            </a:r>
+          </a:p>
+        </p:txBody>
+      </p:sp>
+      <p:sp>
+        <p:nvSpPr>
+          <p:cNvPr id="16" name="TextBox 15"/>
+          <p:cNvSpPr txBox="1"/>
+          <p:nvPr/>
+        </p:nvSpPr>
+        <p:spPr>
+          <a:xfrm>
+            <a:off x="6318000" y="1620000"/>
+            <a:ext cx="5094000" cy="468000"/>
+          </a:xfrm>
+          <a:prstGeom prst="rect">
+            <a:avLst/>
+          </a:prstGeom>
+          <a:noFill/>
+        </p:spPr>
+        <p:txBody>
+          <a:bodyPr wrap="square" anchor="ctr" lIns="36000" rIns="36000" tIns="10800" bIns="10800">
+            <a:spAutoFit/>
+          </a:bodyPr>
+          <a:lstStyle/>
+          <a:p>
+            <a:pPr algn="ctr">
+              <a:lnSpc>
+                <a:spcPct val="105000"/>
+              </a:lnSpc>
+              <a:spcAft>
+                <a:spcPts val="200"/>
+              </a:spcAft>
+            </a:pPr>
+            <a:r>
+              <a:rPr sz="1300" b="1">
+                <a:solidFill>
+                  <a:srgbClr val="1F285A"/>
+                </a:solidFill>
+                <a:latin typeface="メイリオ"/>
+                <a:ea typeface="メイリオ"/>
+                <a:cs typeface="メイリオ"/>
+              </a:rPr>
+              <a:t>CV獲得後｜</a:t>
+            </a:r>
+            <a:r>
+              <a:rPr sz="2400" b="1">
+                <a:solidFill>
+                  <a:srgbClr val="1F285A"/>
+                </a:solidFill>
+                <a:latin typeface="メイリオ"/>
+                <a:ea typeface="メイリオ"/>
+                <a:cs typeface="メイリオ"/>
+              </a:rPr>
+              <a:t>CPO改善</a:t>
+            </a:r>
+          </a:p>
+        </p:txBody>
+      </p:sp>
+      <p:sp>
+        <p:nvSpPr>
+          <p:cNvPr id="17" name="Rectangle 16"/>
           <p:cNvSpPr/>
           <p:nvPr/>
         </p:nvSpPr>
         <p:spPr>
           <a:xfrm>
-            <a:off x="9216000" y="1800000"/>
-            <a:ext cx="2195999" cy="1044000"/>
+            <a:off x="7785000" y="2106000"/>
+            <a:ext cx="2160000" cy="43200"/>
           </a:xfrm>
           <a:prstGeom prst="rect">
             <a:avLst/>
           </a:prstGeom>
           <a:solidFill>
-            <a:srgbClr val="FFFFFF"/>
+            <a:srgbClr val="06C755"/>
           </a:solidFill>
-          <a:ln w="25400">
-            <a:solidFill>
-              <a:srgbClr val="F59B21"/>
-            </a:solidFill>
+          <a:ln>
+            <a:noFill/>
           </a:ln>
           <a:effectLst/>
         </p:spPr>
@@ -3292,29 +3372,52 @@
           </a:fontRef>
         </p:style>
         <p:txBody>
-          <a:bodyPr wrap="square" lIns="72000" tIns="18000" rIns="72000" bIns="18000" rtlCol="0" anchor="ctr"/>
+          <a:bodyPr rtlCol="0" anchor="ctr" wrap="square" lIns="72000" tIns="18000" rIns="72000" bIns="18000"/>
           <a:lstStyle/>
           <a:p>
-            <a:pPr algn="ctr">
-              <a:lnSpc>
-                <a:spcPct val="110000"/>
-              </a:lnSpc>
-              <a:spcAft>
-                <a:spcPts val="200"/>
-              </a:spcAft>
-            </a:pPr>
-            <a:r>
-              <a:rPr sz="2000" b="1">
-                <a:solidFill>
-                  <a:srgbClr val="C46A00"/>
-                </a:solidFill>
-                <a:latin typeface="メイリオ"/>
-                <a:ea typeface="メイリオ"/>
-                <a:cs typeface="メイリオ"/>
-              </a:rPr>
-              <a:t>CPA改善</a:t>
-            </a:r>
-          </a:p>
+            <a:pPr algn="ctr"/>
+          </a:p>
+        </p:txBody>
+      </p:sp>
+      <p:sp>
+        <p:nvSpPr>
+          <p:cNvPr id="18" name="Rectangle 17"/>
+          <p:cNvSpPr/>
+          <p:nvPr/>
+        </p:nvSpPr>
+        <p:spPr>
+          <a:xfrm>
+            <a:off x="7209000" y="2268000"/>
+            <a:ext cx="3311999" cy="396000"/>
+          </a:xfrm>
+          <a:prstGeom prst="rect">
+            <a:avLst/>
+          </a:prstGeom>
+          <a:solidFill>
+            <a:srgbClr val="E4E8F6"/>
+          </a:solidFill>
+          <a:ln>
+            <a:noFill/>
+          </a:ln>
+          <a:effectLst/>
+        </p:spPr>
+        <p:style>
+          <a:lnRef idx="1">
+            <a:schemeClr val="accent1"/>
+          </a:lnRef>
+          <a:fillRef idx="3">
+            <a:schemeClr val="accent1"/>
+          </a:fillRef>
+          <a:effectRef idx="0">
+            <a:schemeClr val="accent1"/>
+          </a:effectRef>
+          <a:fontRef idx="minor">
+            <a:schemeClr val="lt1"/>
+          </a:fontRef>
+        </p:style>
+        <p:txBody>
+          <a:bodyPr rtlCol="0" anchor="ctr" wrap="square" lIns="36000" tIns="0" rIns="36000" bIns="0"/>
+          <a:lstStyle/>
           <a:p>
             <a:pPr algn="ctr">
               <a:lnSpc>
@@ -3325,39 +3428,93 @@
               </a:spcAft>
             </a:pPr>
             <a:r>
-              <a:rPr sz="950" b="0">
-                <a:solidFill>
-                  <a:srgbClr val="7F7F7F"/>
+              <a:rPr sz="1250" b="1">
+                <a:solidFill>
+                  <a:srgbClr val="1F285A"/>
                 </a:solidFill>
                 <a:latin typeface="メイリオ"/>
                 <a:ea typeface="メイリオ"/>
                 <a:cs typeface="メイリオ"/>
               </a:rPr>
-              <a:t>CV1件あたりの広告費</a:t>
-            </a:r>
-          </a:p>
-        </p:txBody>
-      </p:sp>
-      <p:sp>
-        <p:nvSpPr>
-          <p:cNvPr id="17" name="TextBox 16"/>
-          <p:cNvSpPr txBox="1"/>
-          <p:nvPr/>
-        </p:nvSpPr>
-        <p:spPr>
-          <a:xfrm>
-            <a:off x="2556000" y="2880000"/>
-            <a:ext cx="6227999" cy="251999"/>
+              <a:t>CV</a:t>
+            </a:r>
+          </a:p>
+        </p:txBody>
+      </p:sp>
+      <p:cxnSp>
+        <p:nvCxnSpPr>
+          <p:cNvPr id="19" name="Connector 18"/>
+          <p:cNvCxnSpPr/>
+          <p:nvPr/>
+        </p:nvCxnSpPr>
+        <p:spPr>
+          <a:xfrm>
+            <a:off x="8865000" y="2682000"/>
+            <a:ext cx="0" cy="108000"/>
+          </a:xfrm>
+          <a:prstGeom prst="line">
+            <a:avLst/>
+          </a:prstGeom>
+          <a:ln w="22225">
+            <a:solidFill>
+              <a:srgbClr val="1F285A"/>
+            </a:solidFill>
+            <a:tailEnd type="triangle" w="med" len="med"/>
+          </a:ln>
+        </p:spPr>
+        <p:style>
+          <a:lnRef idx="2">
+            <a:schemeClr val="accent1"/>
+          </a:lnRef>
+          <a:fillRef idx="0">
+            <a:schemeClr val="accent1"/>
+          </a:fillRef>
+          <a:effectRef idx="0">
+            <a:schemeClr val="accent1"/>
+          </a:effectRef>
+          <a:fontRef idx="minor">
+            <a:schemeClr val="tx1"/>
+          </a:fontRef>
+        </p:style>
+      </p:cxnSp>
+      <p:sp>
+        <p:nvSpPr>
+          <p:cNvPr id="20" name="Rectangle 19"/>
+          <p:cNvSpPr/>
+          <p:nvPr/>
+        </p:nvSpPr>
+        <p:spPr>
+          <a:xfrm>
+            <a:off x="7209000" y="2808000"/>
+            <a:ext cx="3311999" cy="396000"/>
           </a:xfrm>
           <a:prstGeom prst="rect">
             <a:avLst/>
           </a:prstGeom>
-          <a:noFill/>
-        </p:spPr>
-        <p:txBody>
-          <a:bodyPr wrap="square" lIns="36000" tIns="18000" rIns="36000" bIns="18000" anchor="t">
-            <a:spAutoFit/>
-          </a:bodyPr>
+          <a:solidFill>
+            <a:srgbClr val="06C755"/>
+          </a:solidFill>
+          <a:ln>
+            <a:noFill/>
+          </a:ln>
+          <a:effectLst/>
+        </p:spPr>
+        <p:style>
+          <a:lnRef idx="1">
+            <a:schemeClr val="accent1"/>
+          </a:lnRef>
+          <a:fillRef idx="3">
+            <a:schemeClr val="accent1"/>
+          </a:fillRef>
+          <a:effectRef idx="0">
+            <a:schemeClr val="accent1"/>
+          </a:effectRef>
+          <a:fontRef idx="minor">
+            <a:schemeClr val="lt1"/>
+          </a:fontRef>
+        </p:style>
+        <p:txBody>
+          <a:bodyPr rtlCol="0" anchor="ctr" wrap="square" lIns="36000" tIns="0" rIns="36000" bIns="0"/>
           <a:lstStyle/>
           <a:p>
             <a:pPr algn="ctr">
@@ -3369,37 +3526,38 @@
               </a:spcAft>
             </a:pPr>
             <a:r>
-              <a:rPr sz="1000" b="0">
-                <a:solidFill>
-                  <a:srgbClr val="7F7F7F"/>
+              <a:rPr sz="1250" b="1">
+                <a:solidFill>
+                  <a:srgbClr val="FFFFFF"/>
                 </a:solidFill>
                 <a:latin typeface="メイリオ"/>
                 <a:ea typeface="メイリオ"/>
                 <a:cs typeface="メイリオ"/>
               </a:rPr>
-              <a:t>離脱しそうなユーザーを引き止め、CVの取りこぼしを減らす</a:t>
+              <a:t>サンクスLINE誘導</a:t>
             </a:r>
           </a:p>
         </p:txBody>
       </p:sp>
       <p:cxnSp>
         <p:nvCxnSpPr>
-          <p:cNvPr id="18" name="Connector 17"/>
+          <p:cNvPr id="21" name="Connector 20"/>
           <p:cNvCxnSpPr/>
           <p:nvPr/>
         </p:nvCxnSpPr>
         <p:spPr>
           <a:xfrm>
-            <a:off x="792000" y="3438000"/>
-            <a:ext cx="10620000" cy="0"/>
+            <a:off x="8865000" y="3222000"/>
+            <a:ext cx="0" cy="108000"/>
           </a:xfrm>
           <a:prstGeom prst="line">
             <a:avLst/>
           </a:prstGeom>
-          <a:ln w="9525">
+          <a:ln w="22225">
             <a:solidFill>
-              <a:srgbClr val="D9D9D9"/>
+              <a:srgbClr val="1F285A"/>
             </a:solidFill>
+            <a:tailEnd type="triangle" w="med" len="med"/>
           </a:ln>
         </p:spPr>
         <p:style>
@@ -3419,63 +3577,17 @@
       </p:cxnSp>
       <p:sp>
         <p:nvSpPr>
-          <p:cNvPr id="19" name="TextBox 18"/>
-          <p:cNvSpPr txBox="1"/>
-          <p:nvPr/>
-        </p:nvSpPr>
-        <p:spPr>
-          <a:xfrm>
-            <a:off x="792000" y="3708000"/>
-            <a:ext cx="1655999" cy="574200"/>
+          <p:cNvPr id="22" name="Rectangle 21"/>
+          <p:cNvSpPr/>
+          <p:nvPr/>
+        </p:nvSpPr>
+        <p:spPr>
+          <a:xfrm>
+            <a:off x="7209000" y="3348000"/>
+            <a:ext cx="3311999" cy="396000"/>
           </a:xfrm>
           <a:prstGeom prst="rect">
             <a:avLst/>
-          </a:prstGeom>
-          <a:noFill/>
-        </p:spPr>
-        <p:txBody>
-          <a:bodyPr wrap="square" lIns="36000" tIns="18000" rIns="36000" bIns="18000" anchor="b">
-            <a:spAutoFit/>
-          </a:bodyPr>
-          <a:lstStyle/>
-          <a:p>
-            <a:pPr algn="l">
-              <a:lnSpc>
-                <a:spcPct val="110000"/>
-              </a:lnSpc>
-              <a:spcAft>
-                <a:spcPts val="0"/>
-              </a:spcAft>
-            </a:pPr>
-            <a:r>
-              <a:rPr sz="1600" b="1">
-                <a:solidFill>
-                  <a:srgbClr val="1F285A"/>
-                </a:solidFill>
-                <a:latin typeface="メイリオ"/>
-                <a:ea typeface="メイリオ"/>
-                <a:cs typeface="メイリオ"/>
-              </a:rPr>
-              <a:t>CV獲得後</a:t>
-            </a:r>
-          </a:p>
-        </p:txBody>
-      </p:sp>
-      <p:sp>
-        <p:nvSpPr>
-          <p:cNvPr id="20" name="Rounded Rectangle 19"/>
-          <p:cNvSpPr/>
-          <p:nvPr/>
-        </p:nvSpPr>
-        <p:spPr>
-          <a:xfrm>
-            <a:off x="828000" y="4313520"/>
-            <a:ext cx="936000" cy="251999"/>
-          </a:xfrm>
-          <a:prstGeom prst="roundRect">
-            <a:avLst>
-              <a:gd name="adj" fmla="val 50000"/>
-            </a:avLst>
           </a:prstGeom>
           <a:solidFill>
             <a:srgbClr val="E8F8EE"/>
@@ -3500,7 +3612,7 @@
           </a:fontRef>
         </p:style>
         <p:txBody>
-          <a:bodyPr wrap="square" lIns="36000" tIns="0" rIns="36000" bIns="0" rtlCol="0" anchor="ctr"/>
+          <a:bodyPr rtlCol="0" anchor="ctr" wrap="square" lIns="36000" tIns="0" rIns="36000" bIns="0"/>
           <a:lstStyle/>
           <a:p>
             <a:pPr algn="ctr">
@@ -3512,7 +3624,7 @@
               </a:spcAft>
             </a:pPr>
             <a:r>
-              <a:rPr sz="1050" b="1">
+              <a:rPr sz="1250" b="1">
                 <a:solidFill>
                   <a:srgbClr val="0B7A3B"/>
                 </a:solidFill>
@@ -3520,29 +3632,63 @@
                 <a:ea typeface="メイリオ"/>
                 <a:cs typeface="メイリオ"/>
               </a:rPr>
-              <a:t>LINE領域</a:t>
-            </a:r>
-          </a:p>
-        </p:txBody>
-      </p:sp>
-      <p:sp>
-        <p:nvSpPr>
-          <p:cNvPr id="21" name="Pentagon 20"/>
+              <a:t>LINEで継続フォロー</a:t>
+            </a:r>
+          </a:p>
+        </p:txBody>
+      </p:sp>
+      <p:cxnSp>
+        <p:nvCxnSpPr>
+          <p:cNvPr id="23" name="Connector 22"/>
+          <p:cNvCxnSpPr/>
+          <p:nvPr/>
+        </p:nvCxnSpPr>
+        <p:spPr>
+          <a:xfrm>
+            <a:off x="8865000" y="3762000"/>
+            <a:ext cx="0" cy="108000"/>
+          </a:xfrm>
+          <a:prstGeom prst="line">
+            <a:avLst/>
+          </a:prstGeom>
+          <a:ln w="22225">
+            <a:solidFill>
+              <a:srgbClr val="1F285A"/>
+            </a:solidFill>
+            <a:tailEnd type="triangle" w="med" len="med"/>
+          </a:ln>
+        </p:spPr>
+        <p:style>
+          <a:lnRef idx="2">
+            <a:schemeClr val="accent1"/>
+          </a:lnRef>
+          <a:fillRef idx="0">
+            <a:schemeClr val="accent1"/>
+          </a:fillRef>
+          <a:effectRef idx="0">
+            <a:schemeClr val="accent1"/>
+          </a:effectRef>
+          <a:fontRef idx="minor">
+            <a:schemeClr val="tx1"/>
+          </a:fontRef>
+        </p:style>
+      </p:cxnSp>
+      <p:sp>
+        <p:nvSpPr>
+          <p:cNvPr id="24" name="Rectangle 23"/>
           <p:cNvSpPr/>
           <p:nvPr/>
         </p:nvSpPr>
         <p:spPr>
           <a:xfrm>
-            <a:off x="2556000" y="3708000"/>
-            <a:ext cx="1124425" cy="1044000"/>
-          </a:xfrm>
-          <a:prstGeom prst="homePlate">
-            <a:avLst>
-              <a:gd name="adj" fmla="val 22000"/>
-            </a:avLst>
+            <a:off x="7209000" y="3888000"/>
+            <a:ext cx="3311999" cy="396000"/>
+          </a:xfrm>
+          <a:prstGeom prst="rect">
+            <a:avLst/>
           </a:prstGeom>
           <a:solidFill>
-            <a:srgbClr val="E4E8F6"/>
+            <a:srgbClr val="1F285A"/>
           </a:solidFill>
           <a:ln>
             <a:noFill/>
@@ -3564,34 +3710,7 @@
           </a:fontRef>
         </p:style>
         <p:txBody>
-          <a:bodyPr wrap="square" lIns="72000" tIns="18000" rIns="72000" bIns="18000" rtlCol="0" anchor="ctr"/>
-          <a:lstStyle/>
-          <a:p>
-            <a:pPr algn="ctr"/>
-            <a:endParaRPr/>
-          </a:p>
-        </p:txBody>
-      </p:sp>
-      <p:sp>
-        <p:nvSpPr>
-          <p:cNvPr id="22" name="TextBox 21"/>
-          <p:cNvSpPr txBox="1"/>
-          <p:nvPr/>
-        </p:nvSpPr>
-        <p:spPr>
-          <a:xfrm>
-            <a:off x="2664000" y="3708000"/>
-            <a:ext cx="818425" cy="1044000"/>
-          </a:xfrm>
-          <a:prstGeom prst="rect">
-            <a:avLst/>
-          </a:prstGeom>
-          <a:noFill/>
-        </p:spPr>
-        <p:txBody>
-          <a:bodyPr wrap="square" lIns="36000" tIns="18000" rIns="36000" bIns="18000" anchor="ctr">
-            <a:spAutoFit/>
-          </a:bodyPr>
+          <a:bodyPr rtlCol="0" anchor="ctr" wrap="square" lIns="36000" tIns="0" rIns="36000" bIns="0"/>
           <a:lstStyle/>
           <a:p>
             <a:pPr algn="ctr">
@@ -3603,76 +3722,29 @@
               </a:spcAft>
             </a:pPr>
             <a:r>
-              <a:rPr sz="1300" b="1">
-                <a:solidFill>
-                  <a:srgbClr val="1F285A"/>
+              <a:rPr sz="1250" b="1">
+                <a:solidFill>
+                  <a:srgbClr val="FFFFFF"/>
                 </a:solidFill>
                 <a:latin typeface="メイリオ"/>
                 <a:ea typeface="メイリオ"/>
                 <a:cs typeface="メイリオ"/>
               </a:rPr>
-              <a:t>CV</a:t>
-            </a:r>
-          </a:p>
-        </p:txBody>
-      </p:sp>
-      <p:sp>
-        <p:nvSpPr>
-          <p:cNvPr id="23" name="Chevron 22"/>
-          <p:cNvSpPr/>
-          <p:nvPr/>
-        </p:nvSpPr>
-        <p:spPr>
-          <a:xfrm>
-            <a:off x="3554425" y="3708000"/>
-            <a:ext cx="1756914" cy="1044000"/>
-          </a:xfrm>
-          <a:prstGeom prst="chevron">
-            <a:avLst>
-              <a:gd name="adj" fmla="val 22000"/>
-            </a:avLst>
-          </a:prstGeom>
-          <a:solidFill>
-            <a:srgbClr val="06C755"/>
-          </a:solidFill>
-          <a:ln>
-            <a:noFill/>
-          </a:ln>
-          <a:effectLst/>
-        </p:spPr>
-        <p:style>
-          <a:lnRef idx="1">
-            <a:schemeClr val="accent1"/>
-          </a:lnRef>
-          <a:fillRef idx="3">
-            <a:schemeClr val="accent1"/>
-          </a:fillRef>
-          <a:effectRef idx="0">
-            <a:schemeClr val="accent1"/>
-          </a:effectRef>
-          <a:fontRef idx="minor">
-            <a:schemeClr val="lt1"/>
-          </a:fontRef>
-        </p:style>
-        <p:txBody>
-          <a:bodyPr wrap="square" lIns="72000" tIns="18000" rIns="72000" bIns="18000" rtlCol="0" anchor="ctr"/>
-          <a:lstStyle/>
-          <a:p>
-            <a:pPr algn="ctr"/>
-            <a:endParaRPr/>
-          </a:p>
-        </p:txBody>
-      </p:sp>
-      <p:sp>
-        <p:nvSpPr>
-          <p:cNvPr id="24" name="TextBox 23"/>
+              <a:t>購入・来店・面談などの最終成果</a:t>
+            </a:r>
+          </a:p>
+        </p:txBody>
+      </p:sp>
+      <p:sp>
+        <p:nvSpPr>
+          <p:cNvPr id="25" name="TextBox 24"/>
           <p:cNvSpPr txBox="1"/>
           <p:nvPr/>
         </p:nvSpPr>
         <p:spPr>
           <a:xfrm>
-            <a:off x="3788425" y="3708000"/>
-            <a:ext cx="1324914" cy="1044000"/>
+            <a:off x="6318000" y="4464000"/>
+            <a:ext cx="5094000" cy="288000"/>
           </a:xfrm>
           <a:prstGeom prst="rect">
             <a:avLst/>
@@ -3680,7 +3752,7 @@
           <a:noFill/>
         </p:spPr>
         <p:txBody>
-          <a:bodyPr wrap="square" lIns="36000" tIns="18000" rIns="36000" bIns="18000" anchor="ctr">
+          <a:bodyPr wrap="square" anchor="ctr" lIns="36000" rIns="36000" tIns="18000" bIns="18000">
             <a:spAutoFit/>
           </a:bodyPr>
           <a:lstStyle/>
@@ -3694,37 +3766,108 @@
               </a:spcAft>
             </a:pPr>
             <a:r>
-              <a:rPr sz="1300" b="1">
-                <a:solidFill>
-                  <a:srgbClr val="FFFFFF"/>
+              <a:rPr sz="1100" b="1">
+                <a:solidFill>
+                  <a:srgbClr val="333333"/>
                 </a:solidFill>
                 <a:latin typeface="メイリオ"/>
                 <a:ea typeface="メイリオ"/>
                 <a:cs typeface="メイリオ"/>
               </a:rPr>
-              <a:t>サンクスLINE誘導</a:t>
-            </a:r>
-          </a:p>
-        </p:txBody>
-      </p:sp>
-      <p:sp>
-        <p:nvSpPr>
-          <p:cNvPr id="25" name="Chevron 24"/>
+              <a:t>CV後の歩留まりを改善し、CPO改善へ</a:t>
+            </a:r>
+          </a:p>
+        </p:txBody>
+      </p:sp>
+      <p:cxnSp>
+        <p:nvCxnSpPr>
+          <p:cNvPr id="26" name="Connector 25"/>
+          <p:cNvCxnSpPr/>
+          <p:nvPr/>
+        </p:nvCxnSpPr>
+        <p:spPr>
+          <a:xfrm>
+            <a:off x="6102000" y="1692000"/>
+            <a:ext cx="0" cy="2988000"/>
+          </a:xfrm>
+          <a:prstGeom prst="line">
+            <a:avLst/>
+          </a:prstGeom>
+          <a:ln w="12700">
+            <a:solidFill>
+              <a:srgbClr val="D9D9D9"/>
+            </a:solidFill>
+            <a:prstDash val="dash"/>
+          </a:ln>
+        </p:spPr>
+        <p:style>
+          <a:lnRef idx="2">
+            <a:schemeClr val="accent1"/>
+          </a:lnRef>
+          <a:fillRef idx="0">
+            <a:schemeClr val="accent1"/>
+          </a:fillRef>
+          <a:effectRef idx="0">
+            <a:schemeClr val="accent1"/>
+          </a:effectRef>
+          <a:fontRef idx="minor">
+            <a:schemeClr val="tx1"/>
+          </a:fontRef>
+        </p:style>
+      </p:cxnSp>
+      <p:cxnSp>
+        <p:nvCxnSpPr>
+          <p:cNvPr id="27" name="Connector 26"/>
+          <p:cNvCxnSpPr/>
+          <p:nvPr/>
+        </p:nvCxnSpPr>
+        <p:spPr>
+          <a:xfrm>
+            <a:off x="792000" y="4788000"/>
+            <a:ext cx="10620000" cy="0"/>
+          </a:xfrm>
+          <a:prstGeom prst="line">
+            <a:avLst/>
+          </a:prstGeom>
+          <a:ln w="9525">
+            <a:solidFill>
+              <a:srgbClr val="D9D9D9"/>
+            </a:solidFill>
+          </a:ln>
+        </p:spPr>
+        <p:style>
+          <a:lnRef idx="2">
+            <a:schemeClr val="accent1"/>
+          </a:lnRef>
+          <a:fillRef idx="0">
+            <a:schemeClr val="accent1"/>
+          </a:fillRef>
+          <a:effectRef idx="0">
+            <a:schemeClr val="accent1"/>
+          </a:effectRef>
+          <a:fontRef idx="minor">
+            <a:schemeClr val="tx1"/>
+          </a:fontRef>
+        </p:style>
+      </p:cxnSp>
+      <p:sp>
+        <p:nvSpPr>
+          <p:cNvPr id="28" name="Pentagon 27"/>
           <p:cNvSpPr/>
           <p:nvPr/>
         </p:nvSpPr>
         <p:spPr>
           <a:xfrm>
-            <a:off x="5185340" y="3708000"/>
-            <a:ext cx="1756914" cy="1044000"/>
-          </a:xfrm>
-          <a:prstGeom prst="chevron">
+            <a:off x="1566000" y="4914000"/>
+            <a:ext cx="3096000" cy="450000"/>
+          </a:xfrm>
+          <a:prstGeom prst="homePlate">
             <a:avLst>
-              <a:gd name="adj" fmla="val 22000"/>
+              <a:gd name="adj" fmla="val 25000"/>
             </a:avLst>
           </a:prstGeom>
           <a:solidFill>
-            <a:srgbClr val="E8F8EE"/>
+            <a:srgbClr val="06C755"/>
           </a:solidFill>
           <a:ln>
             <a:noFill/>
@@ -3746,24 +3889,23 @@
           </a:fontRef>
         </p:style>
         <p:txBody>
-          <a:bodyPr wrap="square" lIns="72000" tIns="18000" rIns="72000" bIns="18000" rtlCol="0" anchor="ctr"/>
+          <a:bodyPr rtlCol="0" anchor="ctr" wrap="square" lIns="72000" tIns="18000" rIns="72000" bIns="18000"/>
           <a:lstStyle/>
           <a:p>
             <a:pPr algn="ctr"/>
-            <a:endParaRPr/>
-          </a:p>
-        </p:txBody>
-      </p:sp>
-      <p:sp>
-        <p:nvSpPr>
-          <p:cNvPr id="26" name="TextBox 25"/>
+          </a:p>
+        </p:txBody>
+      </p:sp>
+      <p:sp>
+        <p:nvSpPr>
+          <p:cNvPr id="29" name="TextBox 28"/>
           <p:cNvSpPr txBox="1"/>
           <p:nvPr/>
         </p:nvSpPr>
         <p:spPr>
           <a:xfrm>
-            <a:off x="5419340" y="3708000"/>
-            <a:ext cx="1324914" cy="1044000"/>
+            <a:off x="1674000" y="4914000"/>
+            <a:ext cx="2807999" cy="450000"/>
           </a:xfrm>
           <a:prstGeom prst="rect">
             <a:avLst/>
@@ -3771,7 +3913,7 @@
           <a:noFill/>
         </p:spPr>
         <p:txBody>
-          <a:bodyPr wrap="square" lIns="36000" tIns="18000" rIns="36000" bIns="18000" anchor="ctr">
+          <a:bodyPr wrap="square" anchor="ctr" lIns="36000" rIns="36000" tIns="18000" bIns="18000">
             <a:spAutoFit/>
           </a:bodyPr>
           <a:lstStyle/>
@@ -3785,76 +3927,29 @@
               </a:spcAft>
             </a:pPr>
             <a:r>
-              <a:rPr sz="1300" b="1">
-                <a:solidFill>
-                  <a:srgbClr val="0B7A3B"/>
+              <a:rPr sz="1150" b="1">
+                <a:solidFill>
+                  <a:srgbClr val="FFFFFF"/>
                 </a:solidFill>
                 <a:latin typeface="メイリオ"/>
                 <a:ea typeface="メイリオ"/>
                 <a:cs typeface="メイリオ"/>
               </a:rPr>
-              <a:t>LINEで継続フォロー</a:t>
-            </a:r>
-          </a:p>
-        </p:txBody>
-      </p:sp>
-      <p:sp>
-        <p:nvSpPr>
-          <p:cNvPr id="27" name="Chevron 26"/>
-          <p:cNvSpPr/>
-          <p:nvPr/>
-        </p:nvSpPr>
-        <p:spPr>
-          <a:xfrm>
-            <a:off x="6816255" y="3708000"/>
-            <a:ext cx="1967744" cy="1044000"/>
-          </a:xfrm>
-          <a:prstGeom prst="chevron">
-            <a:avLst>
-              <a:gd name="adj" fmla="val 22000"/>
-            </a:avLst>
-          </a:prstGeom>
-          <a:solidFill>
-            <a:srgbClr val="1F285A"/>
-          </a:solidFill>
-          <a:ln>
-            <a:noFill/>
-          </a:ln>
-          <a:effectLst/>
-        </p:spPr>
-        <p:style>
-          <a:lnRef idx="1">
-            <a:schemeClr val="accent1"/>
-          </a:lnRef>
-          <a:fillRef idx="3">
-            <a:schemeClr val="accent1"/>
-          </a:fillRef>
-          <a:effectRef idx="0">
-            <a:schemeClr val="accent1"/>
-          </a:effectRef>
-          <a:fontRef idx="minor">
-            <a:schemeClr val="lt1"/>
-          </a:fontRef>
-        </p:style>
-        <p:txBody>
-          <a:bodyPr wrap="square" lIns="72000" tIns="18000" rIns="72000" bIns="18000" rtlCol="0" anchor="ctr"/>
-          <a:lstStyle/>
-          <a:p>
-            <a:pPr algn="ctr"/>
-            <a:endParaRPr/>
-          </a:p>
-        </p:txBody>
-      </p:sp>
-      <p:sp>
-        <p:nvSpPr>
-          <p:cNvPr id="28" name="TextBox 27"/>
+              <a:t>CPO改善</a:t>
+            </a:r>
+          </a:p>
+        </p:txBody>
+      </p:sp>
+      <p:sp>
+        <p:nvSpPr>
+          <p:cNvPr id="30" name="TextBox 29"/>
           <p:cNvSpPr txBox="1"/>
           <p:nvPr/>
         </p:nvSpPr>
         <p:spPr>
           <a:xfrm>
-            <a:off x="7050255" y="3708000"/>
-            <a:ext cx="1535744" cy="1044000"/>
+            <a:off x="1602000" y="5382000"/>
+            <a:ext cx="3024000" cy="216000"/>
           </a:xfrm>
           <a:prstGeom prst="rect">
             <a:avLst/>
@@ -3862,7 +3957,7 @@
           <a:noFill/>
         </p:spPr>
         <p:txBody>
-          <a:bodyPr wrap="square" lIns="36000" tIns="18000" rIns="36000" bIns="18000" anchor="ctr">
+          <a:bodyPr wrap="square" anchor="t" lIns="36000" rIns="36000" tIns="18000" bIns="18000">
             <a:spAutoFit/>
           </a:bodyPr>
           <a:lstStyle/>
@@ -3876,35 +3971,37 @@
               </a:spcAft>
             </a:pPr>
             <a:r>
-              <a:rPr sz="1300" b="1">
-                <a:solidFill>
-                  <a:srgbClr val="FFFFFF"/>
+              <a:rPr sz="900" b="0">
+                <a:solidFill>
+                  <a:srgbClr val="7F7F7F"/>
                 </a:solidFill>
                 <a:latin typeface="メイリオ"/>
                 <a:ea typeface="メイリオ"/>
                 <a:cs typeface="メイリオ"/>
               </a:rPr>
-              <a:t>来店・面談・購入</a:t>
-            </a:r>
-          </a:p>
-        </p:txBody>
-      </p:sp>
-      <p:sp>
-        <p:nvSpPr>
-          <p:cNvPr id="29" name="Rectangle 28"/>
+              <a:t>CV後の歩留まりが上がる</a:t>
+            </a:r>
+          </a:p>
+        </p:txBody>
+      </p:sp>
+      <p:sp>
+        <p:nvSpPr>
+          <p:cNvPr id="31" name="Chevron 30"/>
           <p:cNvSpPr/>
           <p:nvPr/>
         </p:nvSpPr>
         <p:spPr>
           <a:xfrm>
-            <a:off x="9216000" y="3708000"/>
-            <a:ext cx="2195999" cy="1044000"/>
-          </a:xfrm>
-          <a:prstGeom prst="rect">
-            <a:avLst/>
+            <a:off x="4554000" y="4914000"/>
+            <a:ext cx="3096000" cy="450000"/>
+          </a:xfrm>
+          <a:prstGeom prst="chevron">
+            <a:avLst>
+              <a:gd name="adj" fmla="val 25000"/>
+            </a:avLst>
           </a:prstGeom>
           <a:solidFill>
-            <a:srgbClr val="1F285A"/>
+            <a:srgbClr val="E4E8F6"/>
           </a:solidFill>
           <a:ln>
             <a:noFill/>
@@ -3926,37 +4023,34 @@
           </a:fontRef>
         </p:style>
         <p:txBody>
-          <a:bodyPr wrap="square" lIns="72000" tIns="18000" rIns="72000" bIns="18000" rtlCol="0" anchor="ctr"/>
+          <a:bodyPr rtlCol="0" anchor="ctr" wrap="square" lIns="72000" tIns="18000" rIns="72000" bIns="18000"/>
           <a:lstStyle/>
           <a:p>
-            <a:pPr algn="ctr">
-              <a:lnSpc>
-                <a:spcPct val="110000"/>
-              </a:lnSpc>
-              <a:spcAft>
-                <a:spcPts val="200"/>
-              </a:spcAft>
-            </a:pPr>
-            <a:r>
-              <a:rPr sz="2000" b="1" dirty="0" err="1">
-                <a:solidFill>
-                  <a:srgbClr val="FFFFFF"/>
-                </a:solidFill>
-                <a:latin typeface="メイリオ"/>
-                <a:ea typeface="メイリオ"/>
-                <a:cs typeface="メイリオ"/>
-              </a:rPr>
-              <a:t>CPO改善</a:t>
-            </a:r>
-            <a:endParaRPr sz="2000" b="1" dirty="0">
-              <a:solidFill>
-                <a:srgbClr val="FFFFFF"/>
-              </a:solidFill>
-              <a:latin typeface="メイリオ"/>
-              <a:ea typeface="メイリオ"/>
-              <a:cs typeface="メイリオ"/>
-            </a:endParaRPr>
-          </a:p>
+            <a:pPr algn="ctr"/>
+          </a:p>
+        </p:txBody>
+      </p:sp>
+      <p:sp>
+        <p:nvSpPr>
+          <p:cNvPr id="32" name="TextBox 31"/>
+          <p:cNvSpPr txBox="1"/>
+          <p:nvPr/>
+        </p:nvSpPr>
+        <p:spPr>
+          <a:xfrm>
+            <a:off x="4770000" y="4914000"/>
+            <a:ext cx="2700000" cy="450000"/>
+          </a:xfrm>
+          <a:prstGeom prst="rect">
+            <a:avLst/>
+          </a:prstGeom>
+          <a:noFill/>
+        </p:spPr>
+        <p:txBody>
+          <a:bodyPr wrap="square" anchor="ctr" lIns="36000" rIns="36000" tIns="18000" bIns="18000">
+            <a:spAutoFit/>
+          </a:bodyPr>
+          <a:lstStyle/>
           <a:p>
             <a:pPr algn="ctr">
               <a:lnSpc>
@@ -3967,29 +4061,29 @@
               </a:spcAft>
             </a:pPr>
             <a:r>
-              <a:rPr sz="950" b="0" dirty="0">
-                <a:solidFill>
-                  <a:srgbClr val="D9DCEA"/>
+              <a:rPr sz="1150" b="1">
+                <a:solidFill>
+                  <a:srgbClr val="1F285A"/>
                 </a:solidFill>
                 <a:latin typeface="メイリオ"/>
                 <a:ea typeface="メイリオ"/>
                 <a:cs typeface="メイリオ"/>
               </a:rPr>
-              <a:t>購入1件あたりの費用</a:t>
-            </a:r>
-          </a:p>
-        </p:txBody>
-      </p:sp>
-      <p:sp>
-        <p:nvSpPr>
-          <p:cNvPr id="30" name="TextBox 29"/>
+              <a:t>許容CPA（目安CPA）の引き上げ</a:t>
+            </a:r>
+          </a:p>
+        </p:txBody>
+      </p:sp>
+      <p:sp>
+        <p:nvSpPr>
+          <p:cNvPr id="33" name="TextBox 32"/>
           <p:cNvSpPr txBox="1"/>
           <p:nvPr/>
         </p:nvSpPr>
         <p:spPr>
           <a:xfrm>
-            <a:off x="5185340" y="4788000"/>
-            <a:ext cx="3598659" cy="251999"/>
+            <a:off x="4590000" y="5382000"/>
+            <a:ext cx="3024000" cy="216000"/>
           </a:xfrm>
           <a:prstGeom prst="rect">
             <a:avLst/>
@@ -3997,7 +4091,7 @@
           <a:noFill/>
         </p:spPr>
         <p:txBody>
-          <a:bodyPr wrap="square" lIns="36000" tIns="18000" rIns="36000" bIns="18000" anchor="t">
+          <a:bodyPr wrap="square" anchor="t" lIns="36000" rIns="36000" tIns="18000" bIns="18000">
             <a:spAutoFit/>
           </a:bodyPr>
           <a:lstStyle/>
@@ -4011,7 +4105,7 @@
               </a:spcAft>
             </a:pPr>
             <a:r>
-              <a:rPr sz="1000" b="0">
+              <a:rPr sz="900" b="0">
                 <a:solidFill>
                   <a:srgbClr val="7F7F7F"/>
                 </a:solidFill>
@@ -4019,21 +4113,67 @@
                 <a:ea typeface="メイリオ"/>
                 <a:cs typeface="メイリオ"/>
               </a:rPr>
-              <a:t>リマインド・情報提供で、CVの後の離脱を防ぐ</a:t>
-            </a:r>
-          </a:p>
-        </p:txBody>
-      </p:sp>
-      <p:sp>
-        <p:nvSpPr>
-          <p:cNvPr id="31" name="TextBox 30"/>
+              <a:t>1件の最終成果にかけられる広告費が増える</a:t>
+            </a:r>
+          </a:p>
+        </p:txBody>
+      </p:sp>
+      <p:sp>
+        <p:nvSpPr>
+          <p:cNvPr id="34" name="Chevron 33"/>
+          <p:cNvSpPr/>
+          <p:nvPr/>
+        </p:nvSpPr>
+        <p:spPr>
+          <a:xfrm>
+            <a:off x="7542000" y="4914000"/>
+            <a:ext cx="3096000" cy="450000"/>
+          </a:xfrm>
+          <a:prstGeom prst="chevron">
+            <a:avLst>
+              <a:gd name="adj" fmla="val 25000"/>
+            </a:avLst>
+          </a:prstGeom>
+          <a:solidFill>
+            <a:srgbClr val="1F285A"/>
+          </a:solidFill>
+          <a:ln>
+            <a:noFill/>
+          </a:ln>
+          <a:effectLst/>
+        </p:spPr>
+        <p:style>
+          <a:lnRef idx="1">
+            <a:schemeClr val="accent1"/>
+          </a:lnRef>
+          <a:fillRef idx="3">
+            <a:schemeClr val="accent1"/>
+          </a:fillRef>
+          <a:effectRef idx="0">
+            <a:schemeClr val="accent1"/>
+          </a:effectRef>
+          <a:fontRef idx="minor">
+            <a:schemeClr val="lt1"/>
+          </a:fontRef>
+        </p:style>
+        <p:txBody>
+          <a:bodyPr rtlCol="0" anchor="ctr" wrap="square" lIns="72000" tIns="18000" rIns="72000" bIns="18000"/>
+          <a:lstStyle/>
+          <a:p>
+            <a:pPr algn="ctr"/>
+          </a:p>
+        </p:txBody>
+      </p:sp>
+      <p:sp>
+        <p:nvSpPr>
+          <p:cNvPr id="35" name="TextBox 34"/>
           <p:cNvSpPr txBox="1"/>
           <p:nvPr/>
         </p:nvSpPr>
         <p:spPr>
           <a:xfrm>
-            <a:off x="792000" y="5544000"/>
-            <a:ext cx="10620000" cy="503999"/>
+            <a:off x="7758000" y="4914000"/>
+            <a:ext cx="2700000" cy="450000"/>
           </a:xfrm>
           <a:prstGeom prst="rect">
             <a:avLst/>
@@ -4041,7 +4181,7 @@
           <a:noFill/>
         </p:spPr>
         <p:txBody>
-          <a:bodyPr wrap="square" lIns="36000" tIns="18000" rIns="36000" bIns="18000" anchor="ctr">
+          <a:bodyPr wrap="square" anchor="ctr" lIns="36000" rIns="36000" tIns="18000" bIns="18000">
             <a:spAutoFit/>
           </a:bodyPr>
           <a:lstStyle/>
@@ -4055,15 +4195,103 @@
               </a:spcAft>
             </a:pPr>
             <a:r>
-              <a:rPr sz="1700" b="1">
-                <a:solidFill>
-                  <a:srgbClr val="1F285A"/>
+              <a:rPr sz="1150" b="1">
+                <a:solidFill>
+                  <a:srgbClr val="FFFFFF"/>
                 </a:solidFill>
                 <a:latin typeface="メイリオ"/>
                 <a:ea typeface="メイリオ"/>
                 <a:cs typeface="メイリオ"/>
               </a:rPr>
-              <a:t>広告のCPA改善だけではなく、CV後まで含めて事業全体の獲得効率を改善する</a:t>
+              <a:t>広告配信の拡大</a:t>
+            </a:r>
+          </a:p>
+        </p:txBody>
+      </p:sp>
+      <p:sp>
+        <p:nvSpPr>
+          <p:cNvPr id="36" name="TextBox 35"/>
+          <p:cNvSpPr txBox="1"/>
+          <p:nvPr/>
+        </p:nvSpPr>
+        <p:spPr>
+          <a:xfrm>
+            <a:off x="7578000" y="5382000"/>
+            <a:ext cx="3024000" cy="216000"/>
+          </a:xfrm>
+          <a:prstGeom prst="rect">
+            <a:avLst/>
+          </a:prstGeom>
+          <a:noFill/>
+        </p:spPr>
+        <p:txBody>
+          <a:bodyPr wrap="square" anchor="t" lIns="36000" rIns="36000" tIns="18000" bIns="18000">
+            <a:spAutoFit/>
+          </a:bodyPr>
+          <a:lstStyle/>
+          <a:p>
+            <a:pPr algn="ctr">
+              <a:lnSpc>
+                <a:spcPct val="110000"/>
+              </a:lnSpc>
+              <a:spcAft>
+                <a:spcPts val="0"/>
+              </a:spcAft>
+            </a:pPr>
+            <a:r>
+              <a:rPr sz="900" b="0">
+                <a:solidFill>
+                  <a:srgbClr val="7F7F7F"/>
+                </a:solidFill>
+                <a:latin typeface="メイリオ"/>
+                <a:ea typeface="メイリオ"/>
+                <a:cs typeface="メイリオ"/>
+              </a:rPr>
+              <a:t>入札・配信を広げやすくなる</a:t>
+            </a:r>
+          </a:p>
+        </p:txBody>
+      </p:sp>
+      <p:sp>
+        <p:nvSpPr>
+          <p:cNvPr id="37" name="TextBox 36"/>
+          <p:cNvSpPr txBox="1"/>
+          <p:nvPr/>
+        </p:nvSpPr>
+        <p:spPr>
+          <a:xfrm>
+            <a:off x="792000" y="5724000"/>
+            <a:ext cx="10620000" cy="468000"/>
+          </a:xfrm>
+          <a:prstGeom prst="rect">
+            <a:avLst/>
+          </a:prstGeom>
+          <a:noFill/>
+        </p:spPr>
+        <p:txBody>
+          <a:bodyPr wrap="square" anchor="ctr" lIns="36000" rIns="36000" tIns="18000" bIns="18000">
+            <a:spAutoFit/>
+          </a:bodyPr>
+          <a:lstStyle/>
+          <a:p>
+            <a:pPr algn="ctr">
+              <a:lnSpc>
+                <a:spcPct val="110000"/>
+              </a:lnSpc>
+              <a:spcAft>
+                <a:spcPts val="0"/>
+              </a:spcAft>
+            </a:pPr>
+            <a:r>
+              <a:rPr sz="1700" b="1">
+                <a:solidFill>
+                  <a:srgbClr val="1F285A"/>
+                </a:solidFill>
+                <a:latin typeface="メイリオ"/>
+                <a:ea typeface="メイリオ"/>
+                <a:cs typeface="メイリオ"/>
+              </a:rPr>
+              <a:t>広告施策とサンクスLINEをセットで実施し、事業単位での獲得効率を改善</a:t>
             </a:r>
           </a:p>
         </p:txBody>

--- a/20261007_サンクスLINE誘導のご提案_業界別ver3.0.pptx
+++ b/20261007_サンクスLINE誘導のご提案_業界別ver3.0.pptx
@@ -2699,14 +2699,124 @@
       </p:sp>
       <p:sp>
         <p:nvSpPr>
-          <p:cNvPr id="4" name="TextBox 2"/>
+          <p:cNvPr id="4" name="Rounded Rectangle 3"/>
+          <p:cNvSpPr/>
+          <p:nvPr/>
+        </p:nvSpPr>
+        <p:spPr>
+          <a:xfrm>
+            <a:off x="792000" y="792000"/>
+            <a:ext cx="5184000" cy="3564000"/>
+          </a:xfrm>
+          <a:prstGeom prst="roundRect">
+            <a:avLst>
+              <a:gd name="adj" fmla="val 4000"/>
+            </a:avLst>
+          </a:prstGeom>
+          <a:solidFill>
+            <a:srgbClr val="F2F5FB"/>
+          </a:solidFill>
+          <a:ln>
+            <a:noFill/>
+          </a:ln>
+          <a:effectLst/>
+        </p:spPr>
+        <p:style>
+          <a:lnRef idx="1">
+            <a:schemeClr val="accent1"/>
+          </a:lnRef>
+          <a:fillRef idx="3">
+            <a:schemeClr val="accent1"/>
+          </a:fillRef>
+          <a:effectRef idx="0">
+            <a:schemeClr val="accent1"/>
+          </a:effectRef>
+          <a:fontRef idx="minor">
+            <a:schemeClr val="lt1"/>
+          </a:fontRef>
+        </p:style>
+        <p:txBody>
+          <a:bodyPr rtlCol="0" anchor="ctr" wrap="square" lIns="72000" tIns="18000" rIns="72000" bIns="18000"/>
+          <a:lstStyle/>
+          <a:p>
+            <a:pPr algn="ctr"/>
+          </a:p>
+        </p:txBody>
+      </p:sp>
+      <p:sp>
+        <p:nvSpPr>
+          <p:cNvPr id="5" name="Rounded Rectangle 4"/>
+          <p:cNvSpPr/>
+          <p:nvPr/>
+        </p:nvSpPr>
+        <p:spPr>
+          <a:xfrm>
+            <a:off x="1080000" y="990000"/>
+            <a:ext cx="1296000" cy="324000"/>
+          </a:xfrm>
+          <a:prstGeom prst="roundRect">
+            <a:avLst>
+              <a:gd name="adj" fmla="val 50000"/>
+            </a:avLst>
+          </a:prstGeom>
+          <a:solidFill>
+            <a:srgbClr val="1F285A"/>
+          </a:solidFill>
+          <a:ln>
+            <a:noFill/>
+          </a:ln>
+          <a:effectLst/>
+        </p:spPr>
+        <p:style>
+          <a:lnRef idx="1">
+            <a:schemeClr val="accent1"/>
+          </a:lnRef>
+          <a:fillRef idx="3">
+            <a:schemeClr val="accent1"/>
+          </a:fillRef>
+          <a:effectRef idx="0">
+            <a:schemeClr val="accent1"/>
+          </a:effectRef>
+          <a:fontRef idx="minor">
+            <a:schemeClr val="lt1"/>
+          </a:fontRef>
+        </p:style>
+        <p:txBody>
+          <a:bodyPr rtlCol="0" anchor="ctr" wrap="square" lIns="18000" tIns="0" rIns="18000" bIns="0"/>
+          <a:lstStyle/>
+          <a:p>
+            <a:pPr algn="ctr">
+              <a:lnSpc>
+                <a:spcPct val="110000"/>
+              </a:lnSpc>
+              <a:spcAft>
+                <a:spcPts val="0"/>
+              </a:spcAft>
+            </a:pPr>
+            <a:r>
+              <a:rPr sz="1100" b="1">
+                <a:solidFill>
+                  <a:srgbClr val="FFFFFF"/>
+                </a:solidFill>
+                <a:latin typeface="メイリオ"/>
+                <a:ea typeface="メイリオ"/>
+                <a:cs typeface="メイリオ"/>
+              </a:rPr>
+              <a:t>CV獲得まで</a:t>
+            </a:r>
+          </a:p>
+        </p:txBody>
+      </p:sp>
+      <p:sp>
+        <p:nvSpPr>
+          <p:cNvPr id="6" name="TextBox 5"/>
           <p:cNvSpPr txBox="1"/>
           <p:nvPr/>
         </p:nvSpPr>
         <p:spPr>
           <a:xfrm>
-            <a:off x="793680" y="725334"/>
-            <a:ext cx="11214119" cy="529332"/>
+            <a:off x="2448000" y="864000"/>
+            <a:ext cx="3384000" cy="576000"/>
           </a:xfrm>
           <a:prstGeom prst="rect">
             <a:avLst/>
@@ -2714,55 +2824,1439 @@
           <a:noFill/>
         </p:spPr>
         <p:txBody>
-          <a:bodyPr wrap="square" lIns="0" tIns="21600" rIns="0" bIns="21600" anchor="ctr">
+          <a:bodyPr wrap="square" anchor="ctr" lIns="36000" rIns="36000" tIns="10800" bIns="10800">
             <a:spAutoFit/>
           </a:bodyPr>
           <a:lstStyle/>
           <a:p>
             <a:pPr algn="l">
               <a:lnSpc>
-                <a:spcPct val="130000"/>
+                <a:spcPct val="105000"/>
               </a:lnSpc>
+              <a:spcAft>
+                <a:spcPts val="200"/>
+              </a:spcAft>
             </a:pPr>
             <a:r>
-              <a:rPr sz="1800" dirty="0" err="1">
-                <a:solidFill>
-                  <a:srgbClr val="333333"/>
+              <a:rPr sz="1500" b="1">
+                <a:solidFill>
+                  <a:srgbClr val="1F285A"/>
                 </a:solidFill>
                 <a:latin typeface="メイリオ"/>
                 <a:ea typeface="メイリオ"/>
                 <a:cs typeface="メイリオ"/>
               </a:rPr>
-              <a:t>広告はCV獲得までのCPA、サンクスLINEはCV獲得後のCPOを改善</a:t>
-            </a:r>
-            <a:endParaRPr sz="1250" dirty="0">
-              <a:solidFill>
-                <a:srgbClr val="333333"/>
-              </a:solidFill>
-              <a:latin typeface="メイリオ"/>
-              <a:ea typeface="メイリオ"/>
-              <a:cs typeface="メイリオ"/>
-            </a:endParaRPr>
+              <a:t>施策全体の </a:t>
+            </a:r>
+            <a:r>
+              <a:rPr sz="3000" b="1">
+                <a:solidFill>
+                  <a:srgbClr val="1F285A"/>
+                </a:solidFill>
+                <a:latin typeface="メイリオ"/>
+                <a:ea typeface="メイリオ"/>
+                <a:cs typeface="メイリオ"/>
+              </a:rPr>
+              <a:t>CPA</a:t>
+            </a:r>
+            <a:r>
+              <a:rPr sz="1900" b="1">
+                <a:solidFill>
+                  <a:srgbClr val="1F285A"/>
+                </a:solidFill>
+                <a:latin typeface="メイリオ"/>
+                <a:ea typeface="メイリオ"/>
+                <a:cs typeface="メイリオ"/>
+              </a:rPr>
+              <a:t> 改善</a:t>
+            </a:r>
+          </a:p>
+        </p:txBody>
+      </p:sp>
+      <p:sp>
+        <p:nvSpPr>
+          <p:cNvPr id="7" name="Rectangle 6"/>
+          <p:cNvSpPr/>
+          <p:nvPr/>
+        </p:nvSpPr>
+        <p:spPr>
+          <a:xfrm>
+            <a:off x="1260000" y="1548000"/>
+            <a:ext cx="4248000" cy="413999"/>
+          </a:xfrm>
+          <a:prstGeom prst="rect">
+            <a:avLst/>
+          </a:prstGeom>
+          <a:solidFill>
+            <a:srgbClr val="DDE3F2"/>
+          </a:solidFill>
+          <a:ln>
+            <a:noFill/>
+          </a:ln>
+          <a:effectLst/>
+        </p:spPr>
+        <p:style>
+          <a:lnRef idx="1">
+            <a:schemeClr val="accent1"/>
+          </a:lnRef>
+          <a:fillRef idx="3">
+            <a:schemeClr val="accent1"/>
+          </a:fillRef>
+          <a:effectRef idx="0">
+            <a:schemeClr val="accent1"/>
+          </a:effectRef>
+          <a:fontRef idx="minor">
+            <a:schemeClr val="lt1"/>
+          </a:fontRef>
+        </p:style>
+        <p:txBody>
+          <a:bodyPr rtlCol="0" anchor="ctr" wrap="square" lIns="36000" tIns="0" rIns="36000" bIns="0"/>
+          <a:lstStyle/>
+          <a:p>
+            <a:pPr algn="ctr">
+              <a:lnSpc>
+                <a:spcPct val="110000"/>
+              </a:lnSpc>
+              <a:spcAft>
+                <a:spcPts val="0"/>
+              </a:spcAft>
+            </a:pPr>
+            <a:r>
+              <a:rPr sz="1300" b="1">
+                <a:solidFill>
+                  <a:srgbClr val="333333"/>
+                </a:solidFill>
+                <a:latin typeface="メイリオ"/>
+                <a:ea typeface="メイリオ"/>
+                <a:cs typeface="メイリオ"/>
+              </a:rPr>
+              <a:t>広告</a:t>
+            </a:r>
+          </a:p>
+        </p:txBody>
+      </p:sp>
+      <p:sp>
+        <p:nvSpPr>
+          <p:cNvPr id="8" name="Isosceles Triangle 7"/>
+          <p:cNvSpPr/>
+          <p:nvPr/>
+        </p:nvSpPr>
+        <p:spPr>
+          <a:xfrm rot="10800000">
+            <a:off x="3304800" y="1998000"/>
+            <a:ext cx="158400" cy="108000"/>
+          </a:xfrm>
+          <a:prstGeom prst="triangle">
+            <a:avLst/>
+          </a:prstGeom>
+          <a:solidFill>
+            <a:srgbClr val="1F285A"/>
+          </a:solidFill>
+          <a:ln>
+            <a:noFill/>
+          </a:ln>
+          <a:effectLst/>
+        </p:spPr>
+        <p:style>
+          <a:lnRef idx="1">
+            <a:schemeClr val="accent1"/>
+          </a:lnRef>
+          <a:fillRef idx="3">
+            <a:schemeClr val="accent1"/>
+          </a:fillRef>
+          <a:effectRef idx="0">
+            <a:schemeClr val="accent1"/>
+          </a:effectRef>
+          <a:fontRef idx="minor">
+            <a:schemeClr val="lt1"/>
+          </a:fontRef>
+        </p:style>
+        <p:txBody>
+          <a:bodyPr rtlCol="0" anchor="ctr"/>
+          <a:lstStyle/>
+          <a:p>
+            <a:pPr algn="ctr"/>
+          </a:p>
+        </p:txBody>
+      </p:sp>
+      <p:sp>
+        <p:nvSpPr>
+          <p:cNvPr id="9" name="Rectangle 8"/>
+          <p:cNvSpPr/>
+          <p:nvPr/>
+        </p:nvSpPr>
+        <p:spPr>
+          <a:xfrm>
+            <a:off x="1260000" y="2142000"/>
+            <a:ext cx="4248000" cy="413999"/>
+          </a:xfrm>
+          <a:prstGeom prst="rect">
+            <a:avLst/>
+          </a:prstGeom>
+          <a:solidFill>
+            <a:srgbClr val="DDE3F2"/>
+          </a:solidFill>
+          <a:ln>
+            <a:noFill/>
+          </a:ln>
+          <a:effectLst/>
+        </p:spPr>
+        <p:style>
+          <a:lnRef idx="1">
+            <a:schemeClr val="accent1"/>
+          </a:lnRef>
+          <a:fillRef idx="3">
+            <a:schemeClr val="accent1"/>
+          </a:fillRef>
+          <a:effectRef idx="0">
+            <a:schemeClr val="accent1"/>
+          </a:effectRef>
+          <a:fontRef idx="minor">
+            <a:schemeClr val="lt1"/>
+          </a:fontRef>
+        </p:style>
+        <p:txBody>
+          <a:bodyPr rtlCol="0" anchor="ctr" wrap="square" lIns="36000" tIns="0" rIns="36000" bIns="0"/>
+          <a:lstStyle/>
+          <a:p>
+            <a:pPr algn="ctr">
+              <a:lnSpc>
+                <a:spcPct val="110000"/>
+              </a:lnSpc>
+              <a:spcAft>
+                <a:spcPts val="0"/>
+              </a:spcAft>
+            </a:pPr>
+            <a:r>
+              <a:rPr sz="1300" b="1">
+                <a:solidFill>
+                  <a:srgbClr val="333333"/>
+                </a:solidFill>
+                <a:latin typeface="メイリオ"/>
+                <a:ea typeface="メイリオ"/>
+                <a:cs typeface="メイリオ"/>
+              </a:rPr>
+              <a:t>LP</a:t>
+            </a:r>
+          </a:p>
+        </p:txBody>
+      </p:sp>
+      <p:sp>
+        <p:nvSpPr>
+          <p:cNvPr id="10" name="Isosceles Triangle 9"/>
+          <p:cNvSpPr/>
+          <p:nvPr/>
+        </p:nvSpPr>
+        <p:spPr>
+          <a:xfrm rot="10800000">
+            <a:off x="3304800" y="2592000"/>
+            <a:ext cx="158400" cy="108000"/>
+          </a:xfrm>
+          <a:prstGeom prst="triangle">
+            <a:avLst/>
+          </a:prstGeom>
+          <a:solidFill>
+            <a:srgbClr val="1F285A"/>
+          </a:solidFill>
+          <a:ln>
+            <a:noFill/>
+          </a:ln>
+          <a:effectLst/>
+        </p:spPr>
+        <p:style>
+          <a:lnRef idx="1">
+            <a:schemeClr val="accent1"/>
+          </a:lnRef>
+          <a:fillRef idx="3">
+            <a:schemeClr val="accent1"/>
+          </a:fillRef>
+          <a:effectRef idx="0">
+            <a:schemeClr val="accent1"/>
+          </a:effectRef>
+          <a:fontRef idx="minor">
+            <a:schemeClr val="lt1"/>
+          </a:fontRef>
+        </p:style>
+        <p:txBody>
+          <a:bodyPr rtlCol="0" anchor="ctr"/>
+          <a:lstStyle/>
+          <a:p>
+            <a:pPr algn="ctr"/>
+          </a:p>
+        </p:txBody>
+      </p:sp>
+      <p:sp>
+        <p:nvSpPr>
+          <p:cNvPr id="11" name="Rectangle 10"/>
+          <p:cNvSpPr/>
+          <p:nvPr/>
+        </p:nvSpPr>
+        <p:spPr>
+          <a:xfrm>
+            <a:off x="1260000" y="2736000"/>
+            <a:ext cx="4248000" cy="413999"/>
+          </a:xfrm>
+          <a:prstGeom prst="rect">
+            <a:avLst/>
+          </a:prstGeom>
+          <a:solidFill>
+            <a:srgbClr val="DDE3F2"/>
+          </a:solidFill>
+          <a:ln>
+            <a:noFill/>
+          </a:ln>
+          <a:effectLst/>
+        </p:spPr>
+        <p:style>
+          <a:lnRef idx="1">
+            <a:schemeClr val="accent1"/>
+          </a:lnRef>
+          <a:fillRef idx="3">
+            <a:schemeClr val="accent1"/>
+          </a:fillRef>
+          <a:effectRef idx="0">
+            <a:schemeClr val="accent1"/>
+          </a:effectRef>
+          <a:fontRef idx="minor">
+            <a:schemeClr val="lt1"/>
+          </a:fontRef>
+        </p:style>
+        <p:txBody>
+          <a:bodyPr rtlCol="0" anchor="ctr" wrap="square" lIns="36000" tIns="0" rIns="36000" bIns="0"/>
+          <a:lstStyle/>
+          <a:p>
+            <a:pPr algn="ctr">
+              <a:lnSpc>
+                <a:spcPct val="110000"/>
+              </a:lnSpc>
+              <a:spcAft>
+                <a:spcPts val="0"/>
+              </a:spcAft>
+            </a:pPr>
+            <a:r>
+              <a:rPr sz="1300" b="1">
+                <a:solidFill>
+                  <a:srgbClr val="333333"/>
+                </a:solidFill>
+                <a:latin typeface="メイリオ"/>
+                <a:ea typeface="メイリオ"/>
+                <a:cs typeface="メイリオ"/>
+              </a:rPr>
+              <a:t>離脱防止 × 成果報酬施策</a:t>
+            </a:r>
+          </a:p>
+        </p:txBody>
+      </p:sp>
+      <p:sp>
+        <p:nvSpPr>
+          <p:cNvPr id="12" name="Isosceles Triangle 11"/>
+          <p:cNvSpPr/>
+          <p:nvPr/>
+        </p:nvSpPr>
+        <p:spPr>
+          <a:xfrm rot="10800000">
+            <a:off x="3304800" y="3186000"/>
+            <a:ext cx="158400" cy="108000"/>
+          </a:xfrm>
+          <a:prstGeom prst="triangle">
+            <a:avLst/>
+          </a:prstGeom>
+          <a:solidFill>
+            <a:srgbClr val="1F285A"/>
+          </a:solidFill>
+          <a:ln>
+            <a:noFill/>
+          </a:ln>
+          <a:effectLst/>
+        </p:spPr>
+        <p:style>
+          <a:lnRef idx="1">
+            <a:schemeClr val="accent1"/>
+          </a:lnRef>
+          <a:fillRef idx="3">
+            <a:schemeClr val="accent1"/>
+          </a:fillRef>
+          <a:effectRef idx="0">
+            <a:schemeClr val="accent1"/>
+          </a:effectRef>
+          <a:fontRef idx="minor">
+            <a:schemeClr val="lt1"/>
+          </a:fontRef>
+        </p:style>
+        <p:txBody>
+          <a:bodyPr rtlCol="0" anchor="ctr"/>
+          <a:lstStyle/>
+          <a:p>
+            <a:pPr algn="ctr"/>
+          </a:p>
+        </p:txBody>
+      </p:sp>
+      <p:sp>
+        <p:nvSpPr>
+          <p:cNvPr id="13" name="Rectangle 12"/>
+          <p:cNvSpPr/>
+          <p:nvPr/>
+        </p:nvSpPr>
+        <p:spPr>
+          <a:xfrm>
+            <a:off x="1260000" y="3330000"/>
+            <a:ext cx="4248000" cy="413999"/>
+          </a:xfrm>
+          <a:prstGeom prst="rect">
+            <a:avLst/>
+          </a:prstGeom>
+          <a:solidFill>
+            <a:srgbClr val="1F285A"/>
+          </a:solidFill>
+          <a:ln>
+            <a:noFill/>
+          </a:ln>
+          <a:effectLst/>
+        </p:spPr>
+        <p:style>
+          <a:lnRef idx="1">
+            <a:schemeClr val="accent1"/>
+          </a:lnRef>
+          <a:fillRef idx="3">
+            <a:schemeClr val="accent1"/>
+          </a:fillRef>
+          <a:effectRef idx="0">
+            <a:schemeClr val="accent1"/>
+          </a:effectRef>
+          <a:fontRef idx="minor">
+            <a:schemeClr val="lt1"/>
+          </a:fontRef>
+        </p:style>
+        <p:txBody>
+          <a:bodyPr rtlCol="0" anchor="ctr" wrap="square" lIns="36000" tIns="0" rIns="36000" bIns="0"/>
+          <a:lstStyle/>
+          <a:p>
+            <a:pPr algn="ctr">
+              <a:lnSpc>
+                <a:spcPct val="110000"/>
+              </a:lnSpc>
+              <a:spcAft>
+                <a:spcPts val="0"/>
+              </a:spcAft>
+            </a:pPr>
+            <a:r>
+              <a:rPr sz="1300" b="1">
+                <a:solidFill>
+                  <a:srgbClr val="FFFFFF"/>
+                </a:solidFill>
+                <a:latin typeface="メイリオ"/>
+                <a:ea typeface="メイリオ"/>
+                <a:cs typeface="メイリオ"/>
+              </a:rPr>
+              <a:t>CV</a:t>
+            </a:r>
+          </a:p>
+        </p:txBody>
+      </p:sp>
+      <p:sp>
+        <p:nvSpPr>
+          <p:cNvPr id="14" name="TextBox 13"/>
+          <p:cNvSpPr txBox="1"/>
+          <p:nvPr/>
+        </p:nvSpPr>
+        <p:spPr>
+          <a:xfrm>
+            <a:off x="1008000" y="3888000"/>
+            <a:ext cx="4752000" cy="503999"/>
+          </a:xfrm>
+          <a:prstGeom prst="rect">
+            <a:avLst/>
+          </a:prstGeom>
+          <a:noFill/>
+        </p:spPr>
+        <p:txBody>
+          <a:bodyPr wrap="square" anchor="ctr" lIns="36000" rIns="36000" tIns="18000" bIns="18000">
+            <a:spAutoFit/>
+          </a:bodyPr>
+          <a:lstStyle/>
+          <a:p>
+            <a:pPr algn="ctr">
+              <a:lnSpc>
+                <a:spcPct val="110000"/>
+              </a:lnSpc>
+              <a:spcAft>
+                <a:spcPts val="0"/>
+              </a:spcAft>
+            </a:pPr>
+            <a:r>
+              <a:rPr sz="1050" b="0">
+                <a:solidFill>
+                  <a:srgbClr val="333333"/>
+                </a:solidFill>
+                <a:latin typeface="メイリオ"/>
+                <a:ea typeface="メイリオ"/>
+                <a:cs typeface="メイリオ"/>
+              </a:rPr>
+              <a:t>CVの取りこぼしを減らし、獲得チャネルを増やすことで</a:t>
+            </a:r>
+          </a:p>
+          <a:p>
+            <a:pPr algn="ctr">
+              <a:lnSpc>
+                <a:spcPct val="110000"/>
+              </a:lnSpc>
+              <a:spcAft>
+                <a:spcPts val="0"/>
+              </a:spcAft>
+            </a:pPr>
+            <a:r>
+              <a:rPr sz="1050" b="0">
+                <a:solidFill>
+                  <a:srgbClr val="333333"/>
+                </a:solidFill>
+                <a:latin typeface="メイリオ"/>
+                <a:ea typeface="メイリオ"/>
+                <a:cs typeface="メイリオ"/>
+              </a:rPr>
+              <a:t>施策全体のCPAを改善</a:t>
+            </a:r>
+          </a:p>
+        </p:txBody>
+      </p:sp>
+      <p:sp>
+        <p:nvSpPr>
+          <p:cNvPr id="15" name="Rounded Rectangle 14"/>
+          <p:cNvSpPr/>
+          <p:nvPr/>
+        </p:nvSpPr>
+        <p:spPr>
+          <a:xfrm>
+            <a:off x="6228000" y="792000"/>
+            <a:ext cx="5184000" cy="3564000"/>
+          </a:xfrm>
+          <a:prstGeom prst="roundRect">
+            <a:avLst>
+              <a:gd name="adj" fmla="val 4000"/>
+            </a:avLst>
+          </a:prstGeom>
+          <a:solidFill>
+            <a:srgbClr val="EEF7F1"/>
+          </a:solidFill>
+          <a:ln>
+            <a:noFill/>
+          </a:ln>
+          <a:effectLst/>
+        </p:spPr>
+        <p:style>
+          <a:lnRef idx="1">
+            <a:schemeClr val="accent1"/>
+          </a:lnRef>
+          <a:fillRef idx="3">
+            <a:schemeClr val="accent1"/>
+          </a:fillRef>
+          <a:effectRef idx="0">
+            <a:schemeClr val="accent1"/>
+          </a:effectRef>
+          <a:fontRef idx="minor">
+            <a:schemeClr val="lt1"/>
+          </a:fontRef>
+        </p:style>
+        <p:txBody>
+          <a:bodyPr rtlCol="0" anchor="ctr" wrap="square" lIns="72000" tIns="18000" rIns="72000" bIns="18000"/>
+          <a:lstStyle/>
+          <a:p>
+            <a:pPr algn="ctr"/>
+          </a:p>
+        </p:txBody>
+      </p:sp>
+      <p:sp>
+        <p:nvSpPr>
+          <p:cNvPr id="16" name="Rounded Rectangle 15"/>
+          <p:cNvSpPr/>
+          <p:nvPr/>
+        </p:nvSpPr>
+        <p:spPr>
+          <a:xfrm>
+            <a:off x="6516000" y="990000"/>
+            <a:ext cx="1296000" cy="324000"/>
+          </a:xfrm>
+          <a:prstGeom prst="roundRect">
+            <a:avLst>
+              <a:gd name="adj" fmla="val 50000"/>
+            </a:avLst>
+          </a:prstGeom>
+          <a:solidFill>
+            <a:srgbClr val="0E8A3F"/>
+          </a:solidFill>
+          <a:ln>
+            <a:noFill/>
+          </a:ln>
+          <a:effectLst/>
+        </p:spPr>
+        <p:style>
+          <a:lnRef idx="1">
+            <a:schemeClr val="accent1"/>
+          </a:lnRef>
+          <a:fillRef idx="3">
+            <a:schemeClr val="accent1"/>
+          </a:fillRef>
+          <a:effectRef idx="0">
+            <a:schemeClr val="accent1"/>
+          </a:effectRef>
+          <a:fontRef idx="minor">
+            <a:schemeClr val="lt1"/>
+          </a:fontRef>
+        </p:style>
+        <p:txBody>
+          <a:bodyPr rtlCol="0" anchor="ctr" wrap="square" lIns="18000" tIns="0" rIns="18000" bIns="0"/>
+          <a:lstStyle/>
+          <a:p>
+            <a:pPr algn="ctr">
+              <a:lnSpc>
+                <a:spcPct val="110000"/>
+              </a:lnSpc>
+              <a:spcAft>
+                <a:spcPts val="0"/>
+              </a:spcAft>
+            </a:pPr>
+            <a:r>
+              <a:rPr sz="1100" b="1">
+                <a:solidFill>
+                  <a:srgbClr val="FFFFFF"/>
+                </a:solidFill>
+                <a:latin typeface="メイリオ"/>
+                <a:ea typeface="メイリオ"/>
+                <a:cs typeface="メイリオ"/>
+              </a:rPr>
+              <a:t>CV獲得後</a:t>
+            </a:r>
+          </a:p>
+        </p:txBody>
+      </p:sp>
+      <p:sp>
+        <p:nvSpPr>
+          <p:cNvPr id="17" name="TextBox 16"/>
+          <p:cNvSpPr txBox="1"/>
+          <p:nvPr/>
+        </p:nvSpPr>
+        <p:spPr>
+          <a:xfrm>
+            <a:off x="7883999" y="864000"/>
+            <a:ext cx="3384000" cy="576000"/>
+          </a:xfrm>
+          <a:prstGeom prst="rect">
+            <a:avLst/>
+          </a:prstGeom>
+          <a:noFill/>
+        </p:spPr>
+        <p:txBody>
+          <a:bodyPr wrap="square" anchor="ctr" lIns="36000" rIns="36000" tIns="10800" bIns="10800">
+            <a:spAutoFit/>
+          </a:bodyPr>
+          <a:lstStyle/>
+          <a:p>
+            <a:pPr algn="l">
+              <a:lnSpc>
+                <a:spcPct val="105000"/>
+              </a:lnSpc>
+              <a:spcAft>
+                <a:spcPts val="200"/>
+              </a:spcAft>
+            </a:pPr>
+            <a:r>
+              <a:rPr sz="3000" b="1">
+                <a:solidFill>
+                  <a:srgbClr val="0E8A3F"/>
+                </a:solidFill>
+                <a:latin typeface="メイリオ"/>
+                <a:ea typeface="メイリオ"/>
+                <a:cs typeface="メイリオ"/>
+              </a:rPr>
+              <a:t>CPO</a:t>
+            </a:r>
+            <a:r>
+              <a:rPr sz="1900" b="1">
+                <a:solidFill>
+                  <a:srgbClr val="0E8A3F"/>
+                </a:solidFill>
+                <a:latin typeface="メイリオ"/>
+                <a:ea typeface="メイリオ"/>
+                <a:cs typeface="メイリオ"/>
+              </a:rPr>
+              <a:t> の改善</a:t>
+            </a:r>
+          </a:p>
+        </p:txBody>
+      </p:sp>
+      <p:sp>
+        <p:nvSpPr>
+          <p:cNvPr id="18" name="Rectangle 17"/>
+          <p:cNvSpPr/>
+          <p:nvPr/>
+        </p:nvSpPr>
+        <p:spPr>
+          <a:xfrm>
+            <a:off x="6696000" y="1548000"/>
+            <a:ext cx="4248000" cy="413999"/>
+          </a:xfrm>
+          <a:prstGeom prst="rect">
+            <a:avLst/>
+          </a:prstGeom>
+          <a:solidFill>
+            <a:srgbClr val="FFFFFF"/>
+          </a:solidFill>
+          <a:ln>
+            <a:noFill/>
+          </a:ln>
+          <a:effectLst/>
+        </p:spPr>
+        <p:style>
+          <a:lnRef idx="1">
+            <a:schemeClr val="accent1"/>
+          </a:lnRef>
+          <a:fillRef idx="3">
+            <a:schemeClr val="accent1"/>
+          </a:fillRef>
+          <a:effectRef idx="0">
+            <a:schemeClr val="accent1"/>
+          </a:effectRef>
+          <a:fontRef idx="minor">
+            <a:schemeClr val="lt1"/>
+          </a:fontRef>
+        </p:style>
+        <p:txBody>
+          <a:bodyPr rtlCol="0" anchor="ctr" wrap="square" lIns="36000" tIns="0" rIns="36000" bIns="0"/>
+          <a:lstStyle/>
+          <a:p>
+            <a:pPr algn="ctr">
+              <a:lnSpc>
+                <a:spcPct val="110000"/>
+              </a:lnSpc>
+              <a:spcAft>
+                <a:spcPts val="0"/>
+              </a:spcAft>
+            </a:pPr>
+            <a:r>
+              <a:rPr sz="1300" b="1">
+                <a:solidFill>
+                  <a:srgbClr val="333333"/>
+                </a:solidFill>
+                <a:latin typeface="メイリオ"/>
+                <a:ea typeface="メイリオ"/>
+                <a:cs typeface="メイリオ"/>
+              </a:rPr>
+              <a:t>CV</a:t>
+            </a:r>
+          </a:p>
+        </p:txBody>
+      </p:sp>
+      <p:sp>
+        <p:nvSpPr>
+          <p:cNvPr id="19" name="Isosceles Triangle 18"/>
+          <p:cNvSpPr/>
+          <p:nvPr/>
+        </p:nvSpPr>
+        <p:spPr>
+          <a:xfrm rot="10800000">
+            <a:off x="8740800" y="1998000"/>
+            <a:ext cx="158400" cy="108000"/>
+          </a:xfrm>
+          <a:prstGeom prst="triangle">
+            <a:avLst/>
+          </a:prstGeom>
+          <a:solidFill>
+            <a:srgbClr val="0E8A3F"/>
+          </a:solidFill>
+          <a:ln>
+            <a:noFill/>
+          </a:ln>
+          <a:effectLst/>
+        </p:spPr>
+        <p:style>
+          <a:lnRef idx="1">
+            <a:schemeClr val="accent1"/>
+          </a:lnRef>
+          <a:fillRef idx="3">
+            <a:schemeClr val="accent1"/>
+          </a:fillRef>
+          <a:effectRef idx="0">
+            <a:schemeClr val="accent1"/>
+          </a:effectRef>
+          <a:fontRef idx="minor">
+            <a:schemeClr val="lt1"/>
+          </a:fontRef>
+        </p:style>
+        <p:txBody>
+          <a:bodyPr rtlCol="0" anchor="ctr"/>
+          <a:lstStyle/>
+          <a:p>
+            <a:pPr algn="ctr"/>
+          </a:p>
+        </p:txBody>
+      </p:sp>
+      <p:sp>
+        <p:nvSpPr>
+          <p:cNvPr id="20" name="Rectangle 19"/>
+          <p:cNvSpPr/>
+          <p:nvPr/>
+        </p:nvSpPr>
+        <p:spPr>
+          <a:xfrm>
+            <a:off x="6696000" y="2142000"/>
+            <a:ext cx="4248000" cy="413999"/>
+          </a:xfrm>
+          <a:prstGeom prst="rect">
+            <a:avLst/>
+          </a:prstGeom>
+          <a:solidFill>
+            <a:srgbClr val="E8F8EE"/>
+          </a:solidFill>
+          <a:ln>
+            <a:noFill/>
+          </a:ln>
+          <a:effectLst/>
+        </p:spPr>
+        <p:style>
+          <a:lnRef idx="1">
+            <a:schemeClr val="accent1"/>
+          </a:lnRef>
+          <a:fillRef idx="3">
+            <a:schemeClr val="accent1"/>
+          </a:fillRef>
+          <a:effectRef idx="0">
+            <a:schemeClr val="accent1"/>
+          </a:effectRef>
+          <a:fontRef idx="minor">
+            <a:schemeClr val="lt1"/>
+          </a:fontRef>
+        </p:style>
+        <p:txBody>
+          <a:bodyPr rtlCol="0" anchor="ctr" wrap="square" lIns="36000" tIns="0" rIns="36000" bIns="0"/>
+          <a:lstStyle/>
+          <a:p>
+            <a:pPr algn="ctr">
+              <a:lnSpc>
+                <a:spcPct val="110000"/>
+              </a:lnSpc>
+              <a:spcAft>
+                <a:spcPts val="0"/>
+              </a:spcAft>
+            </a:pPr>
+            <a:r>
+              <a:rPr sz="1300" b="1">
+                <a:solidFill>
+                  <a:srgbClr val="0B7A3B"/>
+                </a:solidFill>
+                <a:latin typeface="メイリオ"/>
+                <a:ea typeface="メイリオ"/>
+                <a:cs typeface="メイリオ"/>
+              </a:rPr>
+              <a:t>サンクスLINE誘導</a:t>
+            </a:r>
+          </a:p>
+        </p:txBody>
+      </p:sp>
+      <p:sp>
+        <p:nvSpPr>
+          <p:cNvPr id="21" name="Isosceles Triangle 20"/>
+          <p:cNvSpPr/>
+          <p:nvPr/>
+        </p:nvSpPr>
+        <p:spPr>
+          <a:xfrm rot="10800000">
+            <a:off x="8740800" y="2592000"/>
+            <a:ext cx="158400" cy="108000"/>
+          </a:xfrm>
+          <a:prstGeom prst="triangle">
+            <a:avLst/>
+          </a:prstGeom>
+          <a:solidFill>
+            <a:srgbClr val="0B7A3B"/>
+          </a:solidFill>
+          <a:ln>
+            <a:noFill/>
+          </a:ln>
+          <a:effectLst/>
+        </p:spPr>
+        <p:style>
+          <a:lnRef idx="1">
+            <a:schemeClr val="accent1"/>
+          </a:lnRef>
+          <a:fillRef idx="3">
+            <a:schemeClr val="accent1"/>
+          </a:fillRef>
+          <a:effectRef idx="0">
+            <a:schemeClr val="accent1"/>
+          </a:effectRef>
+          <a:fontRef idx="minor">
+            <a:schemeClr val="lt1"/>
+          </a:fontRef>
+        </p:style>
+        <p:txBody>
+          <a:bodyPr rtlCol="0" anchor="ctr"/>
+          <a:lstStyle/>
+          <a:p>
+            <a:pPr algn="ctr"/>
+          </a:p>
+        </p:txBody>
+      </p:sp>
+      <p:sp>
+        <p:nvSpPr>
+          <p:cNvPr id="22" name="Rectangle 21"/>
+          <p:cNvSpPr/>
+          <p:nvPr/>
+        </p:nvSpPr>
+        <p:spPr>
+          <a:xfrm>
+            <a:off x="6696000" y="2736000"/>
+            <a:ext cx="4248000" cy="413999"/>
+          </a:xfrm>
+          <a:prstGeom prst="rect">
+            <a:avLst/>
+          </a:prstGeom>
+          <a:solidFill>
+            <a:srgbClr val="E8F8EE"/>
+          </a:solidFill>
+          <a:ln>
+            <a:noFill/>
+          </a:ln>
+          <a:effectLst/>
+        </p:spPr>
+        <p:style>
+          <a:lnRef idx="1">
+            <a:schemeClr val="accent1"/>
+          </a:lnRef>
+          <a:fillRef idx="3">
+            <a:schemeClr val="accent1"/>
+          </a:fillRef>
+          <a:effectRef idx="0">
+            <a:schemeClr val="accent1"/>
+          </a:effectRef>
+          <a:fontRef idx="minor">
+            <a:schemeClr val="lt1"/>
+          </a:fontRef>
+        </p:style>
+        <p:txBody>
+          <a:bodyPr rtlCol="0" anchor="ctr" wrap="square" lIns="36000" tIns="0" rIns="36000" bIns="0"/>
+          <a:lstStyle/>
+          <a:p>
+            <a:pPr algn="ctr">
+              <a:lnSpc>
+                <a:spcPct val="110000"/>
+              </a:lnSpc>
+              <a:spcAft>
+                <a:spcPts val="0"/>
+              </a:spcAft>
+            </a:pPr>
+            <a:r>
+              <a:rPr sz="1300" b="1">
+                <a:solidFill>
+                  <a:srgbClr val="0B7A3B"/>
+                </a:solidFill>
+                <a:latin typeface="メイリオ"/>
+                <a:ea typeface="メイリオ"/>
+                <a:cs typeface="メイリオ"/>
+              </a:rPr>
+              <a:t>LINEでナーチャリング</a:t>
+            </a:r>
+          </a:p>
+        </p:txBody>
+      </p:sp>
+      <p:sp>
+        <p:nvSpPr>
+          <p:cNvPr id="23" name="Isosceles Triangle 22"/>
+          <p:cNvSpPr/>
+          <p:nvPr/>
+        </p:nvSpPr>
+        <p:spPr>
+          <a:xfrm rot="10800000">
+            <a:off x="8740800" y="3186000"/>
+            <a:ext cx="158400" cy="108000"/>
+          </a:xfrm>
+          <a:prstGeom prst="triangle">
+            <a:avLst/>
+          </a:prstGeom>
+          <a:solidFill>
+            <a:srgbClr val="0B7A3B"/>
+          </a:solidFill>
+          <a:ln>
+            <a:noFill/>
+          </a:ln>
+          <a:effectLst/>
+        </p:spPr>
+        <p:style>
+          <a:lnRef idx="1">
+            <a:schemeClr val="accent1"/>
+          </a:lnRef>
+          <a:fillRef idx="3">
+            <a:schemeClr val="accent1"/>
+          </a:fillRef>
+          <a:effectRef idx="0">
+            <a:schemeClr val="accent1"/>
+          </a:effectRef>
+          <a:fontRef idx="minor">
+            <a:schemeClr val="lt1"/>
+          </a:fontRef>
+        </p:style>
+        <p:txBody>
+          <a:bodyPr rtlCol="0" anchor="ctr"/>
+          <a:lstStyle/>
+          <a:p>
+            <a:pPr algn="ctr"/>
+          </a:p>
+        </p:txBody>
+      </p:sp>
+      <p:sp>
+        <p:nvSpPr>
+          <p:cNvPr id="24" name="Rectangle 23"/>
+          <p:cNvSpPr/>
+          <p:nvPr/>
+        </p:nvSpPr>
+        <p:spPr>
+          <a:xfrm>
+            <a:off x="6696000" y="3330000"/>
+            <a:ext cx="4248000" cy="413999"/>
+          </a:xfrm>
+          <a:prstGeom prst="rect">
+            <a:avLst/>
+          </a:prstGeom>
+          <a:solidFill>
+            <a:srgbClr val="0E8A3F"/>
+          </a:solidFill>
+          <a:ln>
+            <a:noFill/>
+          </a:ln>
+          <a:effectLst/>
+        </p:spPr>
+        <p:style>
+          <a:lnRef idx="1">
+            <a:schemeClr val="accent1"/>
+          </a:lnRef>
+          <a:fillRef idx="3">
+            <a:schemeClr val="accent1"/>
+          </a:fillRef>
+          <a:effectRef idx="0">
+            <a:schemeClr val="accent1"/>
+          </a:effectRef>
+          <a:fontRef idx="minor">
+            <a:schemeClr val="lt1"/>
+          </a:fontRef>
+        </p:style>
+        <p:txBody>
+          <a:bodyPr rtlCol="0" anchor="ctr" wrap="square" lIns="36000" tIns="0" rIns="36000" bIns="0"/>
+          <a:lstStyle/>
+          <a:p>
+            <a:pPr algn="ctr">
+              <a:lnSpc>
+                <a:spcPct val="110000"/>
+              </a:lnSpc>
+              <a:spcAft>
+                <a:spcPts val="0"/>
+              </a:spcAft>
+            </a:pPr>
+            <a:r>
+              <a:rPr sz="1300" b="1">
+                <a:solidFill>
+                  <a:srgbClr val="FFFFFF"/>
+                </a:solidFill>
+                <a:latin typeface="メイリオ"/>
+                <a:ea typeface="メイリオ"/>
+                <a:cs typeface="メイリオ"/>
+              </a:rPr>
+              <a:t>購入・契約などの最終成果</a:t>
+            </a:r>
+          </a:p>
+        </p:txBody>
+      </p:sp>
+      <p:sp>
+        <p:nvSpPr>
+          <p:cNvPr id="25" name="TextBox 24"/>
+          <p:cNvSpPr txBox="1"/>
+          <p:nvPr/>
+        </p:nvSpPr>
+        <p:spPr>
+          <a:xfrm>
+            <a:off x="6444000" y="3888000"/>
+            <a:ext cx="4752000" cy="503999"/>
+          </a:xfrm>
+          <a:prstGeom prst="rect">
+            <a:avLst/>
+          </a:prstGeom>
+          <a:noFill/>
+        </p:spPr>
+        <p:txBody>
+          <a:bodyPr wrap="square" anchor="ctr" lIns="36000" rIns="36000" tIns="18000" bIns="18000">
+            <a:spAutoFit/>
+          </a:bodyPr>
+          <a:lstStyle/>
+          <a:p>
+            <a:pPr algn="ctr">
+              <a:lnSpc>
+                <a:spcPct val="110000"/>
+              </a:lnSpc>
+              <a:spcAft>
+                <a:spcPts val="0"/>
+              </a:spcAft>
+            </a:pPr>
+            <a:r>
+              <a:rPr sz="1050" b="0">
+                <a:solidFill>
+                  <a:srgbClr val="333333"/>
+                </a:solidFill>
+                <a:latin typeface="メイリオ"/>
+                <a:ea typeface="メイリオ"/>
+                <a:cs typeface="メイリオ"/>
+              </a:rPr>
+              <a:t>CV後の歩留まりを改善し、CPOを改善</a:t>
+            </a:r>
+          </a:p>
+        </p:txBody>
+      </p:sp>
+      <p:sp>
+        <p:nvSpPr>
+          <p:cNvPr id="26" name="Pentagon 25"/>
+          <p:cNvSpPr/>
+          <p:nvPr/>
+        </p:nvSpPr>
+        <p:spPr>
+          <a:xfrm>
+            <a:off x="792000" y="4536000"/>
+            <a:ext cx="3612000" cy="684000"/>
+          </a:xfrm>
+          <a:prstGeom prst="homePlate">
+            <a:avLst>
+              <a:gd name="adj" fmla="val 22000"/>
+            </a:avLst>
+          </a:prstGeom>
+          <a:solidFill>
+            <a:srgbClr val="E8F8EE"/>
+          </a:solidFill>
+          <a:ln>
+            <a:noFill/>
+          </a:ln>
+          <a:effectLst/>
+        </p:spPr>
+        <p:style>
+          <a:lnRef idx="1">
+            <a:schemeClr val="accent1"/>
+          </a:lnRef>
+          <a:fillRef idx="3">
+            <a:schemeClr val="accent1"/>
+          </a:fillRef>
+          <a:effectRef idx="0">
+            <a:schemeClr val="accent1"/>
+          </a:effectRef>
+          <a:fontRef idx="minor">
+            <a:schemeClr val="lt1"/>
+          </a:fontRef>
+        </p:style>
+        <p:txBody>
+          <a:bodyPr rtlCol="0" anchor="ctr" wrap="square" lIns="72000" tIns="18000" rIns="72000" bIns="18000"/>
+          <a:lstStyle/>
+          <a:p>
+            <a:pPr algn="ctr"/>
+          </a:p>
+        </p:txBody>
+      </p:sp>
+      <p:sp>
+        <p:nvSpPr>
+          <p:cNvPr id="27" name="TextBox 26"/>
+          <p:cNvSpPr txBox="1"/>
+          <p:nvPr/>
+        </p:nvSpPr>
+        <p:spPr>
+          <a:xfrm>
+            <a:off x="936000" y="4536000"/>
+            <a:ext cx="3179999" cy="684000"/>
+          </a:xfrm>
+          <a:prstGeom prst="rect">
+            <a:avLst/>
+          </a:prstGeom>
+          <a:noFill/>
+        </p:spPr>
+        <p:txBody>
+          <a:bodyPr wrap="square" anchor="ctr" lIns="36000" rIns="36000" tIns="18000" bIns="18000">
+            <a:spAutoFit/>
+          </a:bodyPr>
+          <a:lstStyle/>
+          <a:p>
+            <a:pPr algn="ctr">
+              <a:lnSpc>
+                <a:spcPct val="110000"/>
+              </a:lnSpc>
+              <a:spcAft>
+                <a:spcPts val="200"/>
+              </a:spcAft>
+            </a:pPr>
+            <a:r>
+              <a:rPr sz="1400" b="1">
+                <a:solidFill>
+                  <a:srgbClr val="0B7A3B"/>
+                </a:solidFill>
+                <a:latin typeface="メイリオ"/>
+                <a:ea typeface="メイリオ"/>
+                <a:cs typeface="メイリオ"/>
+              </a:rPr>
+              <a:t>CPOの改善</a:t>
+            </a:r>
+          </a:p>
+          <a:p>
+            <a:pPr algn="ctr">
+              <a:lnSpc>
+                <a:spcPct val="110000"/>
+              </a:lnSpc>
+              <a:spcAft>
+                <a:spcPts val="0"/>
+              </a:spcAft>
+            </a:pPr>
+            <a:r>
+              <a:rPr sz="950" b="0">
+                <a:solidFill>
+                  <a:srgbClr val="333333"/>
+                </a:solidFill>
+                <a:latin typeface="メイリオ"/>
+                <a:ea typeface="メイリオ"/>
+                <a:cs typeface="メイリオ"/>
+              </a:rPr>
+              <a:t>1件の最終成果あたりの広告費を抑えられる</a:t>
+            </a:r>
+          </a:p>
+        </p:txBody>
+      </p:sp>
+      <p:sp>
+        <p:nvSpPr>
+          <p:cNvPr id="28" name="Chevron 27"/>
+          <p:cNvSpPr/>
+          <p:nvPr/>
+        </p:nvSpPr>
+        <p:spPr>
+          <a:xfrm>
+            <a:off x="4296000" y="4536000"/>
+            <a:ext cx="3612000" cy="684000"/>
+          </a:xfrm>
+          <a:prstGeom prst="chevron">
+            <a:avLst>
+              <a:gd name="adj" fmla="val 22000"/>
+            </a:avLst>
+          </a:prstGeom>
+          <a:solidFill>
+            <a:srgbClr val="E4E8F6"/>
+          </a:solidFill>
+          <a:ln>
+            <a:noFill/>
+          </a:ln>
+          <a:effectLst/>
+        </p:spPr>
+        <p:style>
+          <a:lnRef idx="1">
+            <a:schemeClr val="accent1"/>
+          </a:lnRef>
+          <a:fillRef idx="3">
+            <a:schemeClr val="accent1"/>
+          </a:fillRef>
+          <a:effectRef idx="0">
+            <a:schemeClr val="accent1"/>
+          </a:effectRef>
+          <a:fontRef idx="minor">
+            <a:schemeClr val="lt1"/>
+          </a:fontRef>
+        </p:style>
+        <p:txBody>
+          <a:bodyPr rtlCol="0" anchor="ctr" wrap="square" lIns="72000" tIns="18000" rIns="72000" bIns="18000"/>
+          <a:lstStyle/>
+          <a:p>
+            <a:pPr algn="ctr"/>
+          </a:p>
+        </p:txBody>
+      </p:sp>
+      <p:sp>
+        <p:nvSpPr>
+          <p:cNvPr id="29" name="TextBox 28"/>
+          <p:cNvSpPr txBox="1"/>
+          <p:nvPr/>
+        </p:nvSpPr>
+        <p:spPr>
+          <a:xfrm>
+            <a:off x="4620000" y="4536000"/>
+            <a:ext cx="2999999" cy="684000"/>
+          </a:xfrm>
+          <a:prstGeom prst="rect">
+            <a:avLst/>
+          </a:prstGeom>
+          <a:noFill/>
+        </p:spPr>
+        <p:txBody>
+          <a:bodyPr wrap="square" anchor="ctr" lIns="36000" rIns="36000" tIns="18000" bIns="18000">
+            <a:spAutoFit/>
+          </a:bodyPr>
+          <a:lstStyle/>
+          <a:p>
+            <a:pPr algn="ctr">
+              <a:lnSpc>
+                <a:spcPct val="110000"/>
+              </a:lnSpc>
+              <a:spcAft>
+                <a:spcPts val="200"/>
+              </a:spcAft>
+            </a:pPr>
+            <a:r>
+              <a:rPr sz="1400" b="1">
+                <a:solidFill>
+                  <a:srgbClr val="1F285A"/>
+                </a:solidFill>
+                <a:latin typeface="メイリオ"/>
+                <a:ea typeface="メイリオ"/>
+                <a:cs typeface="メイリオ"/>
+              </a:rPr>
+              <a:t>許容CPAの引き上げ</a:t>
+            </a:r>
+          </a:p>
+          <a:p>
+            <a:pPr algn="ctr">
+              <a:lnSpc>
+                <a:spcPct val="110000"/>
+              </a:lnSpc>
+              <a:spcAft>
+                <a:spcPts val="0"/>
+              </a:spcAft>
+            </a:pPr>
+            <a:r>
+              <a:rPr sz="950" b="0">
+                <a:solidFill>
+                  <a:srgbClr val="333333"/>
+                </a:solidFill>
+                <a:latin typeface="メイリオ"/>
+                <a:ea typeface="メイリオ"/>
+                <a:cs typeface="メイリオ"/>
+              </a:rPr>
+              <a:t>1件の最終成果にかけられる広告費が増える</a:t>
+            </a:r>
+          </a:p>
+        </p:txBody>
+      </p:sp>
+      <p:sp>
+        <p:nvSpPr>
+          <p:cNvPr id="30" name="Chevron 29"/>
+          <p:cNvSpPr/>
+          <p:nvPr/>
+        </p:nvSpPr>
+        <p:spPr>
+          <a:xfrm>
+            <a:off x="7799999" y="4536000"/>
+            <a:ext cx="3612000" cy="684000"/>
+          </a:xfrm>
+          <a:prstGeom prst="chevron">
+            <a:avLst>
+              <a:gd name="adj" fmla="val 22000"/>
+            </a:avLst>
+          </a:prstGeom>
+          <a:solidFill>
+            <a:srgbClr val="E4E8F6"/>
+          </a:solidFill>
+          <a:ln>
+            <a:noFill/>
+          </a:ln>
+          <a:effectLst/>
+        </p:spPr>
+        <p:style>
+          <a:lnRef idx="1">
+            <a:schemeClr val="accent1"/>
+          </a:lnRef>
+          <a:fillRef idx="3">
+            <a:schemeClr val="accent1"/>
+          </a:fillRef>
+          <a:effectRef idx="0">
+            <a:schemeClr val="accent1"/>
+          </a:effectRef>
+          <a:fontRef idx="minor">
+            <a:schemeClr val="lt1"/>
+          </a:fontRef>
+        </p:style>
+        <p:txBody>
+          <a:bodyPr rtlCol="0" anchor="ctr" wrap="square" lIns="72000" tIns="18000" rIns="72000" bIns="18000"/>
+          <a:lstStyle/>
+          <a:p>
+            <a:pPr algn="ctr"/>
+          </a:p>
+        </p:txBody>
+      </p:sp>
+      <p:sp>
+        <p:nvSpPr>
+          <p:cNvPr id="31" name="TextBox 30"/>
+          <p:cNvSpPr txBox="1"/>
+          <p:nvPr/>
+        </p:nvSpPr>
+        <p:spPr>
+          <a:xfrm>
+            <a:off x="8123999" y="4536000"/>
+            <a:ext cx="2999999" cy="684000"/>
+          </a:xfrm>
+          <a:prstGeom prst="rect">
+            <a:avLst/>
+          </a:prstGeom>
+          <a:noFill/>
+        </p:spPr>
+        <p:txBody>
+          <a:bodyPr wrap="square" anchor="ctr" lIns="36000" rIns="36000" tIns="18000" bIns="18000">
+            <a:spAutoFit/>
+          </a:bodyPr>
+          <a:lstStyle/>
+          <a:p>
+            <a:pPr algn="ctr">
+              <a:lnSpc>
+                <a:spcPct val="110000"/>
+              </a:lnSpc>
+              <a:spcAft>
+                <a:spcPts val="200"/>
+              </a:spcAft>
+            </a:pPr>
+            <a:r>
+              <a:rPr sz="1400" b="1">
+                <a:solidFill>
+                  <a:srgbClr val="1F285A"/>
+                </a:solidFill>
+                <a:latin typeface="メイリオ"/>
+                <a:ea typeface="メイリオ"/>
+                <a:cs typeface="メイリオ"/>
+              </a:rPr>
+              <a:t>広告配信の拡大</a:t>
+            </a:r>
+          </a:p>
+          <a:p>
+            <a:pPr algn="ctr">
+              <a:lnSpc>
+                <a:spcPct val="110000"/>
+              </a:lnSpc>
+              <a:spcAft>
+                <a:spcPts val="0"/>
+              </a:spcAft>
+            </a:pPr>
+            <a:r>
+              <a:rPr sz="950" b="0">
+                <a:solidFill>
+                  <a:srgbClr val="333333"/>
+                </a:solidFill>
+                <a:latin typeface="メイリオ"/>
+                <a:ea typeface="メイリオ"/>
+                <a:cs typeface="メイリオ"/>
+              </a:rPr>
+              <a:t>入札・予算・配信対象を広げやすくなる</a:t>
+            </a:r>
           </a:p>
         </p:txBody>
       </p:sp>
       <p:cxnSp>
         <p:nvCxnSpPr>
-          <p:cNvPr id="5" name="Connector 3"/>
+          <p:cNvPr id="32" name="Connector 31"/>
           <p:cNvCxnSpPr/>
           <p:nvPr/>
         </p:nvCxnSpPr>
         <p:spPr>
           <a:xfrm>
-            <a:off x="0" y="1389600"/>
-            <a:ext cx="12192119" cy="0"/>
+            <a:off x="11232000" y="5256000"/>
+            <a:ext cx="0" cy="162000"/>
           </a:xfrm>
           <a:prstGeom prst="line">
             <a:avLst/>
           </a:prstGeom>
-          <a:ln w="12700">
+          <a:ln w="19050">
             <a:solidFill>
-              <a:srgbClr val="D9D9D9"/>
+              <a:srgbClr val="1F285A"/>
             </a:solidFill>
           </a:ln>
         </p:spPr>
@@ -2773,7 +4267,7 @@
           <a:fillRef idx="0">
             <a:schemeClr val="accent1"/>
           </a:fillRef>
-          <a:effectRef idx="1">
+          <a:effectRef idx="0">
             <a:schemeClr val="accent1"/>
           </a:effectRef>
           <a:fontRef idx="minor">
@@ -2781,16 +4275,193 @@
           </a:fontRef>
         </p:style>
       </p:cxnSp>
-      <p:sp>
-        <p:nvSpPr>
-          <p:cNvPr id="6" name="TextBox 5"/>
+      <p:cxnSp>
+        <p:nvCxnSpPr>
+          <p:cNvPr id="33" name="Connector 32"/>
+          <p:cNvCxnSpPr/>
+          <p:nvPr/>
+        </p:nvCxnSpPr>
+        <p:spPr>
+          <a:xfrm>
+            <a:off x="972000" y="5418000"/>
+            <a:ext cx="10260000" cy="0"/>
+          </a:xfrm>
+          <a:prstGeom prst="line">
+            <a:avLst/>
+          </a:prstGeom>
+          <a:ln w="19050">
+            <a:solidFill>
+              <a:srgbClr val="1F285A"/>
+            </a:solidFill>
+          </a:ln>
+        </p:spPr>
+        <p:style>
+          <a:lnRef idx="2">
+            <a:schemeClr val="accent1"/>
+          </a:lnRef>
+          <a:fillRef idx="0">
+            <a:schemeClr val="accent1"/>
+          </a:fillRef>
+          <a:effectRef idx="0">
+            <a:schemeClr val="accent1"/>
+          </a:effectRef>
+          <a:fontRef idx="minor">
+            <a:schemeClr val="tx1"/>
+          </a:fontRef>
+        </p:style>
+      </p:cxnSp>
+      <p:cxnSp>
+        <p:nvCxnSpPr>
+          <p:cNvPr id="34" name="Connector 33"/>
+          <p:cNvCxnSpPr/>
+          <p:nvPr/>
+        </p:nvCxnSpPr>
+        <p:spPr>
+          <a:xfrm flipV="1">
+            <a:off x="972000" y="5263200"/>
+            <a:ext cx="0" cy="154800"/>
+          </a:xfrm>
+          <a:prstGeom prst="line">
+            <a:avLst/>
+          </a:prstGeom>
+          <a:ln w="19050">
+            <a:solidFill>
+              <a:srgbClr val="1F285A"/>
+            </a:solidFill>
+            <a:tailEnd type="triangle" w="med" len="med"/>
+          </a:ln>
+        </p:spPr>
+        <p:style>
+          <a:lnRef idx="2">
+            <a:schemeClr val="accent1"/>
+          </a:lnRef>
+          <a:fillRef idx="0">
+            <a:schemeClr val="accent1"/>
+          </a:fillRef>
+          <a:effectRef idx="0">
+            <a:schemeClr val="accent1"/>
+          </a:effectRef>
+          <a:fontRef idx="minor">
+            <a:schemeClr val="tx1"/>
+          </a:fontRef>
+        </p:style>
+      </p:cxnSp>
+      <p:sp>
+        <p:nvSpPr>
+          <p:cNvPr id="35" name="Rectangle 34"/>
+          <p:cNvSpPr/>
+          <p:nvPr/>
+        </p:nvSpPr>
+        <p:spPr>
+          <a:xfrm>
+            <a:off x="4121999" y="5292000"/>
+            <a:ext cx="3960000" cy="251999"/>
+          </a:xfrm>
+          <a:prstGeom prst="rect">
+            <a:avLst/>
+          </a:prstGeom>
+          <a:solidFill>
+            <a:srgbClr val="FFFFFF"/>
+          </a:solidFill>
+          <a:ln>
+            <a:noFill/>
+          </a:ln>
+          <a:effectLst/>
+        </p:spPr>
+        <p:style>
+          <a:lnRef idx="1">
+            <a:schemeClr val="accent1"/>
+          </a:lnRef>
+          <a:fillRef idx="3">
+            <a:schemeClr val="accent1"/>
+          </a:fillRef>
+          <a:effectRef idx="0">
+            <a:schemeClr val="accent1"/>
+          </a:effectRef>
+          <a:fontRef idx="minor">
+            <a:schemeClr val="lt1"/>
+          </a:fontRef>
+        </p:style>
+        <p:txBody>
+          <a:bodyPr rtlCol="0" anchor="ctr" wrap="square" lIns="72000" tIns="18000" rIns="72000" bIns="18000"/>
+          <a:lstStyle/>
+          <a:p>
+            <a:pPr algn="ctr">
+              <a:lnSpc>
+                <a:spcPct val="110000"/>
+              </a:lnSpc>
+              <a:spcAft>
+                <a:spcPts val="0"/>
+              </a:spcAft>
+            </a:pPr>
+            <a:r>
+              <a:rPr sz="1000" b="1">
+                <a:solidFill>
+                  <a:srgbClr val="333333"/>
+                </a:solidFill>
+                <a:latin typeface="メイリオ"/>
+                <a:ea typeface="メイリオ"/>
+                <a:cs typeface="メイリオ"/>
+              </a:rPr>
+              <a:t>さらに成果が増えれば、再投資して継続的に拡大</a:t>
+            </a:r>
+          </a:p>
+        </p:txBody>
+      </p:sp>
+      <p:sp>
+        <p:nvSpPr>
+          <p:cNvPr id="36" name="Rectangle 35"/>
+          <p:cNvSpPr/>
+          <p:nvPr/>
+        </p:nvSpPr>
+        <p:spPr>
+          <a:xfrm>
+            <a:off x="792000" y="5652000"/>
+            <a:ext cx="10620000" cy="612000"/>
+          </a:xfrm>
+          <a:prstGeom prst="rect">
+            <a:avLst/>
+          </a:prstGeom>
+          <a:solidFill>
+            <a:srgbClr val="1F285A"/>
+          </a:solidFill>
+          <a:ln>
+            <a:noFill/>
+          </a:ln>
+          <a:effectLst/>
+        </p:spPr>
+        <p:style>
+          <a:lnRef idx="1">
+            <a:schemeClr val="accent1"/>
+          </a:lnRef>
+          <a:fillRef idx="3">
+            <a:schemeClr val="accent1"/>
+          </a:fillRef>
+          <a:effectRef idx="0">
+            <a:schemeClr val="accent1"/>
+          </a:effectRef>
+          <a:fontRef idx="minor">
+            <a:schemeClr val="lt1"/>
+          </a:fontRef>
+        </p:style>
+        <p:txBody>
+          <a:bodyPr rtlCol="0" anchor="ctr" wrap="square" lIns="72000" tIns="18000" rIns="72000" bIns="18000"/>
+          <a:lstStyle/>
+          <a:p>
+            <a:pPr algn="ctr"/>
+          </a:p>
+        </p:txBody>
+      </p:sp>
+      <p:sp>
+        <p:nvSpPr>
+          <p:cNvPr id="37" name="TextBox 36"/>
           <p:cNvSpPr txBox="1"/>
           <p:nvPr/>
         </p:nvSpPr>
         <p:spPr>
           <a:xfrm>
-            <a:off x="792000" y="1620000"/>
-            <a:ext cx="5094000" cy="468000"/>
+            <a:off x="792000" y="5652000"/>
+            <a:ext cx="10620000" cy="612000"/>
           </a:xfrm>
           <a:prstGeom prst="rect">
             <a:avLst/>
@@ -2812,1486 +4483,37 @@
               </a:spcAft>
             </a:pPr>
             <a:r>
-              <a:rPr sz="1300" b="1">
-                <a:solidFill>
-                  <a:srgbClr val="1F285A"/>
+              <a:rPr sz="2000" b="1">
+                <a:solidFill>
+                  <a:srgbClr val="FFFFFF"/>
                 </a:solidFill>
                 <a:latin typeface="メイリオ"/>
                 <a:ea typeface="メイリオ"/>
                 <a:cs typeface="メイリオ"/>
               </a:rPr>
-              <a:t>CV獲得まで｜</a:t>
-            </a:r>
-            <a:r>
-              <a:rPr sz="2400" b="1">
-                <a:solidFill>
-                  <a:srgbClr val="1F285A"/>
+              <a:t>広告とあわせて実施することで、</a:t>
+            </a:r>
+            <a:r>
+              <a:rPr sz="2000" b="1">
+                <a:solidFill>
+                  <a:srgbClr val="FFE400"/>
                 </a:solidFill>
                 <a:latin typeface="メイリオ"/>
                 <a:ea typeface="メイリオ"/>
                 <a:cs typeface="メイリオ"/>
               </a:rPr>
-              <a:t>CPA改善</a:t>
-            </a:r>
-          </a:p>
-        </p:txBody>
-      </p:sp>
-      <p:sp>
-        <p:nvSpPr>
-          <p:cNvPr id="7" name="Rectangle 6"/>
-          <p:cNvSpPr/>
-          <p:nvPr/>
-        </p:nvSpPr>
-        <p:spPr>
-          <a:xfrm>
-            <a:off x="2259000" y="2106000"/>
-            <a:ext cx="2160000" cy="43200"/>
-          </a:xfrm>
-          <a:prstGeom prst="rect">
-            <a:avLst/>
-          </a:prstGeom>
-          <a:solidFill>
-            <a:srgbClr val="1F285A"/>
-          </a:solidFill>
-          <a:ln>
-            <a:noFill/>
-          </a:ln>
-          <a:effectLst/>
-        </p:spPr>
-        <p:style>
-          <a:lnRef idx="1">
-            <a:schemeClr val="accent1"/>
-          </a:lnRef>
-          <a:fillRef idx="3">
-            <a:schemeClr val="accent1"/>
-          </a:fillRef>
-          <a:effectRef idx="0">
-            <a:schemeClr val="accent1"/>
-          </a:effectRef>
-          <a:fontRef idx="minor">
-            <a:schemeClr val="lt1"/>
-          </a:fontRef>
-        </p:style>
-        <p:txBody>
-          <a:bodyPr rtlCol="0" anchor="ctr" wrap="square" lIns="72000" tIns="18000" rIns="72000" bIns="18000"/>
-          <a:lstStyle/>
-          <a:p>
-            <a:pPr algn="ctr"/>
-          </a:p>
-        </p:txBody>
-      </p:sp>
-      <p:sp>
-        <p:nvSpPr>
-          <p:cNvPr id="8" name="Rectangle 7"/>
-          <p:cNvSpPr/>
-          <p:nvPr/>
-        </p:nvSpPr>
-        <p:spPr>
-          <a:xfrm>
-            <a:off x="1683000" y="2268000"/>
-            <a:ext cx="3311999" cy="396000"/>
-          </a:xfrm>
-          <a:prstGeom prst="rect">
-            <a:avLst/>
-          </a:prstGeom>
-          <a:solidFill>
-            <a:srgbClr val="E4E8F6"/>
-          </a:solidFill>
-          <a:ln>
-            <a:noFill/>
-          </a:ln>
-          <a:effectLst/>
-        </p:spPr>
-        <p:style>
-          <a:lnRef idx="1">
-            <a:schemeClr val="accent1"/>
-          </a:lnRef>
-          <a:fillRef idx="3">
-            <a:schemeClr val="accent1"/>
-          </a:fillRef>
-          <a:effectRef idx="0">
-            <a:schemeClr val="accent1"/>
-          </a:effectRef>
-          <a:fontRef idx="minor">
-            <a:schemeClr val="lt1"/>
-          </a:fontRef>
-        </p:style>
-        <p:txBody>
-          <a:bodyPr rtlCol="0" anchor="ctr" wrap="square" lIns="36000" tIns="0" rIns="36000" bIns="0"/>
-          <a:lstStyle/>
-          <a:p>
-            <a:pPr algn="ctr">
-              <a:lnSpc>
-                <a:spcPct val="110000"/>
-              </a:lnSpc>
-              <a:spcAft>
-                <a:spcPts val="0"/>
-              </a:spcAft>
-            </a:pPr>
-            <a:r>
-              <a:rPr sz="1250" b="1">
-                <a:solidFill>
-                  <a:srgbClr val="1F285A"/>
+              <a:t>事業全体の効率化</a:t>
+            </a:r>
+            <a:r>
+              <a:rPr sz="2000" b="1">
+                <a:solidFill>
+                  <a:srgbClr val="FFFFFF"/>
                 </a:solidFill>
                 <a:latin typeface="メイリオ"/>
                 <a:ea typeface="メイリオ"/>
                 <a:cs typeface="メイリオ"/>
               </a:rPr>
-              <a:t>広告</a:t>
-            </a:r>
-          </a:p>
-        </p:txBody>
-      </p:sp>
-      <p:cxnSp>
-        <p:nvCxnSpPr>
-          <p:cNvPr id="9" name="Connector 8"/>
-          <p:cNvCxnSpPr/>
-          <p:nvPr/>
-        </p:nvCxnSpPr>
-        <p:spPr>
-          <a:xfrm>
-            <a:off x="3339000" y="2682000"/>
-            <a:ext cx="0" cy="108000"/>
-          </a:xfrm>
-          <a:prstGeom prst="line">
-            <a:avLst/>
-          </a:prstGeom>
-          <a:ln w="22225">
-            <a:solidFill>
-              <a:srgbClr val="1F285A"/>
-            </a:solidFill>
-            <a:tailEnd type="triangle" w="med" len="med"/>
-          </a:ln>
-        </p:spPr>
-        <p:style>
-          <a:lnRef idx="2">
-            <a:schemeClr val="accent1"/>
-          </a:lnRef>
-          <a:fillRef idx="0">
-            <a:schemeClr val="accent1"/>
-          </a:fillRef>
-          <a:effectRef idx="0">
-            <a:schemeClr val="accent1"/>
-          </a:effectRef>
-          <a:fontRef idx="minor">
-            <a:schemeClr val="tx1"/>
-          </a:fontRef>
-        </p:style>
-      </p:cxnSp>
-      <p:sp>
-        <p:nvSpPr>
-          <p:cNvPr id="10" name="Rectangle 9"/>
-          <p:cNvSpPr/>
-          <p:nvPr/>
-        </p:nvSpPr>
-        <p:spPr>
-          <a:xfrm>
-            <a:off x="1683000" y="2808000"/>
-            <a:ext cx="3311999" cy="396000"/>
-          </a:xfrm>
-          <a:prstGeom prst="rect">
-            <a:avLst/>
-          </a:prstGeom>
-          <a:solidFill>
-            <a:srgbClr val="E4E8F6"/>
-          </a:solidFill>
-          <a:ln>
-            <a:noFill/>
-          </a:ln>
-          <a:effectLst/>
-        </p:spPr>
-        <p:style>
-          <a:lnRef idx="1">
-            <a:schemeClr val="accent1"/>
-          </a:lnRef>
-          <a:fillRef idx="3">
-            <a:schemeClr val="accent1"/>
-          </a:fillRef>
-          <a:effectRef idx="0">
-            <a:schemeClr val="accent1"/>
-          </a:effectRef>
-          <a:fontRef idx="minor">
-            <a:schemeClr val="lt1"/>
-          </a:fontRef>
-        </p:style>
-        <p:txBody>
-          <a:bodyPr rtlCol="0" anchor="ctr" wrap="square" lIns="36000" tIns="0" rIns="36000" bIns="0"/>
-          <a:lstStyle/>
-          <a:p>
-            <a:pPr algn="ctr">
-              <a:lnSpc>
-                <a:spcPct val="110000"/>
-              </a:lnSpc>
-              <a:spcAft>
-                <a:spcPts val="0"/>
-              </a:spcAft>
-            </a:pPr>
-            <a:r>
-              <a:rPr sz="1250" b="1">
-                <a:solidFill>
-                  <a:srgbClr val="1F285A"/>
-                </a:solidFill>
-                <a:latin typeface="メイリオ"/>
-                <a:ea typeface="メイリオ"/>
-                <a:cs typeface="メイリオ"/>
-              </a:rPr>
-              <a:t>LP</a:t>
-            </a:r>
-          </a:p>
-        </p:txBody>
-      </p:sp>
-      <p:cxnSp>
-        <p:nvCxnSpPr>
-          <p:cNvPr id="11" name="Connector 10"/>
-          <p:cNvCxnSpPr/>
-          <p:nvPr/>
-        </p:nvCxnSpPr>
-        <p:spPr>
-          <a:xfrm>
-            <a:off x="3339000" y="3222000"/>
-            <a:ext cx="0" cy="108000"/>
-          </a:xfrm>
-          <a:prstGeom prst="line">
-            <a:avLst/>
-          </a:prstGeom>
-          <a:ln w="22225">
-            <a:solidFill>
-              <a:srgbClr val="1F285A"/>
-            </a:solidFill>
-            <a:tailEnd type="triangle" w="med" len="med"/>
-          </a:ln>
-        </p:spPr>
-        <p:style>
-          <a:lnRef idx="2">
-            <a:schemeClr val="accent1"/>
-          </a:lnRef>
-          <a:fillRef idx="0">
-            <a:schemeClr val="accent1"/>
-          </a:fillRef>
-          <a:effectRef idx="0">
-            <a:schemeClr val="accent1"/>
-          </a:effectRef>
-          <a:fontRef idx="minor">
-            <a:schemeClr val="tx1"/>
-          </a:fontRef>
-        </p:style>
-      </p:cxnSp>
-      <p:sp>
-        <p:nvSpPr>
-          <p:cNvPr id="12" name="Rectangle 11"/>
-          <p:cNvSpPr/>
-          <p:nvPr/>
-        </p:nvSpPr>
-        <p:spPr>
-          <a:xfrm>
-            <a:off x="1683000" y="3348000"/>
-            <a:ext cx="3311999" cy="396000"/>
-          </a:xfrm>
-          <a:prstGeom prst="rect">
-            <a:avLst/>
-          </a:prstGeom>
-          <a:solidFill>
-            <a:srgbClr val="1F285A"/>
-          </a:solidFill>
-          <a:ln>
-            <a:noFill/>
-          </a:ln>
-          <a:effectLst/>
-        </p:spPr>
-        <p:style>
-          <a:lnRef idx="1">
-            <a:schemeClr val="accent1"/>
-          </a:lnRef>
-          <a:fillRef idx="3">
-            <a:schemeClr val="accent1"/>
-          </a:fillRef>
-          <a:effectRef idx="0">
-            <a:schemeClr val="accent1"/>
-          </a:effectRef>
-          <a:fontRef idx="minor">
-            <a:schemeClr val="lt1"/>
-          </a:fontRef>
-        </p:style>
-        <p:txBody>
-          <a:bodyPr rtlCol="0" anchor="ctr" wrap="square" lIns="36000" tIns="0" rIns="36000" bIns="0"/>
-          <a:lstStyle/>
-          <a:p>
-            <a:pPr algn="ctr">
-              <a:lnSpc>
-                <a:spcPct val="110000"/>
-              </a:lnSpc>
-              <a:spcAft>
-                <a:spcPts val="0"/>
-              </a:spcAft>
-            </a:pPr>
-            <a:r>
-              <a:rPr sz="1250" b="1">
-                <a:solidFill>
-                  <a:srgbClr val="FFFFFF"/>
-                </a:solidFill>
-                <a:latin typeface="メイリオ"/>
-                <a:ea typeface="メイリオ"/>
-                <a:cs typeface="メイリオ"/>
-              </a:rPr>
-              <a:t>離脱防止 × 成果報酬施策</a:t>
-            </a:r>
-          </a:p>
-        </p:txBody>
-      </p:sp>
-      <p:cxnSp>
-        <p:nvCxnSpPr>
-          <p:cNvPr id="13" name="Connector 12"/>
-          <p:cNvCxnSpPr/>
-          <p:nvPr/>
-        </p:nvCxnSpPr>
-        <p:spPr>
-          <a:xfrm>
-            <a:off x="3339000" y="3762000"/>
-            <a:ext cx="0" cy="108000"/>
-          </a:xfrm>
-          <a:prstGeom prst="line">
-            <a:avLst/>
-          </a:prstGeom>
-          <a:ln w="22225">
-            <a:solidFill>
-              <a:srgbClr val="1F285A"/>
-            </a:solidFill>
-            <a:tailEnd type="triangle" w="med" len="med"/>
-          </a:ln>
-        </p:spPr>
-        <p:style>
-          <a:lnRef idx="2">
-            <a:schemeClr val="accent1"/>
-          </a:lnRef>
-          <a:fillRef idx="0">
-            <a:schemeClr val="accent1"/>
-          </a:fillRef>
-          <a:effectRef idx="0">
-            <a:schemeClr val="accent1"/>
-          </a:effectRef>
-          <a:fontRef idx="minor">
-            <a:schemeClr val="tx1"/>
-          </a:fontRef>
-        </p:style>
-      </p:cxnSp>
-      <p:sp>
-        <p:nvSpPr>
-          <p:cNvPr id="14" name="Rectangle 13"/>
-          <p:cNvSpPr/>
-          <p:nvPr/>
-        </p:nvSpPr>
-        <p:spPr>
-          <a:xfrm>
-            <a:off x="1683000" y="3888000"/>
-            <a:ext cx="3311999" cy="396000"/>
-          </a:xfrm>
-          <a:prstGeom prst="rect">
-            <a:avLst/>
-          </a:prstGeom>
-          <a:solidFill>
-            <a:srgbClr val="1F285A"/>
-          </a:solidFill>
-          <a:ln>
-            <a:noFill/>
-          </a:ln>
-          <a:effectLst/>
-        </p:spPr>
-        <p:style>
-          <a:lnRef idx="1">
-            <a:schemeClr val="accent1"/>
-          </a:lnRef>
-          <a:fillRef idx="3">
-            <a:schemeClr val="accent1"/>
-          </a:fillRef>
-          <a:effectRef idx="0">
-            <a:schemeClr val="accent1"/>
-          </a:effectRef>
-          <a:fontRef idx="minor">
-            <a:schemeClr val="lt1"/>
-          </a:fontRef>
-        </p:style>
-        <p:txBody>
-          <a:bodyPr rtlCol="0" anchor="ctr" wrap="square" lIns="36000" tIns="0" rIns="36000" bIns="0"/>
-          <a:lstStyle/>
-          <a:p>
-            <a:pPr algn="ctr">
-              <a:lnSpc>
-                <a:spcPct val="110000"/>
-              </a:lnSpc>
-              <a:spcAft>
-                <a:spcPts val="0"/>
-              </a:spcAft>
-            </a:pPr>
-            <a:r>
-              <a:rPr sz="1250" b="1">
-                <a:solidFill>
-                  <a:srgbClr val="FFFFFF"/>
-                </a:solidFill>
-                <a:latin typeface="メイリオ"/>
-                <a:ea typeface="メイリオ"/>
-                <a:cs typeface="メイリオ"/>
-              </a:rPr>
-              <a:t>CV</a:t>
-            </a:r>
-          </a:p>
-        </p:txBody>
-      </p:sp>
-      <p:sp>
-        <p:nvSpPr>
-          <p:cNvPr id="15" name="TextBox 14"/>
-          <p:cNvSpPr txBox="1"/>
-          <p:nvPr/>
-        </p:nvSpPr>
-        <p:spPr>
-          <a:xfrm>
-            <a:off x="792000" y="4464000"/>
-            <a:ext cx="5094000" cy="288000"/>
-          </a:xfrm>
-          <a:prstGeom prst="rect">
-            <a:avLst/>
-          </a:prstGeom>
-          <a:noFill/>
-        </p:spPr>
-        <p:txBody>
-          <a:bodyPr wrap="square" anchor="ctr" lIns="36000" rIns="36000" tIns="18000" bIns="18000">
-            <a:spAutoFit/>
-          </a:bodyPr>
-          <a:lstStyle/>
-          <a:p>
-            <a:pPr algn="ctr">
-              <a:lnSpc>
-                <a:spcPct val="110000"/>
-              </a:lnSpc>
-              <a:spcAft>
-                <a:spcPts val="0"/>
-              </a:spcAft>
-            </a:pPr>
-            <a:r>
-              <a:rPr sz="1100" b="1">
-                <a:solidFill>
-                  <a:srgbClr val="333333"/>
-                </a:solidFill>
-                <a:latin typeface="メイリオ"/>
-                <a:ea typeface="メイリオ"/>
-                <a:cs typeface="メイリオ"/>
-              </a:rPr>
-              <a:t>CVの取りこぼしを減らし、施策全体のCPA改善へ</a:t>
-            </a:r>
-          </a:p>
-        </p:txBody>
-      </p:sp>
-      <p:sp>
-        <p:nvSpPr>
-          <p:cNvPr id="16" name="TextBox 15"/>
-          <p:cNvSpPr txBox="1"/>
-          <p:nvPr/>
-        </p:nvSpPr>
-        <p:spPr>
-          <a:xfrm>
-            <a:off x="6318000" y="1620000"/>
-            <a:ext cx="5094000" cy="468000"/>
-          </a:xfrm>
-          <a:prstGeom prst="rect">
-            <a:avLst/>
-          </a:prstGeom>
-          <a:noFill/>
-        </p:spPr>
-        <p:txBody>
-          <a:bodyPr wrap="square" anchor="ctr" lIns="36000" rIns="36000" tIns="10800" bIns="10800">
-            <a:spAutoFit/>
-          </a:bodyPr>
-          <a:lstStyle/>
-          <a:p>
-            <a:pPr algn="ctr">
-              <a:lnSpc>
-                <a:spcPct val="105000"/>
-              </a:lnSpc>
-              <a:spcAft>
-                <a:spcPts val="200"/>
-              </a:spcAft>
-            </a:pPr>
-            <a:r>
-              <a:rPr sz="1300" b="1">
-                <a:solidFill>
-                  <a:srgbClr val="1F285A"/>
-                </a:solidFill>
-                <a:latin typeface="メイリオ"/>
-                <a:ea typeface="メイリオ"/>
-                <a:cs typeface="メイリオ"/>
-              </a:rPr>
-              <a:t>CV獲得後｜</a:t>
-            </a:r>
-            <a:r>
-              <a:rPr sz="2400" b="1">
-                <a:solidFill>
-                  <a:srgbClr val="1F285A"/>
-                </a:solidFill>
-                <a:latin typeface="メイリオ"/>
-                <a:ea typeface="メイリオ"/>
-                <a:cs typeface="メイリオ"/>
-              </a:rPr>
-              <a:t>CPO改善</a:t>
-            </a:r>
-          </a:p>
-        </p:txBody>
-      </p:sp>
-      <p:sp>
-        <p:nvSpPr>
-          <p:cNvPr id="17" name="Rectangle 16"/>
-          <p:cNvSpPr/>
-          <p:nvPr/>
-        </p:nvSpPr>
-        <p:spPr>
-          <a:xfrm>
-            <a:off x="7785000" y="2106000"/>
-            <a:ext cx="2160000" cy="43200"/>
-          </a:xfrm>
-          <a:prstGeom prst="rect">
-            <a:avLst/>
-          </a:prstGeom>
-          <a:solidFill>
-            <a:srgbClr val="06C755"/>
-          </a:solidFill>
-          <a:ln>
-            <a:noFill/>
-          </a:ln>
-          <a:effectLst/>
-        </p:spPr>
-        <p:style>
-          <a:lnRef idx="1">
-            <a:schemeClr val="accent1"/>
-          </a:lnRef>
-          <a:fillRef idx="3">
-            <a:schemeClr val="accent1"/>
-          </a:fillRef>
-          <a:effectRef idx="0">
-            <a:schemeClr val="accent1"/>
-          </a:effectRef>
-          <a:fontRef idx="minor">
-            <a:schemeClr val="lt1"/>
-          </a:fontRef>
-        </p:style>
-        <p:txBody>
-          <a:bodyPr rtlCol="0" anchor="ctr" wrap="square" lIns="72000" tIns="18000" rIns="72000" bIns="18000"/>
-          <a:lstStyle/>
-          <a:p>
-            <a:pPr algn="ctr"/>
-          </a:p>
-        </p:txBody>
-      </p:sp>
-      <p:sp>
-        <p:nvSpPr>
-          <p:cNvPr id="18" name="Rectangle 17"/>
-          <p:cNvSpPr/>
-          <p:nvPr/>
-        </p:nvSpPr>
-        <p:spPr>
-          <a:xfrm>
-            <a:off x="7209000" y="2268000"/>
-            <a:ext cx="3311999" cy="396000"/>
-          </a:xfrm>
-          <a:prstGeom prst="rect">
-            <a:avLst/>
-          </a:prstGeom>
-          <a:solidFill>
-            <a:srgbClr val="E4E8F6"/>
-          </a:solidFill>
-          <a:ln>
-            <a:noFill/>
-          </a:ln>
-          <a:effectLst/>
-        </p:spPr>
-        <p:style>
-          <a:lnRef idx="1">
-            <a:schemeClr val="accent1"/>
-          </a:lnRef>
-          <a:fillRef idx="3">
-            <a:schemeClr val="accent1"/>
-          </a:fillRef>
-          <a:effectRef idx="0">
-            <a:schemeClr val="accent1"/>
-          </a:effectRef>
-          <a:fontRef idx="minor">
-            <a:schemeClr val="lt1"/>
-          </a:fontRef>
-        </p:style>
-        <p:txBody>
-          <a:bodyPr rtlCol="0" anchor="ctr" wrap="square" lIns="36000" tIns="0" rIns="36000" bIns="0"/>
-          <a:lstStyle/>
-          <a:p>
-            <a:pPr algn="ctr">
-              <a:lnSpc>
-                <a:spcPct val="110000"/>
-              </a:lnSpc>
-              <a:spcAft>
-                <a:spcPts val="0"/>
-              </a:spcAft>
-            </a:pPr>
-            <a:r>
-              <a:rPr sz="1250" b="1">
-                <a:solidFill>
-                  <a:srgbClr val="1F285A"/>
-                </a:solidFill>
-                <a:latin typeface="メイリオ"/>
-                <a:ea typeface="メイリオ"/>
-                <a:cs typeface="メイリオ"/>
-              </a:rPr>
-              <a:t>CV</a:t>
-            </a:r>
-          </a:p>
-        </p:txBody>
-      </p:sp>
-      <p:cxnSp>
-        <p:nvCxnSpPr>
-          <p:cNvPr id="19" name="Connector 18"/>
-          <p:cNvCxnSpPr/>
-          <p:nvPr/>
-        </p:nvCxnSpPr>
-        <p:spPr>
-          <a:xfrm>
-            <a:off x="8865000" y="2682000"/>
-            <a:ext cx="0" cy="108000"/>
-          </a:xfrm>
-          <a:prstGeom prst="line">
-            <a:avLst/>
-          </a:prstGeom>
-          <a:ln w="22225">
-            <a:solidFill>
-              <a:srgbClr val="1F285A"/>
-            </a:solidFill>
-            <a:tailEnd type="triangle" w="med" len="med"/>
-          </a:ln>
-        </p:spPr>
-        <p:style>
-          <a:lnRef idx="2">
-            <a:schemeClr val="accent1"/>
-          </a:lnRef>
-          <a:fillRef idx="0">
-            <a:schemeClr val="accent1"/>
-          </a:fillRef>
-          <a:effectRef idx="0">
-            <a:schemeClr val="accent1"/>
-          </a:effectRef>
-          <a:fontRef idx="minor">
-            <a:schemeClr val="tx1"/>
-          </a:fontRef>
-        </p:style>
-      </p:cxnSp>
-      <p:sp>
-        <p:nvSpPr>
-          <p:cNvPr id="20" name="Rectangle 19"/>
-          <p:cNvSpPr/>
-          <p:nvPr/>
-        </p:nvSpPr>
-        <p:spPr>
-          <a:xfrm>
-            <a:off x="7209000" y="2808000"/>
-            <a:ext cx="3311999" cy="396000"/>
-          </a:xfrm>
-          <a:prstGeom prst="rect">
-            <a:avLst/>
-          </a:prstGeom>
-          <a:solidFill>
-            <a:srgbClr val="06C755"/>
-          </a:solidFill>
-          <a:ln>
-            <a:noFill/>
-          </a:ln>
-          <a:effectLst/>
-        </p:spPr>
-        <p:style>
-          <a:lnRef idx="1">
-            <a:schemeClr val="accent1"/>
-          </a:lnRef>
-          <a:fillRef idx="3">
-            <a:schemeClr val="accent1"/>
-          </a:fillRef>
-          <a:effectRef idx="0">
-            <a:schemeClr val="accent1"/>
-          </a:effectRef>
-          <a:fontRef idx="minor">
-            <a:schemeClr val="lt1"/>
-          </a:fontRef>
-        </p:style>
-        <p:txBody>
-          <a:bodyPr rtlCol="0" anchor="ctr" wrap="square" lIns="36000" tIns="0" rIns="36000" bIns="0"/>
-          <a:lstStyle/>
-          <a:p>
-            <a:pPr algn="ctr">
-              <a:lnSpc>
-                <a:spcPct val="110000"/>
-              </a:lnSpc>
-              <a:spcAft>
-                <a:spcPts val="0"/>
-              </a:spcAft>
-            </a:pPr>
-            <a:r>
-              <a:rPr sz="1250" b="1">
-                <a:solidFill>
-                  <a:srgbClr val="FFFFFF"/>
-                </a:solidFill>
-                <a:latin typeface="メイリオ"/>
-                <a:ea typeface="メイリオ"/>
-                <a:cs typeface="メイリオ"/>
-              </a:rPr>
-              <a:t>サンクスLINE誘導</a:t>
-            </a:r>
-          </a:p>
-        </p:txBody>
-      </p:sp>
-      <p:cxnSp>
-        <p:nvCxnSpPr>
-          <p:cNvPr id="21" name="Connector 20"/>
-          <p:cNvCxnSpPr/>
-          <p:nvPr/>
-        </p:nvCxnSpPr>
-        <p:spPr>
-          <a:xfrm>
-            <a:off x="8865000" y="3222000"/>
-            <a:ext cx="0" cy="108000"/>
-          </a:xfrm>
-          <a:prstGeom prst="line">
-            <a:avLst/>
-          </a:prstGeom>
-          <a:ln w="22225">
-            <a:solidFill>
-              <a:srgbClr val="1F285A"/>
-            </a:solidFill>
-            <a:tailEnd type="triangle" w="med" len="med"/>
-          </a:ln>
-        </p:spPr>
-        <p:style>
-          <a:lnRef idx="2">
-            <a:schemeClr val="accent1"/>
-          </a:lnRef>
-          <a:fillRef idx="0">
-            <a:schemeClr val="accent1"/>
-          </a:fillRef>
-          <a:effectRef idx="0">
-            <a:schemeClr val="accent1"/>
-          </a:effectRef>
-          <a:fontRef idx="minor">
-            <a:schemeClr val="tx1"/>
-          </a:fontRef>
-        </p:style>
-      </p:cxnSp>
-      <p:sp>
-        <p:nvSpPr>
-          <p:cNvPr id="22" name="Rectangle 21"/>
-          <p:cNvSpPr/>
-          <p:nvPr/>
-        </p:nvSpPr>
-        <p:spPr>
-          <a:xfrm>
-            <a:off x="7209000" y="3348000"/>
-            <a:ext cx="3311999" cy="396000"/>
-          </a:xfrm>
-          <a:prstGeom prst="rect">
-            <a:avLst/>
-          </a:prstGeom>
-          <a:solidFill>
-            <a:srgbClr val="E8F8EE"/>
-          </a:solidFill>
-          <a:ln>
-            <a:noFill/>
-          </a:ln>
-          <a:effectLst/>
-        </p:spPr>
-        <p:style>
-          <a:lnRef idx="1">
-            <a:schemeClr val="accent1"/>
-          </a:lnRef>
-          <a:fillRef idx="3">
-            <a:schemeClr val="accent1"/>
-          </a:fillRef>
-          <a:effectRef idx="0">
-            <a:schemeClr val="accent1"/>
-          </a:effectRef>
-          <a:fontRef idx="minor">
-            <a:schemeClr val="lt1"/>
-          </a:fontRef>
-        </p:style>
-        <p:txBody>
-          <a:bodyPr rtlCol="0" anchor="ctr" wrap="square" lIns="36000" tIns="0" rIns="36000" bIns="0"/>
-          <a:lstStyle/>
-          <a:p>
-            <a:pPr algn="ctr">
-              <a:lnSpc>
-                <a:spcPct val="110000"/>
-              </a:lnSpc>
-              <a:spcAft>
-                <a:spcPts val="0"/>
-              </a:spcAft>
-            </a:pPr>
-            <a:r>
-              <a:rPr sz="1250" b="1">
-                <a:solidFill>
-                  <a:srgbClr val="0B7A3B"/>
-                </a:solidFill>
-                <a:latin typeface="メイリオ"/>
-                <a:ea typeface="メイリオ"/>
-                <a:cs typeface="メイリオ"/>
-              </a:rPr>
-              <a:t>LINEで継続フォロー</a:t>
-            </a:r>
-          </a:p>
-        </p:txBody>
-      </p:sp>
-      <p:cxnSp>
-        <p:nvCxnSpPr>
-          <p:cNvPr id="23" name="Connector 22"/>
-          <p:cNvCxnSpPr/>
-          <p:nvPr/>
-        </p:nvCxnSpPr>
-        <p:spPr>
-          <a:xfrm>
-            <a:off x="8865000" y="3762000"/>
-            <a:ext cx="0" cy="108000"/>
-          </a:xfrm>
-          <a:prstGeom prst="line">
-            <a:avLst/>
-          </a:prstGeom>
-          <a:ln w="22225">
-            <a:solidFill>
-              <a:srgbClr val="1F285A"/>
-            </a:solidFill>
-            <a:tailEnd type="triangle" w="med" len="med"/>
-          </a:ln>
-        </p:spPr>
-        <p:style>
-          <a:lnRef idx="2">
-            <a:schemeClr val="accent1"/>
-          </a:lnRef>
-          <a:fillRef idx="0">
-            <a:schemeClr val="accent1"/>
-          </a:fillRef>
-          <a:effectRef idx="0">
-            <a:schemeClr val="accent1"/>
-          </a:effectRef>
-          <a:fontRef idx="minor">
-            <a:schemeClr val="tx1"/>
-          </a:fontRef>
-        </p:style>
-      </p:cxnSp>
-      <p:sp>
-        <p:nvSpPr>
-          <p:cNvPr id="24" name="Rectangle 23"/>
-          <p:cNvSpPr/>
-          <p:nvPr/>
-        </p:nvSpPr>
-        <p:spPr>
-          <a:xfrm>
-            <a:off x="7209000" y="3888000"/>
-            <a:ext cx="3311999" cy="396000"/>
-          </a:xfrm>
-          <a:prstGeom prst="rect">
-            <a:avLst/>
-          </a:prstGeom>
-          <a:solidFill>
-            <a:srgbClr val="1F285A"/>
-          </a:solidFill>
-          <a:ln>
-            <a:noFill/>
-          </a:ln>
-          <a:effectLst/>
-        </p:spPr>
-        <p:style>
-          <a:lnRef idx="1">
-            <a:schemeClr val="accent1"/>
-          </a:lnRef>
-          <a:fillRef idx="3">
-            <a:schemeClr val="accent1"/>
-          </a:fillRef>
-          <a:effectRef idx="0">
-            <a:schemeClr val="accent1"/>
-          </a:effectRef>
-          <a:fontRef idx="minor">
-            <a:schemeClr val="lt1"/>
-          </a:fontRef>
-        </p:style>
-        <p:txBody>
-          <a:bodyPr rtlCol="0" anchor="ctr" wrap="square" lIns="36000" tIns="0" rIns="36000" bIns="0"/>
-          <a:lstStyle/>
-          <a:p>
-            <a:pPr algn="ctr">
-              <a:lnSpc>
-                <a:spcPct val="110000"/>
-              </a:lnSpc>
-              <a:spcAft>
-                <a:spcPts val="0"/>
-              </a:spcAft>
-            </a:pPr>
-            <a:r>
-              <a:rPr sz="1250" b="1">
-                <a:solidFill>
-                  <a:srgbClr val="FFFFFF"/>
-                </a:solidFill>
-                <a:latin typeface="メイリオ"/>
-                <a:ea typeface="メイリオ"/>
-                <a:cs typeface="メイリオ"/>
-              </a:rPr>
-              <a:t>購入・来店・面談などの最終成果</a:t>
-            </a:r>
-          </a:p>
-        </p:txBody>
-      </p:sp>
-      <p:sp>
-        <p:nvSpPr>
-          <p:cNvPr id="25" name="TextBox 24"/>
-          <p:cNvSpPr txBox="1"/>
-          <p:nvPr/>
-        </p:nvSpPr>
-        <p:spPr>
-          <a:xfrm>
-            <a:off x="6318000" y="4464000"/>
-            <a:ext cx="5094000" cy="288000"/>
-          </a:xfrm>
-          <a:prstGeom prst="rect">
-            <a:avLst/>
-          </a:prstGeom>
-          <a:noFill/>
-        </p:spPr>
-        <p:txBody>
-          <a:bodyPr wrap="square" anchor="ctr" lIns="36000" rIns="36000" tIns="18000" bIns="18000">
-            <a:spAutoFit/>
-          </a:bodyPr>
-          <a:lstStyle/>
-          <a:p>
-            <a:pPr algn="ctr">
-              <a:lnSpc>
-                <a:spcPct val="110000"/>
-              </a:lnSpc>
-              <a:spcAft>
-                <a:spcPts val="0"/>
-              </a:spcAft>
-            </a:pPr>
-            <a:r>
-              <a:rPr sz="1100" b="1">
-                <a:solidFill>
-                  <a:srgbClr val="333333"/>
-                </a:solidFill>
-                <a:latin typeface="メイリオ"/>
-                <a:ea typeface="メイリオ"/>
-                <a:cs typeface="メイリオ"/>
-              </a:rPr>
-              <a:t>CV後の歩留まりを改善し、CPO改善へ</a:t>
-            </a:r>
-          </a:p>
-        </p:txBody>
-      </p:sp>
-      <p:cxnSp>
-        <p:nvCxnSpPr>
-          <p:cNvPr id="26" name="Connector 25"/>
-          <p:cNvCxnSpPr/>
-          <p:nvPr/>
-        </p:nvCxnSpPr>
-        <p:spPr>
-          <a:xfrm>
-            <a:off x="6102000" y="1692000"/>
-            <a:ext cx="0" cy="2988000"/>
-          </a:xfrm>
-          <a:prstGeom prst="line">
-            <a:avLst/>
-          </a:prstGeom>
-          <a:ln w="12700">
-            <a:solidFill>
-              <a:srgbClr val="D9D9D9"/>
-            </a:solidFill>
-            <a:prstDash val="dash"/>
-          </a:ln>
-        </p:spPr>
-        <p:style>
-          <a:lnRef idx="2">
-            <a:schemeClr val="accent1"/>
-          </a:lnRef>
-          <a:fillRef idx="0">
-            <a:schemeClr val="accent1"/>
-          </a:fillRef>
-          <a:effectRef idx="0">
-            <a:schemeClr val="accent1"/>
-          </a:effectRef>
-          <a:fontRef idx="minor">
-            <a:schemeClr val="tx1"/>
-          </a:fontRef>
-        </p:style>
-      </p:cxnSp>
-      <p:cxnSp>
-        <p:nvCxnSpPr>
-          <p:cNvPr id="27" name="Connector 26"/>
-          <p:cNvCxnSpPr/>
-          <p:nvPr/>
-        </p:nvCxnSpPr>
-        <p:spPr>
-          <a:xfrm>
-            <a:off x="792000" y="4788000"/>
-            <a:ext cx="10620000" cy="0"/>
-          </a:xfrm>
-          <a:prstGeom prst="line">
-            <a:avLst/>
-          </a:prstGeom>
-          <a:ln w="9525">
-            <a:solidFill>
-              <a:srgbClr val="D9D9D9"/>
-            </a:solidFill>
-          </a:ln>
-        </p:spPr>
-        <p:style>
-          <a:lnRef idx="2">
-            <a:schemeClr val="accent1"/>
-          </a:lnRef>
-          <a:fillRef idx="0">
-            <a:schemeClr val="accent1"/>
-          </a:fillRef>
-          <a:effectRef idx="0">
-            <a:schemeClr val="accent1"/>
-          </a:effectRef>
-          <a:fontRef idx="minor">
-            <a:schemeClr val="tx1"/>
-          </a:fontRef>
-        </p:style>
-      </p:cxnSp>
-      <p:sp>
-        <p:nvSpPr>
-          <p:cNvPr id="28" name="Pentagon 27"/>
-          <p:cNvSpPr/>
-          <p:nvPr/>
-        </p:nvSpPr>
-        <p:spPr>
-          <a:xfrm>
-            <a:off x="1566000" y="4914000"/>
-            <a:ext cx="3096000" cy="450000"/>
-          </a:xfrm>
-          <a:prstGeom prst="homePlate">
-            <a:avLst>
-              <a:gd name="adj" fmla="val 25000"/>
-            </a:avLst>
-          </a:prstGeom>
-          <a:solidFill>
-            <a:srgbClr val="06C755"/>
-          </a:solidFill>
-          <a:ln>
-            <a:noFill/>
-          </a:ln>
-          <a:effectLst/>
-        </p:spPr>
-        <p:style>
-          <a:lnRef idx="1">
-            <a:schemeClr val="accent1"/>
-          </a:lnRef>
-          <a:fillRef idx="3">
-            <a:schemeClr val="accent1"/>
-          </a:fillRef>
-          <a:effectRef idx="0">
-            <a:schemeClr val="accent1"/>
-          </a:effectRef>
-          <a:fontRef idx="minor">
-            <a:schemeClr val="lt1"/>
-          </a:fontRef>
-        </p:style>
-        <p:txBody>
-          <a:bodyPr rtlCol="0" anchor="ctr" wrap="square" lIns="72000" tIns="18000" rIns="72000" bIns="18000"/>
-          <a:lstStyle/>
-          <a:p>
-            <a:pPr algn="ctr"/>
-          </a:p>
-        </p:txBody>
-      </p:sp>
-      <p:sp>
-        <p:nvSpPr>
-          <p:cNvPr id="29" name="TextBox 28"/>
-          <p:cNvSpPr txBox="1"/>
-          <p:nvPr/>
-        </p:nvSpPr>
-        <p:spPr>
-          <a:xfrm>
-            <a:off x="1674000" y="4914000"/>
-            <a:ext cx="2807999" cy="450000"/>
-          </a:xfrm>
-          <a:prstGeom prst="rect">
-            <a:avLst/>
-          </a:prstGeom>
-          <a:noFill/>
-        </p:spPr>
-        <p:txBody>
-          <a:bodyPr wrap="square" anchor="ctr" lIns="36000" rIns="36000" tIns="18000" bIns="18000">
-            <a:spAutoFit/>
-          </a:bodyPr>
-          <a:lstStyle/>
-          <a:p>
-            <a:pPr algn="ctr">
-              <a:lnSpc>
-                <a:spcPct val="110000"/>
-              </a:lnSpc>
-              <a:spcAft>
-                <a:spcPts val="0"/>
-              </a:spcAft>
-            </a:pPr>
-            <a:r>
-              <a:rPr sz="1150" b="1">
-                <a:solidFill>
-                  <a:srgbClr val="FFFFFF"/>
-                </a:solidFill>
-                <a:latin typeface="メイリオ"/>
-                <a:ea typeface="メイリオ"/>
-                <a:cs typeface="メイリオ"/>
-              </a:rPr>
-              <a:t>CPO改善</a:t>
-            </a:r>
-          </a:p>
-        </p:txBody>
-      </p:sp>
-      <p:sp>
-        <p:nvSpPr>
-          <p:cNvPr id="30" name="TextBox 29"/>
-          <p:cNvSpPr txBox="1"/>
-          <p:nvPr/>
-        </p:nvSpPr>
-        <p:spPr>
-          <a:xfrm>
-            <a:off x="1602000" y="5382000"/>
-            <a:ext cx="3024000" cy="216000"/>
-          </a:xfrm>
-          <a:prstGeom prst="rect">
-            <a:avLst/>
-          </a:prstGeom>
-          <a:noFill/>
-        </p:spPr>
-        <p:txBody>
-          <a:bodyPr wrap="square" anchor="t" lIns="36000" rIns="36000" tIns="18000" bIns="18000">
-            <a:spAutoFit/>
-          </a:bodyPr>
-          <a:lstStyle/>
-          <a:p>
-            <a:pPr algn="ctr">
-              <a:lnSpc>
-                <a:spcPct val="110000"/>
-              </a:lnSpc>
-              <a:spcAft>
-                <a:spcPts val="0"/>
-              </a:spcAft>
-            </a:pPr>
-            <a:r>
-              <a:rPr sz="900" b="0">
-                <a:solidFill>
-                  <a:srgbClr val="7F7F7F"/>
-                </a:solidFill>
-                <a:latin typeface="メイリオ"/>
-                <a:ea typeface="メイリオ"/>
-                <a:cs typeface="メイリオ"/>
-              </a:rPr>
-              <a:t>CV後の歩留まりが上がる</a:t>
-            </a:r>
-          </a:p>
-        </p:txBody>
-      </p:sp>
-      <p:sp>
-        <p:nvSpPr>
-          <p:cNvPr id="31" name="Chevron 30"/>
-          <p:cNvSpPr/>
-          <p:nvPr/>
-        </p:nvSpPr>
-        <p:spPr>
-          <a:xfrm>
-            <a:off x="4554000" y="4914000"/>
-            <a:ext cx="3096000" cy="450000"/>
-          </a:xfrm>
-          <a:prstGeom prst="chevron">
-            <a:avLst>
-              <a:gd name="adj" fmla="val 25000"/>
-            </a:avLst>
-          </a:prstGeom>
-          <a:solidFill>
-            <a:srgbClr val="E4E8F6"/>
-          </a:solidFill>
-          <a:ln>
-            <a:noFill/>
-          </a:ln>
-          <a:effectLst/>
-        </p:spPr>
-        <p:style>
-          <a:lnRef idx="1">
-            <a:schemeClr val="accent1"/>
-          </a:lnRef>
-          <a:fillRef idx="3">
-            <a:schemeClr val="accent1"/>
-          </a:fillRef>
-          <a:effectRef idx="0">
-            <a:schemeClr val="accent1"/>
-          </a:effectRef>
-          <a:fontRef idx="minor">
-            <a:schemeClr val="lt1"/>
-          </a:fontRef>
-        </p:style>
-        <p:txBody>
-          <a:bodyPr rtlCol="0" anchor="ctr" wrap="square" lIns="72000" tIns="18000" rIns="72000" bIns="18000"/>
-          <a:lstStyle/>
-          <a:p>
-            <a:pPr algn="ctr"/>
-          </a:p>
-        </p:txBody>
-      </p:sp>
-      <p:sp>
-        <p:nvSpPr>
-          <p:cNvPr id="32" name="TextBox 31"/>
-          <p:cNvSpPr txBox="1"/>
-          <p:nvPr/>
-        </p:nvSpPr>
-        <p:spPr>
-          <a:xfrm>
-            <a:off x="4770000" y="4914000"/>
-            <a:ext cx="2700000" cy="450000"/>
-          </a:xfrm>
-          <a:prstGeom prst="rect">
-            <a:avLst/>
-          </a:prstGeom>
-          <a:noFill/>
-        </p:spPr>
-        <p:txBody>
-          <a:bodyPr wrap="square" anchor="ctr" lIns="36000" rIns="36000" tIns="18000" bIns="18000">
-            <a:spAutoFit/>
-          </a:bodyPr>
-          <a:lstStyle/>
-          <a:p>
-            <a:pPr algn="ctr">
-              <a:lnSpc>
-                <a:spcPct val="110000"/>
-              </a:lnSpc>
-              <a:spcAft>
-                <a:spcPts val="0"/>
-              </a:spcAft>
-            </a:pPr>
-            <a:r>
-              <a:rPr sz="1150" b="1">
-                <a:solidFill>
-                  <a:srgbClr val="1F285A"/>
-                </a:solidFill>
-                <a:latin typeface="メイリオ"/>
-                <a:ea typeface="メイリオ"/>
-                <a:cs typeface="メイリオ"/>
-              </a:rPr>
-              <a:t>許容CPA（目安CPA）の引き上げ</a:t>
-            </a:r>
-          </a:p>
-        </p:txBody>
-      </p:sp>
-      <p:sp>
-        <p:nvSpPr>
-          <p:cNvPr id="33" name="TextBox 32"/>
-          <p:cNvSpPr txBox="1"/>
-          <p:nvPr/>
-        </p:nvSpPr>
-        <p:spPr>
-          <a:xfrm>
-            <a:off x="4590000" y="5382000"/>
-            <a:ext cx="3024000" cy="216000"/>
-          </a:xfrm>
-          <a:prstGeom prst="rect">
-            <a:avLst/>
-          </a:prstGeom>
-          <a:noFill/>
-        </p:spPr>
-        <p:txBody>
-          <a:bodyPr wrap="square" anchor="t" lIns="36000" rIns="36000" tIns="18000" bIns="18000">
-            <a:spAutoFit/>
-          </a:bodyPr>
-          <a:lstStyle/>
-          <a:p>
-            <a:pPr algn="ctr">
-              <a:lnSpc>
-                <a:spcPct val="110000"/>
-              </a:lnSpc>
-              <a:spcAft>
-                <a:spcPts val="0"/>
-              </a:spcAft>
-            </a:pPr>
-            <a:r>
-              <a:rPr sz="900" b="0">
-                <a:solidFill>
-                  <a:srgbClr val="7F7F7F"/>
-                </a:solidFill>
-                <a:latin typeface="メイリオ"/>
-                <a:ea typeface="メイリオ"/>
-                <a:cs typeface="メイリオ"/>
-              </a:rPr>
-              <a:t>1件の最終成果にかけられる広告費が増える</a:t>
-            </a:r>
-          </a:p>
-        </p:txBody>
-      </p:sp>
-      <p:sp>
-        <p:nvSpPr>
-          <p:cNvPr id="34" name="Chevron 33"/>
-          <p:cNvSpPr/>
-          <p:nvPr/>
-        </p:nvSpPr>
-        <p:spPr>
-          <a:xfrm>
-            <a:off x="7542000" y="4914000"/>
-            <a:ext cx="3096000" cy="450000"/>
-          </a:xfrm>
-          <a:prstGeom prst="chevron">
-            <a:avLst>
-              <a:gd name="adj" fmla="val 25000"/>
-            </a:avLst>
-          </a:prstGeom>
-          <a:solidFill>
-            <a:srgbClr val="1F285A"/>
-          </a:solidFill>
-          <a:ln>
-            <a:noFill/>
-          </a:ln>
-          <a:effectLst/>
-        </p:spPr>
-        <p:style>
-          <a:lnRef idx="1">
-            <a:schemeClr val="accent1"/>
-          </a:lnRef>
-          <a:fillRef idx="3">
-            <a:schemeClr val="accent1"/>
-          </a:fillRef>
-          <a:effectRef idx="0">
-            <a:schemeClr val="accent1"/>
-          </a:effectRef>
-          <a:fontRef idx="minor">
-            <a:schemeClr val="lt1"/>
-          </a:fontRef>
-        </p:style>
-        <p:txBody>
-          <a:bodyPr rtlCol="0" anchor="ctr" wrap="square" lIns="72000" tIns="18000" rIns="72000" bIns="18000"/>
-          <a:lstStyle/>
-          <a:p>
-            <a:pPr algn="ctr"/>
-          </a:p>
-        </p:txBody>
-      </p:sp>
-      <p:sp>
-        <p:nvSpPr>
-          <p:cNvPr id="35" name="TextBox 34"/>
-          <p:cNvSpPr txBox="1"/>
-          <p:nvPr/>
-        </p:nvSpPr>
-        <p:spPr>
-          <a:xfrm>
-            <a:off x="7758000" y="4914000"/>
-            <a:ext cx="2700000" cy="450000"/>
-          </a:xfrm>
-          <a:prstGeom prst="rect">
-            <a:avLst/>
-          </a:prstGeom>
-          <a:noFill/>
-        </p:spPr>
-        <p:txBody>
-          <a:bodyPr wrap="square" anchor="ctr" lIns="36000" rIns="36000" tIns="18000" bIns="18000">
-            <a:spAutoFit/>
-          </a:bodyPr>
-          <a:lstStyle/>
-          <a:p>
-            <a:pPr algn="ctr">
-              <a:lnSpc>
-                <a:spcPct val="110000"/>
-              </a:lnSpc>
-              <a:spcAft>
-                <a:spcPts val="0"/>
-              </a:spcAft>
-            </a:pPr>
-            <a:r>
-              <a:rPr sz="1150" b="1">
-                <a:solidFill>
-                  <a:srgbClr val="FFFFFF"/>
-                </a:solidFill>
-                <a:latin typeface="メイリオ"/>
-                <a:ea typeface="メイリオ"/>
-                <a:cs typeface="メイリオ"/>
-              </a:rPr>
-              <a:t>広告配信の拡大</a:t>
-            </a:r>
-          </a:p>
-        </p:txBody>
-      </p:sp>
-      <p:sp>
-        <p:nvSpPr>
-          <p:cNvPr id="36" name="TextBox 35"/>
-          <p:cNvSpPr txBox="1"/>
-          <p:nvPr/>
-        </p:nvSpPr>
-        <p:spPr>
-          <a:xfrm>
-            <a:off x="7578000" y="5382000"/>
-            <a:ext cx="3024000" cy="216000"/>
-          </a:xfrm>
-          <a:prstGeom prst="rect">
-            <a:avLst/>
-          </a:prstGeom>
-          <a:noFill/>
-        </p:spPr>
-        <p:txBody>
-          <a:bodyPr wrap="square" anchor="t" lIns="36000" rIns="36000" tIns="18000" bIns="18000">
-            <a:spAutoFit/>
-          </a:bodyPr>
-          <a:lstStyle/>
-          <a:p>
-            <a:pPr algn="ctr">
-              <a:lnSpc>
-                <a:spcPct val="110000"/>
-              </a:lnSpc>
-              <a:spcAft>
-                <a:spcPts val="0"/>
-              </a:spcAft>
-            </a:pPr>
-            <a:r>
-              <a:rPr sz="900" b="0">
-                <a:solidFill>
-                  <a:srgbClr val="7F7F7F"/>
-                </a:solidFill>
-                <a:latin typeface="メイリオ"/>
-                <a:ea typeface="メイリオ"/>
-                <a:cs typeface="メイリオ"/>
-              </a:rPr>
-              <a:t>入札・配信を広げやすくなる</a:t>
-            </a:r>
-          </a:p>
-        </p:txBody>
-      </p:sp>
-      <p:sp>
-        <p:nvSpPr>
-          <p:cNvPr id="37" name="TextBox 36"/>
-          <p:cNvSpPr txBox="1"/>
-          <p:nvPr/>
-        </p:nvSpPr>
-        <p:spPr>
-          <a:xfrm>
-            <a:off x="792000" y="5724000"/>
-            <a:ext cx="10620000" cy="468000"/>
-          </a:xfrm>
-          <a:prstGeom prst="rect">
-            <a:avLst/>
-          </a:prstGeom>
-          <a:noFill/>
-        </p:spPr>
-        <p:txBody>
-          <a:bodyPr wrap="square" anchor="ctr" lIns="36000" rIns="36000" tIns="18000" bIns="18000">
-            <a:spAutoFit/>
-          </a:bodyPr>
-          <a:lstStyle/>
-          <a:p>
-            <a:pPr algn="ctr">
-              <a:lnSpc>
-                <a:spcPct val="110000"/>
-              </a:lnSpc>
-              <a:spcAft>
-                <a:spcPts val="0"/>
-              </a:spcAft>
-            </a:pPr>
-            <a:r>
-              <a:rPr sz="1700" b="1">
-                <a:solidFill>
-                  <a:srgbClr val="1F285A"/>
-                </a:solidFill>
-                <a:latin typeface="メイリオ"/>
-                <a:ea typeface="メイリオ"/>
-                <a:cs typeface="メイリオ"/>
-              </a:rPr>
-              <a:t>広告施策とサンクスLINEをセットで実施し、事業単位での獲得効率を改善</a:t>
+              <a:t>を図る。</a:t>
             </a:r>
           </a:p>
         </p:txBody>
